--- a/Paper/报告/6_4-10汇报.pptx
+++ b/Paper/报告/6_4-10汇报.pptx
@@ -16,11 +16,11 @@
     <p:sldId id="594" r:id="rId7"/>
     <p:sldId id="597" r:id="rId8"/>
     <p:sldId id="603" r:id="rId9"/>
-    <p:sldId id="604" r:id="rId10"/>
-    <p:sldId id="600" r:id="rId11"/>
+    <p:sldId id="600" r:id="rId10"/>
+    <p:sldId id="606" r:id="rId11"/>
     <p:sldId id="602" r:id="rId12"/>
     <p:sldId id="605" r:id="rId13"/>
-    <p:sldId id="606" r:id="rId14"/>
+    <p:sldId id="604" r:id="rId14"/>
     <p:sldId id="559" r:id="rId15"/>
     <p:sldId id="560" r:id="rId16"/>
     <p:sldId id="601" r:id="rId17"/>
@@ -213,7 +213,7 @@
           <a:p>
             <a:fld id="{BB503B35-3CCA-4E00-9C00-5A848D20FD36}" type="datetimeFigureOut">
               <a:rPr lang="zh-CN" altLang="en-US" smtClean="0"/>
-              <a:t>2024/4/9</a:t>
+              <a:t>2024/4/10</a:t>
             </a:fld>
             <a:endParaRPr lang="zh-CN" altLang="en-US"/>
           </a:p>
@@ -989,6 +989,150 @@
           <a:bodyPr/>
           <a:lstStyle/>
           <a:p>
+            <a:pPr marL="0" marR="0" lvl="0" indent="0" algn="l" defTabSz="914400" rtl="0" eaLnBrk="1" fontAlgn="auto" latinLnBrk="0" hangingPunct="1">
+              <a:lnSpc>
+                <a:spcPct val="100000"/>
+              </a:lnSpc>
+              <a:spcBef>
+                <a:spcPts val="0"/>
+              </a:spcBef>
+              <a:spcAft>
+                <a:spcPts val="0"/>
+              </a:spcAft>
+              <a:buClrTx/>
+              <a:buSzTx/>
+              <a:buFontTx/>
+              <a:buNone/>
+              <a:tabLst/>
+              <a:defRPr/>
+            </a:pPr>
+            <a:r>
+              <a:rPr lang="zh-CN" altLang="en-US" sz="4000" b="1" dirty="0">
+                <a:solidFill>
+                  <a:srgbClr val="4747BA"/>
+                </a:solidFill>
+                <a:latin typeface="Constantia" panose="02030602050306030303" pitchFamily="18" charset="0"/>
+                <a:ea typeface="腾讯体 W3" panose="020C04030202040F0204" pitchFamily="34" charset="-122"/>
+                <a:cs typeface="Times" panose="02020603050405020304" pitchFamily="18" charset="0"/>
+              </a:rPr>
+              <a:t>对未来发展方向的一些不太成熟的设想</a:t>
+            </a:r>
+            <a:endParaRPr lang="en-US" altLang="zh-CN" sz="2800" b="1" dirty="0">
+              <a:solidFill>
+                <a:srgbClr val="4747BA"/>
+              </a:solidFill>
+              <a:latin typeface="Constantia" panose="02030602050306030303" pitchFamily="18" charset="0"/>
+              <a:ea typeface="腾讯体 W3" panose="020C04030202040F0204" pitchFamily="34" charset="-122"/>
+              <a:cs typeface="Times" panose="02020603050405020304" pitchFamily="18" charset="0"/>
+            </a:endParaRPr>
+          </a:p>
+          <a:p>
+            <a:pPr algn="l"/>
+            <a:endParaRPr lang="en-US" altLang="zh-CN" sz="2800" b="1" i="0" dirty="0">
+              <a:solidFill>
+                <a:srgbClr val="333333"/>
+              </a:solidFill>
+              <a:effectLst/>
+              <a:latin typeface="-apple-system"/>
+            </a:endParaRPr>
+          </a:p>
+          <a:p>
+            <a:pPr algn="l"/>
+            <a:r>
+              <a:rPr lang="en-US" altLang="zh-CN" sz="2800" b="1" i="0" dirty="0">
+                <a:solidFill>
+                  <a:srgbClr val="333333"/>
+                </a:solidFill>
+                <a:effectLst/>
+                <a:latin typeface="-apple-system"/>
+              </a:rPr>
+              <a:t>Abase2</a:t>
+            </a:r>
+            <a:r>
+              <a:rPr lang="zh-CN" altLang="en-US" sz="2800" b="1" i="0" dirty="0">
+                <a:solidFill>
+                  <a:srgbClr val="333333"/>
+                </a:solidFill>
+                <a:effectLst/>
+                <a:latin typeface="-apple-system"/>
+              </a:rPr>
+              <a:t>：字节跳动新一代高可用 </a:t>
+            </a:r>
+            <a:r>
+              <a:rPr lang="en-US" altLang="zh-CN" sz="2800" b="1" i="0" dirty="0">
+                <a:solidFill>
+                  <a:srgbClr val="333333"/>
+                </a:solidFill>
+                <a:effectLst/>
+                <a:latin typeface="-apple-system"/>
+              </a:rPr>
+              <a:t>NoSQL </a:t>
+            </a:r>
+            <a:r>
+              <a:rPr lang="zh-CN" altLang="en-US" sz="2800" b="1" i="0" dirty="0">
+                <a:solidFill>
+                  <a:srgbClr val="333333"/>
+                </a:solidFill>
+                <a:effectLst/>
+                <a:latin typeface="-apple-system"/>
+              </a:rPr>
+              <a:t>数据库 </a:t>
+            </a:r>
+            <a:endParaRPr lang="en-US" altLang="zh-CN" sz="2800" b="1" i="0" dirty="0">
+              <a:solidFill>
+                <a:srgbClr val="333333"/>
+              </a:solidFill>
+              <a:effectLst/>
+              <a:latin typeface="-apple-system"/>
+            </a:endParaRPr>
+          </a:p>
+          <a:p>
+            <a:pPr marL="0" marR="0" lvl="0" indent="0" algn="l" defTabSz="914400" rtl="0" eaLnBrk="1" fontAlgn="auto" latinLnBrk="0" hangingPunct="1">
+              <a:lnSpc>
+                <a:spcPct val="100000"/>
+              </a:lnSpc>
+              <a:spcBef>
+                <a:spcPts val="0"/>
+              </a:spcBef>
+              <a:spcAft>
+                <a:spcPts val="0"/>
+              </a:spcAft>
+              <a:buClrTx/>
+              <a:buSzTx/>
+              <a:buFontTx/>
+              <a:buNone/>
+              <a:tabLst/>
+              <a:defRPr/>
+            </a:pPr>
+            <a:r>
+              <a:rPr lang="en-US" altLang="zh-CN" sz="1800" b="1" i="0" dirty="0">
+                <a:solidFill>
+                  <a:srgbClr val="333333"/>
+                </a:solidFill>
+                <a:effectLst/>
+                <a:latin typeface="-apple-system"/>
+              </a:rPr>
+              <a:t>https://www.51cto.com/article/709845.html</a:t>
+            </a:r>
+            <a:endParaRPr lang="zh-CN" altLang="en-US" sz="1800" b="1" i="0" dirty="0">
+              <a:solidFill>
+                <a:srgbClr val="333333"/>
+              </a:solidFill>
+              <a:effectLst/>
+              <a:latin typeface="-apple-system"/>
+            </a:endParaRPr>
+          </a:p>
+          <a:p>
+            <a:pPr algn="l"/>
+            <a:endParaRPr lang="en-US" altLang="zh-CN" sz="1800" b="0" i="0" dirty="0">
+              <a:solidFill>
+                <a:srgbClr val="222222"/>
+              </a:solidFill>
+              <a:effectLst/>
+              <a:latin typeface="PingFangSC-Regular"/>
+            </a:endParaRPr>
+          </a:p>
+          <a:p>
             <a:pPr marL="0" marR="0" lvl="0" indent="0" algn="just" defTabSz="914400" rtl="0" eaLnBrk="1" fontAlgn="auto" latinLnBrk="0" hangingPunct="1">
               <a:lnSpc>
                 <a:spcPct val="100000"/>
@@ -1003,117 +1147,137 @@
               <a:buSzTx/>
               <a:buFont typeface="Arial" panose="020B0604020202020204" pitchFamily="34" charset="0"/>
               <a:buNone/>
+              <a:tabLst/>
               <a:defRPr/>
             </a:pPr>
             <a:r>
-              <a:rPr lang="zh-CN" altLang="en-US" sz="1200" dirty="0"/>
-              <a:t>尽管</a:t>
-            </a:r>
-            <a:r>
-              <a:rPr lang="en-US" altLang="zh-CN" sz="1200" dirty="0"/>
-              <a:t>HFTL</a:t>
-            </a:r>
-            <a:r>
-              <a:rPr lang="zh-CN" altLang="en-US" sz="1200" dirty="0"/>
-              <a:t>的职责较</a:t>
-            </a:r>
-            <a:r>
-              <a:rPr lang="en-US" altLang="zh-CN" sz="1200" dirty="0"/>
-              <a:t>SSD FTL</a:t>
-            </a:r>
-            <a:r>
-              <a:rPr lang="zh-CN" altLang="en-US" sz="1200" dirty="0"/>
-              <a:t>小，但它必须管理其对</a:t>
-            </a:r>
-            <a:r>
-              <a:rPr lang="en-US" altLang="zh-CN" sz="1200" dirty="0"/>
-              <a:t>CPU</a:t>
-            </a:r>
-            <a:r>
-              <a:rPr lang="zh-CN" altLang="en-US" sz="1200" dirty="0"/>
-              <a:t>和</a:t>
-            </a:r>
-            <a:r>
-              <a:rPr lang="en-US" altLang="zh-CN" sz="1200" dirty="0"/>
-              <a:t>DRAM</a:t>
-            </a:r>
-            <a:r>
-              <a:rPr lang="zh-CN" altLang="en-US" sz="1200" dirty="0"/>
-              <a:t>资源的使用，因为这些资源与主机应用共享。</a:t>
-            </a:r>
-            <a:r>
-              <a:rPr lang="en-US" altLang="zh-CN" sz="1200" dirty="0"/>
-              <a:t>HFTL</a:t>
-            </a:r>
-            <a:r>
-              <a:rPr lang="zh-CN" altLang="en-US" sz="1200" dirty="0"/>
-              <a:t>简化了与主机端信息的整合，增强了数据放置和垃圾回收的控制，并向应用程序提供传统块接口。目前，例如</a:t>
-            </a:r>
-            <a:r>
-              <a:rPr lang="en-US" altLang="zh-CN" sz="1200" dirty="0"/>
-              <a:t>dm-zoned</a:t>
-            </a:r>
-            <a:r>
-              <a:rPr lang="zh-CN" altLang="en-US" sz="1200" dirty="0"/>
-              <a:t>、</a:t>
-            </a:r>
-            <a:r>
-              <a:rPr lang="en-US" altLang="zh-CN" sz="1200" dirty="0"/>
-              <a:t>dm-zap</a:t>
-            </a:r>
-            <a:r>
-              <a:rPr lang="zh-CN" altLang="en-US" sz="1200" dirty="0"/>
-              <a:t>、</a:t>
-            </a:r>
-            <a:r>
-              <a:rPr lang="en-US" altLang="zh-CN" sz="1200" dirty="0" err="1"/>
-              <a:t>pblk</a:t>
-            </a:r>
-            <a:r>
-              <a:rPr lang="zh-CN" altLang="en-US" sz="1200" dirty="0"/>
-              <a:t>和</a:t>
-            </a:r>
-            <a:r>
-              <a:rPr lang="en-US" altLang="zh-CN" sz="1200" dirty="0"/>
-              <a:t>SPDK</a:t>
-            </a:r>
-            <a:r>
-              <a:rPr lang="zh-CN" altLang="en-US" sz="1200" dirty="0"/>
-              <a:t>的</a:t>
-            </a:r>
-            <a:r>
-              <a:rPr lang="en-US" altLang="zh-CN" sz="1200" dirty="0"/>
-              <a:t>FTL</a:t>
-            </a:r>
-            <a:r>
-              <a:rPr lang="zh-CN" altLang="en-US" sz="1200" dirty="0"/>
-              <a:t>等工作显示了</a:t>
-            </a:r>
-            <a:r>
-              <a:rPr lang="en-US" altLang="zh-CN" sz="1200" dirty="0"/>
-              <a:t>HFTL</a:t>
-            </a:r>
-            <a:r>
-              <a:rPr lang="zh-CN" altLang="en-US" sz="1200" dirty="0"/>
-              <a:t>的可行性和应用性，但目前只有</a:t>
-            </a:r>
-            <a:r>
-              <a:rPr lang="en-US" altLang="zh-CN" sz="1200" dirty="0"/>
-              <a:t>dm-zap</a:t>
-            </a:r>
-            <a:r>
-              <a:rPr lang="zh-CN" altLang="en-US" sz="1200" dirty="0"/>
-              <a:t>支持</a:t>
-            </a:r>
-            <a:r>
-              <a:rPr lang="en-US" altLang="zh-CN" sz="1200" dirty="0"/>
-              <a:t>ZNS SSD</a:t>
-            </a:r>
-            <a:r>
-              <a:rPr lang="zh-CN" altLang="en-US" sz="1200" dirty="0"/>
-              <a:t>。</a:t>
-            </a:r>
-            <a:endParaRPr lang="en-US" altLang="zh-CN" sz="1200" dirty="0"/>
+              <a:rPr lang="zh-CN" altLang="en-US" sz="1800" b="0" i="0" dirty="0">
+                <a:solidFill>
+                  <a:srgbClr val="222222"/>
+                </a:solidFill>
+                <a:effectLst/>
+                <a:latin typeface="PingFangSC-Regular"/>
+              </a:rPr>
+              <a:t>单体数据库，</a:t>
+            </a:r>
+            <a:r>
+              <a:rPr lang="en-US" altLang="zh-CN" sz="1800" b="0" i="0" dirty="0" err="1">
+                <a:solidFill>
+                  <a:srgbClr val="222222"/>
+                </a:solidFill>
+                <a:effectLst/>
+                <a:latin typeface="PingFangSC-Regular"/>
+              </a:rPr>
+              <a:t>Terarkdb</a:t>
+            </a:r>
+            <a:r>
+              <a:rPr lang="en-US" altLang="zh-CN" sz="1800" b="0" i="0" dirty="0">
+                <a:solidFill>
+                  <a:srgbClr val="222222"/>
+                </a:solidFill>
+                <a:effectLst/>
+                <a:latin typeface="PingFangSC-Regular"/>
+              </a:rPr>
+              <a:t> </a:t>
+            </a:r>
+            <a:r>
+              <a:rPr lang="zh-CN" altLang="en-US" sz="1800" b="0" i="0" dirty="0">
+                <a:solidFill>
+                  <a:srgbClr val="222222"/>
+                </a:solidFill>
+                <a:effectLst/>
+                <a:latin typeface="PingFangSC-Regular"/>
+              </a:rPr>
+              <a:t>，</a:t>
+            </a:r>
+            <a:r>
+              <a:rPr lang="zh-CN" altLang="en-US" sz="2800" b="0" i="0" dirty="0">
+                <a:solidFill>
+                  <a:srgbClr val="333333"/>
+                </a:solidFill>
+                <a:effectLst/>
+                <a:latin typeface="PingFangSC-Regular"/>
+              </a:rPr>
+              <a:t>向上承接分布式团队业务，</a:t>
+            </a:r>
+            <a:r>
+              <a:rPr lang="zh-CN" altLang="en-US" sz="1800" b="0" i="0" dirty="0">
+                <a:solidFill>
+                  <a:srgbClr val="222222"/>
+                </a:solidFill>
+                <a:effectLst/>
+                <a:latin typeface="PingFangSC-Regular"/>
+              </a:rPr>
+              <a:t>向下使用 </a:t>
+            </a:r>
+            <a:r>
+              <a:rPr lang="en-US" altLang="zh-CN" sz="1800" b="0" i="0" dirty="0">
+                <a:solidFill>
+                  <a:srgbClr val="222222"/>
+                </a:solidFill>
+                <a:effectLst/>
+                <a:latin typeface="PingFangSC-Regular"/>
+              </a:rPr>
+              <a:t>SSD+ZNS+DPU</a:t>
+            </a:r>
+            <a:r>
+              <a:rPr lang="zh-CN" altLang="en-US" sz="1800" b="0" i="0" dirty="0">
+                <a:solidFill>
+                  <a:srgbClr val="222222"/>
+                </a:solidFill>
+                <a:effectLst/>
+                <a:latin typeface="PingFangSC-Regular"/>
+              </a:rPr>
+              <a:t>，</a:t>
+            </a:r>
+            <a:r>
+              <a:rPr lang="en-US" altLang="zh-CN" sz="1800" b="0" i="0" dirty="0">
+                <a:solidFill>
+                  <a:srgbClr val="222222"/>
+                </a:solidFill>
+                <a:effectLst/>
+                <a:latin typeface="PingFangSC-Regular"/>
+              </a:rPr>
+              <a:t>22</a:t>
+            </a:r>
+            <a:r>
+              <a:rPr lang="zh-CN" altLang="en-US" sz="1800" b="0" i="0" dirty="0">
+                <a:solidFill>
+                  <a:srgbClr val="222222"/>
+                </a:solidFill>
+                <a:effectLst/>
+                <a:latin typeface="PingFangSC-Regular"/>
+              </a:rPr>
+              <a:t>年中旬提交的关于</a:t>
+            </a:r>
+            <a:r>
+              <a:rPr lang="en-US" altLang="zh-CN" sz="1800" b="0" i="0" dirty="0">
+                <a:solidFill>
+                  <a:srgbClr val="222222"/>
+                </a:solidFill>
+                <a:effectLst/>
+                <a:latin typeface="PingFangSC-Regular"/>
+              </a:rPr>
+              <a:t>ZNS</a:t>
+            </a:r>
+            <a:r>
+              <a:rPr lang="zh-CN" altLang="en-US" sz="1800" b="0" i="0" dirty="0">
+                <a:solidFill>
+                  <a:srgbClr val="222222"/>
+                </a:solidFill>
+                <a:effectLst/>
+                <a:latin typeface="PingFangSC-Regular"/>
+              </a:rPr>
+              <a:t>的代码</a:t>
+            </a:r>
+            <a:endParaRPr lang="zh-CN" altLang="en-US" sz="1800" b="1" dirty="0">
+              <a:solidFill>
+                <a:srgbClr val="4747BA"/>
+              </a:solidFill>
+              <a:latin typeface="Constantia" panose="02030602050306030303" pitchFamily="18" charset="0"/>
+              <a:ea typeface="腾讯体 W3" panose="020C04030202040F0204" pitchFamily="34" charset="-122"/>
+              <a:cs typeface="Times" panose="02020603050405020304" pitchFamily="18" charset="0"/>
+            </a:endParaRPr>
           </a:p>
           <a:p>
             <a:pPr indent="0" algn="just">
@@ -1123,9 +1287,472 @@
               <a:buFont typeface="Arial" panose="020B0604020202020204" pitchFamily="34" charset="0"/>
               <a:buNone/>
             </a:pPr>
-            <a:endParaRPr lang="zh-CN" altLang="en-US" sz="1200" dirty="0">
-              <a:latin typeface="Constantia" panose="02030602050306030303" pitchFamily="18" charset="0"/>
+            <a:r>
+              <a:rPr lang="en-US" altLang="zh-CN" sz="1800" kern="100" dirty="0">
+                <a:effectLst/>
+                <a:latin typeface="Times New Roman" panose="02020603050405020304" pitchFamily="18" charset="0"/>
+                <a:ea typeface="宋体" panose="02010600030101010101" pitchFamily="2" charset="-122"/>
+                <a:cs typeface="Times New Roman" panose="02020603050405020304" pitchFamily="18" charset="0"/>
+              </a:rPr>
+              <a:t>https://www.nowcoder.com/discuss/375095020267872256</a:t>
+            </a:r>
+          </a:p>
+          <a:p>
+            <a:pPr indent="0" algn="just">
+              <a:spcAft>
+                <a:spcPts val="1200"/>
+              </a:spcAft>
+              <a:buFont typeface="Arial" panose="020B0604020202020204" pitchFamily="34" charset="0"/>
+              <a:buNone/>
+            </a:pPr>
+            <a:endParaRPr lang="en-US" altLang="zh-CN" sz="1800" kern="100" dirty="0">
+              <a:effectLst/>
+              <a:latin typeface="Times New Roman" panose="02020603050405020304" pitchFamily="18" charset="0"/>
+              <a:ea typeface="宋体" panose="02010600030101010101" pitchFamily="2" charset="-122"/>
+              <a:cs typeface="Times New Roman" panose="02020603050405020304" pitchFamily="18" charset="0"/>
             </a:endParaRPr>
+          </a:p>
+          <a:p>
+            <a:pPr indent="0" algn="just">
+              <a:spcAft>
+                <a:spcPts val="1200"/>
+              </a:spcAft>
+              <a:buFont typeface="Arial" panose="020B0604020202020204" pitchFamily="34" charset="0"/>
+              <a:buNone/>
+            </a:pPr>
+            <a:r>
+              <a:rPr lang="zh-CN" altLang="en-US" sz="2800" b="0" i="0" dirty="0">
+                <a:solidFill>
+                  <a:srgbClr val="0052FF"/>
+                </a:solidFill>
+                <a:effectLst/>
+                <a:latin typeface="system-ui"/>
+              </a:rPr>
+              <a:t>做了一个很奇怪的硬件改进</a:t>
+            </a:r>
+            <a:r>
+              <a:rPr lang="en-US" altLang="zh-CN" sz="2800" b="0" i="0" dirty="0">
+                <a:solidFill>
+                  <a:srgbClr val="0052FF"/>
+                </a:solidFill>
+                <a:effectLst/>
+                <a:latin typeface="system-ui"/>
+              </a:rPr>
+              <a:t>,</a:t>
+            </a:r>
+            <a:r>
+              <a:rPr lang="zh-CN" altLang="en-US" sz="2800" b="0" i="0" dirty="0">
+                <a:solidFill>
+                  <a:srgbClr val="0052FF"/>
+                </a:solidFill>
+                <a:effectLst/>
+                <a:latin typeface="system-ui"/>
+              </a:rPr>
+              <a:t>要支持写入数据最后一个</a:t>
+            </a:r>
+            <a:r>
+              <a:rPr lang="en-US" altLang="zh-CN" sz="2800" b="0" i="0" dirty="0">
+                <a:solidFill>
+                  <a:srgbClr val="0052FF"/>
+                </a:solidFill>
+                <a:effectLst/>
+                <a:latin typeface="system-ui"/>
+              </a:rPr>
+              <a:t>LBA overwrite</a:t>
+            </a:r>
+            <a:r>
+              <a:rPr lang="zh-CN" altLang="en-US" sz="2800" b="0" i="0" dirty="0">
+                <a:solidFill>
+                  <a:srgbClr val="0052FF"/>
+                </a:solidFill>
+                <a:effectLst/>
+                <a:latin typeface="system-ui"/>
+              </a:rPr>
+              <a:t>覆盖写，优化</a:t>
+            </a:r>
+            <a:r>
+              <a:rPr lang="en-US" altLang="zh-CN" sz="2800" b="0" i="0" dirty="0">
+                <a:solidFill>
+                  <a:srgbClr val="0052FF"/>
+                </a:solidFill>
+                <a:effectLst/>
+                <a:latin typeface="system-ui"/>
+              </a:rPr>
+              <a:t>NAND</a:t>
+            </a:r>
+            <a:r>
+              <a:rPr lang="zh-CN" altLang="en-US" sz="2800" b="0" i="0" dirty="0">
+                <a:solidFill>
+                  <a:srgbClr val="0052FF"/>
+                </a:solidFill>
+                <a:effectLst/>
+                <a:latin typeface="system-ui"/>
+              </a:rPr>
+              <a:t>存储空间，最终降低写放大</a:t>
+            </a:r>
+            <a:r>
+              <a:rPr lang="en-US" altLang="zh-CN" sz="1800" b="0" i="0" kern="100" dirty="0">
+                <a:solidFill>
+                  <a:srgbClr val="0052FF"/>
+                </a:solidFill>
+                <a:effectLst/>
+                <a:latin typeface="Times New Roman" panose="02020603050405020304" pitchFamily="18" charset="0"/>
+                <a:ea typeface="宋体" panose="02010600030101010101" pitchFamily="2" charset="-122"/>
+                <a:cs typeface="Times New Roman" panose="02020603050405020304" pitchFamily="18" charset="0"/>
+              </a:rPr>
+              <a:t>                           </a:t>
+            </a:r>
+            <a:r>
+              <a:rPr lang="zh-CN" altLang="en-US" sz="1800" kern="100" dirty="0">
+                <a:effectLst/>
+                <a:latin typeface="Times New Roman" panose="02020603050405020304" pitchFamily="18" charset="0"/>
+                <a:ea typeface="宋体" panose="02010600030101010101" pitchFamily="2" charset="-122"/>
+                <a:cs typeface="Times New Roman" panose="02020603050405020304" pitchFamily="18" charset="0"/>
+              </a:rPr>
+              <a:t>郭宽？</a:t>
+            </a:r>
+            <a:endParaRPr lang="en-US" altLang="zh-CN" sz="1800" kern="100" dirty="0">
+              <a:effectLst/>
+              <a:latin typeface="Times New Roman" panose="02020603050405020304" pitchFamily="18" charset="0"/>
+              <a:ea typeface="宋体" panose="02010600030101010101" pitchFamily="2" charset="-122"/>
+              <a:cs typeface="Times New Roman" panose="02020603050405020304" pitchFamily="18" charset="0"/>
+            </a:endParaRPr>
+          </a:p>
+          <a:p>
+            <a:pPr marL="0" marR="0" lvl="0" indent="0" algn="just" defTabSz="914400" rtl="0" eaLnBrk="1" fontAlgn="auto" latinLnBrk="0" hangingPunct="1">
+              <a:lnSpc>
+                <a:spcPct val="100000"/>
+              </a:lnSpc>
+              <a:spcBef>
+                <a:spcPts val="0"/>
+              </a:spcBef>
+              <a:spcAft>
+                <a:spcPts val="1200"/>
+              </a:spcAft>
+              <a:buClrTx/>
+              <a:buSzTx/>
+              <a:buFont typeface="Arial" panose="020B0604020202020204" pitchFamily="34" charset="0"/>
+              <a:buNone/>
+              <a:tabLst/>
+              <a:defRPr/>
+            </a:pPr>
+            <a:endParaRPr lang="en-US" altLang="zh-CN" sz="2800" b="1" i="0" dirty="0">
+              <a:solidFill>
+                <a:srgbClr val="333333"/>
+              </a:solidFill>
+              <a:effectLst/>
+              <a:latin typeface="HelveticaNeue Regular"/>
+            </a:endParaRPr>
+          </a:p>
+          <a:p>
+            <a:pPr marL="0" marR="0" lvl="0" indent="0" algn="just" defTabSz="914400" rtl="0" eaLnBrk="1" fontAlgn="auto" latinLnBrk="0" hangingPunct="1">
+              <a:lnSpc>
+                <a:spcPct val="100000"/>
+              </a:lnSpc>
+              <a:spcBef>
+                <a:spcPts val="0"/>
+              </a:spcBef>
+              <a:spcAft>
+                <a:spcPts val="1200"/>
+              </a:spcAft>
+              <a:buClrTx/>
+              <a:buSzTx/>
+              <a:buFont typeface="Arial" panose="020B0604020202020204" pitchFamily="34" charset="0"/>
+              <a:buNone/>
+              <a:tabLst/>
+              <a:defRPr/>
+            </a:pPr>
+            <a:r>
+              <a:rPr lang="zh-CN" altLang="en-US" sz="4000" b="0" i="0" dirty="0">
+                <a:solidFill>
+                  <a:srgbClr val="191B1F"/>
+                </a:solidFill>
+                <a:effectLst/>
+                <a:latin typeface="-apple-system"/>
+              </a:rPr>
+              <a:t>各类存储系统，尤其是 </a:t>
+            </a:r>
+            <a:r>
+              <a:rPr lang="en-US" altLang="zh-CN" sz="4000" b="0" i="0" dirty="0">
+                <a:solidFill>
+                  <a:srgbClr val="191B1F"/>
+                </a:solidFill>
+                <a:effectLst/>
+                <a:latin typeface="-apple-system"/>
+              </a:rPr>
+              <a:t>LSM </a:t>
+            </a:r>
+            <a:r>
+              <a:rPr lang="zh-CN" altLang="en-US" sz="4000" b="0" i="0" dirty="0">
+                <a:solidFill>
+                  <a:srgbClr val="191B1F"/>
+                </a:solidFill>
+                <a:effectLst/>
+                <a:latin typeface="-apple-system"/>
+              </a:rPr>
+              <a:t>花费了大量的精力进行写放大的优化，但即便是 </a:t>
+            </a:r>
+            <a:r>
+              <a:rPr lang="en-US" altLang="zh-CN" sz="4000" b="0" i="0" dirty="0">
+                <a:solidFill>
+                  <a:srgbClr val="191B1F"/>
+                </a:solidFill>
+                <a:effectLst/>
+                <a:latin typeface="-apple-system"/>
+              </a:rPr>
+              <a:t>LSM </a:t>
+            </a:r>
+            <a:r>
+              <a:rPr lang="zh-CN" altLang="en-US" sz="4000" b="0" i="0" dirty="0">
+                <a:solidFill>
+                  <a:srgbClr val="191B1F"/>
+                </a:solidFill>
+                <a:effectLst/>
+                <a:latin typeface="-apple-system"/>
+              </a:rPr>
+              <a:t>写放大降低到 </a:t>
+            </a:r>
+            <a:r>
+              <a:rPr lang="en-US" altLang="zh-CN" sz="4000" b="0" i="0" dirty="0">
+                <a:solidFill>
+                  <a:srgbClr val="191B1F"/>
+                </a:solidFill>
+                <a:effectLst/>
+                <a:latin typeface="-apple-system"/>
+              </a:rPr>
+              <a:t>5</a:t>
+            </a:r>
+            <a:r>
+              <a:rPr lang="zh-CN" altLang="en-US" sz="4000" b="0" i="0" dirty="0">
+                <a:solidFill>
+                  <a:srgbClr val="191B1F"/>
+                </a:solidFill>
+                <a:effectLst/>
+                <a:latin typeface="-apple-system"/>
+              </a:rPr>
+              <a:t>，</a:t>
+            </a:r>
+            <a:r>
+              <a:rPr lang="en-US" altLang="zh-CN" sz="4000" b="0" i="0" dirty="0">
+                <a:solidFill>
+                  <a:srgbClr val="191B1F"/>
+                </a:solidFill>
+                <a:effectLst/>
+                <a:latin typeface="-apple-system"/>
+              </a:rPr>
+              <a:t>SSD </a:t>
+            </a:r>
+            <a:r>
+              <a:rPr lang="zh-CN" altLang="en-US" sz="4000" b="0" i="0" dirty="0">
+                <a:solidFill>
+                  <a:srgbClr val="191B1F"/>
+                </a:solidFill>
+                <a:effectLst/>
+                <a:latin typeface="-apple-system"/>
+              </a:rPr>
+              <a:t>自身的写放大通常也有 </a:t>
+            </a:r>
+            <a:r>
+              <a:rPr lang="en-US" altLang="zh-CN" sz="4000" b="0" i="0" dirty="0">
+                <a:solidFill>
+                  <a:srgbClr val="191B1F"/>
+                </a:solidFill>
+                <a:effectLst/>
+                <a:latin typeface="-apple-system"/>
+              </a:rPr>
+              <a:t>3 </a:t>
+            </a:r>
+            <a:r>
+              <a:rPr lang="zh-CN" altLang="en-US" sz="4000" b="0" i="0" dirty="0">
+                <a:solidFill>
+                  <a:srgbClr val="191B1F"/>
+                </a:solidFill>
+                <a:effectLst/>
+                <a:latin typeface="-apple-system"/>
+              </a:rPr>
+              <a:t>倍，综合写放大还是 </a:t>
+            </a:r>
+            <a:r>
+              <a:rPr lang="en-US" altLang="zh-CN" sz="4000" b="0" i="0" dirty="0">
+                <a:solidFill>
+                  <a:srgbClr val="191B1F"/>
+                </a:solidFill>
+                <a:effectLst/>
+                <a:latin typeface="-apple-system"/>
+              </a:rPr>
+              <a:t>15 </a:t>
+            </a:r>
+            <a:r>
+              <a:rPr lang="zh-CN" altLang="en-US" sz="4000" b="0" i="0" dirty="0">
+                <a:solidFill>
+                  <a:srgbClr val="191B1F"/>
+                </a:solidFill>
+                <a:effectLst/>
+                <a:latin typeface="-apple-system"/>
+              </a:rPr>
+              <a:t>倍之多。</a:t>
+            </a:r>
+            <a:endParaRPr lang="en-US" altLang="zh-CN" sz="2800" b="1" i="0" dirty="0">
+              <a:solidFill>
+                <a:srgbClr val="333333"/>
+              </a:solidFill>
+              <a:effectLst/>
+              <a:latin typeface="HelveticaNeue Regular"/>
+            </a:endParaRPr>
+          </a:p>
+          <a:p>
+            <a:pPr marL="0" marR="0" lvl="0" indent="0" algn="just" defTabSz="914400" rtl="0" eaLnBrk="1" fontAlgn="auto" latinLnBrk="0" hangingPunct="1">
+              <a:lnSpc>
+                <a:spcPct val="100000"/>
+              </a:lnSpc>
+              <a:spcBef>
+                <a:spcPts val="0"/>
+              </a:spcBef>
+              <a:spcAft>
+                <a:spcPts val="1200"/>
+              </a:spcAft>
+              <a:buClrTx/>
+              <a:buSzTx/>
+              <a:buFont typeface="Arial" panose="020B0604020202020204" pitchFamily="34" charset="0"/>
+              <a:buNone/>
+              <a:tabLst/>
+              <a:defRPr/>
+            </a:pPr>
+            <a:endParaRPr lang="en-US" altLang="zh-CN" sz="4000" b="0" i="0" dirty="0">
+              <a:solidFill>
+                <a:srgbClr val="191B1F"/>
+              </a:solidFill>
+              <a:effectLst/>
+              <a:latin typeface="-apple-system"/>
+            </a:endParaRPr>
+          </a:p>
+          <a:p>
+            <a:pPr marL="0" marR="0" lvl="0" indent="0" algn="just" defTabSz="914400" rtl="0" eaLnBrk="1" fontAlgn="auto" latinLnBrk="0" hangingPunct="1">
+              <a:lnSpc>
+                <a:spcPct val="100000"/>
+              </a:lnSpc>
+              <a:spcBef>
+                <a:spcPts val="0"/>
+              </a:spcBef>
+              <a:spcAft>
+                <a:spcPts val="1200"/>
+              </a:spcAft>
+              <a:buClrTx/>
+              <a:buSzTx/>
+              <a:buFont typeface="Arial" panose="020B0604020202020204" pitchFamily="34" charset="0"/>
+              <a:buNone/>
+              <a:tabLst/>
+              <a:defRPr/>
+            </a:pPr>
+            <a:r>
+              <a:rPr lang="zh-CN" altLang="en-US" sz="4000" b="0" i="0" dirty="0">
+                <a:solidFill>
+                  <a:srgbClr val="191B1F"/>
+                </a:solidFill>
+                <a:effectLst/>
+                <a:latin typeface="-apple-system"/>
+              </a:rPr>
+              <a:t>预测未来硬件的发展趋势是非常，</a:t>
+            </a:r>
+            <a:endParaRPr lang="en-US" altLang="zh-CN" sz="2800" b="1" i="0" dirty="0">
+              <a:solidFill>
+                <a:srgbClr val="333333"/>
+              </a:solidFill>
+              <a:effectLst/>
+              <a:latin typeface="HelveticaNeue Regular"/>
+            </a:endParaRPr>
+          </a:p>
+          <a:p>
+            <a:pPr marL="0" marR="0" lvl="0" indent="0" algn="just" defTabSz="914400" rtl="0" eaLnBrk="1" fontAlgn="auto" latinLnBrk="0" hangingPunct="1">
+              <a:lnSpc>
+                <a:spcPct val="100000"/>
+              </a:lnSpc>
+              <a:spcBef>
+                <a:spcPts val="0"/>
+              </a:spcBef>
+              <a:spcAft>
+                <a:spcPts val="1200"/>
+              </a:spcAft>
+              <a:buClrTx/>
+              <a:buSzTx/>
+              <a:buFont typeface="Arial" panose="020B0604020202020204" pitchFamily="34" charset="0"/>
+              <a:buNone/>
+              <a:tabLst/>
+              <a:defRPr/>
+            </a:pPr>
+            <a:endParaRPr lang="en-US" altLang="zh-CN" sz="2800" b="1" i="0" dirty="0">
+              <a:solidFill>
+                <a:srgbClr val="333333"/>
+              </a:solidFill>
+              <a:effectLst/>
+              <a:latin typeface="HelveticaNeue Regular"/>
+            </a:endParaRPr>
+          </a:p>
+          <a:p>
+            <a:pPr marL="0" marR="0" lvl="0" indent="0" algn="just" defTabSz="914400" rtl="0" eaLnBrk="1" fontAlgn="auto" latinLnBrk="0" hangingPunct="1">
+              <a:lnSpc>
+                <a:spcPct val="100000"/>
+              </a:lnSpc>
+              <a:spcBef>
+                <a:spcPts val="0"/>
+              </a:spcBef>
+              <a:spcAft>
+                <a:spcPts val="1200"/>
+              </a:spcAft>
+              <a:buClrTx/>
+              <a:buSzTx/>
+              <a:buFont typeface="Arial" panose="020B0604020202020204" pitchFamily="34" charset="0"/>
+              <a:buNone/>
+              <a:tabLst/>
+              <a:defRPr/>
+            </a:pPr>
+            <a:r>
+              <a:rPr lang="zh-CN" altLang="en-US" sz="1800" kern="100" dirty="0">
+                <a:effectLst/>
+                <a:latin typeface="Times New Roman" panose="02020603050405020304" pitchFamily="18" charset="0"/>
+                <a:ea typeface="宋体" panose="02010600030101010101" pitchFamily="2" charset="-122"/>
+                <a:cs typeface="Times New Roman" panose="02020603050405020304" pitchFamily="18" charset="0"/>
+              </a:rPr>
+              <a:t>已有</a:t>
+            </a:r>
+            <a:r>
+              <a:rPr lang="en-US" altLang="zh-CN" sz="1800" kern="100" dirty="0">
+                <a:effectLst/>
+                <a:latin typeface="Times New Roman" panose="02020603050405020304" pitchFamily="18" charset="0"/>
+                <a:ea typeface="宋体" panose="02010600030101010101" pitchFamily="2" charset="-122"/>
+                <a:cs typeface="Times New Roman" panose="02020603050405020304" pitchFamily="18" charset="0"/>
+              </a:rPr>
+              <a:t>CACHE </a:t>
+            </a:r>
+            <a:r>
+              <a:rPr lang="zh-CN" altLang="en-US" sz="1800" kern="100" dirty="0">
+                <a:effectLst/>
+                <a:latin typeface="Times New Roman" panose="02020603050405020304" pitchFamily="18" charset="0"/>
+                <a:ea typeface="宋体" panose="02010600030101010101" pitchFamily="2" charset="-122"/>
+                <a:cs typeface="Times New Roman" panose="02020603050405020304" pitchFamily="18" charset="0"/>
+              </a:rPr>
+              <a:t>研究</a:t>
+            </a:r>
+            <a:r>
+              <a:rPr lang="en-US" altLang="zh-CN" sz="2800" b="1" i="0" dirty="0" err="1">
+                <a:solidFill>
+                  <a:srgbClr val="333333"/>
+                </a:solidFill>
+                <a:effectLst/>
+                <a:latin typeface="HelveticaNeue Regular"/>
+              </a:rPr>
+              <a:t>ZonedStore</a:t>
+            </a:r>
+            <a:r>
+              <a:rPr lang="en-US" altLang="zh-CN" sz="2800" b="1" i="0" dirty="0">
+                <a:solidFill>
+                  <a:srgbClr val="333333"/>
+                </a:solidFill>
+                <a:effectLst/>
+                <a:latin typeface="HelveticaNeue Regular"/>
+              </a:rPr>
+              <a:t>: A Concurrent ZNS-Aware Cache System for Cloud Data Storage</a:t>
+            </a:r>
           </a:p>
         </p:txBody>
       </p:sp>
@@ -1155,7 +1782,7 @@
     </p:spTree>
     <p:extLst>
       <p:ext uri="{BB962C8B-B14F-4D97-AF65-F5344CB8AC3E}">
-        <p14:creationId xmlns:p14="http://schemas.microsoft.com/office/powerpoint/2010/main" val="3396682912"/>
+        <p14:creationId xmlns:p14="http://schemas.microsoft.com/office/powerpoint/2010/main" val="3240529570"/>
       </p:ext>
     </p:extLst>
   </p:cSld>
@@ -1524,6 +2151,12 @@
               <a:buFont typeface="Arial" panose="020B0604020202020204" pitchFamily="34" charset="0"/>
               <a:buNone/>
             </a:pPr>
+            <a:r>
+              <a:rPr lang="en-US" altLang="zh-CN" sz="1200" dirty="0">
+                <a:latin typeface="Constantia" panose="02030602050306030303" pitchFamily="18" charset="0"/>
+              </a:rPr>
+              <a:t>https://www.baidu.com/s?wd=%22Navy%22%E6%98%AFCacheLib%E6%9C%80%E6%96%B0%E7%9A%84%E7%BB%84%E4%BB%B6%E6%88%96%E5%8A%9F%E8%83%BD%E4%B9%8B%E4%B8%80&amp;rsv_spt=1&amp;rsv_iqid=0xbee64fc1002f3e4b&amp;issp=1&amp;f=8&amp;rsv_bp=1&amp;rsv_idx=2&amp;ie=utf-8&amp;rqlang=cn&amp;tn=baiduhome_pg&amp;rsv_dl=tb&amp;rsv_enter=1&amp;oq=give%2520password%2520for%2520maintance&amp;rsv_btype=t&amp;inputT=522184&amp;rsv_t=f7d73OedvQKPi8khPGTPFRWOj6S5N2296YTnTzi1jSvTUceL05sHuTXO7snRVeaGmWDa&amp;rsv_sug3=3&amp;rsv_n=2&amp;rsv_pq=931944c8002a9288&amp;rsv_sug1=1&amp;rsv_sug7=100&amp;rsv_sug2=0&amp;rsv_sug4=522184</a:t>
+            </a:r>
             <a:endParaRPr lang="zh-CN" altLang="en-US" sz="1200" dirty="0">
               <a:latin typeface="Constantia" panose="02030602050306030303" pitchFamily="18" charset="0"/>
             </a:endParaRPr>
@@ -3489,150 +4122,6 @@
           <a:bodyPr/>
           <a:lstStyle/>
           <a:p>
-            <a:pPr marL="0" marR="0" lvl="0" indent="0" algn="l" defTabSz="914400" rtl="0" eaLnBrk="1" fontAlgn="auto" latinLnBrk="0" hangingPunct="1">
-              <a:lnSpc>
-                <a:spcPct val="100000"/>
-              </a:lnSpc>
-              <a:spcBef>
-                <a:spcPts val="0"/>
-              </a:spcBef>
-              <a:spcAft>
-                <a:spcPts val="0"/>
-              </a:spcAft>
-              <a:buClrTx/>
-              <a:buSzTx/>
-              <a:buFontTx/>
-              <a:buNone/>
-              <a:tabLst/>
-              <a:defRPr/>
-            </a:pPr>
-            <a:r>
-              <a:rPr lang="zh-CN" altLang="en-US" sz="4000" b="1" dirty="0">
-                <a:solidFill>
-                  <a:srgbClr val="4747BA"/>
-                </a:solidFill>
-                <a:latin typeface="Constantia" panose="02030602050306030303" pitchFamily="18" charset="0"/>
-                <a:ea typeface="腾讯体 W3" panose="020C04030202040F0204" pitchFamily="34" charset="-122"/>
-                <a:cs typeface="Times" panose="02020603050405020304" pitchFamily="18" charset="0"/>
-              </a:rPr>
-              <a:t>对未来发展方向的一些不太成熟的设想</a:t>
-            </a:r>
-            <a:endParaRPr lang="en-US" altLang="zh-CN" sz="2800" b="1" dirty="0">
-              <a:solidFill>
-                <a:srgbClr val="4747BA"/>
-              </a:solidFill>
-              <a:latin typeface="Constantia" panose="02030602050306030303" pitchFamily="18" charset="0"/>
-              <a:ea typeface="腾讯体 W3" panose="020C04030202040F0204" pitchFamily="34" charset="-122"/>
-              <a:cs typeface="Times" panose="02020603050405020304" pitchFamily="18" charset="0"/>
-            </a:endParaRPr>
-          </a:p>
-          <a:p>
-            <a:pPr algn="l"/>
-            <a:endParaRPr lang="en-US" altLang="zh-CN" sz="2800" b="1" i="0" dirty="0">
-              <a:solidFill>
-                <a:srgbClr val="333333"/>
-              </a:solidFill>
-              <a:effectLst/>
-              <a:latin typeface="-apple-system"/>
-            </a:endParaRPr>
-          </a:p>
-          <a:p>
-            <a:pPr algn="l"/>
-            <a:r>
-              <a:rPr lang="en-US" altLang="zh-CN" sz="2800" b="1" i="0" dirty="0">
-                <a:solidFill>
-                  <a:srgbClr val="333333"/>
-                </a:solidFill>
-                <a:effectLst/>
-                <a:latin typeface="-apple-system"/>
-              </a:rPr>
-              <a:t>Abase2</a:t>
-            </a:r>
-            <a:r>
-              <a:rPr lang="zh-CN" altLang="en-US" sz="2800" b="1" i="0" dirty="0">
-                <a:solidFill>
-                  <a:srgbClr val="333333"/>
-                </a:solidFill>
-                <a:effectLst/>
-                <a:latin typeface="-apple-system"/>
-              </a:rPr>
-              <a:t>：字节跳动新一代高可用 </a:t>
-            </a:r>
-            <a:r>
-              <a:rPr lang="en-US" altLang="zh-CN" sz="2800" b="1" i="0" dirty="0">
-                <a:solidFill>
-                  <a:srgbClr val="333333"/>
-                </a:solidFill>
-                <a:effectLst/>
-                <a:latin typeface="-apple-system"/>
-              </a:rPr>
-              <a:t>NoSQL </a:t>
-            </a:r>
-            <a:r>
-              <a:rPr lang="zh-CN" altLang="en-US" sz="2800" b="1" i="0" dirty="0">
-                <a:solidFill>
-                  <a:srgbClr val="333333"/>
-                </a:solidFill>
-                <a:effectLst/>
-                <a:latin typeface="-apple-system"/>
-              </a:rPr>
-              <a:t>数据库 </a:t>
-            </a:r>
-            <a:endParaRPr lang="en-US" altLang="zh-CN" sz="2800" b="1" i="0" dirty="0">
-              <a:solidFill>
-                <a:srgbClr val="333333"/>
-              </a:solidFill>
-              <a:effectLst/>
-              <a:latin typeface="-apple-system"/>
-            </a:endParaRPr>
-          </a:p>
-          <a:p>
-            <a:pPr marL="0" marR="0" lvl="0" indent="0" algn="l" defTabSz="914400" rtl="0" eaLnBrk="1" fontAlgn="auto" latinLnBrk="0" hangingPunct="1">
-              <a:lnSpc>
-                <a:spcPct val="100000"/>
-              </a:lnSpc>
-              <a:spcBef>
-                <a:spcPts val="0"/>
-              </a:spcBef>
-              <a:spcAft>
-                <a:spcPts val="0"/>
-              </a:spcAft>
-              <a:buClrTx/>
-              <a:buSzTx/>
-              <a:buFontTx/>
-              <a:buNone/>
-              <a:tabLst/>
-              <a:defRPr/>
-            </a:pPr>
-            <a:r>
-              <a:rPr lang="en-US" altLang="zh-CN" sz="1800" b="1" i="0" dirty="0">
-                <a:solidFill>
-                  <a:srgbClr val="333333"/>
-                </a:solidFill>
-                <a:effectLst/>
-                <a:latin typeface="-apple-system"/>
-              </a:rPr>
-              <a:t>https://www.51cto.com/article/709845.html</a:t>
-            </a:r>
-            <a:endParaRPr lang="zh-CN" altLang="en-US" sz="1800" b="1" i="0" dirty="0">
-              <a:solidFill>
-                <a:srgbClr val="333333"/>
-              </a:solidFill>
-              <a:effectLst/>
-              <a:latin typeface="-apple-system"/>
-            </a:endParaRPr>
-          </a:p>
-          <a:p>
-            <a:pPr algn="l"/>
-            <a:endParaRPr lang="en-US" altLang="zh-CN" sz="1800" b="0" i="0" dirty="0">
-              <a:solidFill>
-                <a:srgbClr val="222222"/>
-              </a:solidFill>
-              <a:effectLst/>
-              <a:latin typeface="PingFangSC-Regular"/>
-            </a:endParaRPr>
-          </a:p>
-          <a:p>
             <a:pPr marL="0" marR="0" lvl="0" indent="0" algn="just" defTabSz="914400" rtl="0" eaLnBrk="1" fontAlgn="auto" latinLnBrk="0" hangingPunct="1">
               <a:lnSpc>
                 <a:spcPct val="100000"/>
@@ -3647,137 +4136,117 @@
               <a:buSzTx/>
               <a:buFont typeface="Arial" panose="020B0604020202020204" pitchFamily="34" charset="0"/>
               <a:buNone/>
-              <a:tabLst/>
               <a:defRPr/>
             </a:pPr>
             <a:r>
-              <a:rPr lang="zh-CN" altLang="en-US" sz="1800" b="0" i="0" dirty="0">
-                <a:solidFill>
-                  <a:srgbClr val="222222"/>
-                </a:solidFill>
-                <a:effectLst/>
-                <a:latin typeface="PingFangSC-Regular"/>
-              </a:rPr>
-              <a:t>单体数据库，</a:t>
-            </a:r>
-            <a:r>
-              <a:rPr lang="en-US" altLang="zh-CN" sz="1800" b="0" i="0" dirty="0" err="1">
-                <a:solidFill>
-                  <a:srgbClr val="222222"/>
-                </a:solidFill>
-                <a:effectLst/>
-                <a:latin typeface="PingFangSC-Regular"/>
-              </a:rPr>
-              <a:t>Terarkdb</a:t>
-            </a:r>
-            <a:r>
-              <a:rPr lang="en-US" altLang="zh-CN" sz="1800" b="0" i="0" dirty="0">
-                <a:solidFill>
-                  <a:srgbClr val="222222"/>
-                </a:solidFill>
-                <a:effectLst/>
-                <a:latin typeface="PingFangSC-Regular"/>
-              </a:rPr>
-              <a:t> </a:t>
-            </a:r>
-            <a:r>
-              <a:rPr lang="zh-CN" altLang="en-US" sz="1800" b="0" i="0" dirty="0">
-                <a:solidFill>
-                  <a:srgbClr val="222222"/>
-                </a:solidFill>
-                <a:effectLst/>
-                <a:latin typeface="PingFangSC-Regular"/>
-              </a:rPr>
-              <a:t>，</a:t>
-            </a:r>
-            <a:r>
-              <a:rPr lang="zh-CN" altLang="en-US" sz="2800" b="0" i="0" dirty="0">
-                <a:solidFill>
-                  <a:srgbClr val="333333"/>
-                </a:solidFill>
-                <a:effectLst/>
-                <a:latin typeface="PingFangSC-Regular"/>
-              </a:rPr>
-              <a:t>向上承接分布式团队业务，</a:t>
-            </a:r>
-            <a:r>
-              <a:rPr lang="zh-CN" altLang="en-US" sz="1800" b="0" i="0" dirty="0">
-                <a:solidFill>
-                  <a:srgbClr val="222222"/>
-                </a:solidFill>
-                <a:effectLst/>
-                <a:latin typeface="PingFangSC-Regular"/>
-              </a:rPr>
-              <a:t>向下使用 </a:t>
-            </a:r>
-            <a:r>
-              <a:rPr lang="en-US" altLang="zh-CN" sz="1800" b="0" i="0" dirty="0">
-                <a:solidFill>
-                  <a:srgbClr val="222222"/>
-                </a:solidFill>
-                <a:effectLst/>
-                <a:latin typeface="PingFangSC-Regular"/>
-              </a:rPr>
-              <a:t>SSD+ZNS+DPU</a:t>
-            </a:r>
-            <a:r>
-              <a:rPr lang="zh-CN" altLang="en-US" sz="1800" b="0" i="0" dirty="0">
-                <a:solidFill>
-                  <a:srgbClr val="222222"/>
-                </a:solidFill>
-                <a:effectLst/>
-                <a:latin typeface="PingFangSC-Regular"/>
-              </a:rPr>
-              <a:t>，</a:t>
-            </a:r>
-            <a:r>
-              <a:rPr lang="en-US" altLang="zh-CN" sz="1800" b="0" i="0" dirty="0">
-                <a:solidFill>
-                  <a:srgbClr val="222222"/>
-                </a:solidFill>
-                <a:effectLst/>
-                <a:latin typeface="PingFangSC-Regular"/>
-              </a:rPr>
-              <a:t>22</a:t>
-            </a:r>
-            <a:r>
-              <a:rPr lang="zh-CN" altLang="en-US" sz="1800" b="0" i="0" dirty="0">
-                <a:solidFill>
-                  <a:srgbClr val="222222"/>
-                </a:solidFill>
-                <a:effectLst/>
-                <a:latin typeface="PingFangSC-Regular"/>
-              </a:rPr>
-              <a:t>年中旬提交的关于</a:t>
-            </a:r>
-            <a:r>
-              <a:rPr lang="en-US" altLang="zh-CN" sz="1800" b="0" i="0" dirty="0">
-                <a:solidFill>
-                  <a:srgbClr val="222222"/>
-                </a:solidFill>
-                <a:effectLst/>
-                <a:latin typeface="PingFangSC-Regular"/>
-              </a:rPr>
-              <a:t>ZNS</a:t>
-            </a:r>
-            <a:r>
-              <a:rPr lang="zh-CN" altLang="en-US" sz="1800" b="0" i="0" dirty="0">
-                <a:solidFill>
-                  <a:srgbClr val="222222"/>
-                </a:solidFill>
-                <a:effectLst/>
-                <a:latin typeface="PingFangSC-Regular"/>
-              </a:rPr>
-              <a:t>的代码</a:t>
-            </a:r>
-            <a:endParaRPr lang="zh-CN" altLang="en-US" sz="1800" b="1" dirty="0">
-              <a:solidFill>
-                <a:srgbClr val="4747BA"/>
-              </a:solidFill>
-              <a:latin typeface="Constantia" panose="02030602050306030303" pitchFamily="18" charset="0"/>
-              <a:ea typeface="腾讯体 W3" panose="020C04030202040F0204" pitchFamily="34" charset="-122"/>
-              <a:cs typeface="Times" panose="02020603050405020304" pitchFamily="18" charset="0"/>
-            </a:endParaRPr>
+              <a:rPr lang="zh-CN" altLang="en-US" sz="1200" dirty="0"/>
+              <a:t>尽管</a:t>
+            </a:r>
+            <a:r>
+              <a:rPr lang="en-US" altLang="zh-CN" sz="1200" dirty="0"/>
+              <a:t>HFTL</a:t>
+            </a:r>
+            <a:r>
+              <a:rPr lang="zh-CN" altLang="en-US" sz="1200" dirty="0"/>
+              <a:t>的职责较</a:t>
+            </a:r>
+            <a:r>
+              <a:rPr lang="en-US" altLang="zh-CN" sz="1200" dirty="0"/>
+              <a:t>SSD FTL</a:t>
+            </a:r>
+            <a:r>
+              <a:rPr lang="zh-CN" altLang="en-US" sz="1200" dirty="0"/>
+              <a:t>小，但它必须管理其对</a:t>
+            </a:r>
+            <a:r>
+              <a:rPr lang="en-US" altLang="zh-CN" sz="1200" dirty="0"/>
+              <a:t>CPU</a:t>
+            </a:r>
+            <a:r>
+              <a:rPr lang="zh-CN" altLang="en-US" sz="1200" dirty="0"/>
+              <a:t>和</a:t>
+            </a:r>
+            <a:r>
+              <a:rPr lang="en-US" altLang="zh-CN" sz="1200" dirty="0"/>
+              <a:t>DRAM</a:t>
+            </a:r>
+            <a:r>
+              <a:rPr lang="zh-CN" altLang="en-US" sz="1200" dirty="0"/>
+              <a:t>资源的使用，因为这些资源与主机应用共享。</a:t>
+            </a:r>
+            <a:r>
+              <a:rPr lang="en-US" altLang="zh-CN" sz="1200" dirty="0"/>
+              <a:t>HFTL</a:t>
+            </a:r>
+            <a:r>
+              <a:rPr lang="zh-CN" altLang="en-US" sz="1200" dirty="0"/>
+              <a:t>简化了与主机端信息的整合，增强了数据放置和垃圾回收的控制，并向应用程序提供传统块接口。目前，例如</a:t>
+            </a:r>
+            <a:r>
+              <a:rPr lang="en-US" altLang="zh-CN" sz="1200" dirty="0"/>
+              <a:t>dm-zoned</a:t>
+            </a:r>
+            <a:r>
+              <a:rPr lang="zh-CN" altLang="en-US" sz="1200" dirty="0"/>
+              <a:t>、</a:t>
+            </a:r>
+            <a:r>
+              <a:rPr lang="en-US" altLang="zh-CN" sz="1200" dirty="0"/>
+              <a:t>dm-zap</a:t>
+            </a:r>
+            <a:r>
+              <a:rPr lang="zh-CN" altLang="en-US" sz="1200" dirty="0"/>
+              <a:t>、</a:t>
+            </a:r>
+            <a:r>
+              <a:rPr lang="en-US" altLang="zh-CN" sz="1200" dirty="0" err="1"/>
+              <a:t>pblk</a:t>
+            </a:r>
+            <a:r>
+              <a:rPr lang="zh-CN" altLang="en-US" sz="1200" dirty="0"/>
+              <a:t>和</a:t>
+            </a:r>
+            <a:r>
+              <a:rPr lang="en-US" altLang="zh-CN" sz="1200" dirty="0"/>
+              <a:t>SPDK</a:t>
+            </a:r>
+            <a:r>
+              <a:rPr lang="zh-CN" altLang="en-US" sz="1200" dirty="0"/>
+              <a:t>的</a:t>
+            </a:r>
+            <a:r>
+              <a:rPr lang="en-US" altLang="zh-CN" sz="1200" dirty="0"/>
+              <a:t>FTL</a:t>
+            </a:r>
+            <a:r>
+              <a:rPr lang="zh-CN" altLang="en-US" sz="1200" dirty="0"/>
+              <a:t>等工作显示了</a:t>
+            </a:r>
+            <a:r>
+              <a:rPr lang="en-US" altLang="zh-CN" sz="1200" dirty="0"/>
+              <a:t>HFTL</a:t>
+            </a:r>
+            <a:r>
+              <a:rPr lang="zh-CN" altLang="en-US" sz="1200" dirty="0"/>
+              <a:t>的可行性和应用性，但目前只有</a:t>
+            </a:r>
+            <a:r>
+              <a:rPr lang="en-US" altLang="zh-CN" sz="1200" dirty="0"/>
+              <a:t>dm-zap</a:t>
+            </a:r>
+            <a:r>
+              <a:rPr lang="zh-CN" altLang="en-US" sz="1200" dirty="0"/>
+              <a:t>支持</a:t>
+            </a:r>
+            <a:r>
+              <a:rPr lang="en-US" altLang="zh-CN" sz="1200" dirty="0"/>
+              <a:t>ZNS SSD</a:t>
+            </a:r>
+            <a:r>
+              <a:rPr lang="zh-CN" altLang="en-US" sz="1200" dirty="0"/>
+              <a:t>。</a:t>
+            </a:r>
+            <a:endParaRPr lang="en-US" altLang="zh-CN" sz="1200" dirty="0"/>
           </a:p>
           <a:p>
             <a:pPr indent="0" algn="just">
@@ -3787,472 +4256,9 @@
               <a:buFont typeface="Arial" panose="020B0604020202020204" pitchFamily="34" charset="0"/>
               <a:buNone/>
             </a:pPr>
-            <a:r>
-              <a:rPr lang="en-US" altLang="zh-CN" sz="1800" kern="100" dirty="0">
-                <a:effectLst/>
-                <a:latin typeface="Times New Roman" panose="02020603050405020304" pitchFamily="18" charset="0"/>
-                <a:ea typeface="宋体" panose="02010600030101010101" pitchFamily="2" charset="-122"/>
-                <a:cs typeface="Times New Roman" panose="02020603050405020304" pitchFamily="18" charset="0"/>
-              </a:rPr>
-              <a:t>https://www.nowcoder.com/discuss/375095020267872256</a:t>
-            </a:r>
-          </a:p>
-          <a:p>
-            <a:pPr indent="0" algn="just">
-              <a:spcAft>
-                <a:spcPts val="1200"/>
-              </a:spcAft>
-              <a:buFont typeface="Arial" panose="020B0604020202020204" pitchFamily="34" charset="0"/>
-              <a:buNone/>
-            </a:pPr>
-            <a:endParaRPr lang="en-US" altLang="zh-CN" sz="1800" kern="100" dirty="0">
-              <a:effectLst/>
-              <a:latin typeface="Times New Roman" panose="02020603050405020304" pitchFamily="18" charset="0"/>
-              <a:ea typeface="宋体" panose="02010600030101010101" pitchFamily="2" charset="-122"/>
-              <a:cs typeface="Times New Roman" panose="02020603050405020304" pitchFamily="18" charset="0"/>
+            <a:endParaRPr lang="zh-CN" altLang="en-US" sz="1200" dirty="0">
+              <a:latin typeface="Constantia" panose="02030602050306030303" pitchFamily="18" charset="0"/>
             </a:endParaRPr>
-          </a:p>
-          <a:p>
-            <a:pPr indent="0" algn="just">
-              <a:spcAft>
-                <a:spcPts val="1200"/>
-              </a:spcAft>
-              <a:buFont typeface="Arial" panose="020B0604020202020204" pitchFamily="34" charset="0"/>
-              <a:buNone/>
-            </a:pPr>
-            <a:r>
-              <a:rPr lang="zh-CN" altLang="en-US" sz="2800" b="0" i="0" dirty="0">
-                <a:solidFill>
-                  <a:srgbClr val="0052FF"/>
-                </a:solidFill>
-                <a:effectLst/>
-                <a:latin typeface="system-ui"/>
-              </a:rPr>
-              <a:t>做了一个很奇怪的硬件改进</a:t>
-            </a:r>
-            <a:r>
-              <a:rPr lang="en-US" altLang="zh-CN" sz="2800" b="0" i="0" dirty="0">
-                <a:solidFill>
-                  <a:srgbClr val="0052FF"/>
-                </a:solidFill>
-                <a:effectLst/>
-                <a:latin typeface="system-ui"/>
-              </a:rPr>
-              <a:t>,</a:t>
-            </a:r>
-            <a:r>
-              <a:rPr lang="zh-CN" altLang="en-US" sz="2800" b="0" i="0" dirty="0">
-                <a:solidFill>
-                  <a:srgbClr val="0052FF"/>
-                </a:solidFill>
-                <a:effectLst/>
-                <a:latin typeface="system-ui"/>
-              </a:rPr>
-              <a:t>要支持写入数据最后一个</a:t>
-            </a:r>
-            <a:r>
-              <a:rPr lang="en-US" altLang="zh-CN" sz="2800" b="0" i="0" dirty="0">
-                <a:solidFill>
-                  <a:srgbClr val="0052FF"/>
-                </a:solidFill>
-                <a:effectLst/>
-                <a:latin typeface="system-ui"/>
-              </a:rPr>
-              <a:t>LBA overwrite</a:t>
-            </a:r>
-            <a:r>
-              <a:rPr lang="zh-CN" altLang="en-US" sz="2800" b="0" i="0" dirty="0">
-                <a:solidFill>
-                  <a:srgbClr val="0052FF"/>
-                </a:solidFill>
-                <a:effectLst/>
-                <a:latin typeface="system-ui"/>
-              </a:rPr>
-              <a:t>覆盖写，优化</a:t>
-            </a:r>
-            <a:r>
-              <a:rPr lang="en-US" altLang="zh-CN" sz="2800" b="0" i="0" dirty="0">
-                <a:solidFill>
-                  <a:srgbClr val="0052FF"/>
-                </a:solidFill>
-                <a:effectLst/>
-                <a:latin typeface="system-ui"/>
-              </a:rPr>
-              <a:t>NAND</a:t>
-            </a:r>
-            <a:r>
-              <a:rPr lang="zh-CN" altLang="en-US" sz="2800" b="0" i="0" dirty="0">
-                <a:solidFill>
-                  <a:srgbClr val="0052FF"/>
-                </a:solidFill>
-                <a:effectLst/>
-                <a:latin typeface="system-ui"/>
-              </a:rPr>
-              <a:t>存储空间，最终降低写放大</a:t>
-            </a:r>
-            <a:r>
-              <a:rPr lang="en-US" altLang="zh-CN" sz="1800" b="0" i="0" kern="100" dirty="0">
-                <a:solidFill>
-                  <a:srgbClr val="0052FF"/>
-                </a:solidFill>
-                <a:effectLst/>
-                <a:latin typeface="Times New Roman" panose="02020603050405020304" pitchFamily="18" charset="0"/>
-                <a:ea typeface="宋体" panose="02010600030101010101" pitchFamily="2" charset="-122"/>
-                <a:cs typeface="Times New Roman" panose="02020603050405020304" pitchFamily="18" charset="0"/>
-              </a:rPr>
-              <a:t>                           </a:t>
-            </a:r>
-            <a:r>
-              <a:rPr lang="zh-CN" altLang="en-US" sz="1800" kern="100" dirty="0">
-                <a:effectLst/>
-                <a:latin typeface="Times New Roman" panose="02020603050405020304" pitchFamily="18" charset="0"/>
-                <a:ea typeface="宋体" panose="02010600030101010101" pitchFamily="2" charset="-122"/>
-                <a:cs typeface="Times New Roman" panose="02020603050405020304" pitchFamily="18" charset="0"/>
-              </a:rPr>
-              <a:t>郭宽？</a:t>
-            </a:r>
-            <a:endParaRPr lang="en-US" altLang="zh-CN" sz="1800" kern="100" dirty="0">
-              <a:effectLst/>
-              <a:latin typeface="Times New Roman" panose="02020603050405020304" pitchFamily="18" charset="0"/>
-              <a:ea typeface="宋体" panose="02010600030101010101" pitchFamily="2" charset="-122"/>
-              <a:cs typeface="Times New Roman" panose="02020603050405020304" pitchFamily="18" charset="0"/>
-            </a:endParaRPr>
-          </a:p>
-          <a:p>
-            <a:pPr marL="0" marR="0" lvl="0" indent="0" algn="just" defTabSz="914400" rtl="0" eaLnBrk="1" fontAlgn="auto" latinLnBrk="0" hangingPunct="1">
-              <a:lnSpc>
-                <a:spcPct val="100000"/>
-              </a:lnSpc>
-              <a:spcBef>
-                <a:spcPts val="0"/>
-              </a:spcBef>
-              <a:spcAft>
-                <a:spcPts val="1200"/>
-              </a:spcAft>
-              <a:buClrTx/>
-              <a:buSzTx/>
-              <a:buFont typeface="Arial" panose="020B0604020202020204" pitchFamily="34" charset="0"/>
-              <a:buNone/>
-              <a:tabLst/>
-              <a:defRPr/>
-            </a:pPr>
-            <a:endParaRPr lang="en-US" altLang="zh-CN" sz="2800" b="1" i="0" dirty="0">
-              <a:solidFill>
-                <a:srgbClr val="333333"/>
-              </a:solidFill>
-              <a:effectLst/>
-              <a:latin typeface="HelveticaNeue Regular"/>
-            </a:endParaRPr>
-          </a:p>
-          <a:p>
-            <a:pPr marL="0" marR="0" lvl="0" indent="0" algn="just" defTabSz="914400" rtl="0" eaLnBrk="1" fontAlgn="auto" latinLnBrk="0" hangingPunct="1">
-              <a:lnSpc>
-                <a:spcPct val="100000"/>
-              </a:lnSpc>
-              <a:spcBef>
-                <a:spcPts val="0"/>
-              </a:spcBef>
-              <a:spcAft>
-                <a:spcPts val="1200"/>
-              </a:spcAft>
-              <a:buClrTx/>
-              <a:buSzTx/>
-              <a:buFont typeface="Arial" panose="020B0604020202020204" pitchFamily="34" charset="0"/>
-              <a:buNone/>
-              <a:tabLst/>
-              <a:defRPr/>
-            </a:pPr>
-            <a:r>
-              <a:rPr lang="zh-CN" altLang="en-US" sz="4000" b="0" i="0" dirty="0">
-                <a:solidFill>
-                  <a:srgbClr val="191B1F"/>
-                </a:solidFill>
-                <a:effectLst/>
-                <a:latin typeface="-apple-system"/>
-              </a:rPr>
-              <a:t>各类存储系统，尤其是 </a:t>
-            </a:r>
-            <a:r>
-              <a:rPr lang="en-US" altLang="zh-CN" sz="4000" b="0" i="0" dirty="0">
-                <a:solidFill>
-                  <a:srgbClr val="191B1F"/>
-                </a:solidFill>
-                <a:effectLst/>
-                <a:latin typeface="-apple-system"/>
-              </a:rPr>
-              <a:t>LSM </a:t>
-            </a:r>
-            <a:r>
-              <a:rPr lang="zh-CN" altLang="en-US" sz="4000" b="0" i="0" dirty="0">
-                <a:solidFill>
-                  <a:srgbClr val="191B1F"/>
-                </a:solidFill>
-                <a:effectLst/>
-                <a:latin typeface="-apple-system"/>
-              </a:rPr>
-              <a:t>花费了大量的精力进行写放大的优化，但即便是 </a:t>
-            </a:r>
-            <a:r>
-              <a:rPr lang="en-US" altLang="zh-CN" sz="4000" b="0" i="0" dirty="0">
-                <a:solidFill>
-                  <a:srgbClr val="191B1F"/>
-                </a:solidFill>
-                <a:effectLst/>
-                <a:latin typeface="-apple-system"/>
-              </a:rPr>
-              <a:t>LSM </a:t>
-            </a:r>
-            <a:r>
-              <a:rPr lang="zh-CN" altLang="en-US" sz="4000" b="0" i="0" dirty="0">
-                <a:solidFill>
-                  <a:srgbClr val="191B1F"/>
-                </a:solidFill>
-                <a:effectLst/>
-                <a:latin typeface="-apple-system"/>
-              </a:rPr>
-              <a:t>写放大降低到 </a:t>
-            </a:r>
-            <a:r>
-              <a:rPr lang="en-US" altLang="zh-CN" sz="4000" b="0" i="0" dirty="0">
-                <a:solidFill>
-                  <a:srgbClr val="191B1F"/>
-                </a:solidFill>
-                <a:effectLst/>
-                <a:latin typeface="-apple-system"/>
-              </a:rPr>
-              <a:t>5</a:t>
-            </a:r>
-            <a:r>
-              <a:rPr lang="zh-CN" altLang="en-US" sz="4000" b="0" i="0" dirty="0">
-                <a:solidFill>
-                  <a:srgbClr val="191B1F"/>
-                </a:solidFill>
-                <a:effectLst/>
-                <a:latin typeface="-apple-system"/>
-              </a:rPr>
-              <a:t>，</a:t>
-            </a:r>
-            <a:r>
-              <a:rPr lang="en-US" altLang="zh-CN" sz="4000" b="0" i="0" dirty="0">
-                <a:solidFill>
-                  <a:srgbClr val="191B1F"/>
-                </a:solidFill>
-                <a:effectLst/>
-                <a:latin typeface="-apple-system"/>
-              </a:rPr>
-              <a:t>SSD </a:t>
-            </a:r>
-            <a:r>
-              <a:rPr lang="zh-CN" altLang="en-US" sz="4000" b="0" i="0" dirty="0">
-                <a:solidFill>
-                  <a:srgbClr val="191B1F"/>
-                </a:solidFill>
-                <a:effectLst/>
-                <a:latin typeface="-apple-system"/>
-              </a:rPr>
-              <a:t>自身的写放大通常也有 </a:t>
-            </a:r>
-            <a:r>
-              <a:rPr lang="en-US" altLang="zh-CN" sz="4000" b="0" i="0" dirty="0">
-                <a:solidFill>
-                  <a:srgbClr val="191B1F"/>
-                </a:solidFill>
-                <a:effectLst/>
-                <a:latin typeface="-apple-system"/>
-              </a:rPr>
-              <a:t>3 </a:t>
-            </a:r>
-            <a:r>
-              <a:rPr lang="zh-CN" altLang="en-US" sz="4000" b="0" i="0" dirty="0">
-                <a:solidFill>
-                  <a:srgbClr val="191B1F"/>
-                </a:solidFill>
-                <a:effectLst/>
-                <a:latin typeface="-apple-system"/>
-              </a:rPr>
-              <a:t>倍，综合写放大还是 </a:t>
-            </a:r>
-            <a:r>
-              <a:rPr lang="en-US" altLang="zh-CN" sz="4000" b="0" i="0" dirty="0">
-                <a:solidFill>
-                  <a:srgbClr val="191B1F"/>
-                </a:solidFill>
-                <a:effectLst/>
-                <a:latin typeface="-apple-system"/>
-              </a:rPr>
-              <a:t>15 </a:t>
-            </a:r>
-            <a:r>
-              <a:rPr lang="zh-CN" altLang="en-US" sz="4000" b="0" i="0" dirty="0">
-                <a:solidFill>
-                  <a:srgbClr val="191B1F"/>
-                </a:solidFill>
-                <a:effectLst/>
-                <a:latin typeface="-apple-system"/>
-              </a:rPr>
-              <a:t>倍之多。</a:t>
-            </a:r>
-            <a:endParaRPr lang="en-US" altLang="zh-CN" sz="2800" b="1" i="0" dirty="0">
-              <a:solidFill>
-                <a:srgbClr val="333333"/>
-              </a:solidFill>
-              <a:effectLst/>
-              <a:latin typeface="HelveticaNeue Regular"/>
-            </a:endParaRPr>
-          </a:p>
-          <a:p>
-            <a:pPr marL="0" marR="0" lvl="0" indent="0" algn="just" defTabSz="914400" rtl="0" eaLnBrk="1" fontAlgn="auto" latinLnBrk="0" hangingPunct="1">
-              <a:lnSpc>
-                <a:spcPct val="100000"/>
-              </a:lnSpc>
-              <a:spcBef>
-                <a:spcPts val="0"/>
-              </a:spcBef>
-              <a:spcAft>
-                <a:spcPts val="1200"/>
-              </a:spcAft>
-              <a:buClrTx/>
-              <a:buSzTx/>
-              <a:buFont typeface="Arial" panose="020B0604020202020204" pitchFamily="34" charset="0"/>
-              <a:buNone/>
-              <a:tabLst/>
-              <a:defRPr/>
-            </a:pPr>
-            <a:endParaRPr lang="en-US" altLang="zh-CN" sz="4000" b="0" i="0" dirty="0">
-              <a:solidFill>
-                <a:srgbClr val="191B1F"/>
-              </a:solidFill>
-              <a:effectLst/>
-              <a:latin typeface="-apple-system"/>
-            </a:endParaRPr>
-          </a:p>
-          <a:p>
-            <a:pPr marL="0" marR="0" lvl="0" indent="0" algn="just" defTabSz="914400" rtl="0" eaLnBrk="1" fontAlgn="auto" latinLnBrk="0" hangingPunct="1">
-              <a:lnSpc>
-                <a:spcPct val="100000"/>
-              </a:lnSpc>
-              <a:spcBef>
-                <a:spcPts val="0"/>
-              </a:spcBef>
-              <a:spcAft>
-                <a:spcPts val="1200"/>
-              </a:spcAft>
-              <a:buClrTx/>
-              <a:buSzTx/>
-              <a:buFont typeface="Arial" panose="020B0604020202020204" pitchFamily="34" charset="0"/>
-              <a:buNone/>
-              <a:tabLst/>
-              <a:defRPr/>
-            </a:pPr>
-            <a:r>
-              <a:rPr lang="zh-CN" altLang="en-US" sz="4000" b="0" i="0" dirty="0">
-                <a:solidFill>
-                  <a:srgbClr val="191B1F"/>
-                </a:solidFill>
-                <a:effectLst/>
-                <a:latin typeface="-apple-system"/>
-              </a:rPr>
-              <a:t>预测未来硬件的发展趋势是非常，</a:t>
-            </a:r>
-            <a:endParaRPr lang="en-US" altLang="zh-CN" sz="2800" b="1" i="0" dirty="0">
-              <a:solidFill>
-                <a:srgbClr val="333333"/>
-              </a:solidFill>
-              <a:effectLst/>
-              <a:latin typeface="HelveticaNeue Regular"/>
-            </a:endParaRPr>
-          </a:p>
-          <a:p>
-            <a:pPr marL="0" marR="0" lvl="0" indent="0" algn="just" defTabSz="914400" rtl="0" eaLnBrk="1" fontAlgn="auto" latinLnBrk="0" hangingPunct="1">
-              <a:lnSpc>
-                <a:spcPct val="100000"/>
-              </a:lnSpc>
-              <a:spcBef>
-                <a:spcPts val="0"/>
-              </a:spcBef>
-              <a:spcAft>
-                <a:spcPts val="1200"/>
-              </a:spcAft>
-              <a:buClrTx/>
-              <a:buSzTx/>
-              <a:buFont typeface="Arial" panose="020B0604020202020204" pitchFamily="34" charset="0"/>
-              <a:buNone/>
-              <a:tabLst/>
-              <a:defRPr/>
-            </a:pPr>
-            <a:endParaRPr lang="en-US" altLang="zh-CN" sz="2800" b="1" i="0" dirty="0">
-              <a:solidFill>
-                <a:srgbClr val="333333"/>
-              </a:solidFill>
-              <a:effectLst/>
-              <a:latin typeface="HelveticaNeue Regular"/>
-            </a:endParaRPr>
-          </a:p>
-          <a:p>
-            <a:pPr marL="0" marR="0" lvl="0" indent="0" algn="just" defTabSz="914400" rtl="0" eaLnBrk="1" fontAlgn="auto" latinLnBrk="0" hangingPunct="1">
-              <a:lnSpc>
-                <a:spcPct val="100000"/>
-              </a:lnSpc>
-              <a:spcBef>
-                <a:spcPts val="0"/>
-              </a:spcBef>
-              <a:spcAft>
-                <a:spcPts val="1200"/>
-              </a:spcAft>
-              <a:buClrTx/>
-              <a:buSzTx/>
-              <a:buFont typeface="Arial" panose="020B0604020202020204" pitchFamily="34" charset="0"/>
-              <a:buNone/>
-              <a:tabLst/>
-              <a:defRPr/>
-            </a:pPr>
-            <a:r>
-              <a:rPr lang="zh-CN" altLang="en-US" sz="1800" kern="100" dirty="0">
-                <a:effectLst/>
-                <a:latin typeface="Times New Roman" panose="02020603050405020304" pitchFamily="18" charset="0"/>
-                <a:ea typeface="宋体" panose="02010600030101010101" pitchFamily="2" charset="-122"/>
-                <a:cs typeface="Times New Roman" panose="02020603050405020304" pitchFamily="18" charset="0"/>
-              </a:rPr>
-              <a:t>已有</a:t>
-            </a:r>
-            <a:r>
-              <a:rPr lang="en-US" altLang="zh-CN" sz="1800" kern="100" dirty="0">
-                <a:effectLst/>
-                <a:latin typeface="Times New Roman" panose="02020603050405020304" pitchFamily="18" charset="0"/>
-                <a:ea typeface="宋体" panose="02010600030101010101" pitchFamily="2" charset="-122"/>
-                <a:cs typeface="Times New Roman" panose="02020603050405020304" pitchFamily="18" charset="0"/>
-              </a:rPr>
-              <a:t>CACHE </a:t>
-            </a:r>
-            <a:r>
-              <a:rPr lang="zh-CN" altLang="en-US" sz="1800" kern="100" dirty="0">
-                <a:effectLst/>
-                <a:latin typeface="Times New Roman" panose="02020603050405020304" pitchFamily="18" charset="0"/>
-                <a:ea typeface="宋体" panose="02010600030101010101" pitchFamily="2" charset="-122"/>
-                <a:cs typeface="Times New Roman" panose="02020603050405020304" pitchFamily="18" charset="0"/>
-              </a:rPr>
-              <a:t>研究</a:t>
-            </a:r>
-            <a:r>
-              <a:rPr lang="en-US" altLang="zh-CN" sz="2800" b="1" i="0" dirty="0" err="1">
-                <a:solidFill>
-                  <a:srgbClr val="333333"/>
-                </a:solidFill>
-                <a:effectLst/>
-                <a:latin typeface="HelveticaNeue Regular"/>
-              </a:rPr>
-              <a:t>ZonedStore</a:t>
-            </a:r>
-            <a:r>
-              <a:rPr lang="en-US" altLang="zh-CN" sz="2800" b="1" i="0" dirty="0">
-                <a:solidFill>
-                  <a:srgbClr val="333333"/>
-                </a:solidFill>
-                <a:effectLst/>
-                <a:latin typeface="HelveticaNeue Regular"/>
-              </a:rPr>
-              <a:t>: A Concurrent ZNS-Aware Cache System for Cloud Data Storage</a:t>
-            </a:r>
           </a:p>
         </p:txBody>
       </p:sp>
@@ -4282,7 +4288,7 @@
     </p:spTree>
     <p:extLst>
       <p:ext uri="{BB962C8B-B14F-4D97-AF65-F5344CB8AC3E}">
-        <p14:creationId xmlns:p14="http://schemas.microsoft.com/office/powerpoint/2010/main" val="3240529570"/>
+        <p14:creationId xmlns:p14="http://schemas.microsoft.com/office/powerpoint/2010/main" val="3312157083"/>
       </p:ext>
     </p:extLst>
   </p:cSld>
@@ -4336,133 +4342,6 @@
           <a:bodyPr/>
           <a:lstStyle/>
           <a:p>
-            <a:pPr marL="0" marR="0" lvl="0" indent="0" algn="just" defTabSz="914400" rtl="0" eaLnBrk="1" fontAlgn="auto" latinLnBrk="0" hangingPunct="1">
-              <a:lnSpc>
-                <a:spcPct val="100000"/>
-              </a:lnSpc>
-              <a:spcBef>
-                <a:spcPts val="0"/>
-              </a:spcBef>
-              <a:spcAft>
-                <a:spcPts val="1200"/>
-              </a:spcAft>
-              <a:buClrTx/>
-              <a:buSzTx/>
-              <a:buFont typeface="Arial" panose="020B0604020202020204" pitchFamily="34" charset="0"/>
-              <a:buNone/>
-              <a:defRPr/>
-            </a:pPr>
-            <a:r>
-              <a:rPr lang="zh-CN" altLang="en-US" sz="1200" dirty="0"/>
-              <a:t>尽管</a:t>
-            </a:r>
-            <a:r>
-              <a:rPr lang="en-US" altLang="zh-CN" sz="1200" dirty="0"/>
-              <a:t>HFTL</a:t>
-            </a:r>
-            <a:r>
-              <a:rPr lang="zh-CN" altLang="en-US" sz="1200" dirty="0"/>
-              <a:t>的职责较</a:t>
-            </a:r>
-            <a:r>
-              <a:rPr lang="en-US" altLang="zh-CN" sz="1200" dirty="0"/>
-              <a:t>SSD FTL</a:t>
-            </a:r>
-            <a:r>
-              <a:rPr lang="zh-CN" altLang="en-US" sz="1200" dirty="0"/>
-              <a:t>小，但它必须管理其对</a:t>
-            </a:r>
-            <a:r>
-              <a:rPr lang="en-US" altLang="zh-CN" sz="1200" dirty="0"/>
-              <a:t>CPU</a:t>
-            </a:r>
-            <a:r>
-              <a:rPr lang="zh-CN" altLang="en-US" sz="1200" dirty="0"/>
-              <a:t>和</a:t>
-            </a:r>
-            <a:r>
-              <a:rPr lang="en-US" altLang="zh-CN" sz="1200" dirty="0"/>
-              <a:t>DRAM</a:t>
-            </a:r>
-            <a:r>
-              <a:rPr lang="zh-CN" altLang="en-US" sz="1200" dirty="0"/>
-              <a:t>资源的使用，因为这些资源与主机应用共享。</a:t>
-            </a:r>
-            <a:r>
-              <a:rPr lang="en-US" altLang="zh-CN" sz="1200" dirty="0"/>
-              <a:t>HFTL</a:t>
-            </a:r>
-            <a:r>
-              <a:rPr lang="zh-CN" altLang="en-US" sz="1200" dirty="0"/>
-              <a:t>简化了与主机端信息的整合，增强了数据放置和垃圾回收的控制，并向应用程序提供传统块接口。目前，例如</a:t>
-            </a:r>
-            <a:r>
-              <a:rPr lang="en-US" altLang="zh-CN" sz="1200" dirty="0"/>
-              <a:t>dm-zoned</a:t>
-            </a:r>
-            <a:r>
-              <a:rPr lang="zh-CN" altLang="en-US" sz="1200" dirty="0"/>
-              <a:t>、</a:t>
-            </a:r>
-            <a:r>
-              <a:rPr lang="en-US" altLang="zh-CN" sz="1200" dirty="0"/>
-              <a:t>dm-zap</a:t>
-            </a:r>
-            <a:r>
-              <a:rPr lang="zh-CN" altLang="en-US" sz="1200" dirty="0"/>
-              <a:t>、</a:t>
-            </a:r>
-            <a:r>
-              <a:rPr lang="en-US" altLang="zh-CN" sz="1200" dirty="0" err="1"/>
-              <a:t>pblk</a:t>
-            </a:r>
-            <a:r>
-              <a:rPr lang="zh-CN" altLang="en-US" sz="1200" dirty="0"/>
-              <a:t>和</a:t>
-            </a:r>
-            <a:r>
-              <a:rPr lang="en-US" altLang="zh-CN" sz="1200" dirty="0"/>
-              <a:t>SPDK</a:t>
-            </a:r>
-            <a:r>
-              <a:rPr lang="zh-CN" altLang="en-US" sz="1200" dirty="0"/>
-              <a:t>的</a:t>
-            </a:r>
-            <a:r>
-              <a:rPr lang="en-US" altLang="zh-CN" sz="1200" dirty="0"/>
-              <a:t>FTL</a:t>
-            </a:r>
-            <a:r>
-              <a:rPr lang="zh-CN" altLang="en-US" sz="1200" dirty="0"/>
-              <a:t>等工作显示了</a:t>
-            </a:r>
-            <a:r>
-              <a:rPr lang="en-US" altLang="zh-CN" sz="1200" dirty="0"/>
-              <a:t>HFTL</a:t>
-            </a:r>
-            <a:r>
-              <a:rPr lang="zh-CN" altLang="en-US" sz="1200" dirty="0"/>
-              <a:t>的可行性和应用性，但目前只有</a:t>
-            </a:r>
-            <a:r>
-              <a:rPr lang="en-US" altLang="zh-CN" sz="1200" dirty="0"/>
-              <a:t>dm-zap</a:t>
-            </a:r>
-            <a:r>
-              <a:rPr lang="zh-CN" altLang="en-US" sz="1200" dirty="0"/>
-              <a:t>支持</a:t>
-            </a:r>
-            <a:r>
-              <a:rPr lang="en-US" altLang="zh-CN" sz="1200" dirty="0"/>
-              <a:t>ZNS SSD</a:t>
-            </a:r>
-            <a:r>
-              <a:rPr lang="zh-CN" altLang="en-US" sz="1200" dirty="0"/>
-              <a:t>。</a:t>
-            </a:r>
-            <a:endParaRPr lang="en-US" altLang="zh-CN" sz="1200" dirty="0"/>
-          </a:p>
-          <a:p>
             <a:pPr indent="0" algn="just">
               <a:spcAft>
                 <a:spcPts val="1200"/>
@@ -4470,6 +4349,12 @@
               <a:buFont typeface="Arial" panose="020B0604020202020204" pitchFamily="34" charset="0"/>
               <a:buNone/>
             </a:pPr>
+            <a:r>
+              <a:rPr lang="en-US" altLang="zh-CN" sz="1200" dirty="0">
+                <a:latin typeface="Constantia" panose="02030602050306030303" pitchFamily="18" charset="0"/>
+              </a:rPr>
+              <a:t>https://www.usenix.org/conference/fast24/presentation/joshi</a:t>
+            </a:r>
             <a:endParaRPr lang="zh-CN" altLang="en-US" sz="1200" dirty="0">
               <a:latin typeface="Constantia" panose="02030602050306030303" pitchFamily="18" charset="0"/>
             </a:endParaRPr>
@@ -4502,7 +4387,7 @@
     </p:spTree>
     <p:extLst>
       <p:ext uri="{BB962C8B-B14F-4D97-AF65-F5344CB8AC3E}">
-        <p14:creationId xmlns:p14="http://schemas.microsoft.com/office/powerpoint/2010/main" val="3312157083"/>
+        <p14:creationId xmlns:p14="http://schemas.microsoft.com/office/powerpoint/2010/main" val="3396682912"/>
       </p:ext>
     </p:extLst>
   </p:cSld>
@@ -4659,7 +4544,7 @@
           <a:p>
             <a:fld id="{A0040790-74FE-4212-A615-F89461BB8B94}" type="datetimeFigureOut">
               <a:rPr lang="zh-CN" altLang="en-US" smtClean="0"/>
-              <a:t>2024/4/9</a:t>
+              <a:t>2024/4/10</a:t>
             </a:fld>
             <a:endParaRPr lang="zh-CN" altLang="en-US"/>
           </a:p>
@@ -4857,7 +4742,7 @@
           <a:p>
             <a:fld id="{A0040790-74FE-4212-A615-F89461BB8B94}" type="datetimeFigureOut">
               <a:rPr lang="zh-CN" altLang="en-US" smtClean="0"/>
-              <a:t>2024/4/9</a:t>
+              <a:t>2024/4/10</a:t>
             </a:fld>
             <a:endParaRPr lang="zh-CN" altLang="en-US"/>
           </a:p>
@@ -5065,7 +4950,7 @@
           <a:p>
             <a:fld id="{A0040790-74FE-4212-A615-F89461BB8B94}" type="datetimeFigureOut">
               <a:rPr lang="zh-CN" altLang="en-US" smtClean="0"/>
-              <a:t>2024/4/9</a:t>
+              <a:t>2024/4/10</a:t>
             </a:fld>
             <a:endParaRPr lang="zh-CN" altLang="en-US"/>
           </a:p>
@@ -5213,7 +5098,7 @@
           <a:p>
             <a:fld id="{A0040790-74FE-4212-A615-F89461BB8B94}" type="datetimeFigureOut">
               <a:rPr lang="zh-CN" altLang="en-US" smtClean="0"/>
-              <a:t>2024/4/9</a:t>
+              <a:t>2024/4/10</a:t>
             </a:fld>
             <a:endParaRPr lang="zh-CN" altLang="en-US"/>
           </a:p>
@@ -5411,7 +5296,7 @@
           <a:p>
             <a:fld id="{A0040790-74FE-4212-A615-F89461BB8B94}" type="datetimeFigureOut">
               <a:rPr lang="zh-CN" altLang="en-US" smtClean="0"/>
-              <a:t>2024/4/9</a:t>
+              <a:t>2024/4/10</a:t>
             </a:fld>
             <a:endParaRPr lang="zh-CN" altLang="en-US"/>
           </a:p>
@@ -5686,7 +5571,7 @@
           <a:p>
             <a:fld id="{A0040790-74FE-4212-A615-F89461BB8B94}" type="datetimeFigureOut">
               <a:rPr lang="zh-CN" altLang="en-US" smtClean="0"/>
-              <a:t>2024/4/9</a:t>
+              <a:t>2024/4/10</a:t>
             </a:fld>
             <a:endParaRPr lang="zh-CN" altLang="en-US"/>
           </a:p>
@@ -5951,7 +5836,7 @@
           <a:p>
             <a:fld id="{A0040790-74FE-4212-A615-F89461BB8B94}" type="datetimeFigureOut">
               <a:rPr lang="zh-CN" altLang="en-US" smtClean="0"/>
-              <a:t>2024/4/9</a:t>
+              <a:t>2024/4/10</a:t>
             </a:fld>
             <a:endParaRPr lang="zh-CN" altLang="en-US"/>
           </a:p>
@@ -6363,7 +6248,7 @@
           <a:p>
             <a:fld id="{A0040790-74FE-4212-A615-F89461BB8B94}" type="datetimeFigureOut">
               <a:rPr lang="zh-CN" altLang="en-US" smtClean="0"/>
-              <a:t>2024/4/9</a:t>
+              <a:t>2024/4/10</a:t>
             </a:fld>
             <a:endParaRPr lang="zh-CN" altLang="en-US"/>
           </a:p>
@@ -6504,7 +6389,7 @@
           <a:p>
             <a:fld id="{A0040790-74FE-4212-A615-F89461BB8B94}" type="datetimeFigureOut">
               <a:rPr lang="zh-CN" altLang="en-US" smtClean="0"/>
-              <a:t>2024/4/9</a:t>
+              <a:t>2024/4/10</a:t>
             </a:fld>
             <a:endParaRPr lang="zh-CN" altLang="en-US"/>
           </a:p>
@@ -6617,7 +6502,7 @@
           <a:p>
             <a:fld id="{A0040790-74FE-4212-A615-F89461BB8B94}" type="datetimeFigureOut">
               <a:rPr lang="zh-CN" altLang="en-US" smtClean="0"/>
-              <a:t>2024/4/9</a:t>
+              <a:t>2024/4/10</a:t>
             </a:fld>
             <a:endParaRPr lang="zh-CN" altLang="en-US"/>
           </a:p>
@@ -6928,7 +6813,7 @@
           <a:p>
             <a:fld id="{A0040790-74FE-4212-A615-F89461BB8B94}" type="datetimeFigureOut">
               <a:rPr lang="zh-CN" altLang="en-US" smtClean="0"/>
-              <a:t>2024/4/9</a:t>
+              <a:t>2024/4/10</a:t>
             </a:fld>
             <a:endParaRPr lang="zh-CN" altLang="en-US"/>
           </a:p>
@@ -7216,7 +7101,7 @@
           <a:p>
             <a:fld id="{A0040790-74FE-4212-A615-F89461BB8B94}" type="datetimeFigureOut">
               <a:rPr lang="zh-CN" altLang="en-US" smtClean="0"/>
-              <a:t>2024/4/9</a:t>
+              <a:t>2024/4/10</a:t>
             </a:fld>
             <a:endParaRPr lang="zh-CN" altLang="en-US"/>
           </a:p>
@@ -7457,7 +7342,7 @@
           <a:p>
             <a:fld id="{A0040790-74FE-4212-A615-F89461BB8B94}" type="datetimeFigureOut">
               <a:rPr lang="zh-CN" altLang="en-US" smtClean="0"/>
-              <a:t>2024/4/9</a:t>
+              <a:t>2024/4/10</a:t>
             </a:fld>
             <a:endParaRPr lang="zh-CN" altLang="en-US"/>
           </a:p>
@@ -8552,7 +8437,7 @@
                 <a:tabLst/>
                 <a:defRPr/>
               </a:pPr>
-              <a:t>April 9, 2024</a:t>
+              <a:t>April 10, 2024</a:t>
             </a:fld>
             <a:endParaRPr kumimoji="0" lang="zh-CN" altLang="en-US" sz="1400" b="1" i="0" u="none" strike="noStrike" kern="1200" cap="none" spc="0" normalizeH="0" baseline="0" noProof="0" dirty="0">
               <a:ln>
@@ -9283,7 +9168,7 @@
                 <a:latin typeface="Constantia" panose="02030602050306030303" pitchFamily="18" charset="0"/>
                 <a:cs typeface="Times" panose="02020603050405020304" pitchFamily="18" charset="0"/>
               </a:rPr>
-              <a:t>April 9, 2024</a:t>
+              <a:t>April 10, 2024</a:t>
             </a:fld>
             <a:endParaRPr lang="zh-CN" altLang="en-US" sz="1400" b="1" dirty="0">
               <a:solidFill>
@@ -9559,8 +9444,8 @@
         </p:nvSpPr>
         <p:spPr>
           <a:xfrm>
-            <a:off x="3914876" y="5188337"/>
-            <a:ext cx="4420998" cy="1061829"/>
+            <a:off x="3354438" y="4889495"/>
+            <a:ext cx="5483124" cy="1338828"/>
           </a:xfrm>
           <a:prstGeom prst="rect">
             <a:avLst/>
@@ -9620,12 +9505,18 @@
               </a:rPr>
               <a:t>Meta Platforms Inc</a:t>
             </a:r>
-            <a:endParaRPr lang="en-US" altLang="zh-CN" dirty="0">
-              <a:solidFill>
-                <a:srgbClr val="34495E"/>
-              </a:solidFill>
-              <a:latin typeface="Ubuntu" panose="020B0504030602030204" pitchFamily="34" charset="0"/>
-            </a:endParaRPr>
+          </a:p>
+          <a:p>
+            <a:pPr algn="ctr"/>
+            <a:r>
+              <a:rPr lang="en-US" altLang="zh-CN" dirty="0">
+                <a:solidFill>
+                  <a:srgbClr val="34495E"/>
+                </a:solidFill>
+                <a:latin typeface="Ubuntu" panose="020B0504030602030204" pitchFamily="34" charset="0"/>
+              </a:rPr>
+              <a:t>https://www.usenix.org/system/files/fast24-joshi.pdf</a:t>
+            </a:r>
           </a:p>
         </p:txBody>
       </p:sp>
@@ -10015,7 +9906,7 @@
                 <a:latin typeface="Constantia" panose="02030602050306030303" pitchFamily="18" charset="0"/>
                 <a:cs typeface="Times" panose="02020603050405020304" pitchFamily="18" charset="0"/>
               </a:rPr>
-              <a:t>April 9, 2024</a:t>
+              <a:t>April 10, 2024</a:t>
             </a:fld>
             <a:endParaRPr lang="zh-CN" altLang="en-US" sz="1400" b="1" dirty="0">
               <a:solidFill>
@@ -10224,8 +10115,8 @@
         </p:nvSpPr>
         <p:spPr>
           <a:xfrm>
-            <a:off x="366332" y="1195178"/>
-            <a:ext cx="4420998" cy="462499"/>
+            <a:off x="385590" y="1052473"/>
+            <a:ext cx="4420998" cy="506934"/>
           </a:xfrm>
           <a:prstGeom prst="rect">
             <a:avLst/>
@@ -10253,13 +10144,22 @@
               <a:rPr lang="zh-CN" altLang="en-US" dirty="0">
                 <a:latin typeface="NimbusRomNo9L-Regu"/>
               </a:rPr>
-              <a:t>新的内核旁路</a:t>
-            </a:r>
-            <a:endParaRPr lang="en-US" altLang="zh-CN" dirty="0">
+              <a:t>新的内核</a:t>
+            </a:r>
+            <a:r>
+              <a:rPr lang="zh-CN" altLang="en-US" sz="2000" dirty="0">
+                <a:solidFill>
+                  <a:srgbClr val="374151"/>
+                </a:solidFill>
+                <a:latin typeface="_5b8b_4f53"/>
+              </a:rPr>
+              <a:t>旁路</a:t>
+            </a:r>
+            <a:endParaRPr lang="en-US" altLang="zh-CN" sz="2000" dirty="0">
               <a:solidFill>
-                <a:srgbClr val="34495E"/>
+                <a:srgbClr val="374151"/>
               </a:solidFill>
-              <a:latin typeface="Ubuntu" panose="020B0504030602030204" pitchFamily="34" charset="0"/>
+              <a:latin typeface="_5b8b_4f53"/>
             </a:endParaRPr>
           </a:p>
         </p:txBody>
@@ -10353,6 +10253,324 @@
               <a:ea typeface="腾讯体 W3" panose="020C04030202040F0204" pitchFamily="34" charset="-122"/>
               <a:cs typeface="Times" panose="02020603050405020304" pitchFamily="18" charset="0"/>
             </a:endParaRPr>
+          </a:p>
+        </p:txBody>
+      </p:sp>
+      <p:sp>
+        <p:nvSpPr>
+          <p:cNvPr id="15" name="文本框 14">
+            <a:extLst>
+              <a:ext uri="{FF2B5EF4-FFF2-40B4-BE49-F238E27FC236}">
+                <a16:creationId xmlns:a16="http://schemas.microsoft.com/office/drawing/2014/main" id="{2B1AC87F-F19D-48CB-96F0-BC98EB18CF4B}"/>
+              </a:ext>
+            </a:extLst>
+          </p:cNvPr>
+          <p:cNvSpPr txBox="1"/>
+          <p:nvPr/>
+        </p:nvSpPr>
+        <p:spPr>
+          <a:xfrm>
+            <a:off x="385590" y="1980837"/>
+            <a:ext cx="11209510" cy="3276923"/>
+          </a:xfrm>
+          <a:prstGeom prst="rect">
+            <a:avLst/>
+          </a:prstGeom>
+          <a:noFill/>
+        </p:spPr>
+        <p:txBody>
+          <a:bodyPr wrap="square">
+            <a:spAutoFit/>
+          </a:bodyPr>
+          <a:lstStyle/>
+          <a:p>
+            <a:pPr>
+              <a:lnSpc>
+                <a:spcPct val="150000"/>
+              </a:lnSpc>
+            </a:pPr>
+            <a:r>
+              <a:rPr lang="zh-CN" altLang="en-US" sz="2000" dirty="0">
+                <a:solidFill>
+                  <a:srgbClr val="374151"/>
+                </a:solidFill>
+                <a:latin typeface="_5b8b_4f53"/>
+              </a:rPr>
+              <a:t>在此之前只有两种选择：</a:t>
+            </a:r>
+            <a:endParaRPr lang="en-US" altLang="zh-CN" sz="2000" dirty="0">
+              <a:solidFill>
+                <a:srgbClr val="374151"/>
+              </a:solidFill>
+              <a:latin typeface="_5b8b_4f53"/>
+            </a:endParaRPr>
+          </a:p>
+          <a:p>
+            <a:pPr>
+              <a:lnSpc>
+                <a:spcPct val="150000"/>
+              </a:lnSpc>
+            </a:pPr>
+            <a:r>
+              <a:rPr lang="zh-CN" altLang="en-US" sz="2000" dirty="0">
+                <a:solidFill>
+                  <a:srgbClr val="374151"/>
+                </a:solidFill>
+                <a:latin typeface="_5b8b_4f53"/>
+              </a:rPr>
+              <a:t>（</a:t>
+            </a:r>
+            <a:r>
+              <a:rPr lang="en-US" altLang="zh-CN" sz="2000" dirty="0">
+                <a:solidFill>
+                  <a:srgbClr val="374151"/>
+                </a:solidFill>
+                <a:latin typeface="_5b8b_4f53"/>
+              </a:rPr>
+              <a:t>1</a:t>
+            </a:r>
+            <a:r>
+              <a:rPr lang="zh-CN" altLang="en-US" sz="2000" dirty="0">
+                <a:solidFill>
+                  <a:srgbClr val="374151"/>
+                </a:solidFill>
+                <a:latin typeface="_5b8b_4f53"/>
+              </a:rPr>
+              <a:t>）在块接口上使用同步</a:t>
+            </a:r>
+            <a:r>
+              <a:rPr lang="en-US" altLang="zh-CN" sz="2000" dirty="0" err="1">
+                <a:solidFill>
+                  <a:srgbClr val="374151"/>
+                </a:solidFill>
+                <a:latin typeface="_5b8b_4f53"/>
+              </a:rPr>
+              <a:t>NVMe</a:t>
+            </a:r>
+            <a:endParaRPr lang="en-US" altLang="zh-CN" sz="2000" dirty="0">
+              <a:solidFill>
+                <a:srgbClr val="374151"/>
+              </a:solidFill>
+              <a:latin typeface="_5b8b_4f53"/>
+            </a:endParaRPr>
+          </a:p>
+          <a:p>
+            <a:pPr>
+              <a:lnSpc>
+                <a:spcPct val="150000"/>
+              </a:lnSpc>
+            </a:pPr>
+            <a:r>
+              <a:rPr lang="zh-CN" altLang="en-US" sz="2000" dirty="0">
+                <a:solidFill>
+                  <a:srgbClr val="374151"/>
+                </a:solidFill>
+                <a:latin typeface="_5b8b_4f53"/>
+              </a:rPr>
+              <a:t>（</a:t>
+            </a:r>
+            <a:r>
+              <a:rPr lang="en-US" altLang="zh-CN" sz="2000" dirty="0">
+                <a:solidFill>
+                  <a:srgbClr val="374151"/>
+                </a:solidFill>
+                <a:latin typeface="_5b8b_4f53"/>
+              </a:rPr>
+              <a:t>2</a:t>
+            </a:r>
+            <a:r>
+              <a:rPr lang="zh-CN" altLang="en-US" sz="2000" dirty="0">
+                <a:solidFill>
+                  <a:srgbClr val="374151"/>
+                </a:solidFill>
+                <a:latin typeface="_5b8b_4f53"/>
+              </a:rPr>
+              <a:t>）切换到内核旁路解决方案</a:t>
+            </a:r>
+            <a:endParaRPr lang="en-US" altLang="zh-CN" sz="2000" dirty="0">
+              <a:solidFill>
+                <a:srgbClr val="374151"/>
+              </a:solidFill>
+              <a:latin typeface="_5b8b_4f53"/>
+            </a:endParaRPr>
+          </a:p>
+          <a:p>
+            <a:pPr>
+              <a:lnSpc>
+                <a:spcPct val="150000"/>
+              </a:lnSpc>
+            </a:pPr>
+            <a:r>
+              <a:rPr lang="zh-CN" altLang="en-US" sz="2000" dirty="0">
+                <a:solidFill>
+                  <a:srgbClr val="374151"/>
+                </a:solidFill>
+                <a:latin typeface="_5b8b_4f53"/>
+              </a:rPr>
+              <a:t>本文在内核中添加新的直通路径来创建一个新的替代方案。此路径将</a:t>
+            </a:r>
+            <a:r>
+              <a:rPr lang="en-US" altLang="zh-CN" sz="2000" dirty="0" err="1">
+                <a:solidFill>
+                  <a:srgbClr val="374151"/>
+                </a:solidFill>
+                <a:latin typeface="_5b8b_4f53"/>
+              </a:rPr>
+              <a:t>NVMe</a:t>
+            </a:r>
+            <a:r>
+              <a:rPr lang="zh-CN" altLang="en-US" sz="2000" dirty="0">
+                <a:solidFill>
+                  <a:srgbClr val="374151"/>
+                </a:solidFill>
+                <a:latin typeface="_5b8b_4f53"/>
+              </a:rPr>
+              <a:t>字符接口与</a:t>
+            </a:r>
+            <a:r>
+              <a:rPr lang="en-US" altLang="zh-CN" sz="2000" dirty="0" err="1">
+                <a:solidFill>
+                  <a:srgbClr val="374151"/>
+                </a:solidFill>
+                <a:latin typeface="_5b8b_4f53"/>
+              </a:rPr>
+              <a:t>io_uring</a:t>
+            </a:r>
+            <a:r>
+              <a:rPr lang="zh-CN" altLang="en-US" sz="2000" dirty="0">
+                <a:solidFill>
+                  <a:srgbClr val="374151"/>
+                </a:solidFill>
+                <a:latin typeface="_5b8b_4f53"/>
+              </a:rPr>
+              <a:t>相结合。并将此路径集成到各种用户空间库</a:t>
+            </a:r>
+            <a:r>
+              <a:rPr lang="en-US" altLang="zh-CN" sz="2000" dirty="0">
+                <a:solidFill>
+                  <a:srgbClr val="374151"/>
+                </a:solidFill>
+                <a:latin typeface="_5b8b_4f53"/>
+              </a:rPr>
+              <a:t>/</a:t>
+            </a:r>
+            <a:r>
+              <a:rPr lang="zh-CN" altLang="en-US" sz="2000" dirty="0">
+                <a:solidFill>
+                  <a:srgbClr val="374151"/>
+                </a:solidFill>
+                <a:latin typeface="_5b8b_4f53"/>
+              </a:rPr>
+              <a:t>工具，说明如何简化</a:t>
+            </a:r>
+            <a:r>
+              <a:rPr lang="en-US" altLang="zh-CN" sz="2000" dirty="0">
+                <a:solidFill>
+                  <a:srgbClr val="374151"/>
+                </a:solidFill>
+                <a:latin typeface="_5b8b_4f53"/>
+              </a:rPr>
+              <a:t>FDP SSD</a:t>
+            </a:r>
+            <a:r>
+              <a:rPr lang="zh-CN" altLang="en-US" sz="2000" dirty="0">
+                <a:solidFill>
+                  <a:srgbClr val="374151"/>
+                </a:solidFill>
+                <a:latin typeface="_5b8b_4f53"/>
+              </a:rPr>
+              <a:t>、端到端数据保护和计算存储的启用。还在</a:t>
+            </a:r>
+            <a:r>
+              <a:rPr lang="en-US" altLang="zh-CN" sz="2000" dirty="0" err="1">
+                <a:solidFill>
+                  <a:srgbClr val="374151"/>
+                </a:solidFill>
+                <a:latin typeface="_5b8b_4f53"/>
+              </a:rPr>
+              <a:t>io_uring</a:t>
+            </a:r>
+            <a:r>
+              <a:rPr lang="zh-CN" altLang="en-US" sz="2000" dirty="0">
+                <a:solidFill>
+                  <a:srgbClr val="374151"/>
+                </a:solidFill>
+                <a:latin typeface="_5b8b_4f53"/>
+              </a:rPr>
+              <a:t>中引入了</a:t>
+            </a:r>
+            <a:r>
+              <a:rPr lang="en-US" altLang="zh-CN" sz="2000" dirty="0" err="1">
+                <a:solidFill>
+                  <a:srgbClr val="374151"/>
+                </a:solidFill>
+                <a:latin typeface="_5b8b_4f53"/>
+              </a:rPr>
+              <a:t>ioctl</a:t>
+            </a:r>
+            <a:r>
+              <a:rPr lang="zh-CN" altLang="en-US" sz="2000" dirty="0">
+                <a:solidFill>
+                  <a:srgbClr val="374151"/>
+                </a:solidFill>
+                <a:latin typeface="_5b8b_4f53"/>
+              </a:rPr>
+              <a:t>的替代方案。</a:t>
+            </a:r>
+            <a:r>
+              <a:rPr lang="en-US" altLang="zh-CN" sz="2000" dirty="0" err="1">
+                <a:solidFill>
+                  <a:srgbClr val="374151"/>
+                </a:solidFill>
+                <a:latin typeface="_5b8b_4f53"/>
+              </a:rPr>
+              <a:t>io_uring_command</a:t>
+            </a:r>
+            <a:r>
+              <a:rPr lang="zh-CN" altLang="en-US" sz="2000" dirty="0">
+                <a:solidFill>
+                  <a:srgbClr val="374151"/>
+                </a:solidFill>
+                <a:latin typeface="_5b8b_4f53"/>
+              </a:rPr>
+              <a:t>基础设施确保</a:t>
+            </a:r>
+            <a:r>
+              <a:rPr lang="en-US" altLang="zh-CN" sz="2000" dirty="0" err="1">
+                <a:solidFill>
+                  <a:srgbClr val="374151"/>
+                </a:solidFill>
+                <a:latin typeface="_5b8b_4f53"/>
+              </a:rPr>
+              <a:t>io_uring</a:t>
+            </a:r>
+            <a:r>
+              <a:rPr lang="zh-CN" altLang="en-US" sz="2000" dirty="0">
+                <a:solidFill>
+                  <a:srgbClr val="374151"/>
+                </a:solidFill>
+                <a:latin typeface="_5b8b_4f53"/>
+              </a:rPr>
+              <a:t>功能不仅限于现有机制（即经典的读</a:t>
+            </a:r>
+            <a:r>
+              <a:rPr lang="en-US" altLang="zh-CN" sz="2000" dirty="0">
+                <a:solidFill>
+                  <a:srgbClr val="374151"/>
+                </a:solidFill>
+                <a:latin typeface="_5b8b_4f53"/>
+              </a:rPr>
+              <a:t>/</a:t>
+            </a:r>
+            <a:r>
+              <a:rPr lang="zh-CN" altLang="en-US" sz="2000" dirty="0">
+                <a:solidFill>
+                  <a:srgbClr val="374151"/>
+                </a:solidFill>
+                <a:latin typeface="_5b8b_4f53"/>
+              </a:rPr>
+              <a:t>写或其他已建立的系统调用），而且还可以应用于新的原语。</a:t>
+            </a:r>
           </a:p>
         </p:txBody>
       </p:sp>
@@ -10661,7 +10879,7 @@
                 <a:latin typeface="Constantia" panose="02030602050306030303" pitchFamily="18" charset="0"/>
                 <a:cs typeface="Times" panose="02020603050405020304" pitchFamily="18" charset="0"/>
               </a:rPr>
-              <a:t>April 9, 2024</a:t>
+              <a:t>April 10, 2024</a:t>
             </a:fld>
             <a:endParaRPr lang="zh-CN" altLang="en-US" sz="1400" b="1" dirty="0">
               <a:solidFill>
@@ -10858,77 +11076,7 @@
       </p:sp>
       <p:sp>
         <p:nvSpPr>
-          <p:cNvPr id="2" name="文本框 1">
-            <a:extLst>
-              <a:ext uri="{FF2B5EF4-FFF2-40B4-BE49-F238E27FC236}">
-                <a16:creationId xmlns:a16="http://schemas.microsoft.com/office/drawing/2014/main" id="{8DE1F298-A953-8FC5-1524-0A465CE82634}"/>
-              </a:ext>
-            </a:extLst>
-          </p:cNvPr>
-          <p:cNvSpPr txBox="1"/>
-          <p:nvPr/>
-        </p:nvSpPr>
-        <p:spPr>
-          <a:xfrm>
-            <a:off x="385590" y="1044176"/>
-            <a:ext cx="4420998" cy="369332"/>
-          </a:xfrm>
-          <a:prstGeom prst="rect">
-            <a:avLst/>
-          </a:prstGeom>
-          <a:noFill/>
-        </p:spPr>
-        <p:txBody>
-          <a:bodyPr wrap="square">
-            <a:spAutoFit/>
-          </a:bodyPr>
-          <a:lstStyle/>
-          <a:p>
-            <a:r>
-              <a:rPr lang="en-US" altLang="zh-CN" dirty="0">
-                <a:solidFill>
-                  <a:srgbClr val="34495E"/>
-                </a:solidFill>
-                <a:latin typeface="Ubuntu" panose="020B0504030602030204" pitchFamily="34" charset="0"/>
-              </a:rPr>
-              <a:t>Linux I/O</a:t>
-            </a:r>
-            <a:r>
-              <a:rPr lang="zh-CN" altLang="en-US" dirty="0">
-                <a:solidFill>
-                  <a:srgbClr val="34495E"/>
-                </a:solidFill>
-                <a:latin typeface="Ubuntu" panose="020B0504030602030204" pitchFamily="34" charset="0"/>
-              </a:rPr>
-              <a:t>栈冗杂</a:t>
-            </a:r>
-            <a:r>
-              <a:rPr lang="en-US" altLang="zh-CN" dirty="0">
-                <a:solidFill>
-                  <a:srgbClr val="34495E"/>
-                </a:solidFill>
-                <a:latin typeface="Ubuntu" panose="020B0504030602030204" pitchFamily="34" charset="0"/>
-              </a:rPr>
-              <a:t>:</a:t>
-            </a:r>
-            <a:endParaRPr lang="en-US" altLang="zh-CN" dirty="0">
-              <a:solidFill>
-                <a:srgbClr val="34495E"/>
-              </a:solidFill>
-              <a:latin typeface="NimbusRomNo9L-Regu"/>
-            </a:endParaRPr>
-          </a:p>
-        </p:txBody>
-      </p:sp>
-      <p:sp>
-        <p:nvSpPr>
-          <p:cNvPr id="3" name="文本框 2">
-            <a:extLst>
-              <a:ext uri="{FF2B5EF4-FFF2-40B4-BE49-F238E27FC236}">
-                <a16:creationId xmlns:a16="http://schemas.microsoft.com/office/drawing/2014/main" id="{DEB44779-53D4-7056-169D-EB471F9F0E95}"/>
-              </a:ext>
-            </a:extLst>
-          </p:cNvPr>
+          <p:cNvPr id="25" name="文本框 24"/>
           <p:cNvSpPr txBox="1"/>
           <p:nvPr/>
         </p:nvSpPr>
@@ -10958,7 +11106,7 @@
               <a:defRPr/>
             </a:pPr>
             <a:r>
-              <a:rPr lang="en-US" altLang="zh-CN" sz="3200" b="1" dirty="0">
+              <a:rPr lang="zh-CN" altLang="en-US" sz="3200" b="1" dirty="0">
                 <a:solidFill>
                   <a:srgbClr val="4747BA"/>
                 </a:solidFill>
@@ -10966,17 +11114,49 @@
                 <a:ea typeface="腾讯体 W3" panose="020C04030202040F0204" pitchFamily="34" charset="-122"/>
                 <a:cs typeface="Times" panose="02020603050405020304" pitchFamily="18" charset="0"/>
               </a:rPr>
-              <a:t>LINUX I/O</a:t>
-            </a:r>
-          </a:p>
-        </p:txBody>
-      </p:sp>
-      <p:sp>
-        <p:nvSpPr>
-          <p:cNvPr id="4" name="文本框 3">
+              <a:t>未来发展</a:t>
+            </a:r>
+            <a:endParaRPr lang="en-US" altLang="zh-CN" sz="3200" b="1" dirty="0">
+              <a:solidFill>
+                <a:srgbClr val="4747BA"/>
+              </a:solidFill>
+              <a:latin typeface="Constantia" panose="02030602050306030303" pitchFamily="18" charset="0"/>
+              <a:ea typeface="腾讯体 W3" panose="020C04030202040F0204" pitchFamily="34" charset="-122"/>
+              <a:cs typeface="Times" panose="02020603050405020304" pitchFamily="18" charset="0"/>
+            </a:endParaRPr>
+          </a:p>
+        </p:txBody>
+      </p:sp>
+      <p:pic>
+        <p:nvPicPr>
+          <p:cNvPr id="6" name="图片 5"/>
+          <p:cNvPicPr>
+            <a:picLocks noChangeAspect="1"/>
+          </p:cNvPicPr>
+          <p:nvPr/>
+        </p:nvPicPr>
+        <p:blipFill>
+          <a:blip r:embed="rId5"/>
+          <a:stretch>
+            <a:fillRect/>
+          </a:stretch>
+        </p:blipFill>
+        <p:spPr>
+          <a:xfrm>
+            <a:off x="3444240" y="7169150"/>
+            <a:ext cx="5172075" cy="1619250"/>
+          </a:xfrm>
+          <a:prstGeom prst="rect">
+            <a:avLst/>
+          </a:prstGeom>
+        </p:spPr>
+      </p:pic>
+      <p:sp>
+        <p:nvSpPr>
+          <p:cNvPr id="15" name="文本框 14">
             <a:extLst>
               <a:ext uri="{FF2B5EF4-FFF2-40B4-BE49-F238E27FC236}">
-                <a16:creationId xmlns:a16="http://schemas.microsoft.com/office/drawing/2014/main" id="{AE7560BC-2982-36AC-43D7-F64EB51EACD3}"/>
+                <a16:creationId xmlns:a16="http://schemas.microsoft.com/office/drawing/2014/main" id="{A42DD39C-9468-4C42-1F98-C6F771CE0FF2}"/>
               </a:ext>
             </a:extLst>
           </p:cNvPr>
@@ -10985,8 +11165,8 @@
         </p:nvSpPr>
         <p:spPr>
           <a:xfrm>
-            <a:off x="537990" y="4266950"/>
-            <a:ext cx="4420998" cy="923330"/>
+            <a:off x="396239" y="1357786"/>
+            <a:ext cx="10618505" cy="4989186"/>
           </a:xfrm>
           <a:prstGeom prst="rect">
             <a:avLst/>
@@ -10999,146 +11179,452 @@
           </a:bodyPr>
           <a:lstStyle/>
           <a:p>
-            <a:r>
-              <a:rPr lang="zh-CN" altLang="en-US" dirty="0">
-                <a:solidFill>
-                  <a:srgbClr val="34495E"/>
-                </a:solidFill>
-                <a:latin typeface="NimbusRomNo9L-Regu"/>
-              </a:rPr>
-              <a:t>用户空间的工具：</a:t>
-            </a:r>
+            <a:pPr indent="-285750" fontAlgn="base">
+              <a:lnSpc>
+                <a:spcPct val="150000"/>
+              </a:lnSpc>
+              <a:spcBef>
+                <a:spcPct val="0"/>
+              </a:spcBef>
+              <a:spcAft>
+                <a:spcPct val="0"/>
+              </a:spcAft>
+              <a:buFont typeface="Arial" panose="020B0604020202020204" pitchFamily="34" charset="0"/>
+              <a:buChar char="•"/>
+            </a:pPr>
+            <a:r>
+              <a:rPr lang="zh-CN" altLang="en-US" sz="2000" dirty="0">
+                <a:solidFill>
+                  <a:srgbClr val="374151"/>
+                </a:solidFill>
+                <a:latin typeface="_5b8b_4f53"/>
+              </a:rPr>
+              <a:t>在应用级别，在</a:t>
+            </a:r>
+            <a:r>
+              <a:rPr lang="en-US" altLang="zh-CN" sz="2000" dirty="0">
+                <a:solidFill>
+                  <a:srgbClr val="374151"/>
+                </a:solidFill>
+                <a:latin typeface="_5b8b_4f53"/>
+              </a:rPr>
+              <a:t>KV</a:t>
+            </a:r>
+            <a:r>
+              <a:rPr lang="zh-CN" altLang="en-US" sz="2000" dirty="0">
+                <a:solidFill>
+                  <a:srgbClr val="374151"/>
+                </a:solidFill>
+                <a:latin typeface="_5b8b_4f53"/>
+              </a:rPr>
+              <a:t>存储领域（</a:t>
+            </a:r>
+            <a:r>
+              <a:rPr lang="en-US" altLang="zh-CN" sz="2000" dirty="0">
+                <a:solidFill>
+                  <a:srgbClr val="374151"/>
+                </a:solidFill>
+                <a:latin typeface="_5b8b_4f53"/>
+              </a:rPr>
+              <a:t>append</a:t>
+            </a:r>
+            <a:r>
+              <a:rPr lang="zh-CN" altLang="en-US" sz="2000" dirty="0">
+                <a:solidFill>
+                  <a:srgbClr val="374151"/>
+                </a:solidFill>
+                <a:latin typeface="_5b8b_4f53"/>
+              </a:rPr>
+              <a:t>模式的数据存储引擎），在上述路线上的进一步优化，终极目标：</a:t>
+            </a:r>
+            <a:r>
+              <a:rPr lang="en-US" altLang="zh-CN" sz="2000" dirty="0">
+                <a:solidFill>
+                  <a:srgbClr val="374151"/>
+                </a:solidFill>
+                <a:latin typeface="_5b8b_4f53"/>
+              </a:rPr>
+              <a:t>LSM GC = SSD GC</a:t>
+            </a:r>
+          </a:p>
+          <a:p>
+            <a:pPr marL="285750" indent="-285750" eaLnBrk="0" fontAlgn="base" hangingPunct="0">
+              <a:lnSpc>
+                <a:spcPct val="150000"/>
+              </a:lnSpc>
+              <a:spcBef>
+                <a:spcPct val="0"/>
+              </a:spcBef>
+              <a:spcAft>
+                <a:spcPct val="0"/>
+              </a:spcAft>
+              <a:buFont typeface="Arial" panose="020B0604020202020204" pitchFamily="34" charset="0"/>
+              <a:buChar char="•"/>
+            </a:pPr>
             <a:endParaRPr lang="en-US" altLang="zh-CN" dirty="0">
               <a:solidFill>
                 <a:srgbClr val="34495E"/>
               </a:solidFill>
-              <a:latin typeface="NimbusRomNo9L-Regu"/>
+              <a:latin typeface="Ubuntu" panose="020B0504030602030204" pitchFamily="34" charset="0"/>
             </a:endParaRPr>
           </a:p>
           <a:p>
+            <a:pPr indent="-285750" fontAlgn="base">
+              <a:lnSpc>
+                <a:spcPct val="150000"/>
+              </a:lnSpc>
+              <a:spcBef>
+                <a:spcPct val="0"/>
+              </a:spcBef>
+              <a:spcAft>
+                <a:spcPct val="0"/>
+              </a:spcAft>
+              <a:buFont typeface="Arial" panose="020B0604020202020204" pitchFamily="34" charset="0"/>
+              <a:buChar char="•"/>
+            </a:pPr>
+            <a:r>
+              <a:rPr lang="zh-CN" altLang="en-US" sz="2000" dirty="0">
+                <a:solidFill>
+                  <a:srgbClr val="374151"/>
+                </a:solidFill>
+                <a:latin typeface="_5b8b_4f53"/>
+              </a:rPr>
+              <a:t>在系统级，我们需要一个通用的裸盘</a:t>
+            </a:r>
+            <a:r>
+              <a:rPr lang="en-US" altLang="zh-CN" sz="2000" dirty="0">
+                <a:solidFill>
+                  <a:srgbClr val="374151"/>
+                </a:solidFill>
+                <a:latin typeface="_5b8b_4f53"/>
+              </a:rPr>
+              <a:t>IO</a:t>
+            </a:r>
+            <a:r>
+              <a:rPr lang="zh-CN" altLang="en-US" sz="2000" dirty="0">
+                <a:solidFill>
+                  <a:srgbClr val="374151"/>
+                </a:solidFill>
+                <a:latin typeface="_5b8b_4f53"/>
+              </a:rPr>
+              <a:t>层</a:t>
+            </a:r>
+            <a:r>
+              <a:rPr lang="en-US" altLang="zh-CN" sz="2000" dirty="0">
+                <a:solidFill>
+                  <a:srgbClr val="374151"/>
+                </a:solidFill>
+                <a:latin typeface="_5b8b_4f53"/>
+              </a:rPr>
+              <a:t>( for all non-block I/O )</a:t>
+            </a:r>
+            <a:r>
+              <a:rPr lang="zh-CN" altLang="en-US" sz="2000" dirty="0">
+                <a:solidFill>
+                  <a:srgbClr val="374151"/>
+                </a:solidFill>
+                <a:latin typeface="_5b8b_4f53"/>
+              </a:rPr>
+              <a:t>：</a:t>
+            </a:r>
+            <a:r>
+              <a:rPr lang="en-US" altLang="zh-CN" sz="2000" dirty="0">
+                <a:solidFill>
+                  <a:srgbClr val="374151"/>
+                </a:solidFill>
+                <a:latin typeface="_5b8b_4f53"/>
+              </a:rPr>
+              <a:t> </a:t>
+            </a:r>
+            <a:r>
+              <a:rPr lang="zh-CN" altLang="en-US" sz="2000" dirty="0">
+                <a:solidFill>
+                  <a:srgbClr val="374151"/>
+                </a:solidFill>
+                <a:latin typeface="_5b8b_4f53"/>
+              </a:rPr>
+              <a:t>为存储设备封装出一套统一的抽象接口，并且兼容现有的所有应用。这个接口对下可以支持：</a:t>
+            </a:r>
+            <a:r>
+              <a:rPr lang="en-US" altLang="zh-CN" sz="2000" dirty="0">
+                <a:solidFill>
+                  <a:srgbClr val="374151"/>
+                </a:solidFill>
+                <a:latin typeface="_5b8b_4f53"/>
+              </a:rPr>
+              <a:t>ZNS</a:t>
+            </a:r>
+            <a:r>
+              <a:rPr lang="zh-CN" altLang="en-US" sz="2000" dirty="0">
+                <a:solidFill>
+                  <a:srgbClr val="374151"/>
+                </a:solidFill>
+                <a:latin typeface="_5b8b_4f53"/>
+              </a:rPr>
+              <a:t>，</a:t>
+            </a:r>
+            <a:r>
+              <a:rPr lang="en-US" altLang="zh-CN" sz="2000" dirty="0">
+                <a:solidFill>
+                  <a:srgbClr val="374151"/>
+                </a:solidFill>
+                <a:latin typeface="_5b8b_4f53"/>
+              </a:rPr>
+              <a:t> Optane SSD </a:t>
+            </a:r>
+            <a:r>
+              <a:rPr lang="zh-CN" altLang="en-US" sz="2000" dirty="0">
+                <a:solidFill>
+                  <a:srgbClr val="374151"/>
+                </a:solidFill>
+                <a:latin typeface="_5b8b_4f53"/>
+              </a:rPr>
+              <a:t>，</a:t>
+            </a:r>
+            <a:r>
+              <a:rPr lang="en-US" altLang="zh-CN" sz="2000" dirty="0">
+                <a:solidFill>
+                  <a:srgbClr val="374151"/>
+                </a:solidFill>
+                <a:latin typeface="_5b8b_4f53"/>
+              </a:rPr>
+              <a:t>TLC/QLC SSD …  </a:t>
+            </a:r>
+          </a:p>
+          <a:p>
+            <a:pPr fontAlgn="base">
+              <a:lnSpc>
+                <a:spcPct val="150000"/>
+              </a:lnSpc>
+              <a:spcBef>
+                <a:spcPct val="0"/>
+              </a:spcBef>
+              <a:spcAft>
+                <a:spcPct val="0"/>
+              </a:spcAft>
+            </a:pPr>
+            <a:r>
+              <a:rPr lang="en-US" altLang="zh-CN" sz="2000" dirty="0">
+                <a:solidFill>
+                  <a:srgbClr val="374151"/>
+                </a:solidFill>
+                <a:latin typeface="_5b8b_4f53"/>
+              </a:rPr>
+              <a:t>     </a:t>
+            </a:r>
+            <a:r>
+              <a:rPr lang="zh-CN" altLang="en-US" sz="2000" dirty="0">
+                <a:solidFill>
+                  <a:srgbClr val="374151"/>
+                </a:solidFill>
+                <a:latin typeface="_5b8b_4f53"/>
+              </a:rPr>
+              <a:t>到目前为止，无论是</a:t>
+            </a:r>
+            <a:r>
+              <a:rPr lang="en-US" altLang="zh-CN" sz="2000" dirty="0">
+                <a:solidFill>
+                  <a:srgbClr val="374151"/>
+                </a:solidFill>
+                <a:latin typeface="_5b8b_4f53"/>
+              </a:rPr>
+              <a:t>OC-SSD</a:t>
+            </a:r>
+            <a:r>
+              <a:rPr lang="zh-CN" altLang="en-US" sz="2000" dirty="0">
+                <a:solidFill>
+                  <a:srgbClr val="374151"/>
+                </a:solidFill>
+                <a:latin typeface="_5b8b_4f53"/>
+              </a:rPr>
+              <a:t>、</a:t>
+            </a:r>
+            <a:r>
+              <a:rPr lang="en-US" altLang="zh-CN" sz="2000" dirty="0">
+                <a:solidFill>
+                  <a:srgbClr val="374151"/>
+                </a:solidFill>
+                <a:latin typeface="_5b8b_4f53"/>
+              </a:rPr>
+              <a:t>Stream-SSD</a:t>
+            </a:r>
+            <a:r>
+              <a:rPr lang="zh-CN" altLang="en-US" sz="2000" dirty="0">
+                <a:solidFill>
+                  <a:srgbClr val="374151"/>
+                </a:solidFill>
+                <a:latin typeface="_5b8b_4f53"/>
+              </a:rPr>
+              <a:t>、</a:t>
+            </a:r>
+            <a:r>
+              <a:rPr lang="en-US" altLang="zh-CN" sz="2000" dirty="0">
+                <a:solidFill>
+                  <a:srgbClr val="374151"/>
+                </a:solidFill>
+                <a:latin typeface="_5b8b_4f53"/>
+              </a:rPr>
+              <a:t>ZNS</a:t>
+            </a:r>
+            <a:r>
+              <a:rPr lang="zh-CN" altLang="en-US" sz="2000" dirty="0">
+                <a:solidFill>
+                  <a:srgbClr val="374151"/>
+                </a:solidFill>
+                <a:latin typeface="_5b8b_4f53"/>
+              </a:rPr>
+              <a:t>甚至包括近存计算等技术，工程师想要的是尽可能少更改现有应用（甚至不更改）， 就能达到更好的性能。</a:t>
+            </a:r>
+            <a:endParaRPr lang="en-US" altLang="zh-CN" sz="2000" dirty="0">
+              <a:solidFill>
+                <a:srgbClr val="374151"/>
+              </a:solidFill>
+              <a:latin typeface="_5b8b_4f53"/>
+            </a:endParaRPr>
+          </a:p>
+          <a:p>
+            <a:pPr marL="285750" indent="-285750" eaLnBrk="0" fontAlgn="base" hangingPunct="0">
+              <a:lnSpc>
+                <a:spcPct val="150000"/>
+              </a:lnSpc>
+              <a:spcBef>
+                <a:spcPct val="0"/>
+              </a:spcBef>
+              <a:spcAft>
+                <a:spcPct val="0"/>
+              </a:spcAft>
+              <a:buFont typeface="Arial" panose="020B0604020202020204" pitchFamily="34" charset="0"/>
+              <a:buChar char="•"/>
+            </a:pPr>
+            <a:endParaRPr lang="en-US" altLang="zh-CN" b="0" i="0" dirty="0">
+              <a:solidFill>
+                <a:srgbClr val="191B1F"/>
+              </a:solidFill>
+              <a:effectLst/>
+              <a:latin typeface="-apple-system"/>
+            </a:endParaRPr>
+          </a:p>
+          <a:p>
+            <a:pPr indent="-285750" fontAlgn="base">
+              <a:lnSpc>
+                <a:spcPct val="150000"/>
+              </a:lnSpc>
+              <a:spcBef>
+                <a:spcPct val="0"/>
+              </a:spcBef>
+              <a:spcAft>
+                <a:spcPct val="0"/>
+              </a:spcAft>
+              <a:buFont typeface="Arial" panose="020B0604020202020204" pitchFamily="34" charset="0"/>
+              <a:buChar char="•"/>
+            </a:pPr>
+            <a:r>
+              <a:rPr lang="zh-CN" altLang="en-US" sz="2000" dirty="0">
+                <a:solidFill>
+                  <a:srgbClr val="374151"/>
+                </a:solidFill>
+                <a:latin typeface="_5b8b_4f53"/>
+              </a:rPr>
+              <a:t>在硬件级，</a:t>
+            </a:r>
+            <a:r>
+              <a:rPr lang="en-US" altLang="zh-CN" sz="2000" dirty="0">
+                <a:solidFill>
+                  <a:srgbClr val="374151"/>
+                </a:solidFill>
+                <a:latin typeface="_5b8b_4f53"/>
+              </a:rPr>
+              <a:t>Zone</a:t>
+            </a:r>
+            <a:r>
+              <a:rPr lang="zh-CN" altLang="en-US" sz="2000" dirty="0">
+                <a:solidFill>
+                  <a:srgbClr val="374151"/>
+                </a:solidFill>
+                <a:latin typeface="_5b8b_4f53"/>
+              </a:rPr>
+              <a:t> </a:t>
+            </a:r>
+            <a:r>
+              <a:rPr lang="en-US" altLang="zh-CN" sz="2000" dirty="0">
+                <a:solidFill>
+                  <a:srgbClr val="374151"/>
+                </a:solidFill>
+                <a:latin typeface="_5b8b_4f53"/>
+              </a:rPr>
+              <a:t>size</a:t>
+            </a:r>
+            <a:r>
+              <a:rPr lang="zh-CN" altLang="en-US" sz="2000" dirty="0">
+                <a:solidFill>
+                  <a:srgbClr val="374151"/>
+                </a:solidFill>
+                <a:latin typeface="_5b8b_4f53"/>
+              </a:rPr>
+              <a:t>的进一步讨论：</a:t>
+            </a:r>
+            <a:r>
+              <a:rPr lang="en-US" altLang="zh-CN" sz="2000" dirty="0">
+                <a:solidFill>
+                  <a:srgbClr val="374151"/>
+                </a:solidFill>
+                <a:latin typeface="_5b8b_4f53"/>
+              </a:rPr>
+              <a:t>Small zone</a:t>
+            </a:r>
+            <a:r>
+              <a:rPr lang="zh-CN" altLang="en-US" sz="2000" dirty="0">
+                <a:solidFill>
+                  <a:srgbClr val="374151"/>
+                </a:solidFill>
+                <a:latin typeface="_5b8b_4f53"/>
+              </a:rPr>
+              <a:t>，例如</a:t>
+            </a:r>
+            <a:r>
+              <a:rPr lang="en-US" altLang="zh-CN" sz="2000" dirty="0">
+                <a:solidFill>
+                  <a:srgbClr val="374151"/>
+                </a:solidFill>
+                <a:latin typeface="_5b8b_4f53"/>
+              </a:rPr>
+              <a:t>96MB</a:t>
+            </a:r>
+            <a:r>
+              <a:rPr lang="zh-CN" altLang="en-US" sz="2000" dirty="0">
+                <a:solidFill>
+                  <a:srgbClr val="374151"/>
+                </a:solidFill>
+                <a:latin typeface="_5b8b_4f53"/>
+              </a:rPr>
+              <a:t>，与擦除单元保持一致。</a:t>
+            </a:r>
+            <a:endParaRPr lang="en-US" altLang="zh-CN" sz="2000" dirty="0">
+              <a:solidFill>
+                <a:srgbClr val="374151"/>
+              </a:solidFill>
+              <a:latin typeface="_5b8b_4f53"/>
+            </a:endParaRPr>
+          </a:p>
+          <a:p>
+            <a:pPr marL="285750" indent="-285750" eaLnBrk="0" fontAlgn="base" hangingPunct="0">
+              <a:lnSpc>
+                <a:spcPct val="150000"/>
+              </a:lnSpc>
+              <a:spcBef>
+                <a:spcPct val="0"/>
+              </a:spcBef>
+              <a:spcAft>
+                <a:spcPct val="0"/>
+              </a:spcAft>
+              <a:buFont typeface="Arial" panose="020B0604020202020204" pitchFamily="34" charset="0"/>
+              <a:buChar char="•"/>
+            </a:pPr>
             <a:endParaRPr lang="en-US" altLang="zh-CN" dirty="0">
               <a:solidFill>
                 <a:srgbClr val="34495E"/>
               </a:solidFill>
-              <a:latin typeface="NimbusRomNo9L-Regu"/>
-            </a:endParaRPr>
-          </a:p>
-          <a:p>
-            <a:r>
-              <a:rPr lang="en-US" altLang="zh-CN" b="0" i="0" dirty="0">
-                <a:solidFill>
-                  <a:srgbClr val="191B1F"/>
-                </a:solidFill>
-                <a:effectLst/>
-                <a:latin typeface="-apple-system"/>
-              </a:rPr>
-              <a:t>SPDK</a:t>
-            </a:r>
-            <a:r>
-              <a:rPr lang="zh-CN" altLang="en-US" b="0" i="0" dirty="0">
-                <a:solidFill>
-                  <a:srgbClr val="191B1F"/>
-                </a:solidFill>
-                <a:effectLst/>
-                <a:latin typeface="-apple-system"/>
-              </a:rPr>
-              <a:t>、</a:t>
-            </a:r>
-            <a:r>
-              <a:rPr lang="en-US" altLang="zh-CN" b="0" i="0" dirty="0" err="1">
-                <a:solidFill>
-                  <a:srgbClr val="191B1F"/>
-                </a:solidFill>
-                <a:effectLst/>
-                <a:latin typeface="-apple-system"/>
-              </a:rPr>
-              <a:t>xNVMe</a:t>
-            </a:r>
-            <a:r>
-              <a:rPr lang="zh-CN" altLang="en-US" b="0" i="0" dirty="0">
-                <a:solidFill>
-                  <a:srgbClr val="191B1F"/>
-                </a:solidFill>
-                <a:effectLst/>
-                <a:latin typeface="-apple-system"/>
-              </a:rPr>
-              <a:t>、</a:t>
-            </a:r>
-            <a:r>
-              <a:rPr lang="en-US" altLang="zh-CN" b="0" i="0" dirty="0" err="1">
-                <a:solidFill>
-                  <a:srgbClr val="191B1F"/>
-                </a:solidFill>
-                <a:effectLst/>
-                <a:latin typeface="-apple-system"/>
-              </a:rPr>
-              <a:t>liburing</a:t>
-            </a:r>
-            <a:r>
-              <a:rPr lang="zh-CN" altLang="en-US" b="0" i="0" dirty="0">
-                <a:solidFill>
-                  <a:srgbClr val="191B1F"/>
-                </a:solidFill>
-                <a:effectLst/>
-                <a:latin typeface="-apple-system"/>
-              </a:rPr>
-              <a:t>、</a:t>
-            </a:r>
-            <a:r>
-              <a:rPr lang="en-US" altLang="zh-CN" b="0" i="0" dirty="0" err="1">
-                <a:solidFill>
-                  <a:srgbClr val="191B1F"/>
-                </a:solidFill>
-                <a:effectLst/>
-                <a:latin typeface="-apple-system"/>
-              </a:rPr>
-              <a:t>fio</a:t>
-            </a:r>
-            <a:r>
-              <a:rPr lang="zh-CN" altLang="en-US" b="0" i="0" dirty="0">
-                <a:solidFill>
-                  <a:srgbClr val="191B1F"/>
-                </a:solidFill>
-                <a:effectLst/>
-                <a:latin typeface="-apple-system"/>
-              </a:rPr>
-              <a:t>和</a:t>
-            </a:r>
-            <a:r>
-              <a:rPr lang="en-US" altLang="zh-CN" b="0" i="0" dirty="0" err="1">
-                <a:solidFill>
-                  <a:srgbClr val="191B1F"/>
-                </a:solidFill>
-                <a:effectLst/>
-                <a:latin typeface="-apple-system"/>
-              </a:rPr>
-              <a:t>nvme</a:t>
-            </a:r>
-            <a:r>
-              <a:rPr lang="en-US" altLang="zh-CN" b="0" i="0" dirty="0">
-                <a:solidFill>
-                  <a:srgbClr val="191B1F"/>
-                </a:solidFill>
-                <a:effectLst/>
-                <a:latin typeface="-apple-system"/>
-              </a:rPr>
-              <a:t>-cli</a:t>
-            </a:r>
-            <a:r>
-              <a:rPr lang="zh-CN" altLang="en-US" b="0" i="0" dirty="0">
-                <a:solidFill>
-                  <a:srgbClr val="191B1F"/>
-                </a:solidFill>
-                <a:effectLst/>
-                <a:latin typeface="-apple-system"/>
-              </a:rPr>
-              <a:t>。</a:t>
-            </a:r>
-            <a:endParaRPr lang="en-US" altLang="zh-CN" dirty="0">
-              <a:solidFill>
-                <a:srgbClr val="34495E"/>
-              </a:solidFill>
-              <a:latin typeface="NimbusRomNo9L-Regu"/>
+              <a:latin typeface="Ubuntu" panose="020B0504030602030204" pitchFamily="34" charset="0"/>
             </a:endParaRPr>
           </a:p>
         </p:txBody>
@@ -11146,7 +11632,7 @@
     </p:spTree>
     <p:extLst>
       <p:ext uri="{BB962C8B-B14F-4D97-AF65-F5344CB8AC3E}">
-        <p14:creationId xmlns:p14="http://schemas.microsoft.com/office/powerpoint/2010/main" val="1384790914"/>
+        <p14:creationId xmlns:p14="http://schemas.microsoft.com/office/powerpoint/2010/main" val="813606937"/>
       </p:ext>
     </p:extLst>
   </p:cSld>
@@ -11448,7 +11934,7 @@
                 <a:latin typeface="Constantia" panose="02030602050306030303" pitchFamily="18" charset="0"/>
                 <a:cs typeface="Times" panose="02020603050405020304" pitchFamily="18" charset="0"/>
               </a:rPr>
-              <a:t>April 9, 2024</a:t>
+              <a:t>April 10, 2024</a:t>
             </a:fld>
             <a:endParaRPr lang="zh-CN" altLang="en-US" sz="1400" b="1" dirty="0">
               <a:solidFill>
@@ -12485,7 +12971,7 @@
                 <a:latin typeface="Constantia" panose="02030602050306030303" pitchFamily="18" charset="0"/>
                 <a:cs typeface="Times" panose="02020603050405020304" pitchFamily="18" charset="0"/>
               </a:rPr>
-              <a:t>April 9, 2024</a:t>
+              <a:t>April 10, 2024</a:t>
             </a:fld>
             <a:endParaRPr lang="zh-CN" altLang="en-US" sz="1400" b="1" dirty="0">
               <a:solidFill>
@@ -13226,7 +13712,7 @@
                 <a:latin typeface="Constantia" panose="02030602050306030303" pitchFamily="18" charset="0"/>
                 <a:cs typeface="Times" panose="02020603050405020304" pitchFamily="18" charset="0"/>
               </a:rPr>
-              <a:t>April 9, 2024</a:t>
+              <a:t>April 10, 2024</a:t>
             </a:fld>
             <a:endParaRPr lang="zh-CN" altLang="en-US" sz="1400" b="1" dirty="0">
               <a:solidFill>
@@ -13499,8 +13985,8 @@
         </p:nvSpPr>
         <p:spPr>
           <a:xfrm>
-            <a:off x="440055" y="1666450"/>
-            <a:ext cx="9407814" cy="3016210"/>
+            <a:off x="385590" y="1353000"/>
+            <a:ext cx="5687354" cy="4200252"/>
           </a:xfrm>
           <a:prstGeom prst="rect">
             <a:avLst/>
@@ -13519,546 +14005,425 @@
               </a:lnSpc>
             </a:pPr>
             <a:r>
-              <a:rPr lang="en-US" altLang="zh-CN" sz="2000" dirty="0"/>
-              <a:t>Navy</a:t>
-            </a:r>
-            <a:r>
-              <a:rPr lang="zh-CN" altLang="en-US" sz="2000" dirty="0"/>
-              <a:t>：</a:t>
-            </a:r>
-            <a:endParaRPr lang="en-US" altLang="zh-CN" sz="2000" dirty="0"/>
-          </a:p>
-          <a:p>
-            <a:pPr algn="l"/>
-            <a:r>
-              <a:rPr lang="en-US" altLang="zh-CN" sz="2000" b="0" i="0" dirty="0">
-                <a:solidFill>
-                  <a:srgbClr val="060607"/>
-                </a:solidFill>
-                <a:effectLst/>
-                <a:latin typeface="-apple-system"/>
+              <a:rPr lang="en-US" altLang="zh-CN" sz="2000" dirty="0">
+                <a:solidFill>
+                  <a:srgbClr val="374151"/>
+                </a:solidFill>
+                <a:latin typeface="_5b8b_4f53"/>
               </a:rPr>
               <a:t>Navy </a:t>
             </a:r>
             <a:r>
-              <a:rPr lang="zh-CN" altLang="en-US" sz="2000" b="0" i="0" dirty="0">
-                <a:solidFill>
-                  <a:srgbClr val="060607"/>
-                </a:solidFill>
-                <a:effectLst/>
-                <a:latin typeface="-apple-system"/>
+              <a:rPr lang="zh-CN" altLang="en-US" sz="2000" dirty="0">
+                <a:solidFill>
+                  <a:srgbClr val="374151"/>
+                </a:solidFill>
+                <a:latin typeface="_5b8b_4f53"/>
               </a:rPr>
               <a:t>是 </a:t>
             </a:r>
             <a:r>
-              <a:rPr lang="en-US" altLang="zh-CN" sz="2000" b="0" i="0" dirty="0" err="1">
-                <a:solidFill>
-                  <a:srgbClr val="060607"/>
-                </a:solidFill>
-                <a:effectLst/>
-                <a:latin typeface="-apple-system"/>
+              <a:rPr lang="en-US" altLang="zh-CN" sz="2000" dirty="0" err="1">
+                <a:solidFill>
+                  <a:srgbClr val="374151"/>
+                </a:solidFill>
+                <a:latin typeface="_5b8b_4f53"/>
               </a:rPr>
               <a:t>CacheLib</a:t>
             </a:r>
             <a:r>
-              <a:rPr lang="en-US" altLang="zh-CN" sz="2000" b="0" i="0" dirty="0">
-                <a:solidFill>
-                  <a:srgbClr val="060607"/>
-                </a:solidFill>
-                <a:effectLst/>
-                <a:latin typeface="-apple-system"/>
+              <a:rPr lang="en-US" altLang="zh-CN" sz="2000" dirty="0">
+                <a:solidFill>
+                  <a:srgbClr val="374151"/>
+                </a:solidFill>
+                <a:latin typeface="_5b8b_4f53"/>
               </a:rPr>
               <a:t> </a:t>
             </a:r>
             <a:r>
-              <a:rPr lang="zh-CN" altLang="en-US" sz="2000" b="0" i="0" dirty="0">
-                <a:solidFill>
-                  <a:srgbClr val="060607"/>
-                </a:solidFill>
-                <a:effectLst/>
-                <a:latin typeface="-apple-system"/>
+              <a:rPr lang="zh-CN" altLang="en-US" sz="2000" dirty="0">
+                <a:solidFill>
+                  <a:srgbClr val="374151"/>
+                </a:solidFill>
+                <a:latin typeface="_5b8b_4f53"/>
               </a:rPr>
               <a:t>中的一个组件，它是一个为 </a:t>
             </a:r>
             <a:r>
-              <a:rPr lang="en-US" altLang="zh-CN" sz="2000" b="0" i="0" dirty="0">
-                <a:solidFill>
-                  <a:srgbClr val="060607"/>
-                </a:solidFill>
-                <a:effectLst/>
-                <a:latin typeface="-apple-system"/>
+              <a:rPr lang="en-US" altLang="zh-CN" sz="2000" dirty="0">
+                <a:solidFill>
+                  <a:srgbClr val="374151"/>
+                </a:solidFill>
+                <a:latin typeface="_5b8b_4f53"/>
               </a:rPr>
               <a:t>SSD </a:t>
             </a:r>
             <a:r>
-              <a:rPr lang="zh-CN" altLang="en-US" sz="2000" b="0" i="0" dirty="0">
-                <a:solidFill>
-                  <a:srgbClr val="060607"/>
-                </a:solidFill>
-                <a:effectLst/>
-                <a:latin typeface="-apple-system"/>
+              <a:rPr lang="zh-CN" altLang="en-US" sz="2000" dirty="0">
+                <a:solidFill>
+                  <a:srgbClr val="374151"/>
+                </a:solidFill>
+                <a:latin typeface="_5b8b_4f53"/>
               </a:rPr>
               <a:t>优化的缓存引擎，专门为 </a:t>
             </a:r>
             <a:r>
-              <a:rPr lang="en-US" altLang="zh-CN" sz="2000" b="0" i="0" dirty="0">
-                <a:solidFill>
-                  <a:srgbClr val="060607"/>
-                </a:solidFill>
-                <a:effectLst/>
-                <a:latin typeface="-apple-system"/>
+              <a:rPr lang="en-US" altLang="zh-CN" sz="2000" dirty="0">
+                <a:solidFill>
+                  <a:srgbClr val="374151"/>
+                </a:solidFill>
+                <a:latin typeface="_5b8b_4f53"/>
               </a:rPr>
               <a:t>Hybrid Cache </a:t>
             </a:r>
             <a:r>
-              <a:rPr lang="zh-CN" altLang="en-US" sz="2000" b="0" i="0" dirty="0">
-                <a:solidFill>
-                  <a:srgbClr val="060607"/>
-                </a:solidFill>
-                <a:effectLst/>
-                <a:latin typeface="-apple-system"/>
-              </a:rPr>
-              <a:t>设计</a:t>
-            </a:r>
-            <a:r>
-              <a:rPr lang="en-US" altLang="zh-CN" sz="2000" b="0" i="0" dirty="0">
-                <a:solidFill>
-                  <a:srgbClr val="060607"/>
-                </a:solidFill>
-                <a:effectLst/>
-                <a:latin typeface="-apple-system"/>
+              <a:rPr lang="zh-CN" altLang="en-US" sz="2000" dirty="0">
+                <a:solidFill>
+                  <a:srgbClr val="374151"/>
+                </a:solidFill>
+                <a:latin typeface="_5b8b_4f53"/>
+              </a:rPr>
+              <a:t>设计。</a:t>
+            </a:r>
+            <a:r>
+              <a:rPr lang="en-US" altLang="zh-CN" sz="2000" dirty="0">
+                <a:solidFill>
+                  <a:srgbClr val="374151"/>
+                </a:solidFill>
+                <a:latin typeface="_5b8b_4f53"/>
+              </a:rPr>
+              <a:t>Navy </a:t>
+            </a:r>
+            <a:r>
+              <a:rPr lang="zh-CN" altLang="en-US" sz="2000" dirty="0">
+                <a:solidFill>
+                  <a:srgbClr val="374151"/>
+                </a:solidFill>
+                <a:latin typeface="_5b8b_4f53"/>
+              </a:rPr>
+              <a:t>通过 </a:t>
+            </a:r>
+            <a:r>
+              <a:rPr lang="en-US" altLang="zh-CN" sz="2000" dirty="0" err="1">
+                <a:solidFill>
+                  <a:srgbClr val="374151"/>
+                </a:solidFill>
+                <a:latin typeface="_5b8b_4f53"/>
+              </a:rPr>
+              <a:t>nvmcache</a:t>
+            </a:r>
+            <a:r>
+              <a:rPr lang="en-US" altLang="zh-CN" sz="2000" dirty="0">
+                <a:solidFill>
+                  <a:srgbClr val="374151"/>
+                </a:solidFill>
+                <a:latin typeface="_5b8b_4f53"/>
+              </a:rPr>
+              <a:t> </a:t>
+            </a:r>
+            <a:r>
+              <a:rPr lang="zh-CN" altLang="en-US" sz="2000" dirty="0">
+                <a:solidFill>
+                  <a:srgbClr val="374151"/>
+                </a:solidFill>
+                <a:latin typeface="_5b8b_4f53"/>
+              </a:rPr>
+              <a:t>接口与 </a:t>
+            </a:r>
+            <a:r>
+              <a:rPr lang="en-US" altLang="zh-CN" sz="2000" dirty="0" err="1">
+                <a:solidFill>
+                  <a:srgbClr val="374151"/>
+                </a:solidFill>
+                <a:latin typeface="_5b8b_4f53"/>
+              </a:rPr>
+              <a:t>cachelib</a:t>
+            </a:r>
+            <a:r>
+              <a:rPr lang="en-US" altLang="zh-CN" sz="2000" dirty="0">
+                <a:solidFill>
+                  <a:srgbClr val="374151"/>
+                </a:solidFill>
+                <a:latin typeface="_5b8b_4f53"/>
+              </a:rPr>
+              <a:t> </a:t>
+            </a:r>
+            <a:r>
+              <a:rPr lang="zh-CN" altLang="en-US" sz="2000" dirty="0">
+                <a:solidFill>
+                  <a:srgbClr val="374151"/>
+                </a:solidFill>
+                <a:latin typeface="_5b8b_4f53"/>
+              </a:rPr>
+              <a:t>集成。它能够高效地管理 </a:t>
+            </a:r>
+            <a:r>
+              <a:rPr lang="en-US" altLang="zh-CN" sz="2000" dirty="0">
+                <a:solidFill>
+                  <a:srgbClr val="374151"/>
+                </a:solidFill>
+                <a:latin typeface="_5b8b_4f53"/>
+              </a:rPr>
+              <a:t>TB </a:t>
+            </a:r>
+            <a:r>
+              <a:rPr lang="zh-CN" altLang="en-US" sz="2000" dirty="0">
+                <a:solidFill>
+                  <a:srgbClr val="374151"/>
+                </a:solidFill>
+                <a:latin typeface="_5b8b_4f53"/>
+              </a:rPr>
+              <a:t>级别的数据，并且同时支持小型（约 </a:t>
+            </a:r>
+            <a:r>
+              <a:rPr lang="en-US" altLang="zh-CN" sz="2000" dirty="0">
+                <a:solidFill>
+                  <a:srgbClr val="374151"/>
+                </a:solidFill>
+                <a:latin typeface="_5b8b_4f53"/>
+              </a:rPr>
+              <a:t>100 </a:t>
+            </a:r>
+            <a:r>
+              <a:rPr lang="zh-CN" altLang="en-US" sz="2000" dirty="0">
+                <a:solidFill>
+                  <a:srgbClr val="374151"/>
+                </a:solidFill>
+                <a:latin typeface="_5b8b_4f53"/>
+              </a:rPr>
+              <a:t>字节）和大型（</a:t>
+            </a:r>
+            <a:r>
+              <a:rPr lang="en-US" altLang="zh-CN" sz="2000" dirty="0">
+                <a:solidFill>
+                  <a:srgbClr val="374151"/>
+                </a:solidFill>
+                <a:latin typeface="_5b8b_4f53"/>
+              </a:rPr>
+              <a:t>10KB </a:t>
+            </a:r>
+            <a:r>
+              <a:rPr lang="zh-CN" altLang="en-US" sz="2000" dirty="0">
+                <a:solidFill>
+                  <a:srgbClr val="374151"/>
+                </a:solidFill>
+                <a:latin typeface="_5b8b_4f53"/>
+              </a:rPr>
+              <a:t>到 </a:t>
+            </a:r>
+            <a:r>
+              <a:rPr lang="en-US" altLang="zh-CN" sz="2000" dirty="0">
+                <a:solidFill>
+                  <a:srgbClr val="374151"/>
+                </a:solidFill>
+                <a:latin typeface="_5b8b_4f53"/>
+              </a:rPr>
+              <a:t>1MB</a:t>
+            </a:r>
+            <a:r>
+              <a:rPr lang="zh-CN" altLang="en-US" sz="2000" dirty="0">
+                <a:solidFill>
+                  <a:srgbClr val="374151"/>
+                </a:solidFill>
+                <a:latin typeface="_5b8b_4f53"/>
+              </a:rPr>
+              <a:t>）对象的缓存</a:t>
+            </a:r>
+            <a:r>
+              <a:rPr lang="en-US" altLang="zh-CN" sz="2000" dirty="0">
+                <a:solidFill>
+                  <a:srgbClr val="374151"/>
+                </a:solidFill>
+                <a:latin typeface="_5b8b_4f53"/>
               </a:rPr>
               <a:t>1</a:t>
             </a:r>
             <a:r>
-              <a:rPr lang="zh-CN" altLang="en-US" sz="2000" b="0" i="0" dirty="0">
-                <a:solidFill>
-                  <a:srgbClr val="060607"/>
-                </a:solidFill>
-                <a:effectLst/>
-                <a:latin typeface="-apple-system"/>
+              <a:rPr lang="zh-CN" altLang="en-US" sz="2000" dirty="0">
+                <a:solidFill>
+                  <a:srgbClr val="374151"/>
+                </a:solidFill>
+                <a:latin typeface="_5b8b_4f53"/>
               </a:rPr>
               <a:t>。</a:t>
             </a:r>
             <a:r>
-              <a:rPr lang="en-US" altLang="zh-CN" sz="2000" b="0" i="0" dirty="0">
-                <a:solidFill>
-                  <a:srgbClr val="060607"/>
-                </a:solidFill>
-                <a:effectLst/>
-                <a:latin typeface="-apple-system"/>
+              <a:rPr lang="en-US" altLang="zh-CN" sz="2000" dirty="0">
+                <a:solidFill>
+                  <a:srgbClr val="374151"/>
+                </a:solidFill>
+                <a:latin typeface="_5b8b_4f53"/>
               </a:rPr>
               <a:t>Navy </a:t>
             </a:r>
             <a:r>
-              <a:rPr lang="zh-CN" altLang="en-US" sz="2000" b="0" i="0" dirty="0">
-                <a:solidFill>
-                  <a:srgbClr val="060607"/>
-                </a:solidFill>
-                <a:effectLst/>
-                <a:latin typeface="-apple-system"/>
-              </a:rPr>
-              <a:t>通过 </a:t>
-            </a:r>
-            <a:r>
-              <a:rPr lang="en-US" altLang="zh-CN" sz="2000" b="0" i="0" dirty="0" err="1">
-                <a:solidFill>
-                  <a:srgbClr val="060607"/>
-                </a:solidFill>
-                <a:effectLst/>
-                <a:latin typeface="-apple-system"/>
-              </a:rPr>
-              <a:t>nvmcache</a:t>
-            </a:r>
-            <a:r>
-              <a:rPr lang="en-US" altLang="zh-CN" sz="2000" b="0" i="0" dirty="0">
-                <a:solidFill>
-                  <a:srgbClr val="060607"/>
-                </a:solidFill>
-                <a:effectLst/>
-                <a:latin typeface="-apple-system"/>
+              <a:rPr lang="zh-CN" altLang="en-US" sz="2000" dirty="0">
+                <a:solidFill>
+                  <a:srgbClr val="374151"/>
+                </a:solidFill>
+                <a:latin typeface="_5b8b_4f53"/>
+              </a:rPr>
+              <a:t>提供了同步和异步 </a:t>
+            </a:r>
+            <a:r>
+              <a:rPr lang="en-US" altLang="zh-CN" sz="2000" dirty="0">
+                <a:solidFill>
+                  <a:srgbClr val="374151"/>
+                </a:solidFill>
+                <a:latin typeface="_5b8b_4f53"/>
+              </a:rPr>
+              <a:t>API</a:t>
+            </a:r>
+            <a:r>
+              <a:rPr lang="zh-CN" altLang="en-US" sz="2000" dirty="0">
+                <a:solidFill>
+                  <a:srgbClr val="374151"/>
+                </a:solidFill>
+                <a:latin typeface="_5b8b_4f53"/>
+              </a:rPr>
+              <a:t>（支持自定义执行器进行异步操作），并在安全关闭时提供缓存持久性。此外，</a:t>
+            </a:r>
+            <a:r>
+              <a:rPr lang="en-US" altLang="zh-CN" sz="2000" dirty="0">
+                <a:solidFill>
+                  <a:srgbClr val="374151"/>
+                </a:solidFill>
+                <a:latin typeface="_5b8b_4f53"/>
+              </a:rPr>
+              <a:t>Navy </a:t>
+            </a:r>
+            <a:r>
+              <a:rPr lang="zh-CN" altLang="en-US" sz="2000" dirty="0">
+                <a:solidFill>
+                  <a:srgbClr val="374151"/>
+                </a:solidFill>
+                <a:latin typeface="_5b8b_4f53"/>
+              </a:rPr>
+              <a:t>还支持直接 </a:t>
+            </a:r>
+            <a:r>
+              <a:rPr lang="en-US" altLang="zh-CN" sz="2000" dirty="0">
+                <a:solidFill>
+                  <a:srgbClr val="374151"/>
+                </a:solidFill>
+                <a:latin typeface="_5b8b_4f53"/>
+              </a:rPr>
+              <a:t>I/O </a:t>
+            </a:r>
+            <a:r>
+              <a:rPr lang="zh-CN" altLang="en-US" sz="2000" dirty="0">
+                <a:solidFill>
+                  <a:srgbClr val="374151"/>
+                </a:solidFill>
+                <a:latin typeface="_5b8b_4f53"/>
+              </a:rPr>
+              <a:t>和原始设备，以及使用 </a:t>
+            </a:r>
+            <a:r>
+              <a:rPr lang="en-US" altLang="zh-CN" sz="2000" dirty="0" err="1">
+                <a:solidFill>
+                  <a:srgbClr val="374151"/>
+                </a:solidFill>
+                <a:latin typeface="_5b8b_4f53"/>
+              </a:rPr>
+              <a:t>io_uring</a:t>
+            </a:r>
+            <a:r>
+              <a:rPr lang="en-US" altLang="zh-CN" sz="2000" dirty="0">
+                <a:solidFill>
+                  <a:srgbClr val="374151"/>
+                </a:solidFill>
+                <a:latin typeface="_5b8b_4f53"/>
               </a:rPr>
               <a:t> </a:t>
             </a:r>
             <a:r>
-              <a:rPr lang="zh-CN" altLang="en-US" sz="2000" b="0" i="0" dirty="0">
-                <a:solidFill>
-                  <a:srgbClr val="060607"/>
-                </a:solidFill>
-                <a:effectLst/>
-                <a:latin typeface="-apple-system"/>
-              </a:rPr>
-              <a:t>接口与 </a:t>
-            </a:r>
-            <a:r>
-              <a:rPr lang="en-US" altLang="zh-CN" sz="2000" b="0" i="0" dirty="0" err="1">
-                <a:solidFill>
-                  <a:srgbClr val="060607"/>
-                </a:solidFill>
-                <a:effectLst/>
-                <a:latin typeface="-apple-system"/>
-              </a:rPr>
-              <a:t>cachelib</a:t>
-            </a:r>
-            <a:r>
-              <a:rPr lang="en-US" altLang="zh-CN" sz="2000" b="0" i="0" dirty="0">
-                <a:solidFill>
-                  <a:srgbClr val="060607"/>
-                </a:solidFill>
-                <a:effectLst/>
-                <a:latin typeface="-apple-system"/>
+              <a:rPr lang="zh-CN" altLang="en-US" sz="2000" dirty="0">
+                <a:solidFill>
+                  <a:srgbClr val="374151"/>
+                </a:solidFill>
+                <a:latin typeface="_5b8b_4f53"/>
+              </a:rPr>
+              <a:t>或 </a:t>
+            </a:r>
+            <a:r>
+              <a:rPr lang="en-US" altLang="zh-CN" sz="2000" dirty="0" err="1">
+                <a:solidFill>
+                  <a:srgbClr val="374151"/>
+                </a:solidFill>
+                <a:latin typeface="_5b8b_4f53"/>
+              </a:rPr>
+              <a:t>libaio</a:t>
+            </a:r>
+            <a:r>
+              <a:rPr lang="en-US" altLang="zh-CN" sz="2000" dirty="0">
+                <a:solidFill>
+                  <a:srgbClr val="374151"/>
+                </a:solidFill>
+                <a:latin typeface="_5b8b_4f53"/>
               </a:rPr>
               <a:t> </a:t>
             </a:r>
             <a:r>
-              <a:rPr lang="zh-CN" altLang="en-US" sz="2000" b="0" i="0" dirty="0">
-                <a:solidFill>
-                  <a:srgbClr val="060607"/>
-                </a:solidFill>
-                <a:effectLst/>
-                <a:latin typeface="-apple-system"/>
-              </a:rPr>
-              <a:t>集成，并可以通过 </a:t>
-            </a:r>
-            <a:r>
-              <a:rPr lang="en-US" altLang="zh-CN" sz="2000" b="0" i="0" dirty="0" err="1">
-                <a:solidFill>
-                  <a:srgbClr val="060607"/>
-                </a:solidFill>
-                <a:effectLst/>
-                <a:latin typeface="-apple-system"/>
-              </a:rPr>
-              <a:t>NavyConfig</a:t>
-            </a:r>
-            <a:r>
-              <a:rPr lang="en-US" altLang="zh-CN" sz="2000" b="0" i="0" dirty="0">
-                <a:solidFill>
-                  <a:srgbClr val="060607"/>
-                </a:solidFill>
-                <a:effectLst/>
-                <a:latin typeface="-apple-system"/>
-              </a:rPr>
-              <a:t> </a:t>
-            </a:r>
-            <a:r>
-              <a:rPr lang="zh-CN" altLang="en-US" sz="2000" b="0" i="0" dirty="0">
-                <a:solidFill>
-                  <a:srgbClr val="060607"/>
-                </a:solidFill>
-                <a:effectLst/>
-                <a:latin typeface="-apple-system"/>
-              </a:rPr>
-              <a:t>启用</a:t>
-            </a:r>
-            <a:r>
-              <a:rPr lang="en-US" altLang="zh-CN" sz="2000" b="0" i="0" dirty="0">
-                <a:solidFill>
-                  <a:srgbClr val="060607"/>
-                </a:solidFill>
-                <a:effectLst/>
-                <a:latin typeface="-apple-system"/>
-              </a:rPr>
-              <a:t>1</a:t>
-            </a:r>
-            <a:r>
-              <a:rPr lang="zh-CN" altLang="en-US" sz="2000" b="0" i="0" dirty="0">
-                <a:solidFill>
-                  <a:srgbClr val="060607"/>
-                </a:solidFill>
-                <a:effectLst/>
-                <a:latin typeface="-apple-system"/>
-              </a:rPr>
-              <a:t>。它能够高效地管理 </a:t>
-            </a:r>
-            <a:r>
-              <a:rPr lang="en-US" altLang="zh-CN" sz="2000" b="0" i="0" dirty="0">
-                <a:solidFill>
-                  <a:srgbClr val="060607"/>
-                </a:solidFill>
-                <a:effectLst/>
-                <a:latin typeface="-apple-system"/>
-              </a:rPr>
-              <a:t>TB </a:t>
-            </a:r>
-            <a:r>
-              <a:rPr lang="zh-CN" altLang="en-US" sz="2000" b="0" i="0" dirty="0">
-                <a:solidFill>
-                  <a:srgbClr val="060607"/>
-                </a:solidFill>
-                <a:effectLst/>
-                <a:latin typeface="-apple-system"/>
-              </a:rPr>
-              <a:t>级别的数据，并且同时支持小型（约 </a:t>
-            </a:r>
-            <a:r>
-              <a:rPr lang="en-US" altLang="zh-CN" sz="2000" b="0" i="0" dirty="0">
-                <a:solidFill>
-                  <a:srgbClr val="060607"/>
-                </a:solidFill>
-                <a:effectLst/>
-                <a:latin typeface="-apple-system"/>
-              </a:rPr>
-              <a:t>100 </a:t>
-            </a:r>
-            <a:r>
-              <a:rPr lang="zh-CN" altLang="en-US" sz="2000" b="0" i="0" dirty="0">
-                <a:solidFill>
-                  <a:srgbClr val="060607"/>
-                </a:solidFill>
-                <a:effectLst/>
-                <a:latin typeface="-apple-system"/>
-              </a:rPr>
-              <a:t>字节）和大型（</a:t>
-            </a:r>
-            <a:r>
-              <a:rPr lang="en-US" altLang="zh-CN" sz="2000" b="0" i="0" dirty="0">
-                <a:solidFill>
-                  <a:srgbClr val="060607"/>
-                </a:solidFill>
-                <a:effectLst/>
-                <a:latin typeface="-apple-system"/>
-              </a:rPr>
-              <a:t>10KB </a:t>
-            </a:r>
-            <a:r>
-              <a:rPr lang="zh-CN" altLang="en-US" sz="2000" b="0" i="0" dirty="0">
-                <a:solidFill>
-                  <a:srgbClr val="060607"/>
-                </a:solidFill>
-                <a:effectLst/>
-                <a:latin typeface="-apple-system"/>
-              </a:rPr>
-              <a:t>到 </a:t>
-            </a:r>
-            <a:r>
-              <a:rPr lang="en-US" altLang="zh-CN" sz="2000" b="0" i="0" dirty="0">
-                <a:solidFill>
-                  <a:srgbClr val="060607"/>
-                </a:solidFill>
-                <a:effectLst/>
-                <a:latin typeface="-apple-system"/>
-              </a:rPr>
-              <a:t>1MB</a:t>
-            </a:r>
-            <a:r>
-              <a:rPr lang="zh-CN" altLang="en-US" sz="2000" b="0" i="0" dirty="0">
-                <a:solidFill>
-                  <a:srgbClr val="060607"/>
-                </a:solidFill>
-                <a:effectLst/>
-                <a:latin typeface="-apple-system"/>
-              </a:rPr>
-              <a:t>）对象的缓存</a:t>
-            </a:r>
-            <a:r>
-              <a:rPr lang="en-US" altLang="zh-CN" sz="2000" b="0" i="0" dirty="0">
-                <a:solidFill>
-                  <a:srgbClr val="060607"/>
-                </a:solidFill>
-                <a:effectLst/>
-                <a:latin typeface="-apple-system"/>
-              </a:rPr>
-              <a:t>1</a:t>
-            </a:r>
-            <a:r>
-              <a:rPr lang="zh-CN" altLang="en-US" sz="2000" b="0" i="0" dirty="0">
-                <a:solidFill>
-                  <a:srgbClr val="060607"/>
-                </a:solidFill>
-                <a:effectLst/>
-                <a:latin typeface="-apple-system"/>
+              <a:rPr lang="zh-CN" altLang="en-US" sz="2000" dirty="0">
+                <a:solidFill>
+                  <a:srgbClr val="374151"/>
+                </a:solidFill>
+                <a:latin typeface="_5b8b_4f53"/>
+              </a:rPr>
+              <a:t>进行异步 </a:t>
+            </a:r>
+            <a:r>
+              <a:rPr lang="en-US" altLang="zh-CN" sz="2000" dirty="0">
+                <a:solidFill>
+                  <a:srgbClr val="374151"/>
+                </a:solidFill>
+                <a:latin typeface="_5b8b_4f53"/>
+              </a:rPr>
+              <a:t>I/O</a:t>
+            </a:r>
+            <a:r>
+              <a:rPr lang="zh-CN" altLang="en-US" sz="2000" dirty="0">
+                <a:solidFill>
+                  <a:srgbClr val="374151"/>
+                </a:solidFill>
+                <a:latin typeface="_5b8b_4f53"/>
               </a:rPr>
               <a:t>。</a:t>
             </a:r>
-            <a:r>
-              <a:rPr lang="en-US" altLang="zh-CN" sz="2000" b="0" i="0" dirty="0">
-                <a:solidFill>
-                  <a:srgbClr val="060607"/>
-                </a:solidFill>
-                <a:effectLst/>
-                <a:latin typeface="-apple-system"/>
-              </a:rPr>
-              <a:t>Navy </a:t>
-            </a:r>
-            <a:r>
-              <a:rPr lang="zh-CN" altLang="en-US" sz="2000" b="0" i="0" dirty="0">
-                <a:solidFill>
-                  <a:srgbClr val="060607"/>
-                </a:solidFill>
-                <a:effectLst/>
-                <a:latin typeface="-apple-system"/>
-              </a:rPr>
-              <a:t>提供了同步和异步 </a:t>
-            </a:r>
-            <a:r>
-              <a:rPr lang="en-US" altLang="zh-CN" sz="2000" b="0" i="0" dirty="0">
-                <a:solidFill>
-                  <a:srgbClr val="060607"/>
-                </a:solidFill>
-                <a:effectLst/>
-                <a:latin typeface="-apple-system"/>
-              </a:rPr>
-              <a:t>API</a:t>
-            </a:r>
-            <a:r>
-              <a:rPr lang="zh-CN" altLang="en-US" sz="2000" b="0" i="0" dirty="0">
-                <a:solidFill>
-                  <a:srgbClr val="060607"/>
-                </a:solidFill>
-                <a:effectLst/>
-                <a:latin typeface="-apple-system"/>
-              </a:rPr>
-              <a:t>（支持自定义执行器进行异步操作），并在安全关闭时提供缓存持久性</a:t>
-            </a:r>
-            <a:r>
-              <a:rPr lang="en-US" altLang="zh-CN" sz="2000" b="0" i="0" dirty="0">
-                <a:solidFill>
-                  <a:srgbClr val="060607"/>
-                </a:solidFill>
-                <a:effectLst/>
-                <a:latin typeface="-apple-system"/>
-              </a:rPr>
-              <a:t>1</a:t>
-            </a:r>
-            <a:r>
-              <a:rPr lang="zh-CN" altLang="en-US" sz="2000" b="0" i="0" dirty="0">
-                <a:solidFill>
-                  <a:srgbClr val="060607"/>
-                </a:solidFill>
-                <a:effectLst/>
-                <a:latin typeface="-apple-system"/>
-              </a:rPr>
-              <a:t>。此外，</a:t>
-            </a:r>
-            <a:r>
-              <a:rPr lang="en-US" altLang="zh-CN" sz="2000" b="0" i="0" dirty="0">
-                <a:solidFill>
-                  <a:srgbClr val="060607"/>
-                </a:solidFill>
-                <a:effectLst/>
-                <a:latin typeface="-apple-system"/>
-              </a:rPr>
-              <a:t>Navy </a:t>
-            </a:r>
-            <a:r>
-              <a:rPr lang="zh-CN" altLang="en-US" sz="2000" b="0" i="0" dirty="0">
-                <a:solidFill>
-                  <a:srgbClr val="060607"/>
-                </a:solidFill>
-                <a:effectLst/>
-                <a:latin typeface="-apple-system"/>
-              </a:rPr>
-              <a:t>还支持直接 </a:t>
-            </a:r>
-            <a:r>
-              <a:rPr lang="en-US" altLang="zh-CN" sz="2000" b="0" i="0" dirty="0">
-                <a:solidFill>
-                  <a:srgbClr val="060607"/>
-                </a:solidFill>
-                <a:effectLst/>
-                <a:latin typeface="-apple-system"/>
-              </a:rPr>
-              <a:t>I/O </a:t>
-            </a:r>
-            <a:r>
-              <a:rPr lang="zh-CN" altLang="en-US" sz="2000" b="0" i="0" dirty="0">
-                <a:solidFill>
-                  <a:srgbClr val="060607"/>
-                </a:solidFill>
-                <a:effectLst/>
-                <a:latin typeface="-apple-system"/>
-              </a:rPr>
-              <a:t>和原始设备，以及使用 </a:t>
-            </a:r>
-            <a:r>
-              <a:rPr lang="en-US" altLang="zh-CN" sz="2000" b="0" i="0" dirty="0" err="1">
-                <a:solidFill>
-                  <a:srgbClr val="060607"/>
-                </a:solidFill>
-                <a:effectLst/>
-                <a:latin typeface="-apple-system"/>
-              </a:rPr>
-              <a:t>io_uring</a:t>
-            </a:r>
-            <a:r>
-              <a:rPr lang="en-US" altLang="zh-CN" sz="2000" b="0" i="0" dirty="0">
-                <a:solidFill>
-                  <a:srgbClr val="060607"/>
-                </a:solidFill>
-                <a:effectLst/>
-                <a:latin typeface="-apple-system"/>
-              </a:rPr>
-              <a:t> </a:t>
-            </a:r>
-            <a:r>
-              <a:rPr lang="zh-CN" altLang="en-US" sz="2000" b="0" i="0" dirty="0">
-                <a:solidFill>
-                  <a:srgbClr val="060607"/>
-                </a:solidFill>
-                <a:effectLst/>
-                <a:latin typeface="-apple-system"/>
-              </a:rPr>
-              <a:t>或 </a:t>
-            </a:r>
-            <a:r>
-              <a:rPr lang="en-US" altLang="zh-CN" sz="2000" b="0" i="0" dirty="0" err="1">
-                <a:solidFill>
-                  <a:srgbClr val="060607"/>
-                </a:solidFill>
-                <a:effectLst/>
-                <a:latin typeface="-apple-system"/>
-              </a:rPr>
-              <a:t>libaio</a:t>
-            </a:r>
-            <a:r>
-              <a:rPr lang="en-US" altLang="zh-CN" sz="2000" b="0" i="0" dirty="0">
-                <a:solidFill>
-                  <a:srgbClr val="060607"/>
-                </a:solidFill>
-                <a:effectLst/>
-                <a:latin typeface="-apple-system"/>
-              </a:rPr>
-              <a:t> </a:t>
-            </a:r>
-            <a:r>
-              <a:rPr lang="zh-CN" altLang="en-US" sz="2000" b="0" i="0" dirty="0">
-                <a:solidFill>
-                  <a:srgbClr val="060607"/>
-                </a:solidFill>
-                <a:effectLst/>
-                <a:latin typeface="-apple-system"/>
-              </a:rPr>
-              <a:t>进行异步 </a:t>
-            </a:r>
-            <a:r>
-              <a:rPr lang="en-US" altLang="zh-CN" sz="2000" b="0" i="0" dirty="0">
-                <a:solidFill>
-                  <a:srgbClr val="060607"/>
-                </a:solidFill>
-                <a:effectLst/>
-                <a:latin typeface="-apple-system"/>
-              </a:rPr>
-              <a:t>I/O1</a:t>
-            </a:r>
-            <a:r>
-              <a:rPr lang="zh-CN" altLang="en-US" sz="2000" b="0" i="0" dirty="0">
-                <a:solidFill>
-                  <a:srgbClr val="060607"/>
-                </a:solidFill>
-                <a:effectLst/>
-                <a:latin typeface="-apple-system"/>
-              </a:rPr>
-              <a:t>。</a:t>
-            </a:r>
-          </a:p>
-          <a:p>
-            <a:br>
-              <a:rPr lang="zh-CN" altLang="en-US" sz="2000" dirty="0"/>
-            </a:br>
-            <a:endParaRPr lang="zh-CN" altLang="en-US" sz="2000" dirty="0"/>
-          </a:p>
-        </p:txBody>
-      </p:sp>
+          </a:p>
+        </p:txBody>
+      </p:sp>
+      <p:pic>
+        <p:nvPicPr>
+          <p:cNvPr id="4" name="图片 3">
+            <a:extLst>
+              <a:ext uri="{FF2B5EF4-FFF2-40B4-BE49-F238E27FC236}">
+                <a16:creationId xmlns:a16="http://schemas.microsoft.com/office/drawing/2014/main" id="{C1993C3B-731A-4B77-8607-E78909102DC6}"/>
+              </a:ext>
+            </a:extLst>
+          </p:cNvPr>
+          <p:cNvPicPr>
+            <a:picLocks noChangeAspect="1"/>
+          </p:cNvPicPr>
+          <p:nvPr/>
+        </p:nvPicPr>
+        <p:blipFill>
+          <a:blip r:embed="rId5"/>
+          <a:stretch>
+            <a:fillRect/>
+          </a:stretch>
+        </p:blipFill>
+        <p:spPr>
+          <a:xfrm>
+            <a:off x="6812191" y="1640607"/>
+            <a:ext cx="5052975" cy="3488502"/>
+          </a:xfrm>
+          <a:prstGeom prst="rect">
+            <a:avLst/>
+          </a:prstGeom>
+        </p:spPr>
+      </p:pic>
     </p:spTree>
   </p:cSld>
   <p:clrMapOvr>
@@ -14398,7 +14763,7 @@
                 <a:latin typeface="Constantia" panose="02030602050306030303" pitchFamily="18" charset="0"/>
                 <a:cs typeface="Times" panose="02020603050405020304" pitchFamily="18" charset="0"/>
               </a:rPr>
-              <a:t>April 9, 2024</a:t>
+              <a:t>April 10, 2024</a:t>
             </a:fld>
             <a:endParaRPr lang="zh-CN" altLang="en-US" sz="1400" b="1" dirty="0">
               <a:solidFill>
@@ -15349,7 +15714,7 @@
                 <a:latin typeface="Constantia" panose="02030602050306030303" pitchFamily="18" charset="0"/>
                 <a:cs typeface="Times" panose="02020603050405020304" pitchFamily="18" charset="0"/>
               </a:rPr>
-              <a:t>April 9, 2024</a:t>
+              <a:t>April 10, 2024</a:t>
             </a:fld>
             <a:endParaRPr lang="zh-CN" altLang="en-US" sz="1400" b="1" dirty="0">
               <a:solidFill>
@@ -16240,7 +16605,7 @@
                 <a:latin typeface="Constantia" panose="02030602050306030303" pitchFamily="18" charset="0"/>
                 <a:cs typeface="Times" panose="02020603050405020304" pitchFamily="18" charset="0"/>
               </a:rPr>
-              <a:t>April 9, 2024</a:t>
+              <a:t>April 10, 2024</a:t>
             </a:fld>
             <a:endParaRPr lang="zh-CN" altLang="en-US" sz="1400" b="1" dirty="0">
               <a:solidFill>
@@ -17133,7 +17498,7 @@
                 <a:latin typeface="Constantia" panose="02030602050306030303" pitchFamily="18" charset="0"/>
                 <a:cs typeface="Times" panose="02020603050405020304" pitchFamily="18" charset="0"/>
               </a:rPr>
-              <a:t>April 9, 2024</a:t>
+              <a:t>April 10, 2024</a:t>
             </a:fld>
             <a:endParaRPr lang="zh-CN" altLang="en-US" sz="1400" b="1" dirty="0">
               <a:solidFill>
@@ -17868,7 +18233,7 @@
                 <a:latin typeface="Constantia" panose="02030602050306030303" pitchFamily="18" charset="0"/>
                 <a:cs typeface="Times" panose="02020603050405020304" pitchFamily="18" charset="0"/>
               </a:rPr>
-              <a:t>April 9, 2024</a:t>
+              <a:t>April 10, 2024</a:t>
             </a:fld>
             <a:endParaRPr lang="zh-CN" altLang="en-US" sz="1400" b="1" dirty="0">
               <a:solidFill>
@@ -18575,7 +18940,7 @@
         </p:nvSpPr>
         <p:spPr>
           <a:xfrm>
-            <a:off x="1209907" y="6494974"/>
+            <a:off x="1273407" y="6522720"/>
             <a:ext cx="1847385" cy="365125"/>
           </a:xfrm>
         </p:spPr>
@@ -18591,7 +18956,7 @@
                 <a:latin typeface="Constantia" panose="02030602050306030303" pitchFamily="18" charset="0"/>
                 <a:cs typeface="Times" panose="02020603050405020304" pitchFamily="18" charset="0"/>
               </a:rPr>
-              <a:t>April 9, 2024</a:t>
+              <a:t>April 10, 2024</a:t>
             </a:fld>
             <a:endParaRPr lang="zh-CN" altLang="en-US" sz="1400" b="1" dirty="0">
               <a:solidFill>
@@ -19074,7 +19439,7 @@
                 </a:solidFill>
                 <a:latin typeface="Ubuntu" panose="020B0504030602030204" pitchFamily="34" charset="0"/>
               </a:rPr>
-              <a:t>部署案例。暂时，也是唯一的企业级应用中的案例 。</a:t>
+              <a:t>部署案例。暂时，也是唯一已知的企业级应用案例 。</a:t>
             </a:r>
             <a:endParaRPr lang="en-US" altLang="zh-CN" dirty="0">
               <a:solidFill>
@@ -19280,6 +19645,53 @@
                 <a:latin typeface="Ubuntu" panose="020B0504030602030204" pitchFamily="34" charset="0"/>
               </a:rPr>
               <a:t>，压榨硬件性能。</a:t>
+            </a:r>
+            <a:endParaRPr lang="en-US" altLang="zh-CN" dirty="0">
+              <a:solidFill>
+                <a:srgbClr val="34495E"/>
+              </a:solidFill>
+              <a:latin typeface="Ubuntu" panose="020B0504030602030204" pitchFamily="34" charset="0"/>
+            </a:endParaRPr>
+          </a:p>
+          <a:p>
+            <a:pPr eaLnBrk="0" fontAlgn="base" hangingPunct="0">
+              <a:lnSpc>
+                <a:spcPct val="150000"/>
+              </a:lnSpc>
+              <a:spcBef>
+                <a:spcPct val="0"/>
+              </a:spcBef>
+              <a:spcAft>
+                <a:spcPct val="0"/>
+              </a:spcAft>
+            </a:pPr>
+            <a:endParaRPr lang="en-US" altLang="zh-CN" dirty="0">
+              <a:solidFill>
+                <a:srgbClr val="34495E"/>
+              </a:solidFill>
+              <a:latin typeface="Ubuntu" panose="020B0504030602030204" pitchFamily="34" charset="0"/>
+            </a:endParaRPr>
+          </a:p>
+          <a:p>
+            <a:pPr eaLnBrk="0" fontAlgn="base" hangingPunct="0">
+              <a:lnSpc>
+                <a:spcPct val="150000"/>
+              </a:lnSpc>
+              <a:spcBef>
+                <a:spcPct val="0"/>
+              </a:spcBef>
+              <a:spcAft>
+                <a:spcPct val="0"/>
+              </a:spcAft>
+            </a:pPr>
+            <a:r>
+              <a:rPr lang="zh-CN" altLang="en-US" dirty="0">
+                <a:solidFill>
+                  <a:srgbClr val="34495E"/>
+                </a:solidFill>
+                <a:latin typeface="Ubuntu" panose="020B0504030602030204" pitchFamily="34" charset="0"/>
+              </a:rPr>
+              <a:t>（非官方说法，来源于工程师博客分享）</a:t>
             </a:r>
             <a:endParaRPr lang="en-US" altLang="zh-CN" dirty="0">
               <a:solidFill>
@@ -19595,7 +20007,920 @@
                 <a:latin typeface="Constantia" panose="02030602050306030303" pitchFamily="18" charset="0"/>
                 <a:cs typeface="Times" panose="02020603050405020304" pitchFamily="18" charset="0"/>
               </a:rPr>
-              <a:t>April 9, 2024</a:t>
+              <a:t>April 10, 2024</a:t>
+            </a:fld>
+            <a:endParaRPr lang="zh-CN" altLang="en-US" sz="1400" b="1" dirty="0">
+              <a:solidFill>
+                <a:schemeClr val="bg1"/>
+              </a:solidFill>
+              <a:latin typeface="Constantia" panose="02030602050306030303" pitchFamily="18" charset="0"/>
+              <a:cs typeface="Times" panose="02020603050405020304" pitchFamily="18" charset="0"/>
+            </a:endParaRPr>
+          </a:p>
+        </p:txBody>
+      </p:sp>
+      <p:cxnSp>
+        <p:nvCxnSpPr>
+          <p:cNvPr id="26" name="直接连接符 25"/>
+          <p:cNvCxnSpPr/>
+          <p:nvPr/>
+        </p:nvCxnSpPr>
+        <p:spPr>
+          <a:xfrm>
+            <a:off x="385590" y="859531"/>
+            <a:ext cx="11479576" cy="0"/>
+          </a:xfrm>
+          <a:prstGeom prst="line">
+            <a:avLst/>
+          </a:prstGeom>
+          <a:ln w="38100">
+            <a:solidFill>
+              <a:srgbClr val="4747BA"/>
+            </a:solidFill>
+          </a:ln>
+        </p:spPr>
+        <p:style>
+          <a:lnRef idx="1">
+            <a:schemeClr val="accent1"/>
+          </a:lnRef>
+          <a:fillRef idx="0">
+            <a:schemeClr val="accent1"/>
+          </a:fillRef>
+          <a:effectRef idx="0">
+            <a:schemeClr val="accent1"/>
+          </a:effectRef>
+          <a:fontRef idx="minor">
+            <a:schemeClr val="tx1"/>
+          </a:fontRef>
+        </p:style>
+      </p:cxnSp>
+      <p:sp>
+        <p:nvSpPr>
+          <p:cNvPr id="19" name="文本框 18"/>
+          <p:cNvSpPr txBox="1"/>
+          <p:nvPr/>
+        </p:nvSpPr>
+        <p:spPr>
+          <a:xfrm>
+            <a:off x="385590" y="226263"/>
+            <a:ext cx="6798981" cy="590931"/>
+          </a:xfrm>
+          <a:prstGeom prst="rect">
+            <a:avLst/>
+          </a:prstGeom>
+          <a:noFill/>
+        </p:spPr>
+        <p:txBody>
+          <a:bodyPr wrap="square" rtlCol="0">
+            <a:spAutoFit/>
+          </a:bodyPr>
+          <a:lstStyle/>
+          <a:p>
+            <a:pPr>
+              <a:lnSpc>
+                <a:spcPct val="90000"/>
+              </a:lnSpc>
+              <a:spcBef>
+                <a:spcPts val="1000"/>
+              </a:spcBef>
+              <a:defRPr/>
+            </a:pPr>
+            <a:r>
+              <a:rPr lang="en-US" altLang="zh-CN" sz="3200" b="1" dirty="0">
+                <a:solidFill>
+                  <a:srgbClr val="4747BA"/>
+                </a:solidFill>
+                <a:latin typeface="Constantia" panose="02030602050306030303" pitchFamily="18" charset="0"/>
+                <a:ea typeface="腾讯体 W3" panose="020C04030202040F0204" pitchFamily="34" charset="-122"/>
+                <a:cs typeface="Times" panose="02020603050405020304" pitchFamily="18" charset="0"/>
+              </a:rPr>
+              <a:t> </a:t>
+            </a:r>
+            <a:r>
+              <a:rPr lang="zh-CN" altLang="en-US" sz="3200" b="1" dirty="0">
+                <a:solidFill>
+                  <a:srgbClr val="4747BA"/>
+                </a:solidFill>
+                <a:latin typeface="Constantia" panose="02030602050306030303" pitchFamily="18" charset="0"/>
+                <a:ea typeface="腾讯体 W3" panose="020C04030202040F0204" pitchFamily="34" charset="-122"/>
+                <a:cs typeface="Times" panose="02020603050405020304" pitchFamily="18" charset="0"/>
+              </a:rPr>
+              <a:t>最新文献</a:t>
+            </a:r>
+            <a:r>
+              <a:rPr lang="en-US" altLang="zh-CN" sz="3600" b="1" dirty="0">
+                <a:solidFill>
+                  <a:srgbClr val="4747BA"/>
+                </a:solidFill>
+                <a:latin typeface="Constantia" panose="02030602050306030303" pitchFamily="18" charset="0"/>
+                <a:ea typeface="腾讯体 W3" panose="020C04030202040F0204" pitchFamily="34" charset="-122"/>
+                <a:cs typeface="Times" panose="02020603050405020304" pitchFamily="18" charset="0"/>
+              </a:rPr>
+              <a:t> </a:t>
+            </a:r>
+            <a:endParaRPr lang="zh-CN" altLang="en-US" sz="3600" b="1" dirty="0">
+              <a:solidFill>
+                <a:srgbClr val="4747BA"/>
+              </a:solidFill>
+              <a:latin typeface="Constantia" panose="02030602050306030303" pitchFamily="18" charset="0"/>
+              <a:ea typeface="腾讯体 W3" panose="020C04030202040F0204" pitchFamily="34" charset="-122"/>
+              <a:cs typeface="Times" panose="02020603050405020304" pitchFamily="18" charset="0"/>
+            </a:endParaRPr>
+          </a:p>
+        </p:txBody>
+      </p:sp>
+      <p:pic>
+        <p:nvPicPr>
+          <p:cNvPr id="23" name="图片 22"/>
+          <p:cNvPicPr>
+            <a:picLocks noChangeAspect="1"/>
+          </p:cNvPicPr>
+          <p:nvPr/>
+        </p:nvPicPr>
+        <p:blipFill>
+          <a:blip r:embed="rId3" cstate="print">
+            <a:extLst>
+              <a:ext uri="{28A0092B-C50C-407E-A947-70E740481C1C}">
+                <a14:useLocalDpi xmlns:a14="http://schemas.microsoft.com/office/drawing/2010/main" val="0"/>
+              </a:ext>
+            </a:extLst>
+          </a:blip>
+          <a:stretch>
+            <a:fillRect/>
+          </a:stretch>
+        </p:blipFill>
+        <p:spPr>
+          <a:xfrm>
+            <a:off x="7804063" y="218980"/>
+            <a:ext cx="730337" cy="556270"/>
+          </a:xfrm>
+          <a:prstGeom prst="rect">
+            <a:avLst/>
+          </a:prstGeom>
+        </p:spPr>
+      </p:pic>
+      <p:sp>
+        <p:nvSpPr>
+          <p:cNvPr id="14" name="灯片编号占位符 8"/>
+          <p:cNvSpPr>
+            <a:spLocks noGrp="1"/>
+          </p:cNvSpPr>
+          <p:nvPr>
+            <p:ph type="sldNum" sz="quarter" idx="12"/>
+          </p:nvPr>
+        </p:nvSpPr>
+        <p:spPr>
+          <a:xfrm>
+            <a:off x="9847869" y="6405035"/>
+            <a:ext cx="809393" cy="545001"/>
+          </a:xfrm>
+        </p:spPr>
+        <p:txBody>
+          <a:bodyPr/>
+          <a:lstStyle/>
+          <a:p>
+            <a:pPr algn="ctr"/>
+            <a:fld id="{152851E7-9224-42D2-A4FF-119762E40804}" type="slidenum">
+              <a:rPr lang="zh-CN" altLang="en-US" sz="1400" b="1" smtClean="0">
+                <a:solidFill>
+                  <a:schemeClr val="bg1"/>
+                </a:solidFill>
+                <a:latin typeface="Constantia" panose="02030602050306030303" pitchFamily="18" charset="0"/>
+                <a:cs typeface="Times" panose="02020603050405020304" pitchFamily="18" charset="0"/>
+              </a:rPr>
+              <a:t>8</a:t>
+            </a:fld>
+            <a:endParaRPr lang="zh-CN" altLang="en-US" sz="1400" b="1" dirty="0">
+              <a:solidFill>
+                <a:schemeClr val="bg1"/>
+              </a:solidFill>
+              <a:latin typeface="Constantia" panose="02030602050306030303" pitchFamily="18" charset="0"/>
+              <a:cs typeface="Times" panose="02020603050405020304" pitchFamily="18" charset="0"/>
+            </a:endParaRPr>
+          </a:p>
+        </p:txBody>
+      </p:sp>
+      <p:pic>
+        <p:nvPicPr>
+          <p:cNvPr id="44" name="图片 43"/>
+          <p:cNvPicPr>
+            <a:picLocks noChangeAspect="1"/>
+          </p:cNvPicPr>
+          <p:nvPr/>
+        </p:nvPicPr>
+        <p:blipFill>
+          <a:blip r:embed="rId4" cstate="print">
+            <a:extLst>
+              <a:ext uri="{28A0092B-C50C-407E-A947-70E740481C1C}">
+                <a14:useLocalDpi xmlns:a14="http://schemas.microsoft.com/office/drawing/2010/main" val="0"/>
+              </a:ext>
+            </a:extLst>
+          </a:blip>
+          <a:stretch>
+            <a:fillRect/>
+          </a:stretch>
+        </p:blipFill>
+        <p:spPr>
+          <a:xfrm>
+            <a:off x="8590829" y="204228"/>
+            <a:ext cx="3323471" cy="570629"/>
+          </a:xfrm>
+          <a:prstGeom prst="rect">
+            <a:avLst/>
+          </a:prstGeom>
+        </p:spPr>
+      </p:pic>
+      <p:sp>
+        <p:nvSpPr>
+          <p:cNvPr id="10" name="Fußzeilenplatzhalter 4"/>
+          <p:cNvSpPr>
+            <a:spLocks noGrp="1"/>
+          </p:cNvSpPr>
+          <p:nvPr>
+            <p:ph type="ftr" sz="quarter" idx="11"/>
+          </p:nvPr>
+        </p:nvSpPr>
+        <p:spPr>
+          <a:xfrm>
+            <a:off x="4095916" y="6553437"/>
+            <a:ext cx="4520431" cy="273844"/>
+          </a:xfrm>
+        </p:spPr>
+        <p:txBody>
+          <a:bodyPr/>
+          <a:lstStyle/>
+          <a:p>
+            <a:r>
+              <a:rPr lang="en-US" altLang="zh-CN" sz="1400" b="1" dirty="0" err="1">
+                <a:solidFill>
+                  <a:schemeClr val="bg1"/>
+                </a:solidFill>
+                <a:latin typeface="Constantia" panose="02030602050306030303" pitchFamily="18" charset="0"/>
+              </a:rPr>
+              <a:t>Ziqi</a:t>
+            </a:r>
+            <a:r>
+              <a:rPr lang="en-US" altLang="zh-CN" sz="1400" b="1" dirty="0">
+                <a:solidFill>
+                  <a:schemeClr val="bg1"/>
+                </a:solidFill>
+                <a:latin typeface="Constantia" panose="02030602050306030303" pitchFamily="18" charset="0"/>
+              </a:rPr>
+              <a:t> Liu | HUST</a:t>
+            </a:r>
+            <a:endParaRPr lang="zh-CN" altLang="en-US" sz="1400" b="1" dirty="0">
+              <a:solidFill>
+                <a:schemeClr val="bg1"/>
+              </a:solidFill>
+              <a:latin typeface="Constantia" panose="02030602050306030303" pitchFamily="18" charset="0"/>
+            </a:endParaRPr>
+          </a:p>
+        </p:txBody>
+      </p:sp>
+      <p:sp>
+        <p:nvSpPr>
+          <p:cNvPr id="15" name="文本框 14">
+            <a:extLst>
+              <a:ext uri="{FF2B5EF4-FFF2-40B4-BE49-F238E27FC236}">
+                <a16:creationId xmlns:a16="http://schemas.microsoft.com/office/drawing/2014/main" id="{488ABAF1-66EA-4F19-B42F-A2C521EB34A2}"/>
+              </a:ext>
+            </a:extLst>
+          </p:cNvPr>
+          <p:cNvSpPr txBox="1"/>
+          <p:nvPr/>
+        </p:nvSpPr>
+        <p:spPr>
+          <a:xfrm>
+            <a:off x="385590" y="992810"/>
+            <a:ext cx="11140663" cy="4005392"/>
+          </a:xfrm>
+          <a:prstGeom prst="rect">
+            <a:avLst/>
+          </a:prstGeom>
+          <a:noFill/>
+        </p:spPr>
+        <p:txBody>
+          <a:bodyPr wrap="square">
+            <a:spAutoFit/>
+          </a:bodyPr>
+          <a:lstStyle/>
+          <a:p>
+            <a:pPr>
+              <a:lnSpc>
+                <a:spcPct val="150000"/>
+              </a:lnSpc>
+            </a:pPr>
+            <a:r>
+              <a:rPr lang="en-US" altLang="zh-CN" sz="2800" dirty="0">
+                <a:solidFill>
+                  <a:srgbClr val="4747BA"/>
+                </a:solidFill>
+                <a:ea typeface="+mn-lt"/>
+                <a:cs typeface="Times New Roman" panose="02020603050405020304" pitchFamily="18" charset="0"/>
+              </a:rPr>
+              <a:t>FAST‘24 </a:t>
+            </a:r>
+            <a:r>
+              <a:rPr lang="zh-CN" altLang="en-US" sz="2800" dirty="0">
+                <a:solidFill>
+                  <a:srgbClr val="4747BA"/>
+                </a:solidFill>
+                <a:ea typeface="+mn-lt"/>
+                <a:cs typeface="Times New Roman" panose="02020603050405020304" pitchFamily="18" charset="0"/>
+              </a:rPr>
+              <a:t>中提及</a:t>
+            </a:r>
+            <a:r>
+              <a:rPr lang="en-US" altLang="zh-CN" sz="2800" dirty="0">
+                <a:solidFill>
+                  <a:srgbClr val="4747BA"/>
+                </a:solidFill>
+                <a:ea typeface="+mn-lt"/>
+                <a:cs typeface="Times New Roman" panose="02020603050405020304" pitchFamily="18" charset="0"/>
+              </a:rPr>
+              <a:t> ZNS</a:t>
+            </a:r>
+            <a:r>
+              <a:rPr lang="zh-CN" altLang="en-US" sz="2800" dirty="0">
+                <a:solidFill>
+                  <a:srgbClr val="4747BA"/>
+                </a:solidFill>
+                <a:ea typeface="+mn-lt"/>
+                <a:cs typeface="Times New Roman" panose="02020603050405020304" pitchFamily="18" charset="0"/>
+              </a:rPr>
+              <a:t>的文章</a:t>
+            </a:r>
+            <a:r>
+              <a:rPr lang="en-US" altLang="zh-CN" sz="2800" dirty="0">
+                <a:solidFill>
+                  <a:srgbClr val="4747BA"/>
+                </a:solidFill>
+                <a:ea typeface="+mn-lt"/>
+                <a:cs typeface="Times New Roman" panose="02020603050405020304" pitchFamily="18" charset="0"/>
+              </a:rPr>
+              <a:t>:</a:t>
+            </a:r>
+            <a:endParaRPr lang="zh-CN" altLang="en-US" sz="2800" dirty="0">
+              <a:solidFill>
+                <a:srgbClr val="4747BA"/>
+              </a:solidFill>
+              <a:ea typeface="+mn-lt"/>
+              <a:cs typeface="Times New Roman" panose="02020603050405020304" pitchFamily="18" charset="0"/>
+            </a:endParaRPr>
+          </a:p>
+          <a:p>
+            <a:pPr>
+              <a:lnSpc>
+                <a:spcPct val="150000"/>
+              </a:lnSpc>
+            </a:pPr>
+            <a:r>
+              <a:rPr lang="en-US" altLang="zh-CN" sz="2000" dirty="0">
+                <a:solidFill>
+                  <a:srgbClr val="374151"/>
+                </a:solidFill>
+                <a:latin typeface="_5b8b_4f53"/>
+              </a:rPr>
+              <a:t>1. I/O </a:t>
+            </a:r>
+            <a:r>
+              <a:rPr lang="en-US" altLang="zh-CN" sz="2000" dirty="0" err="1">
+                <a:solidFill>
+                  <a:srgbClr val="374151"/>
+                </a:solidFill>
+                <a:latin typeface="_5b8b_4f53"/>
+              </a:rPr>
+              <a:t>Passthru</a:t>
+            </a:r>
+            <a:r>
+              <a:rPr lang="en-US" altLang="zh-CN" sz="2000" dirty="0">
+                <a:solidFill>
+                  <a:srgbClr val="374151"/>
+                </a:solidFill>
+                <a:latin typeface="_5b8b_4f53"/>
+              </a:rPr>
+              <a:t>: Upstreaming a flexible and efficient I/O Path in Linux</a:t>
+            </a:r>
+            <a:r>
+              <a:rPr lang="zh-CN" altLang="en-US" sz="2000" dirty="0">
+                <a:solidFill>
+                  <a:srgbClr val="374151"/>
+                </a:solidFill>
+                <a:latin typeface="_5b8b_4f53"/>
+              </a:rPr>
+              <a:t>（</a:t>
+            </a:r>
+            <a:r>
+              <a:rPr lang="en-US" altLang="zh-CN" sz="2000" dirty="0">
+                <a:solidFill>
+                  <a:srgbClr val="374151"/>
+                </a:solidFill>
+                <a:latin typeface="_5b8b_4f53"/>
+              </a:rPr>
+              <a:t>FDP</a:t>
+            </a:r>
+            <a:r>
+              <a:rPr lang="zh-CN" altLang="en-US" sz="2000" dirty="0">
+                <a:solidFill>
+                  <a:srgbClr val="374151"/>
+                </a:solidFill>
+                <a:latin typeface="_5b8b_4f53"/>
+              </a:rPr>
+              <a:t>）（三星</a:t>
+            </a:r>
+            <a:r>
+              <a:rPr lang="en-US" altLang="zh-CN" sz="2000" dirty="0">
+                <a:solidFill>
+                  <a:srgbClr val="374151"/>
+                </a:solidFill>
+                <a:latin typeface="_5b8b_4f53"/>
+              </a:rPr>
+              <a:t>FDP</a:t>
+            </a:r>
+            <a:r>
+              <a:rPr lang="zh-CN" altLang="en-US" sz="2000" dirty="0">
+                <a:solidFill>
+                  <a:srgbClr val="374151"/>
+                </a:solidFill>
+                <a:latin typeface="_5b8b_4f53"/>
+              </a:rPr>
+              <a:t>盘）</a:t>
+            </a:r>
+            <a:endParaRPr lang="en-US" altLang="zh-CN" sz="2000" dirty="0">
+              <a:solidFill>
+                <a:srgbClr val="374151"/>
+              </a:solidFill>
+              <a:latin typeface="_5b8b_4f53"/>
+            </a:endParaRPr>
+          </a:p>
+          <a:p>
+            <a:pPr>
+              <a:lnSpc>
+                <a:spcPct val="150000"/>
+              </a:lnSpc>
+            </a:pPr>
+            <a:r>
+              <a:rPr lang="en-US" altLang="zh-CN" sz="2000" dirty="0">
+                <a:solidFill>
+                  <a:srgbClr val="374151"/>
+                </a:solidFill>
+                <a:latin typeface="_5b8b_4f53"/>
+              </a:rPr>
+              <a:t>2. RFUSE: Modernizing </a:t>
+            </a:r>
+            <a:r>
+              <a:rPr lang="en-US" altLang="zh-CN" sz="2000" dirty="0" err="1">
+                <a:solidFill>
+                  <a:srgbClr val="374151"/>
+                </a:solidFill>
+                <a:latin typeface="_5b8b_4f53"/>
+              </a:rPr>
+              <a:t>Userspace</a:t>
+            </a:r>
+            <a:r>
+              <a:rPr lang="en-US" altLang="zh-CN" sz="2000" dirty="0">
+                <a:solidFill>
+                  <a:srgbClr val="374151"/>
+                </a:solidFill>
+                <a:latin typeface="_5b8b_4f53"/>
+              </a:rPr>
+              <a:t> Filesystem Framework through Scalable Kernel-</a:t>
+            </a:r>
+            <a:r>
+              <a:rPr lang="en-US" altLang="zh-CN" sz="2000" dirty="0" err="1">
+                <a:solidFill>
+                  <a:srgbClr val="374151"/>
+                </a:solidFill>
+                <a:latin typeface="_5b8b_4f53"/>
+              </a:rPr>
+              <a:t>Userspace</a:t>
+            </a:r>
+            <a:r>
+              <a:rPr lang="en-US" altLang="zh-CN" sz="2000" dirty="0">
+                <a:solidFill>
+                  <a:srgbClr val="374151"/>
+                </a:solidFill>
+                <a:latin typeface="_5b8b_4f53"/>
+              </a:rPr>
+              <a:t> Communication</a:t>
+            </a:r>
+            <a:r>
+              <a:rPr lang="zh-CN" altLang="en-US" sz="2000" dirty="0">
+                <a:solidFill>
+                  <a:srgbClr val="374151"/>
+                </a:solidFill>
+                <a:latin typeface="_5b8b_4f53"/>
+              </a:rPr>
+              <a:t>（</a:t>
+            </a:r>
+            <a:r>
+              <a:rPr lang="en-US" altLang="zh-CN" sz="2000" dirty="0">
+                <a:solidFill>
+                  <a:srgbClr val="374151"/>
+                </a:solidFill>
+                <a:latin typeface="_5b8b_4f53"/>
+              </a:rPr>
+              <a:t>OS,FS</a:t>
+            </a:r>
+            <a:r>
+              <a:rPr lang="zh-CN" altLang="en-US" sz="2000" dirty="0">
+                <a:solidFill>
+                  <a:srgbClr val="374151"/>
+                </a:solidFill>
+                <a:latin typeface="_5b8b_4f53"/>
+              </a:rPr>
+              <a:t>）</a:t>
+            </a:r>
+            <a:endParaRPr lang="en-US" altLang="zh-CN" sz="2000" dirty="0">
+              <a:solidFill>
+                <a:srgbClr val="374151"/>
+              </a:solidFill>
+              <a:latin typeface="_5b8b_4f53"/>
+            </a:endParaRPr>
+          </a:p>
+          <a:p>
+            <a:pPr>
+              <a:lnSpc>
+                <a:spcPct val="150000"/>
+              </a:lnSpc>
+            </a:pPr>
+            <a:r>
+              <a:rPr lang="en-US" altLang="zh-CN" sz="2000" dirty="0">
+                <a:solidFill>
+                  <a:srgbClr val="374151"/>
+                </a:solidFill>
+                <a:latin typeface="_5b8b_4f53"/>
+              </a:rPr>
+              <a:t>3. MIDAS: Minimizing Write Amplification in Log-Structured Systems through Adaptive Group Number and Size Configuration </a:t>
+            </a:r>
+            <a:r>
+              <a:rPr lang="zh-CN" altLang="en-US" sz="2000" dirty="0">
+                <a:solidFill>
+                  <a:srgbClr val="374151"/>
+                </a:solidFill>
+                <a:latin typeface="_5b8b_4f53"/>
+              </a:rPr>
+              <a:t>（参数配置、自适应）</a:t>
+            </a:r>
+            <a:endParaRPr lang="en-US" altLang="zh-CN" sz="2000" dirty="0">
+              <a:solidFill>
+                <a:srgbClr val="374151"/>
+              </a:solidFill>
+              <a:latin typeface="_5b8b_4f53"/>
+            </a:endParaRPr>
+          </a:p>
+          <a:p>
+            <a:pPr>
+              <a:lnSpc>
+                <a:spcPct val="150000"/>
+              </a:lnSpc>
+            </a:pPr>
+            <a:r>
+              <a:rPr lang="en-US" altLang="zh-CN" sz="2000" dirty="0">
+                <a:solidFill>
+                  <a:srgbClr val="374151"/>
+                </a:solidFill>
+                <a:latin typeface="_5b8b_4f53"/>
+              </a:rPr>
+              <a:t>4. The Design and Implementation of a Capacity-Variant Storage System</a:t>
+            </a:r>
+            <a:r>
+              <a:rPr lang="zh-CN" altLang="en-US" sz="2000" dirty="0">
+                <a:solidFill>
+                  <a:srgbClr val="374151"/>
+                </a:solidFill>
+                <a:latin typeface="_5b8b_4f53"/>
+              </a:rPr>
+              <a:t>（解决性能骤降）</a:t>
+            </a:r>
+            <a:endParaRPr lang="en-US" altLang="zh-CN" sz="2000" dirty="0">
+              <a:solidFill>
+                <a:srgbClr val="374151"/>
+              </a:solidFill>
+              <a:latin typeface="_5b8b_4f53"/>
+            </a:endParaRPr>
+          </a:p>
+          <a:p>
+            <a:pPr>
+              <a:lnSpc>
+                <a:spcPct val="150000"/>
+              </a:lnSpc>
+            </a:pPr>
+            <a:endParaRPr lang="en-US" altLang="zh-CN" sz="2400" dirty="0">
+              <a:solidFill>
+                <a:srgbClr val="374151"/>
+              </a:solidFill>
+              <a:latin typeface="_5b8b_4f53"/>
+            </a:endParaRPr>
+          </a:p>
+        </p:txBody>
+      </p:sp>
+    </p:spTree>
+    <p:extLst>
+      <p:ext uri="{BB962C8B-B14F-4D97-AF65-F5344CB8AC3E}">
+        <p14:creationId xmlns:p14="http://schemas.microsoft.com/office/powerpoint/2010/main" val="3628028634"/>
+      </p:ext>
+    </p:extLst>
+  </p:cSld>
+  <p:clrMapOvr>
+    <a:masterClrMapping/>
+  </p:clrMapOvr>
+  <mc:AlternateContent xmlns:mc="http://schemas.openxmlformats.org/markup-compatibility/2006" xmlns:p14="http://schemas.microsoft.com/office/powerpoint/2010/main">
+    <mc:Choice Requires="p14">
+      <p:transition p14:dur="10" advClick="0"/>
+    </mc:Choice>
+    <mc:Fallback xmlns="">
+      <p:transition advClick="0"/>
+    </mc:Fallback>
+  </mc:AlternateContent>
+</p:sld>
+</file>
+
+<file path=ppt/slides/slide9.xml><?xml version="1.0" encoding="utf-8"?>
+<p:sld xmlns:a="http://schemas.openxmlformats.org/drawingml/2006/main" xmlns:r="http://schemas.openxmlformats.org/officeDocument/2006/relationships" xmlns:p="http://schemas.openxmlformats.org/presentationml/2006/main">
+  <p:cSld>
+    <p:spTree>
+      <p:nvGrpSpPr>
+        <p:cNvPr id="1" name=""/>
+        <p:cNvGrpSpPr/>
+        <p:nvPr/>
+      </p:nvGrpSpPr>
+      <p:grpSpPr>
+        <a:xfrm>
+          <a:off x="0" y="0"/>
+          <a:ext cx="0" cy="0"/>
+          <a:chOff x="0" y="0"/>
+          <a:chExt cx="0" cy="0"/>
+        </a:xfrm>
+      </p:grpSpPr>
+      <p:sp>
+        <p:nvSpPr>
+          <p:cNvPr id="17" name="矩形 16"/>
+          <p:cNvSpPr/>
+          <p:nvPr/>
+        </p:nvSpPr>
+        <p:spPr>
+          <a:xfrm>
+            <a:off x="0" y="6522720"/>
+            <a:ext cx="4267200" cy="335280"/>
+          </a:xfrm>
+          <a:prstGeom prst="rect">
+            <a:avLst/>
+          </a:prstGeom>
+          <a:solidFill>
+            <a:srgbClr val="4747BA"/>
+          </a:solidFill>
+          <a:ln>
+            <a:noFill/>
+          </a:ln>
+        </p:spPr>
+        <p:style>
+          <a:lnRef idx="2">
+            <a:schemeClr val="accent1">
+              <a:shade val="50000"/>
+            </a:schemeClr>
+          </a:lnRef>
+          <a:fillRef idx="1">
+            <a:schemeClr val="accent1"/>
+          </a:fillRef>
+          <a:effectRef idx="0">
+            <a:schemeClr val="accent1"/>
+          </a:effectRef>
+          <a:fontRef idx="minor">
+            <a:schemeClr val="lt1"/>
+          </a:fontRef>
+        </p:style>
+        <p:txBody>
+          <a:bodyPr rtlCol="0" anchor="ctr"/>
+          <a:lstStyle/>
+          <a:p>
+            <a:pPr algn="ctr"/>
+            <a:endParaRPr lang="zh-CN" altLang="en-US"/>
+          </a:p>
+        </p:txBody>
+      </p:sp>
+      <p:sp>
+        <p:nvSpPr>
+          <p:cNvPr id="18" name="矩形 17"/>
+          <p:cNvSpPr/>
+          <p:nvPr/>
+        </p:nvSpPr>
+        <p:spPr>
+          <a:xfrm>
+            <a:off x="4267200" y="6522720"/>
+            <a:ext cx="4267200" cy="335280"/>
+          </a:xfrm>
+          <a:prstGeom prst="rect">
+            <a:avLst/>
+          </a:prstGeom>
+          <a:solidFill>
+            <a:srgbClr val="8484D1"/>
+          </a:solidFill>
+          <a:ln>
+            <a:noFill/>
+          </a:ln>
+        </p:spPr>
+        <p:style>
+          <a:lnRef idx="2">
+            <a:schemeClr val="accent1">
+              <a:shade val="50000"/>
+            </a:schemeClr>
+          </a:lnRef>
+          <a:fillRef idx="1">
+            <a:schemeClr val="accent1"/>
+          </a:fillRef>
+          <a:effectRef idx="0">
+            <a:schemeClr val="accent1"/>
+          </a:effectRef>
+          <a:fontRef idx="minor">
+            <a:schemeClr val="lt1"/>
+          </a:fontRef>
+        </p:style>
+        <p:txBody>
+          <a:bodyPr rtlCol="0" anchor="ctr"/>
+          <a:lstStyle/>
+          <a:p>
+            <a:pPr algn="ctr"/>
+            <a:endParaRPr lang="zh-CN" altLang="en-US"/>
+          </a:p>
+        </p:txBody>
+      </p:sp>
+      <p:sp>
+        <p:nvSpPr>
+          <p:cNvPr id="20" name="矩形 19"/>
+          <p:cNvSpPr/>
+          <p:nvPr/>
+        </p:nvSpPr>
+        <p:spPr>
+          <a:xfrm>
+            <a:off x="8534400" y="6538313"/>
+            <a:ext cx="3657600" cy="335280"/>
+          </a:xfrm>
+          <a:prstGeom prst="rect">
+            <a:avLst/>
+          </a:prstGeom>
+          <a:solidFill>
+            <a:srgbClr val="ADADE0"/>
+          </a:solidFill>
+          <a:ln>
+            <a:noFill/>
+          </a:ln>
+        </p:spPr>
+        <p:style>
+          <a:lnRef idx="2">
+            <a:schemeClr val="accent1">
+              <a:shade val="50000"/>
+            </a:schemeClr>
+          </a:lnRef>
+          <a:fillRef idx="1">
+            <a:schemeClr val="accent1"/>
+          </a:fillRef>
+          <a:effectRef idx="0">
+            <a:schemeClr val="accent1"/>
+          </a:effectRef>
+          <a:fontRef idx="minor">
+            <a:schemeClr val="lt1"/>
+          </a:fontRef>
+        </p:style>
+        <p:txBody>
+          <a:bodyPr rot="0" spcFirstLastPara="0" vert="horz" wrap="square" lIns="91440" tIns="45720" rIns="91440" bIns="45720" numCol="1" spcCol="0" rtlCol="0" fromWordArt="0" anchor="ctr" anchorCtr="0" forceAA="0" compatLnSpc="1">
+            <a:noAutofit/>
+          </a:bodyPr>
+          <a:lstStyle>
+            <a:defPPr>
+              <a:defRPr lang="zh-CN"/>
+            </a:defPPr>
+            <a:lvl1pPr marL="0" algn="l" defTabSz="914400" rtl="0" eaLnBrk="1" latinLnBrk="0" hangingPunct="1">
+              <a:defRPr sz="1800" kern="1200">
+                <a:solidFill>
+                  <a:schemeClr val="lt1"/>
+                </a:solidFill>
+                <a:latin typeface="+mn-lt"/>
+                <a:ea typeface="+mn-ea"/>
+                <a:cs typeface="+mn-cs"/>
+              </a:defRPr>
+            </a:lvl1pPr>
+            <a:lvl2pPr marL="457200" algn="l" defTabSz="914400" rtl="0" eaLnBrk="1" latinLnBrk="0" hangingPunct="1">
+              <a:defRPr sz="1800" kern="1200">
+                <a:solidFill>
+                  <a:schemeClr val="lt1"/>
+                </a:solidFill>
+                <a:latin typeface="+mn-lt"/>
+                <a:ea typeface="+mn-ea"/>
+                <a:cs typeface="+mn-cs"/>
+              </a:defRPr>
+            </a:lvl2pPr>
+            <a:lvl3pPr marL="914400" algn="l" defTabSz="914400" rtl="0" eaLnBrk="1" latinLnBrk="0" hangingPunct="1">
+              <a:defRPr sz="1800" kern="1200">
+                <a:solidFill>
+                  <a:schemeClr val="lt1"/>
+                </a:solidFill>
+                <a:latin typeface="+mn-lt"/>
+                <a:ea typeface="+mn-ea"/>
+                <a:cs typeface="+mn-cs"/>
+              </a:defRPr>
+            </a:lvl3pPr>
+            <a:lvl4pPr marL="1371600" algn="l" defTabSz="914400" rtl="0" eaLnBrk="1" latinLnBrk="0" hangingPunct="1">
+              <a:defRPr sz="1800" kern="1200">
+                <a:solidFill>
+                  <a:schemeClr val="lt1"/>
+                </a:solidFill>
+                <a:latin typeface="+mn-lt"/>
+                <a:ea typeface="+mn-ea"/>
+                <a:cs typeface="+mn-cs"/>
+              </a:defRPr>
+            </a:lvl4pPr>
+            <a:lvl5pPr marL="1828800" algn="l" defTabSz="914400" rtl="0" eaLnBrk="1" latinLnBrk="0" hangingPunct="1">
+              <a:defRPr sz="1800" kern="1200">
+                <a:solidFill>
+                  <a:schemeClr val="lt1"/>
+                </a:solidFill>
+                <a:latin typeface="+mn-lt"/>
+                <a:ea typeface="+mn-ea"/>
+                <a:cs typeface="+mn-cs"/>
+              </a:defRPr>
+            </a:lvl5pPr>
+            <a:lvl6pPr marL="2286000" algn="l" defTabSz="914400" rtl="0" eaLnBrk="1" latinLnBrk="0" hangingPunct="1">
+              <a:defRPr sz="1800" kern="1200">
+                <a:solidFill>
+                  <a:schemeClr val="lt1"/>
+                </a:solidFill>
+                <a:latin typeface="+mn-lt"/>
+                <a:ea typeface="+mn-ea"/>
+                <a:cs typeface="+mn-cs"/>
+              </a:defRPr>
+            </a:lvl6pPr>
+            <a:lvl7pPr marL="2743200" algn="l" defTabSz="914400" rtl="0" eaLnBrk="1" latinLnBrk="0" hangingPunct="1">
+              <a:defRPr sz="1800" kern="1200">
+                <a:solidFill>
+                  <a:schemeClr val="lt1"/>
+                </a:solidFill>
+                <a:latin typeface="+mn-lt"/>
+                <a:ea typeface="+mn-ea"/>
+                <a:cs typeface="+mn-cs"/>
+              </a:defRPr>
+            </a:lvl7pPr>
+            <a:lvl8pPr marL="3200400" algn="l" defTabSz="914400" rtl="0" eaLnBrk="1" latinLnBrk="0" hangingPunct="1">
+              <a:defRPr sz="1800" kern="1200">
+                <a:solidFill>
+                  <a:schemeClr val="lt1"/>
+                </a:solidFill>
+                <a:latin typeface="+mn-lt"/>
+                <a:ea typeface="+mn-ea"/>
+                <a:cs typeface="+mn-cs"/>
+              </a:defRPr>
+            </a:lvl8pPr>
+            <a:lvl9pPr marL="3657600" algn="l" defTabSz="914400" rtl="0" eaLnBrk="1" latinLnBrk="0" hangingPunct="1">
+              <a:defRPr sz="1800" kern="1200">
+                <a:solidFill>
+                  <a:schemeClr val="lt1"/>
+                </a:solidFill>
+                <a:latin typeface="+mn-lt"/>
+                <a:ea typeface="+mn-ea"/>
+                <a:cs typeface="+mn-cs"/>
+              </a:defRPr>
+            </a:lvl9pPr>
+          </a:lstStyle>
+          <a:p>
+            <a:pPr algn="ctr"/>
+            <a:endParaRPr lang="zh-CN" altLang="en-US" sz="1600" dirty="0">
+              <a:solidFill>
+                <a:schemeClr val="bg1"/>
+              </a:solidFill>
+              <a:latin typeface="Constantia" panose="02030602050306030303" pitchFamily="18" charset="0"/>
+            </a:endParaRPr>
+          </a:p>
+        </p:txBody>
+      </p:sp>
+      <p:sp>
+        <p:nvSpPr>
+          <p:cNvPr id="24" name="日期占位符 7"/>
+          <p:cNvSpPr>
+            <a:spLocks noGrp="1"/>
+          </p:cNvSpPr>
+          <p:nvPr>
+            <p:ph type="dt" sz="half" idx="10"/>
+          </p:nvPr>
+        </p:nvSpPr>
+        <p:spPr>
+          <a:xfrm>
+            <a:off x="1209907" y="6494974"/>
+            <a:ext cx="1847385" cy="365125"/>
+          </a:xfrm>
+        </p:spPr>
+        <p:txBody>
+          <a:bodyPr/>
+          <a:lstStyle/>
+          <a:p>
+            <a:fld id="{31CCC338-FFC3-4940-99DD-6195BEF39901}" type="datetime4">
+              <a:rPr lang="en-US" altLang="zh-CN" sz="1400" b="1">
+                <a:solidFill>
+                  <a:schemeClr val="bg1"/>
+                </a:solidFill>
+                <a:latin typeface="Constantia" panose="02030602050306030303" pitchFamily="18" charset="0"/>
+                <a:cs typeface="Times" panose="02020603050405020304" pitchFamily="18" charset="0"/>
+              </a:rPr>
+              <a:t>April 10, 2024</a:t>
             </a:fld>
             <a:endParaRPr lang="zh-CN" altLang="en-US" sz="1400" b="1" dirty="0">
               <a:solidFill>
@@ -19701,7 +21026,7 @@
                 <a:latin typeface="Constantia" panose="02030602050306030303" pitchFamily="18" charset="0"/>
                 <a:cs typeface="Times" panose="02020603050405020304" pitchFamily="18" charset="0"/>
               </a:rPr>
-              <a:t>8</a:t>
+              <a:t>9</a:t>
             </a:fld>
             <a:endParaRPr lang="zh-CN" altLang="en-US" sz="1400" b="1" dirty="0">
               <a:solidFill>
@@ -19792,7 +21117,274 @@
       </p:sp>
       <p:sp>
         <p:nvSpPr>
-          <p:cNvPr id="25" name="文本框 24"/>
+          <p:cNvPr id="2" name="文本框 1">
+            <a:extLst>
+              <a:ext uri="{FF2B5EF4-FFF2-40B4-BE49-F238E27FC236}">
+                <a16:creationId xmlns:a16="http://schemas.microsoft.com/office/drawing/2014/main" id="{8DE1F298-A953-8FC5-1524-0A465CE82634}"/>
+              </a:ext>
+            </a:extLst>
+          </p:cNvPr>
+          <p:cNvSpPr txBox="1"/>
+          <p:nvPr/>
+        </p:nvSpPr>
+        <p:spPr>
+          <a:xfrm>
+            <a:off x="385590" y="1564876"/>
+            <a:ext cx="5088110" cy="2957861"/>
+          </a:xfrm>
+          <a:prstGeom prst="rect">
+            <a:avLst/>
+          </a:prstGeom>
+          <a:noFill/>
+        </p:spPr>
+        <p:txBody>
+          <a:bodyPr wrap="square">
+            <a:spAutoFit/>
+          </a:bodyPr>
+          <a:lstStyle/>
+          <a:p>
+            <a:pPr>
+              <a:lnSpc>
+                <a:spcPct val="150000"/>
+              </a:lnSpc>
+            </a:pPr>
+            <a:r>
+              <a:rPr lang="en-US" altLang="zh-CN" b="1" dirty="0">
+                <a:solidFill>
+                  <a:srgbClr val="222226"/>
+                </a:solidFill>
+                <a:latin typeface="PingFang SC"/>
+              </a:rPr>
+              <a:t>Linux I/O</a:t>
+            </a:r>
+            <a:r>
+              <a:rPr lang="zh-CN" altLang="en-US" b="1" dirty="0">
+                <a:solidFill>
+                  <a:srgbClr val="222226"/>
+                </a:solidFill>
+                <a:latin typeface="PingFang SC"/>
+              </a:rPr>
+              <a:t>栈冗杂，</a:t>
+            </a:r>
+            <a:r>
+              <a:rPr lang="zh-CN" altLang="en-US" dirty="0">
+                <a:solidFill>
+                  <a:srgbClr val="222226"/>
+                </a:solidFill>
+                <a:latin typeface="PingFang SC"/>
+              </a:rPr>
+              <a:t>总体来看，老方法效率太低，新方法普适性差，需要学习成本。并且经常出现</a:t>
+            </a:r>
+            <a:r>
+              <a:rPr lang="zh-CN" altLang="en-US" b="0" i="0" dirty="0">
+                <a:solidFill>
+                  <a:srgbClr val="191B1F"/>
+                </a:solidFill>
+                <a:effectLst/>
+                <a:latin typeface="-apple-system"/>
+              </a:rPr>
+              <a:t>优化了</a:t>
+            </a:r>
+            <a:r>
+              <a:rPr lang="en-US" altLang="zh-CN" b="0" i="0" dirty="0">
+                <a:solidFill>
+                  <a:srgbClr val="191B1F"/>
+                </a:solidFill>
+                <a:effectLst/>
+                <a:latin typeface="-apple-system"/>
+              </a:rPr>
+              <a:t>A</a:t>
+            </a:r>
+            <a:r>
+              <a:rPr lang="zh-CN" altLang="en-US" b="0" i="0" dirty="0">
+                <a:solidFill>
+                  <a:srgbClr val="191B1F"/>
+                </a:solidFill>
+                <a:effectLst/>
+                <a:latin typeface="-apple-system"/>
+              </a:rPr>
+              <a:t>场景，在</a:t>
+            </a:r>
+            <a:r>
+              <a:rPr lang="en-US" altLang="zh-CN" b="0" i="0" dirty="0">
+                <a:solidFill>
+                  <a:srgbClr val="191B1F"/>
+                </a:solidFill>
+                <a:effectLst/>
+                <a:latin typeface="-apple-system"/>
+              </a:rPr>
+              <a:t>B</a:t>
+            </a:r>
+            <a:r>
+              <a:rPr lang="zh-CN" altLang="en-US" b="0" i="0" dirty="0">
+                <a:solidFill>
+                  <a:srgbClr val="191B1F"/>
+                </a:solidFill>
+                <a:effectLst/>
+                <a:latin typeface="-apple-system"/>
+              </a:rPr>
+              <a:t>场景下就一塌糊涂的情况。</a:t>
+            </a:r>
+            <a:endParaRPr lang="en-US" altLang="zh-CN" b="1" dirty="0">
+              <a:solidFill>
+                <a:srgbClr val="222226"/>
+              </a:solidFill>
+              <a:latin typeface="PingFang SC"/>
+            </a:endParaRPr>
+          </a:p>
+          <a:p>
+            <a:pPr>
+              <a:lnSpc>
+                <a:spcPct val="150000"/>
+              </a:lnSpc>
+            </a:pPr>
+            <a:endParaRPr lang="en-US" altLang="zh-CN" b="1" dirty="0">
+              <a:solidFill>
+                <a:srgbClr val="222226"/>
+              </a:solidFill>
+              <a:latin typeface="PingFang SC"/>
+            </a:endParaRPr>
+          </a:p>
+          <a:p>
+            <a:pPr>
+              <a:lnSpc>
+                <a:spcPct val="150000"/>
+              </a:lnSpc>
+            </a:pPr>
+            <a:r>
+              <a:rPr lang="zh-CN" altLang="en-US" dirty="0">
+                <a:solidFill>
+                  <a:srgbClr val="222226"/>
+                </a:solidFill>
+                <a:latin typeface="PingFang SC"/>
+              </a:rPr>
+              <a:t>现有的主要有图示</a:t>
+            </a:r>
+            <a:r>
+              <a:rPr lang="zh-CN" altLang="en-US" i="0" dirty="0">
+                <a:solidFill>
+                  <a:srgbClr val="222226"/>
+                </a:solidFill>
+                <a:effectLst/>
+                <a:latin typeface="PingFang SC"/>
+              </a:rPr>
+              <a:t>四种</a:t>
+            </a:r>
+            <a:r>
+              <a:rPr lang="en-US" altLang="zh-CN" i="0" dirty="0">
+                <a:solidFill>
+                  <a:srgbClr val="222226"/>
+                </a:solidFill>
+                <a:effectLst/>
+                <a:latin typeface="PingFang SC"/>
+              </a:rPr>
+              <a:t>IO</a:t>
+            </a:r>
+            <a:r>
+              <a:rPr lang="zh-CN" altLang="en-US" i="0" dirty="0">
+                <a:solidFill>
+                  <a:srgbClr val="222226"/>
+                </a:solidFill>
+                <a:effectLst/>
+                <a:latin typeface="PingFang SC"/>
+              </a:rPr>
+              <a:t>栈</a:t>
+            </a:r>
+            <a:r>
+              <a:rPr lang="zh-CN" altLang="en-US" dirty="0">
+                <a:solidFill>
+                  <a:srgbClr val="222226"/>
+                </a:solidFill>
+                <a:latin typeface="PingFang SC"/>
+              </a:rPr>
+              <a:t>。现代的用户空间</a:t>
+            </a:r>
+            <a:r>
+              <a:rPr lang="en-US" altLang="zh-CN" dirty="0">
+                <a:solidFill>
+                  <a:srgbClr val="222226"/>
+                </a:solidFill>
+                <a:latin typeface="PingFang SC"/>
+              </a:rPr>
+              <a:t>I/O</a:t>
+            </a:r>
+            <a:r>
+              <a:rPr lang="zh-CN" altLang="en-US" dirty="0">
+                <a:solidFill>
+                  <a:srgbClr val="222226"/>
+                </a:solidFill>
+                <a:latin typeface="PingFang SC"/>
+              </a:rPr>
+              <a:t>接口：</a:t>
+            </a:r>
+            <a:r>
+              <a:rPr lang="en-US" altLang="zh-CN" dirty="0" err="1">
+                <a:solidFill>
+                  <a:srgbClr val="222226"/>
+                </a:solidFill>
+                <a:latin typeface="PingFang SC"/>
+              </a:rPr>
+              <a:t>io_uring</a:t>
+            </a:r>
+            <a:r>
+              <a:rPr lang="zh-CN" altLang="en-US" dirty="0">
+                <a:solidFill>
+                  <a:srgbClr val="222226"/>
+                </a:solidFill>
+                <a:latin typeface="PingFang SC"/>
+              </a:rPr>
+              <a:t>、</a:t>
+            </a:r>
+            <a:r>
+              <a:rPr lang="en-US" altLang="zh-CN" dirty="0" err="1">
+                <a:solidFill>
+                  <a:srgbClr val="222226"/>
+                </a:solidFill>
+                <a:latin typeface="PingFang SC"/>
+              </a:rPr>
+              <a:t>spdk</a:t>
+            </a:r>
+            <a:r>
+              <a:rPr lang="zh-CN" altLang="en-US" dirty="0">
+                <a:solidFill>
+                  <a:srgbClr val="222226"/>
+                </a:solidFill>
+                <a:latin typeface="PingFang SC"/>
+              </a:rPr>
+              <a:t>等</a:t>
+            </a:r>
+            <a:endParaRPr lang="en-US" altLang="zh-CN" dirty="0">
+              <a:solidFill>
+                <a:srgbClr val="222226"/>
+              </a:solidFill>
+              <a:latin typeface="PingFang SC"/>
+            </a:endParaRPr>
+          </a:p>
+          <a:p>
+            <a:pPr>
+              <a:lnSpc>
+                <a:spcPct val="150000"/>
+              </a:lnSpc>
+            </a:pPr>
+            <a:endParaRPr lang="zh-CN" altLang="en-US" i="0" dirty="0">
+              <a:solidFill>
+                <a:srgbClr val="222226"/>
+              </a:solidFill>
+              <a:effectLst/>
+              <a:latin typeface="PingFang SC"/>
+            </a:endParaRPr>
+          </a:p>
+        </p:txBody>
+      </p:sp>
+      <p:sp>
+        <p:nvSpPr>
+          <p:cNvPr id="3" name="文本框 2">
+            <a:extLst>
+              <a:ext uri="{FF2B5EF4-FFF2-40B4-BE49-F238E27FC236}">
+                <a16:creationId xmlns:a16="http://schemas.microsoft.com/office/drawing/2014/main" id="{DEB44779-53D4-7056-169D-EB471F9F0E95}"/>
+              </a:ext>
+            </a:extLst>
+          </p:cNvPr>
           <p:cNvSpPr txBox="1"/>
           <p:nvPr/>
         </p:nvSpPr>
@@ -19822,7 +21414,7 @@
               <a:defRPr/>
             </a:pPr>
             <a:r>
-              <a:rPr lang="zh-CN" altLang="en-US" sz="3200" b="1" dirty="0">
+              <a:rPr lang="en-US" altLang="zh-CN" sz="3200" b="1" dirty="0">
                 <a:solidFill>
                   <a:srgbClr val="4747BA"/>
                 </a:solidFill>
@@ -19830,49 +21422,17 @@
                 <a:ea typeface="腾讯体 W3" panose="020C04030202040F0204" pitchFamily="34" charset="-122"/>
                 <a:cs typeface="Times" panose="02020603050405020304" pitchFamily="18" charset="0"/>
               </a:rPr>
-              <a:t>未来发展</a:t>
-            </a:r>
-            <a:endParaRPr lang="en-US" altLang="zh-CN" sz="3200" b="1" dirty="0">
-              <a:solidFill>
-                <a:srgbClr val="4747BA"/>
-              </a:solidFill>
-              <a:latin typeface="Constantia" panose="02030602050306030303" pitchFamily="18" charset="0"/>
-              <a:ea typeface="腾讯体 W3" panose="020C04030202040F0204" pitchFamily="34" charset="-122"/>
-              <a:cs typeface="Times" panose="02020603050405020304" pitchFamily="18" charset="0"/>
-            </a:endParaRPr>
-          </a:p>
-        </p:txBody>
-      </p:sp>
-      <p:pic>
-        <p:nvPicPr>
-          <p:cNvPr id="6" name="图片 5"/>
-          <p:cNvPicPr>
-            <a:picLocks noChangeAspect="1"/>
-          </p:cNvPicPr>
-          <p:nvPr/>
-        </p:nvPicPr>
-        <p:blipFill>
-          <a:blip r:embed="rId5"/>
-          <a:stretch>
-            <a:fillRect/>
-          </a:stretch>
-        </p:blipFill>
-        <p:spPr>
-          <a:xfrm>
-            <a:off x="3444240" y="7169150"/>
-            <a:ext cx="5172075" cy="1619250"/>
-          </a:xfrm>
-          <a:prstGeom prst="rect">
-            <a:avLst/>
-          </a:prstGeom>
-        </p:spPr>
-      </p:pic>
-      <p:sp>
-        <p:nvSpPr>
-          <p:cNvPr id="15" name="文本框 14">
+              <a:t>LINUX I/O</a:t>
+            </a:r>
+          </a:p>
+        </p:txBody>
+      </p:sp>
+      <p:sp>
+        <p:nvSpPr>
+          <p:cNvPr id="4" name="文本框 3">
             <a:extLst>
               <a:ext uri="{FF2B5EF4-FFF2-40B4-BE49-F238E27FC236}">
-                <a16:creationId xmlns:a16="http://schemas.microsoft.com/office/drawing/2014/main" id="{A42DD39C-9468-4C42-1F98-C6F771CE0FF2}"/>
+                <a16:creationId xmlns:a16="http://schemas.microsoft.com/office/drawing/2014/main" id="{AE7560BC-2982-36AC-43D7-F64EB51EACD3}"/>
               </a:ext>
             </a:extLst>
           </p:cNvPr>
@@ -19881,8 +21441,8 @@
         </p:nvSpPr>
         <p:spPr>
           <a:xfrm>
-            <a:off x="396239" y="1357786"/>
-            <a:ext cx="10618505" cy="4190121"/>
+            <a:off x="386237" y="4100155"/>
+            <a:ext cx="5342110" cy="1711944"/>
           </a:xfrm>
           <a:prstGeom prst="rect">
             <a:avLst/>
@@ -19895,135 +21455,68 @@
           </a:bodyPr>
           <a:lstStyle/>
           <a:p>
-            <a:pPr marL="285750" indent="-285750" eaLnBrk="0" fontAlgn="base" hangingPunct="0">
+            <a:pPr>
               <a:lnSpc>
                 <a:spcPct val="150000"/>
               </a:lnSpc>
-              <a:spcBef>
-                <a:spcPct val="0"/>
-              </a:spcBef>
-              <a:spcAft>
-                <a:spcPct val="0"/>
-              </a:spcAft>
-              <a:buFont typeface="Arial" panose="020B0604020202020204" pitchFamily="34" charset="0"/>
-              <a:buChar char="•"/>
             </a:pPr>
-            <a:r>
-              <a:rPr lang="zh-CN" altLang="en-US" dirty="0">
-                <a:solidFill>
-                  <a:srgbClr val="34495E"/>
-                </a:solidFill>
-                <a:latin typeface="Ubuntu" panose="020B0504030602030204" pitchFamily="34" charset="0"/>
-              </a:rPr>
-              <a:t>在应用级别，在</a:t>
-            </a:r>
-            <a:r>
-              <a:rPr lang="en-US" altLang="zh-CN" dirty="0">
-                <a:solidFill>
-                  <a:srgbClr val="34495E"/>
-                </a:solidFill>
-                <a:latin typeface="Ubuntu" panose="020B0504030602030204" pitchFamily="34" charset="0"/>
-              </a:rPr>
-              <a:t>KV</a:t>
-            </a:r>
-            <a:r>
-              <a:rPr lang="zh-CN" altLang="en-US" dirty="0">
-                <a:solidFill>
-                  <a:srgbClr val="34495E"/>
-                </a:solidFill>
-                <a:latin typeface="Ubuntu" panose="020B0504030602030204" pitchFamily="34" charset="0"/>
-              </a:rPr>
-              <a:t>存储领域（</a:t>
-            </a:r>
-            <a:r>
-              <a:rPr lang="en-US" altLang="zh-CN" dirty="0">
-                <a:solidFill>
-                  <a:srgbClr val="34495E"/>
-                </a:solidFill>
-                <a:latin typeface="Ubuntu" panose="020B0504030602030204" pitchFamily="34" charset="0"/>
-              </a:rPr>
-              <a:t>append</a:t>
-            </a:r>
-            <a:r>
-              <a:rPr lang="zh-CN" altLang="en-US" dirty="0">
-                <a:solidFill>
-                  <a:srgbClr val="34495E"/>
-                </a:solidFill>
-                <a:latin typeface="Ubuntu" panose="020B0504030602030204" pitchFamily="34" charset="0"/>
-              </a:rPr>
-              <a:t>模式的数据存储引擎），在上述路线上的进一步优化，终极目标：</a:t>
-            </a:r>
-            <a:r>
-              <a:rPr lang="en-US" altLang="zh-CN" dirty="0">
-                <a:solidFill>
-                  <a:srgbClr val="34495E"/>
-                </a:solidFill>
-                <a:latin typeface="Ubuntu" panose="020B0504030602030204" pitchFamily="34" charset="0"/>
-              </a:rPr>
-              <a:t>LSM GC = SSD GC</a:t>
-            </a:r>
-          </a:p>
-          <a:p>
-            <a:pPr marL="285750" indent="-285750" eaLnBrk="0" fontAlgn="base" hangingPunct="0">
+            <a:endParaRPr lang="en-US" altLang="zh-CN" dirty="0">
+              <a:solidFill>
+                <a:srgbClr val="222226"/>
+              </a:solidFill>
+              <a:latin typeface="PingFang SC"/>
+            </a:endParaRPr>
+          </a:p>
+          <a:p>
+            <a:pPr>
               <a:lnSpc>
                 <a:spcPct val="150000"/>
               </a:lnSpc>
-              <a:spcBef>
-                <a:spcPct val="0"/>
-              </a:spcBef>
-              <a:spcAft>
-                <a:spcPct val="0"/>
-              </a:spcAft>
-              <a:buFont typeface="Arial" panose="020B0604020202020204" pitchFamily="34" charset="0"/>
-              <a:buChar char="•"/>
             </a:pPr>
-            <a:endParaRPr lang="en-US" altLang="zh-CN" dirty="0">
-              <a:solidFill>
-                <a:srgbClr val="34495E"/>
-              </a:solidFill>
-              <a:latin typeface="Ubuntu" panose="020B0504030602030204" pitchFamily="34" charset="0"/>
-            </a:endParaRPr>
-          </a:p>
-          <a:p>
-            <a:pPr marL="285750" indent="-285750" eaLnBrk="0" fontAlgn="base" hangingPunct="0">
-              <a:lnSpc>
-                <a:spcPct val="150000"/>
-              </a:lnSpc>
-              <a:spcBef>
-                <a:spcPct val="0"/>
-              </a:spcBef>
-              <a:spcAft>
-                <a:spcPct val="0"/>
-              </a:spcAft>
-              <a:buFont typeface="Arial" panose="020B0604020202020204" pitchFamily="34" charset="0"/>
-              <a:buChar char="•"/>
-            </a:pPr>
             <a:r>
               <a:rPr lang="zh-CN" altLang="en-US" dirty="0">
                 <a:solidFill>
-                  <a:srgbClr val="34495E"/>
-                </a:solidFill>
-                <a:latin typeface="Ubuntu" panose="020B0504030602030204" pitchFamily="34" charset="0"/>
-              </a:rPr>
-              <a:t>在系统级，我们需要一个通用的裸盘</a:t>
+                  <a:srgbClr val="222226"/>
+                </a:solidFill>
+                <a:latin typeface="PingFang SC"/>
+              </a:rPr>
+              <a:t>刚才提到的</a:t>
             </a:r>
             <a:r>
               <a:rPr lang="en-US" altLang="zh-CN" dirty="0">
                 <a:solidFill>
-                  <a:srgbClr val="34495E"/>
-                </a:solidFill>
-                <a:latin typeface="Ubuntu" panose="020B0504030602030204" pitchFamily="34" charset="0"/>
-              </a:rPr>
-              <a:t>IO</a:t>
+                  <a:srgbClr val="222226"/>
+                </a:solidFill>
+                <a:latin typeface="PingFang SC"/>
+              </a:rPr>
+              <a:t>FAST</a:t>
             </a:r>
             <a:r>
               <a:rPr lang="zh-CN" altLang="en-US" dirty="0">
                 <a:solidFill>
-                  <a:srgbClr val="34495E"/>
-                </a:solidFill>
-                <a:latin typeface="Ubuntu" panose="020B0504030602030204" pitchFamily="34" charset="0"/>
-              </a:rPr>
-              <a:t>层：</a:t>
+                  <a:srgbClr val="222226"/>
+                </a:solidFill>
+                <a:latin typeface="PingFang SC"/>
+              </a:rPr>
+              <a:t>’</a:t>
+            </a:r>
+            <a:r>
+              <a:rPr lang="en-US" altLang="zh-CN" dirty="0">
+                <a:solidFill>
+                  <a:srgbClr val="222226"/>
+                </a:solidFill>
+                <a:latin typeface="PingFang SC"/>
+              </a:rPr>
+              <a:t>24</a:t>
+            </a:r>
+            <a:r>
+              <a:rPr lang="zh-CN" altLang="en-US" dirty="0">
+                <a:solidFill>
+                  <a:srgbClr val="222226"/>
+                </a:solidFill>
+                <a:latin typeface="PingFang SC"/>
+              </a:rPr>
+              <a:t>中的</a:t>
             </a:r>
             <a:r>
               <a:rPr lang="en-US" altLang="zh-CN" b="0" i="0" dirty="0">
@@ -20033,65 +21526,56 @@
                 <a:effectLst/>
                 <a:latin typeface="-apple-system"/>
               </a:rPr>
-              <a:t> </a:t>
-            </a:r>
-            <a:r>
-              <a:rPr lang="zh-CN" altLang="en-US" dirty="0">
-                <a:solidFill>
-                  <a:srgbClr val="191B1F"/>
-                </a:solidFill>
-                <a:latin typeface="-apple-system"/>
-              </a:rPr>
-              <a:t>为存储设备</a:t>
-            </a:r>
-            <a:r>
-              <a:rPr lang="zh-CN" altLang="en-US" b="0" i="0" dirty="0">
+              <a:t>I/O </a:t>
+            </a:r>
+            <a:r>
+              <a:rPr lang="en-US" altLang="zh-CN" b="0" i="0" dirty="0" err="1">
                 <a:solidFill>
                   <a:srgbClr val="191B1F"/>
                 </a:solidFill>
                 <a:effectLst/>
                 <a:latin typeface="-apple-system"/>
               </a:rPr>
-              <a:t>封装出一套统一的抽象接口，并且兼容现有的所有应用。这个接口对下可以</a:t>
-            </a:r>
-            <a:r>
-              <a:rPr lang="zh-CN" altLang="en-US" dirty="0">
-                <a:solidFill>
-                  <a:srgbClr val="191B1F"/>
-                </a:solidFill>
-                <a:latin typeface="-apple-system"/>
-              </a:rPr>
-              <a:t>支持：</a:t>
-            </a:r>
-            <a:r>
-              <a:rPr lang="en-US" altLang="zh-CN" b="0" i="0" dirty="0">
+              <a:t>Passthru</a:t>
+            </a:r>
+            <a:r>
+              <a:rPr lang="zh-CN" altLang="en-US" b="0" i="0" dirty="0">
                 <a:solidFill>
                   <a:srgbClr val="191B1F"/>
                 </a:solidFill>
                 <a:effectLst/>
                 <a:latin typeface="-apple-system"/>
               </a:rPr>
-              <a:t>ZNS</a:t>
-            </a:r>
-            <a:r>
-              <a:rPr lang="zh-CN" altLang="en-US" b="0" i="0" dirty="0">
+              <a:t>，讨论了现有的</a:t>
+            </a:r>
+            <a:r>
+              <a:rPr lang="en-US" altLang="zh-CN" b="0" i="0" dirty="0">
                 <a:solidFill>
                   <a:srgbClr val="191B1F"/>
                 </a:solidFill>
                 <a:effectLst/>
                 <a:latin typeface="-apple-system"/>
               </a:rPr>
-              <a:t>，</a:t>
-            </a:r>
-            <a:r>
-              <a:rPr lang="en-US" altLang="zh-CN" b="0" i="0" dirty="0">
+              <a:t>IO</a:t>
+            </a:r>
+            <a:r>
+              <a:rPr lang="zh-CN" altLang="en-US" b="0" i="0" dirty="0">
                 <a:solidFill>
                   <a:srgbClr val="191B1F"/>
                 </a:solidFill>
                 <a:effectLst/>
                 <a:latin typeface="-apple-system"/>
               </a:rPr>
-              <a:t> Optane SSD </a:t>
+              <a:t>栈</a:t>
+            </a:r>
+            <a:r>
+              <a:rPr lang="zh-CN" altLang="en-US" dirty="0">
+                <a:solidFill>
+                  <a:srgbClr val="191B1F"/>
+                </a:solidFill>
+                <a:latin typeface="-apple-system"/>
+              </a:rPr>
+              <a:t>，</a:t>
             </a:r>
             <a:r>
               <a:rPr lang="zh-CN" altLang="en-US" b="0" i="0" dirty="0">
@@ -20101,7 +21585,7 @@
                 <a:effectLst/>
                 <a:latin typeface="-apple-system"/>
               </a:rPr>
-              <a:t>，</a:t>
+              <a:t>提出一种新的</a:t>
             </a:r>
             <a:r>
               <a:rPr lang="en-US" altLang="zh-CN" b="0" i="0" dirty="0">
@@ -20111,7 +21595,7 @@
                 <a:effectLst/>
                 <a:latin typeface="-apple-system"/>
               </a:rPr>
-              <a:t>TLC/QLC SSD … </a:t>
+              <a:t>I/O</a:t>
             </a:r>
             <a:r>
               <a:rPr lang="zh-CN" altLang="en-US" dirty="0">
@@ -20120,7 +21604,7 @@
                 </a:solidFill>
                 <a:latin typeface="-apple-system"/>
               </a:rPr>
-              <a:t>到目前为止，</a:t>
+              <a:t>旁路</a:t>
             </a:r>
             <a:r>
               <a:rPr lang="zh-CN" altLang="en-US" b="0" i="0" dirty="0">
@@ -20130,1152 +21614,108 @@
                 <a:effectLst/>
                 <a:latin typeface="-apple-system"/>
               </a:rPr>
-              <a:t>无论是</a:t>
-            </a:r>
-            <a:r>
-              <a:rPr lang="en-US" altLang="zh-CN" dirty="0">
+              <a:t>，已经并入主流</a:t>
+            </a:r>
+            <a:r>
+              <a:rPr lang="en-US" altLang="zh-CN" b="0" i="0" dirty="0">
                 <a:solidFill>
                   <a:srgbClr val="191B1F"/>
                 </a:solidFill>
+                <a:effectLst/>
                 <a:latin typeface="-apple-system"/>
               </a:rPr>
-              <a:t>OC-SSD</a:t>
-            </a:r>
-            <a:r>
-              <a:rPr lang="zh-CN" altLang="en-US" dirty="0">
+              <a:t>Linux</a:t>
+            </a:r>
+            <a:r>
+              <a:rPr lang="zh-CN" altLang="en-US" b="0" i="0" dirty="0">
                 <a:solidFill>
                   <a:srgbClr val="191B1F"/>
                 </a:solidFill>
+                <a:effectLst/>
                 <a:latin typeface="-apple-system"/>
               </a:rPr>
-              <a:t>、</a:t>
-            </a:r>
-            <a:r>
-              <a:rPr lang="en-US" altLang="zh-CN" dirty="0">
+              <a:t>内核，能够更好地利用</a:t>
+            </a:r>
+            <a:r>
+              <a:rPr lang="en-US" altLang="zh-CN" b="0" i="0" dirty="0">
                 <a:solidFill>
                   <a:srgbClr val="191B1F"/>
                 </a:solidFill>
+                <a:effectLst/>
                 <a:latin typeface="-apple-system"/>
               </a:rPr>
-              <a:t>Stream-SSD</a:t>
-            </a:r>
-            <a:r>
-              <a:rPr lang="zh-CN" altLang="en-US" dirty="0">
+              <a:t>NVME</a:t>
+            </a:r>
+            <a:r>
+              <a:rPr lang="zh-CN" altLang="en-US" b="0" i="0" dirty="0">
                 <a:solidFill>
                   <a:srgbClr val="191B1F"/>
                 </a:solidFill>
+                <a:effectLst/>
                 <a:latin typeface="-apple-system"/>
               </a:rPr>
-              <a:t>、</a:t>
-            </a:r>
-            <a:r>
-              <a:rPr lang="en-US" altLang="zh-CN" dirty="0">
-                <a:solidFill>
-                  <a:srgbClr val="191B1F"/>
-                </a:solidFill>
-                <a:latin typeface="-apple-system"/>
-              </a:rPr>
-              <a:t>ZNS</a:t>
-            </a:r>
-            <a:r>
-              <a:rPr lang="zh-CN" altLang="en-US" dirty="0">
-                <a:solidFill>
-                  <a:srgbClr val="191B1F"/>
-                </a:solidFill>
-                <a:latin typeface="-apple-system"/>
-              </a:rPr>
-              <a:t>甚至包括近存计算等技术，都有一个共性问题</a:t>
-            </a:r>
-            <a:r>
-              <a:rPr lang="zh-CN" altLang="en-US">
-                <a:solidFill>
-                  <a:srgbClr val="191B1F"/>
-                </a:solidFill>
-                <a:latin typeface="-apple-system"/>
-              </a:rPr>
-              <a:t>，工程师想要的是</a:t>
-            </a:r>
-            <a:r>
-              <a:rPr lang="zh-CN" altLang="en-US" dirty="0">
-                <a:solidFill>
-                  <a:srgbClr val="191B1F"/>
-                </a:solidFill>
-                <a:latin typeface="-apple-system"/>
-              </a:rPr>
-              <a:t>尽可能少更改现有应用（甚至不更改）， 就能达到更好的性能。</a:t>
-            </a:r>
-            <a:endParaRPr lang="en-US" altLang="zh-CN" b="0" i="0" dirty="0">
+              <a:t>设备。</a:t>
+            </a:r>
+            <a:endParaRPr lang="en-US" altLang="zh-CN" b="1" dirty="0">
               <a:solidFill>
-                <a:srgbClr val="191B1F"/>
+                <a:srgbClr val="222226"/>
               </a:solidFill>
-              <a:effectLst/>
-              <a:latin typeface="-apple-system"/>
-            </a:endParaRPr>
-          </a:p>
-          <a:p>
-            <a:pPr marL="285750" indent="-285750" eaLnBrk="0" fontAlgn="base" hangingPunct="0">
-              <a:lnSpc>
-                <a:spcPct val="150000"/>
-              </a:lnSpc>
-              <a:spcBef>
-                <a:spcPct val="0"/>
-              </a:spcBef>
-              <a:spcAft>
-                <a:spcPct val="0"/>
-              </a:spcAft>
-              <a:buFont typeface="Arial" panose="020B0604020202020204" pitchFamily="34" charset="0"/>
-              <a:buChar char="•"/>
-            </a:pPr>
-            <a:endParaRPr lang="en-US" altLang="zh-CN" b="0" i="0" dirty="0">
-              <a:solidFill>
-                <a:srgbClr val="191B1F"/>
-              </a:solidFill>
-              <a:effectLst/>
-              <a:latin typeface="-apple-system"/>
-            </a:endParaRPr>
-          </a:p>
-          <a:p>
-            <a:pPr marL="285750" indent="-285750" eaLnBrk="0" fontAlgn="base" hangingPunct="0">
-              <a:lnSpc>
-                <a:spcPct val="150000"/>
-              </a:lnSpc>
-              <a:spcBef>
-                <a:spcPct val="0"/>
-              </a:spcBef>
-              <a:spcAft>
-                <a:spcPct val="0"/>
-              </a:spcAft>
-              <a:buFont typeface="Arial" panose="020B0604020202020204" pitchFamily="34" charset="0"/>
-              <a:buChar char="•"/>
-            </a:pPr>
-            <a:r>
-              <a:rPr lang="zh-CN" altLang="en-US" dirty="0">
-                <a:solidFill>
-                  <a:srgbClr val="34495E"/>
-                </a:solidFill>
-                <a:latin typeface="Ubuntu" panose="020B0504030602030204" pitchFamily="34" charset="0"/>
-              </a:rPr>
-              <a:t>在硬件级，</a:t>
-            </a:r>
-            <a:r>
-              <a:rPr lang="en-US" altLang="zh-CN" dirty="0">
-                <a:solidFill>
-                  <a:srgbClr val="34495E"/>
-                </a:solidFill>
-                <a:latin typeface="Ubuntu" panose="020B0504030602030204" pitchFamily="34" charset="0"/>
-              </a:rPr>
-              <a:t>Zone</a:t>
-            </a:r>
-            <a:r>
-              <a:rPr lang="zh-CN" altLang="en-US" dirty="0">
-                <a:solidFill>
-                  <a:srgbClr val="34495E"/>
-                </a:solidFill>
-                <a:latin typeface="Ubuntu" panose="020B0504030602030204" pitchFamily="34" charset="0"/>
-              </a:rPr>
-              <a:t> </a:t>
-            </a:r>
-            <a:r>
-              <a:rPr lang="en-US" altLang="zh-CN" dirty="0">
-                <a:solidFill>
-                  <a:srgbClr val="34495E"/>
-                </a:solidFill>
-                <a:latin typeface="Ubuntu" panose="020B0504030602030204" pitchFamily="34" charset="0"/>
-              </a:rPr>
-              <a:t>size</a:t>
-            </a:r>
-            <a:r>
-              <a:rPr lang="zh-CN" altLang="en-US" dirty="0">
-                <a:solidFill>
-                  <a:srgbClr val="34495E"/>
-                </a:solidFill>
-                <a:latin typeface="Ubuntu" panose="020B0504030602030204" pitchFamily="34" charset="0"/>
-              </a:rPr>
-              <a:t>的进一步讨论：</a:t>
-            </a:r>
-            <a:r>
-              <a:rPr lang="en-US" altLang="zh-CN" dirty="0">
-                <a:solidFill>
-                  <a:srgbClr val="34495E"/>
-                </a:solidFill>
-                <a:latin typeface="Ubuntu" panose="020B0504030602030204" pitchFamily="34" charset="0"/>
-              </a:rPr>
-              <a:t>Small zone</a:t>
-            </a:r>
-            <a:r>
-              <a:rPr lang="zh-CN" altLang="en-US" dirty="0">
-                <a:solidFill>
-                  <a:srgbClr val="34495E"/>
-                </a:solidFill>
-                <a:latin typeface="Ubuntu" panose="020B0504030602030204" pitchFamily="34" charset="0"/>
-              </a:rPr>
-              <a:t>，例如</a:t>
-            </a:r>
-            <a:r>
-              <a:rPr lang="en-US" altLang="zh-CN" dirty="0">
-                <a:solidFill>
-                  <a:srgbClr val="34495E"/>
-                </a:solidFill>
-                <a:latin typeface="Ubuntu" panose="020B0504030602030204" pitchFamily="34" charset="0"/>
-              </a:rPr>
-              <a:t>96MB</a:t>
-            </a:r>
-            <a:r>
-              <a:rPr lang="zh-CN" altLang="en-US" dirty="0">
-                <a:solidFill>
-                  <a:srgbClr val="34495E"/>
-                </a:solidFill>
-                <a:latin typeface="Ubuntu" panose="020B0504030602030204" pitchFamily="34" charset="0"/>
-              </a:rPr>
-              <a:t>，与擦除单元保持一致。</a:t>
-            </a:r>
-            <a:endParaRPr lang="en-US" altLang="zh-CN" dirty="0">
-              <a:solidFill>
-                <a:srgbClr val="34495E"/>
-              </a:solidFill>
-              <a:latin typeface="Ubuntu" panose="020B0504030602030204" pitchFamily="34" charset="0"/>
-            </a:endParaRPr>
-          </a:p>
-          <a:p>
-            <a:pPr marL="285750" indent="-285750" eaLnBrk="0" fontAlgn="base" hangingPunct="0">
-              <a:lnSpc>
-                <a:spcPct val="150000"/>
-              </a:lnSpc>
-              <a:spcBef>
-                <a:spcPct val="0"/>
-              </a:spcBef>
-              <a:spcAft>
-                <a:spcPct val="0"/>
-              </a:spcAft>
-              <a:buFont typeface="Arial" panose="020B0604020202020204" pitchFamily="34" charset="0"/>
-              <a:buChar char="•"/>
-            </a:pPr>
-            <a:endParaRPr lang="en-US" altLang="zh-CN" dirty="0">
-              <a:solidFill>
-                <a:srgbClr val="34495E"/>
-              </a:solidFill>
-              <a:latin typeface="Ubuntu" panose="020B0504030602030204" pitchFamily="34" charset="0"/>
-            </a:endParaRPr>
-          </a:p>
-        </p:txBody>
-      </p:sp>
-    </p:spTree>
-    <p:extLst>
-      <p:ext uri="{BB962C8B-B14F-4D97-AF65-F5344CB8AC3E}">
-        <p14:creationId xmlns:p14="http://schemas.microsoft.com/office/powerpoint/2010/main" val="813606937"/>
-      </p:ext>
-    </p:extLst>
-  </p:cSld>
-  <p:clrMapOvr>
-    <a:masterClrMapping/>
-  </p:clrMapOvr>
-  <mc:AlternateContent xmlns:mc="http://schemas.openxmlformats.org/markup-compatibility/2006" xmlns:p14="http://schemas.microsoft.com/office/powerpoint/2010/main">
-    <mc:Choice Requires="p14">
-      <p:transition p14:dur="10" advClick="0"/>
-    </mc:Choice>
-    <mc:Fallback xmlns="">
-      <p:transition advClick="0"/>
-    </mc:Fallback>
-  </mc:AlternateContent>
-</p:sld>
-</file>
-
-<file path=ppt/slides/slide9.xml><?xml version="1.0" encoding="utf-8"?>
-<p:sld xmlns:a="http://schemas.openxmlformats.org/drawingml/2006/main" xmlns:r="http://schemas.openxmlformats.org/officeDocument/2006/relationships" xmlns:p="http://schemas.openxmlformats.org/presentationml/2006/main">
-  <p:cSld>
-    <p:spTree>
-      <p:nvGrpSpPr>
-        <p:cNvPr id="1" name=""/>
-        <p:cNvGrpSpPr/>
-        <p:nvPr/>
-      </p:nvGrpSpPr>
-      <p:grpSpPr>
-        <a:xfrm>
-          <a:off x="0" y="0"/>
-          <a:ext cx="0" cy="0"/>
-          <a:chOff x="0" y="0"/>
-          <a:chExt cx="0" cy="0"/>
-        </a:xfrm>
-      </p:grpSpPr>
-      <p:sp>
-        <p:nvSpPr>
-          <p:cNvPr id="17" name="矩形 16"/>
-          <p:cNvSpPr/>
-          <p:nvPr/>
-        </p:nvSpPr>
-        <p:spPr>
-          <a:xfrm>
-            <a:off x="0" y="6522720"/>
-            <a:ext cx="4267200" cy="335280"/>
-          </a:xfrm>
-          <a:prstGeom prst="rect">
-            <a:avLst/>
-          </a:prstGeom>
-          <a:solidFill>
-            <a:srgbClr val="4747BA"/>
-          </a:solidFill>
-          <a:ln>
-            <a:noFill/>
-          </a:ln>
-        </p:spPr>
-        <p:style>
-          <a:lnRef idx="2">
-            <a:schemeClr val="accent1">
-              <a:shade val="50000"/>
-            </a:schemeClr>
-          </a:lnRef>
-          <a:fillRef idx="1">
-            <a:schemeClr val="accent1"/>
-          </a:fillRef>
-          <a:effectRef idx="0">
-            <a:schemeClr val="accent1"/>
-          </a:effectRef>
-          <a:fontRef idx="minor">
-            <a:schemeClr val="lt1"/>
-          </a:fontRef>
-        </p:style>
-        <p:txBody>
-          <a:bodyPr rtlCol="0" anchor="ctr"/>
-          <a:lstStyle/>
-          <a:p>
-            <a:pPr algn="ctr"/>
-            <a:endParaRPr lang="zh-CN" altLang="en-US"/>
-          </a:p>
-        </p:txBody>
-      </p:sp>
-      <p:sp>
-        <p:nvSpPr>
-          <p:cNvPr id="18" name="矩形 17"/>
-          <p:cNvSpPr/>
-          <p:nvPr/>
-        </p:nvSpPr>
-        <p:spPr>
-          <a:xfrm>
-            <a:off x="4267200" y="6522720"/>
-            <a:ext cx="4267200" cy="335280"/>
-          </a:xfrm>
-          <a:prstGeom prst="rect">
-            <a:avLst/>
-          </a:prstGeom>
-          <a:solidFill>
-            <a:srgbClr val="8484D1"/>
-          </a:solidFill>
-          <a:ln>
-            <a:noFill/>
-          </a:ln>
-        </p:spPr>
-        <p:style>
-          <a:lnRef idx="2">
-            <a:schemeClr val="accent1">
-              <a:shade val="50000"/>
-            </a:schemeClr>
-          </a:lnRef>
-          <a:fillRef idx="1">
-            <a:schemeClr val="accent1"/>
-          </a:fillRef>
-          <a:effectRef idx="0">
-            <a:schemeClr val="accent1"/>
-          </a:effectRef>
-          <a:fontRef idx="minor">
-            <a:schemeClr val="lt1"/>
-          </a:fontRef>
-        </p:style>
-        <p:txBody>
-          <a:bodyPr rtlCol="0" anchor="ctr"/>
-          <a:lstStyle/>
-          <a:p>
-            <a:pPr algn="ctr"/>
-            <a:endParaRPr lang="zh-CN" altLang="en-US"/>
-          </a:p>
-        </p:txBody>
-      </p:sp>
-      <p:sp>
-        <p:nvSpPr>
-          <p:cNvPr id="20" name="矩形 19"/>
-          <p:cNvSpPr/>
-          <p:nvPr/>
-        </p:nvSpPr>
-        <p:spPr>
-          <a:xfrm>
-            <a:off x="8534400" y="6538313"/>
-            <a:ext cx="3657600" cy="335280"/>
-          </a:xfrm>
-          <a:prstGeom prst="rect">
-            <a:avLst/>
-          </a:prstGeom>
-          <a:solidFill>
-            <a:srgbClr val="ADADE0"/>
-          </a:solidFill>
-          <a:ln>
-            <a:noFill/>
-          </a:ln>
-        </p:spPr>
-        <p:style>
-          <a:lnRef idx="2">
-            <a:schemeClr val="accent1">
-              <a:shade val="50000"/>
-            </a:schemeClr>
-          </a:lnRef>
-          <a:fillRef idx="1">
-            <a:schemeClr val="accent1"/>
-          </a:fillRef>
-          <a:effectRef idx="0">
-            <a:schemeClr val="accent1"/>
-          </a:effectRef>
-          <a:fontRef idx="minor">
-            <a:schemeClr val="lt1"/>
-          </a:fontRef>
-        </p:style>
-        <p:txBody>
-          <a:bodyPr rot="0" spcFirstLastPara="0" vert="horz" wrap="square" lIns="91440" tIns="45720" rIns="91440" bIns="45720" numCol="1" spcCol="0" rtlCol="0" fromWordArt="0" anchor="ctr" anchorCtr="0" forceAA="0" compatLnSpc="1">
-            <a:noAutofit/>
-          </a:bodyPr>
-          <a:lstStyle>
-            <a:defPPr>
-              <a:defRPr lang="zh-CN"/>
-            </a:defPPr>
-            <a:lvl1pPr marL="0" algn="l" defTabSz="914400" rtl="0" eaLnBrk="1" latinLnBrk="0" hangingPunct="1">
-              <a:defRPr sz="1800" kern="1200">
-                <a:solidFill>
-                  <a:schemeClr val="lt1"/>
-                </a:solidFill>
-                <a:latin typeface="+mn-lt"/>
-                <a:ea typeface="+mn-ea"/>
-                <a:cs typeface="+mn-cs"/>
-              </a:defRPr>
-            </a:lvl1pPr>
-            <a:lvl2pPr marL="457200" algn="l" defTabSz="914400" rtl="0" eaLnBrk="1" latinLnBrk="0" hangingPunct="1">
-              <a:defRPr sz="1800" kern="1200">
-                <a:solidFill>
-                  <a:schemeClr val="lt1"/>
-                </a:solidFill>
-                <a:latin typeface="+mn-lt"/>
-                <a:ea typeface="+mn-ea"/>
-                <a:cs typeface="+mn-cs"/>
-              </a:defRPr>
-            </a:lvl2pPr>
-            <a:lvl3pPr marL="914400" algn="l" defTabSz="914400" rtl="0" eaLnBrk="1" latinLnBrk="0" hangingPunct="1">
-              <a:defRPr sz="1800" kern="1200">
-                <a:solidFill>
-                  <a:schemeClr val="lt1"/>
-                </a:solidFill>
-                <a:latin typeface="+mn-lt"/>
-                <a:ea typeface="+mn-ea"/>
-                <a:cs typeface="+mn-cs"/>
-              </a:defRPr>
-            </a:lvl3pPr>
-            <a:lvl4pPr marL="1371600" algn="l" defTabSz="914400" rtl="0" eaLnBrk="1" latinLnBrk="0" hangingPunct="1">
-              <a:defRPr sz="1800" kern="1200">
-                <a:solidFill>
-                  <a:schemeClr val="lt1"/>
-                </a:solidFill>
-                <a:latin typeface="+mn-lt"/>
-                <a:ea typeface="+mn-ea"/>
-                <a:cs typeface="+mn-cs"/>
-              </a:defRPr>
-            </a:lvl4pPr>
-            <a:lvl5pPr marL="1828800" algn="l" defTabSz="914400" rtl="0" eaLnBrk="1" latinLnBrk="0" hangingPunct="1">
-              <a:defRPr sz="1800" kern="1200">
-                <a:solidFill>
-                  <a:schemeClr val="lt1"/>
-                </a:solidFill>
-                <a:latin typeface="+mn-lt"/>
-                <a:ea typeface="+mn-ea"/>
-                <a:cs typeface="+mn-cs"/>
-              </a:defRPr>
-            </a:lvl5pPr>
-            <a:lvl6pPr marL="2286000" algn="l" defTabSz="914400" rtl="0" eaLnBrk="1" latinLnBrk="0" hangingPunct="1">
-              <a:defRPr sz="1800" kern="1200">
-                <a:solidFill>
-                  <a:schemeClr val="lt1"/>
-                </a:solidFill>
-                <a:latin typeface="+mn-lt"/>
-                <a:ea typeface="+mn-ea"/>
-                <a:cs typeface="+mn-cs"/>
-              </a:defRPr>
-            </a:lvl6pPr>
-            <a:lvl7pPr marL="2743200" algn="l" defTabSz="914400" rtl="0" eaLnBrk="1" latinLnBrk="0" hangingPunct="1">
-              <a:defRPr sz="1800" kern="1200">
-                <a:solidFill>
-                  <a:schemeClr val="lt1"/>
-                </a:solidFill>
-                <a:latin typeface="+mn-lt"/>
-                <a:ea typeface="+mn-ea"/>
-                <a:cs typeface="+mn-cs"/>
-              </a:defRPr>
-            </a:lvl7pPr>
-            <a:lvl8pPr marL="3200400" algn="l" defTabSz="914400" rtl="0" eaLnBrk="1" latinLnBrk="0" hangingPunct="1">
-              <a:defRPr sz="1800" kern="1200">
-                <a:solidFill>
-                  <a:schemeClr val="lt1"/>
-                </a:solidFill>
-                <a:latin typeface="+mn-lt"/>
-                <a:ea typeface="+mn-ea"/>
-                <a:cs typeface="+mn-cs"/>
-              </a:defRPr>
-            </a:lvl8pPr>
-            <a:lvl9pPr marL="3657600" algn="l" defTabSz="914400" rtl="0" eaLnBrk="1" latinLnBrk="0" hangingPunct="1">
-              <a:defRPr sz="1800" kern="1200">
-                <a:solidFill>
-                  <a:schemeClr val="lt1"/>
-                </a:solidFill>
-                <a:latin typeface="+mn-lt"/>
-                <a:ea typeface="+mn-ea"/>
-                <a:cs typeface="+mn-cs"/>
-              </a:defRPr>
-            </a:lvl9pPr>
-          </a:lstStyle>
-          <a:p>
-            <a:pPr algn="ctr"/>
-            <a:endParaRPr lang="zh-CN" altLang="en-US" sz="1600" dirty="0">
-              <a:solidFill>
-                <a:schemeClr val="bg1"/>
-              </a:solidFill>
-              <a:latin typeface="Constantia" panose="02030602050306030303" pitchFamily="18" charset="0"/>
-            </a:endParaRPr>
-          </a:p>
-        </p:txBody>
-      </p:sp>
-      <p:sp>
-        <p:nvSpPr>
-          <p:cNvPr id="24" name="日期占位符 7"/>
-          <p:cNvSpPr>
-            <a:spLocks noGrp="1"/>
-          </p:cNvSpPr>
-          <p:nvPr>
-            <p:ph type="dt" sz="half" idx="10"/>
-          </p:nvPr>
-        </p:nvSpPr>
-        <p:spPr>
-          <a:xfrm>
-            <a:off x="1209907" y="6494974"/>
-            <a:ext cx="1847385" cy="365125"/>
-          </a:xfrm>
-        </p:spPr>
-        <p:txBody>
-          <a:bodyPr/>
-          <a:lstStyle/>
-          <a:p>
-            <a:fld id="{31CCC338-FFC3-4940-99DD-6195BEF39901}" type="datetime4">
-              <a:rPr lang="en-US" altLang="zh-CN" sz="1400" b="1">
-                <a:solidFill>
-                  <a:schemeClr val="bg1"/>
-                </a:solidFill>
-                <a:latin typeface="Constantia" panose="02030602050306030303" pitchFamily="18" charset="0"/>
-                <a:cs typeface="Times" panose="02020603050405020304" pitchFamily="18" charset="0"/>
-              </a:rPr>
-              <a:t>April 9, 2024</a:t>
-            </a:fld>
-            <a:endParaRPr lang="zh-CN" altLang="en-US" sz="1400" b="1" dirty="0">
-              <a:solidFill>
-                <a:schemeClr val="bg1"/>
-              </a:solidFill>
-              <a:latin typeface="Constantia" panose="02030602050306030303" pitchFamily="18" charset="0"/>
-              <a:cs typeface="Times" panose="02020603050405020304" pitchFamily="18" charset="0"/>
-            </a:endParaRPr>
-          </a:p>
-        </p:txBody>
-      </p:sp>
-      <p:cxnSp>
-        <p:nvCxnSpPr>
-          <p:cNvPr id="26" name="直接连接符 25"/>
-          <p:cNvCxnSpPr/>
-          <p:nvPr/>
-        </p:nvCxnSpPr>
-        <p:spPr>
-          <a:xfrm>
-            <a:off x="385590" y="859531"/>
-            <a:ext cx="11479576" cy="0"/>
-          </a:xfrm>
-          <a:prstGeom prst="line">
-            <a:avLst/>
-          </a:prstGeom>
-          <a:ln w="38100">
-            <a:solidFill>
-              <a:srgbClr val="4747BA"/>
-            </a:solidFill>
-          </a:ln>
-        </p:spPr>
-        <p:style>
-          <a:lnRef idx="1">
-            <a:schemeClr val="accent1"/>
-          </a:lnRef>
-          <a:fillRef idx="0">
-            <a:schemeClr val="accent1"/>
-          </a:fillRef>
-          <a:effectRef idx="0">
-            <a:schemeClr val="accent1"/>
-          </a:effectRef>
-          <a:fontRef idx="minor">
-            <a:schemeClr val="tx1"/>
-          </a:fontRef>
-        </p:style>
-      </p:cxnSp>
-      <p:sp>
-        <p:nvSpPr>
-          <p:cNvPr id="19" name="文本框 18"/>
-          <p:cNvSpPr txBox="1"/>
-          <p:nvPr/>
-        </p:nvSpPr>
-        <p:spPr>
-          <a:xfrm>
-            <a:off x="385590" y="226263"/>
-            <a:ext cx="6798981" cy="590931"/>
-          </a:xfrm>
-          <a:prstGeom prst="rect">
-            <a:avLst/>
-          </a:prstGeom>
-          <a:noFill/>
-        </p:spPr>
-        <p:txBody>
-          <a:bodyPr wrap="square" rtlCol="0">
-            <a:spAutoFit/>
-          </a:bodyPr>
-          <a:lstStyle/>
-          <a:p>
-            <a:pPr>
-              <a:lnSpc>
-                <a:spcPct val="90000"/>
-              </a:lnSpc>
-              <a:spcBef>
-                <a:spcPts val="1000"/>
-              </a:spcBef>
-              <a:defRPr/>
-            </a:pPr>
-            <a:r>
-              <a:rPr lang="en-US" altLang="zh-CN" sz="3200" b="1" dirty="0">
-                <a:solidFill>
-                  <a:srgbClr val="4747BA"/>
-                </a:solidFill>
-                <a:latin typeface="Constantia" panose="02030602050306030303" pitchFamily="18" charset="0"/>
-                <a:ea typeface="腾讯体 W3" panose="020C04030202040F0204" pitchFamily="34" charset="-122"/>
-                <a:cs typeface="Times" panose="02020603050405020304" pitchFamily="18" charset="0"/>
-              </a:rPr>
-              <a:t> </a:t>
-            </a:r>
-            <a:r>
-              <a:rPr lang="zh-CN" altLang="en-US" sz="3200" b="1" dirty="0">
-                <a:solidFill>
-                  <a:srgbClr val="4747BA"/>
-                </a:solidFill>
-                <a:latin typeface="Constantia" panose="02030602050306030303" pitchFamily="18" charset="0"/>
-                <a:ea typeface="腾讯体 W3" panose="020C04030202040F0204" pitchFamily="34" charset="-122"/>
-                <a:cs typeface="Times" panose="02020603050405020304" pitchFamily="18" charset="0"/>
-              </a:rPr>
-              <a:t>最新文献</a:t>
-            </a:r>
-            <a:r>
-              <a:rPr lang="en-US" altLang="zh-CN" sz="3600" b="1" dirty="0">
-                <a:solidFill>
-                  <a:srgbClr val="4747BA"/>
-                </a:solidFill>
-                <a:latin typeface="Constantia" panose="02030602050306030303" pitchFamily="18" charset="0"/>
-                <a:ea typeface="腾讯体 W3" panose="020C04030202040F0204" pitchFamily="34" charset="-122"/>
-                <a:cs typeface="Times" panose="02020603050405020304" pitchFamily="18" charset="0"/>
-              </a:rPr>
-              <a:t> </a:t>
-            </a:r>
-            <a:endParaRPr lang="zh-CN" altLang="en-US" sz="3600" b="1" dirty="0">
-              <a:solidFill>
-                <a:srgbClr val="4747BA"/>
-              </a:solidFill>
-              <a:latin typeface="Constantia" panose="02030602050306030303" pitchFamily="18" charset="0"/>
-              <a:ea typeface="腾讯体 W3" panose="020C04030202040F0204" pitchFamily="34" charset="-122"/>
-              <a:cs typeface="Times" panose="02020603050405020304" pitchFamily="18" charset="0"/>
+              <a:latin typeface="PingFang SC"/>
             </a:endParaRPr>
           </a:p>
         </p:txBody>
       </p:sp>
       <p:pic>
         <p:nvPicPr>
-          <p:cNvPr id="23" name="图片 22"/>
+          <p:cNvPr id="1026" name="Picture 2">
+            <a:extLst>
+              <a:ext uri="{FF2B5EF4-FFF2-40B4-BE49-F238E27FC236}">
+                <a16:creationId xmlns:a16="http://schemas.microsoft.com/office/drawing/2014/main" id="{04376A6D-33D6-4AA3-B395-54E10B44FD43}"/>
+              </a:ext>
+            </a:extLst>
+          </p:cNvPr>
           <p:cNvPicPr>
-            <a:picLocks noChangeAspect="1"/>
+            <a:picLocks noChangeAspect="1" noChangeArrowheads="1"/>
           </p:cNvPicPr>
           <p:nvPr/>
         </p:nvPicPr>
         <p:blipFill>
-          <a:blip r:embed="rId3" cstate="print">
+          <a:blip r:embed="rId5">
             <a:extLst>
               <a:ext uri="{28A0092B-C50C-407E-A947-70E740481C1C}">
                 <a14:useLocalDpi xmlns:a14="http://schemas.microsoft.com/office/drawing/2010/main" val="0"/>
               </a:ext>
             </a:extLst>
           </a:blip>
+          <a:srcRect/>
           <a:stretch>
             <a:fillRect/>
           </a:stretch>
         </p:blipFill>
-        <p:spPr>
+        <p:spPr bwMode="auto">
           <a:xfrm>
-            <a:off x="7804063" y="218980"/>
-            <a:ext cx="730337" cy="556270"/>
-          </a:xfrm>
-          <a:prstGeom prst="rect">
-            <a:avLst/>
-          </a:prstGeom>
-        </p:spPr>
-      </p:pic>
-      <p:sp>
-        <p:nvSpPr>
-          <p:cNvPr id="14" name="灯片编号占位符 8"/>
-          <p:cNvSpPr>
-            <a:spLocks noGrp="1"/>
-          </p:cNvSpPr>
-          <p:nvPr>
-            <p:ph type="sldNum" sz="quarter" idx="12"/>
-          </p:nvPr>
-        </p:nvSpPr>
-        <p:spPr>
-          <a:xfrm>
-            <a:off x="9847869" y="6405035"/>
-            <a:ext cx="809393" cy="545001"/>
-          </a:xfrm>
-        </p:spPr>
-        <p:txBody>
-          <a:bodyPr/>
-          <a:lstStyle/>
-          <a:p>
-            <a:pPr algn="ctr"/>
-            <a:fld id="{152851E7-9224-42D2-A4FF-119762E40804}" type="slidenum">
-              <a:rPr lang="zh-CN" altLang="en-US" sz="1400" b="1" smtClean="0">
-                <a:solidFill>
-                  <a:schemeClr val="bg1"/>
-                </a:solidFill>
-                <a:latin typeface="Constantia" panose="02030602050306030303" pitchFamily="18" charset="0"/>
-                <a:cs typeface="Times" panose="02020603050405020304" pitchFamily="18" charset="0"/>
-              </a:rPr>
-              <a:t>9</a:t>
-            </a:fld>
-            <a:endParaRPr lang="zh-CN" altLang="en-US" sz="1400" b="1" dirty="0">
-              <a:solidFill>
-                <a:schemeClr val="bg1"/>
-              </a:solidFill>
-              <a:latin typeface="Constantia" panose="02030602050306030303" pitchFamily="18" charset="0"/>
-              <a:cs typeface="Times" panose="02020603050405020304" pitchFamily="18" charset="0"/>
-            </a:endParaRPr>
-          </a:p>
-        </p:txBody>
-      </p:sp>
-      <p:pic>
-        <p:nvPicPr>
-          <p:cNvPr id="44" name="图片 43"/>
-          <p:cNvPicPr>
-            <a:picLocks noChangeAspect="1"/>
-          </p:cNvPicPr>
-          <p:nvPr/>
-        </p:nvPicPr>
-        <p:blipFill>
-          <a:blip r:embed="rId4" cstate="print">
-            <a:extLst>
-              <a:ext uri="{28A0092B-C50C-407E-A947-70E740481C1C}">
-                <a14:useLocalDpi xmlns:a14="http://schemas.microsoft.com/office/drawing/2010/main" val="0"/>
-              </a:ext>
-            </a:extLst>
-          </a:blip>
-          <a:stretch>
-            <a:fillRect/>
-          </a:stretch>
-        </p:blipFill>
-        <p:spPr>
-          <a:xfrm>
-            <a:off x="8590829" y="204228"/>
-            <a:ext cx="3323471" cy="570629"/>
-          </a:xfrm>
-          <a:prstGeom prst="rect">
-            <a:avLst/>
-          </a:prstGeom>
-        </p:spPr>
-      </p:pic>
-      <p:sp>
-        <p:nvSpPr>
-          <p:cNvPr id="10" name="Fußzeilenplatzhalter 4"/>
-          <p:cNvSpPr>
-            <a:spLocks noGrp="1"/>
-          </p:cNvSpPr>
-          <p:nvPr>
-            <p:ph type="ftr" sz="quarter" idx="11"/>
-          </p:nvPr>
-        </p:nvSpPr>
-        <p:spPr>
-          <a:xfrm>
-            <a:off x="4095916" y="6553437"/>
-            <a:ext cx="4520431" cy="273844"/>
-          </a:xfrm>
-        </p:spPr>
-        <p:txBody>
-          <a:bodyPr/>
-          <a:lstStyle/>
-          <a:p>
-            <a:r>
-              <a:rPr lang="en-US" altLang="zh-CN" sz="1400" b="1" dirty="0" err="1">
-                <a:solidFill>
-                  <a:schemeClr val="bg1"/>
-                </a:solidFill>
-                <a:latin typeface="Constantia" panose="02030602050306030303" pitchFamily="18" charset="0"/>
-              </a:rPr>
-              <a:t>Ziqi</a:t>
-            </a:r>
-            <a:r>
-              <a:rPr lang="en-US" altLang="zh-CN" sz="1400" b="1" dirty="0">
-                <a:solidFill>
-                  <a:schemeClr val="bg1"/>
-                </a:solidFill>
-                <a:latin typeface="Constantia" panose="02030602050306030303" pitchFamily="18" charset="0"/>
-              </a:rPr>
-              <a:t> Liu | HUST</a:t>
-            </a:r>
-            <a:endParaRPr lang="zh-CN" altLang="en-US" sz="1400" b="1" dirty="0">
-              <a:solidFill>
-                <a:schemeClr val="bg1"/>
-              </a:solidFill>
-              <a:latin typeface="Constantia" panose="02030602050306030303" pitchFamily="18" charset="0"/>
-            </a:endParaRPr>
-          </a:p>
-        </p:txBody>
-      </p:sp>
-      <p:sp>
-        <p:nvSpPr>
-          <p:cNvPr id="15" name="文本框 14">
-            <a:extLst>
-              <a:ext uri="{FF2B5EF4-FFF2-40B4-BE49-F238E27FC236}">
-                <a16:creationId xmlns:a16="http://schemas.microsoft.com/office/drawing/2014/main" id="{488ABAF1-66EA-4F19-B42F-A2C521EB34A2}"/>
-              </a:ext>
-            </a:extLst>
-          </p:cNvPr>
-          <p:cNvSpPr txBox="1"/>
-          <p:nvPr/>
-        </p:nvSpPr>
-        <p:spPr>
-          <a:xfrm>
-            <a:off x="385589" y="1336177"/>
-            <a:ext cx="11140663" cy="4005392"/>
+            <a:off x="6056861" y="1005886"/>
+            <a:ext cx="5808305" cy="5083444"/>
           </a:xfrm>
           <a:prstGeom prst="rect">
             <a:avLst/>
           </a:prstGeom>
           <a:noFill/>
+          <a:extLst>
+            <a:ext uri="{909E8E84-426E-40DD-AFC4-6F175D3DCCD1}">
+              <a14:hiddenFill xmlns:a14="http://schemas.microsoft.com/office/drawing/2010/main">
+                <a:solidFill>
+                  <a:srgbClr val="FFFFFF"/>
+                </a:solidFill>
+              </a14:hiddenFill>
+            </a:ext>
+          </a:extLst>
         </p:spPr>
-        <p:txBody>
-          <a:bodyPr wrap="square">
-            <a:spAutoFit/>
-          </a:bodyPr>
-          <a:lstStyle/>
-          <a:p>
-            <a:pPr>
-              <a:lnSpc>
-                <a:spcPct val="150000"/>
-              </a:lnSpc>
-            </a:pPr>
-            <a:r>
-              <a:rPr lang="en-US" altLang="zh-CN" sz="2800" dirty="0">
-                <a:solidFill>
-                  <a:srgbClr val="4747BA"/>
-                </a:solidFill>
-                <a:ea typeface="+mn-lt"/>
-                <a:cs typeface="Times New Roman" panose="02020603050405020304" pitchFamily="18" charset="0"/>
-              </a:rPr>
-              <a:t>FAST‘24 </a:t>
-            </a:r>
-            <a:r>
-              <a:rPr lang="zh-CN" altLang="en-US" sz="2800" dirty="0">
-                <a:solidFill>
-                  <a:srgbClr val="4747BA"/>
-                </a:solidFill>
-                <a:ea typeface="+mn-lt"/>
-                <a:cs typeface="Times New Roman" panose="02020603050405020304" pitchFamily="18" charset="0"/>
-              </a:rPr>
-              <a:t>中提及</a:t>
-            </a:r>
-            <a:r>
-              <a:rPr lang="en-US" altLang="zh-CN" sz="2800" dirty="0">
-                <a:solidFill>
-                  <a:srgbClr val="4747BA"/>
-                </a:solidFill>
-                <a:ea typeface="+mn-lt"/>
-                <a:cs typeface="Times New Roman" panose="02020603050405020304" pitchFamily="18" charset="0"/>
-              </a:rPr>
-              <a:t> ZNS</a:t>
-            </a:r>
-            <a:r>
-              <a:rPr lang="zh-CN" altLang="en-US" sz="2800" dirty="0">
-                <a:solidFill>
-                  <a:srgbClr val="4747BA"/>
-                </a:solidFill>
-                <a:ea typeface="+mn-lt"/>
-                <a:cs typeface="Times New Roman" panose="02020603050405020304" pitchFamily="18" charset="0"/>
-              </a:rPr>
-              <a:t>的文章</a:t>
-            </a:r>
-            <a:r>
-              <a:rPr lang="en-US" altLang="zh-CN" sz="2800" dirty="0">
-                <a:solidFill>
-                  <a:srgbClr val="4747BA"/>
-                </a:solidFill>
-                <a:ea typeface="+mn-lt"/>
-                <a:cs typeface="Times New Roman" panose="02020603050405020304" pitchFamily="18" charset="0"/>
-              </a:rPr>
-              <a:t>:</a:t>
-            </a:r>
-            <a:endParaRPr lang="zh-CN" altLang="en-US" sz="2800" dirty="0">
-              <a:solidFill>
-                <a:srgbClr val="4747BA"/>
-              </a:solidFill>
-              <a:ea typeface="+mn-lt"/>
-              <a:cs typeface="Times New Roman" panose="02020603050405020304" pitchFamily="18" charset="0"/>
-            </a:endParaRPr>
-          </a:p>
-          <a:p>
-            <a:pPr>
-              <a:lnSpc>
-                <a:spcPct val="150000"/>
-              </a:lnSpc>
-            </a:pPr>
-            <a:r>
-              <a:rPr lang="en-US" altLang="zh-CN" sz="2000" dirty="0">
-                <a:solidFill>
-                  <a:srgbClr val="374151"/>
-                </a:solidFill>
-                <a:latin typeface="_5b8b_4f53"/>
-              </a:rPr>
-              <a:t>1. I/O </a:t>
-            </a:r>
-            <a:r>
-              <a:rPr lang="en-US" altLang="zh-CN" sz="2000" dirty="0" err="1">
-                <a:solidFill>
-                  <a:srgbClr val="374151"/>
-                </a:solidFill>
-                <a:latin typeface="_5b8b_4f53"/>
-              </a:rPr>
-              <a:t>Passthru</a:t>
-            </a:r>
-            <a:r>
-              <a:rPr lang="en-US" altLang="zh-CN" sz="2000" dirty="0">
-                <a:solidFill>
-                  <a:srgbClr val="374151"/>
-                </a:solidFill>
-                <a:latin typeface="_5b8b_4f53"/>
-              </a:rPr>
-              <a:t>: Upstreaming a flexible and efficient I/O Path in Linux</a:t>
-            </a:r>
-            <a:r>
-              <a:rPr lang="zh-CN" altLang="en-US" sz="2000" dirty="0">
-                <a:solidFill>
-                  <a:srgbClr val="374151"/>
-                </a:solidFill>
-                <a:latin typeface="_5b8b_4f53"/>
-              </a:rPr>
-              <a:t>（</a:t>
-            </a:r>
-            <a:r>
-              <a:rPr lang="en-US" altLang="zh-CN" sz="2000" dirty="0">
-                <a:solidFill>
-                  <a:srgbClr val="374151"/>
-                </a:solidFill>
-                <a:latin typeface="_5b8b_4f53"/>
-              </a:rPr>
-              <a:t>FDP</a:t>
-            </a:r>
-            <a:r>
-              <a:rPr lang="zh-CN" altLang="en-US" sz="2000" dirty="0">
-                <a:solidFill>
-                  <a:srgbClr val="374151"/>
-                </a:solidFill>
-                <a:latin typeface="_5b8b_4f53"/>
-              </a:rPr>
-              <a:t>）（三星</a:t>
-            </a:r>
-            <a:r>
-              <a:rPr lang="en-US" altLang="zh-CN" sz="2000" dirty="0">
-                <a:solidFill>
-                  <a:srgbClr val="374151"/>
-                </a:solidFill>
-                <a:latin typeface="_5b8b_4f53"/>
-              </a:rPr>
-              <a:t>FDP</a:t>
-            </a:r>
-            <a:r>
-              <a:rPr lang="zh-CN" altLang="en-US" sz="2000" dirty="0">
-                <a:solidFill>
-                  <a:srgbClr val="374151"/>
-                </a:solidFill>
-                <a:latin typeface="_5b8b_4f53"/>
-              </a:rPr>
-              <a:t>盘）</a:t>
-            </a:r>
-            <a:endParaRPr lang="en-US" altLang="zh-CN" sz="2000" dirty="0">
-              <a:solidFill>
-                <a:srgbClr val="374151"/>
-              </a:solidFill>
-              <a:latin typeface="_5b8b_4f53"/>
-            </a:endParaRPr>
-          </a:p>
-          <a:p>
-            <a:pPr>
-              <a:lnSpc>
-                <a:spcPct val="150000"/>
-              </a:lnSpc>
-            </a:pPr>
-            <a:r>
-              <a:rPr lang="en-US" altLang="zh-CN" sz="2000" dirty="0">
-                <a:solidFill>
-                  <a:srgbClr val="374151"/>
-                </a:solidFill>
-                <a:latin typeface="_5b8b_4f53"/>
-              </a:rPr>
-              <a:t>2. RFUSE: Modernizing </a:t>
-            </a:r>
-            <a:r>
-              <a:rPr lang="en-US" altLang="zh-CN" sz="2000" dirty="0" err="1">
-                <a:solidFill>
-                  <a:srgbClr val="374151"/>
-                </a:solidFill>
-                <a:latin typeface="_5b8b_4f53"/>
-              </a:rPr>
-              <a:t>Userspace</a:t>
-            </a:r>
-            <a:r>
-              <a:rPr lang="en-US" altLang="zh-CN" sz="2000" dirty="0">
-                <a:solidFill>
-                  <a:srgbClr val="374151"/>
-                </a:solidFill>
-                <a:latin typeface="_5b8b_4f53"/>
-              </a:rPr>
-              <a:t> Filesystem Framework through Scalable Kernel-</a:t>
-            </a:r>
-            <a:r>
-              <a:rPr lang="en-US" altLang="zh-CN" sz="2000" dirty="0" err="1">
-                <a:solidFill>
-                  <a:srgbClr val="374151"/>
-                </a:solidFill>
-                <a:latin typeface="_5b8b_4f53"/>
-              </a:rPr>
-              <a:t>Userspace</a:t>
-            </a:r>
-            <a:r>
-              <a:rPr lang="en-US" altLang="zh-CN" sz="2000" dirty="0">
-                <a:solidFill>
-                  <a:srgbClr val="374151"/>
-                </a:solidFill>
-                <a:latin typeface="_5b8b_4f53"/>
-              </a:rPr>
-              <a:t> Communication</a:t>
-            </a:r>
-            <a:r>
-              <a:rPr lang="zh-CN" altLang="en-US" sz="2000" dirty="0">
-                <a:solidFill>
-                  <a:srgbClr val="374151"/>
-                </a:solidFill>
-                <a:latin typeface="_5b8b_4f53"/>
-              </a:rPr>
-              <a:t>（偏</a:t>
-            </a:r>
-            <a:r>
-              <a:rPr lang="en-US" altLang="zh-CN" sz="2000" dirty="0">
-                <a:solidFill>
-                  <a:srgbClr val="374151"/>
-                </a:solidFill>
-                <a:latin typeface="_5b8b_4f53"/>
-              </a:rPr>
-              <a:t>OS,FS</a:t>
-            </a:r>
-            <a:r>
-              <a:rPr lang="zh-CN" altLang="en-US" sz="2000" dirty="0">
-                <a:solidFill>
-                  <a:srgbClr val="374151"/>
-                </a:solidFill>
-                <a:latin typeface="_5b8b_4f53"/>
-              </a:rPr>
-              <a:t>）</a:t>
-            </a:r>
-            <a:endParaRPr lang="en-US" altLang="zh-CN" sz="2000" dirty="0">
-              <a:solidFill>
-                <a:srgbClr val="374151"/>
-              </a:solidFill>
-              <a:latin typeface="_5b8b_4f53"/>
-            </a:endParaRPr>
-          </a:p>
-          <a:p>
-            <a:pPr>
-              <a:lnSpc>
-                <a:spcPct val="150000"/>
-              </a:lnSpc>
-            </a:pPr>
-            <a:r>
-              <a:rPr lang="en-US" altLang="zh-CN" sz="2000" dirty="0">
-                <a:solidFill>
-                  <a:srgbClr val="374151"/>
-                </a:solidFill>
-                <a:latin typeface="_5b8b_4f53"/>
-              </a:rPr>
-              <a:t>3. MIDAS: Minimizing Write Amplification in Log-Structured Systems through Adaptive Group Number and Size Configuration </a:t>
-            </a:r>
-            <a:r>
-              <a:rPr lang="zh-CN" altLang="en-US" sz="2000" dirty="0">
-                <a:solidFill>
-                  <a:srgbClr val="374151"/>
-                </a:solidFill>
-                <a:latin typeface="_5b8b_4f53"/>
-              </a:rPr>
-              <a:t>（参数配置、自适应）</a:t>
-            </a:r>
-            <a:endParaRPr lang="en-US" altLang="zh-CN" sz="2000" dirty="0">
-              <a:solidFill>
-                <a:srgbClr val="374151"/>
-              </a:solidFill>
-              <a:latin typeface="_5b8b_4f53"/>
-            </a:endParaRPr>
-          </a:p>
-          <a:p>
-            <a:pPr>
-              <a:lnSpc>
-                <a:spcPct val="150000"/>
-              </a:lnSpc>
-            </a:pPr>
-            <a:r>
-              <a:rPr lang="en-US" altLang="zh-CN" sz="2000" dirty="0">
-                <a:solidFill>
-                  <a:srgbClr val="374151"/>
-                </a:solidFill>
-                <a:latin typeface="_5b8b_4f53"/>
-              </a:rPr>
-              <a:t>4. The Design and Implementation of a Capacity-Variant Storage System</a:t>
-            </a:r>
-            <a:r>
-              <a:rPr lang="zh-CN" altLang="en-US" sz="2000" dirty="0">
-                <a:solidFill>
-                  <a:srgbClr val="374151"/>
-                </a:solidFill>
-                <a:latin typeface="_5b8b_4f53"/>
-              </a:rPr>
-              <a:t>（解决性能骤降）</a:t>
-            </a:r>
-            <a:endParaRPr lang="en-US" altLang="zh-CN" sz="2000" dirty="0">
-              <a:solidFill>
-                <a:srgbClr val="374151"/>
-              </a:solidFill>
-              <a:latin typeface="_5b8b_4f53"/>
-            </a:endParaRPr>
-          </a:p>
-          <a:p>
-            <a:pPr>
-              <a:lnSpc>
-                <a:spcPct val="150000"/>
-              </a:lnSpc>
-            </a:pPr>
-            <a:endParaRPr lang="en-US" altLang="zh-CN" sz="2400" dirty="0">
-              <a:solidFill>
-                <a:srgbClr val="374151"/>
-              </a:solidFill>
-              <a:latin typeface="_5b8b_4f53"/>
-            </a:endParaRPr>
-          </a:p>
-        </p:txBody>
-      </p:sp>
+      </p:pic>
     </p:spTree>
     <p:extLst>
       <p:ext uri="{BB962C8B-B14F-4D97-AF65-F5344CB8AC3E}">
-        <p14:creationId xmlns:p14="http://schemas.microsoft.com/office/powerpoint/2010/main" val="3628028634"/>
+        <p14:creationId xmlns:p14="http://schemas.microsoft.com/office/powerpoint/2010/main" val="1384790914"/>
       </p:ext>
     </p:extLst>
   </p:cSld>

--- a/Paper/报告/6_4-10汇报.pptx
+++ b/Paper/报告/6_4-10汇报.pptx
@@ -6,7 +6,7 @@
     <p:sldMasterId id="2147483660" r:id="rId2"/>
   </p:sldMasterIdLst>
   <p:notesMasterIdLst>
-    <p:notesMasterId r:id="rId19"/>
+    <p:notesMasterId r:id="rId18"/>
   </p:notesMasterIdLst>
   <p:sldIdLst>
     <p:sldId id="266" r:id="rId3"/>
@@ -21,10 +21,9 @@
     <p:sldId id="602" r:id="rId12"/>
     <p:sldId id="605" r:id="rId13"/>
     <p:sldId id="604" r:id="rId14"/>
-    <p:sldId id="559" r:id="rId15"/>
-    <p:sldId id="560" r:id="rId16"/>
-    <p:sldId id="601" r:id="rId17"/>
-    <p:sldId id="261" r:id="rId18"/>
+    <p:sldId id="601" r:id="rId15"/>
+    <p:sldId id="559" r:id="rId16"/>
+    <p:sldId id="560" r:id="rId17"/>
   </p:sldIdLst>
   <p:sldSz cx="12192000" cy="6858000"/>
   <p:notesSz cx="6858000" cy="9144000"/>
@@ -1836,133 +1835,6 @@
           <a:bodyPr/>
           <a:lstStyle/>
           <a:p>
-            <a:pPr marL="0" marR="0" lvl="0" indent="0" algn="just" defTabSz="914400" rtl="0" eaLnBrk="1" fontAlgn="auto" latinLnBrk="0" hangingPunct="1">
-              <a:lnSpc>
-                <a:spcPct val="100000"/>
-              </a:lnSpc>
-              <a:spcBef>
-                <a:spcPts val="0"/>
-              </a:spcBef>
-              <a:spcAft>
-                <a:spcPts val="1200"/>
-              </a:spcAft>
-              <a:buClrTx/>
-              <a:buSzTx/>
-              <a:buFont typeface="Arial" panose="020B0604020202020204" pitchFamily="34" charset="0"/>
-              <a:buNone/>
-              <a:defRPr/>
-            </a:pPr>
-            <a:r>
-              <a:rPr lang="zh-CN" altLang="en-US" sz="1200" dirty="0"/>
-              <a:t>尽管</a:t>
-            </a:r>
-            <a:r>
-              <a:rPr lang="en-US" altLang="zh-CN" sz="1200" dirty="0"/>
-              <a:t>HFTL</a:t>
-            </a:r>
-            <a:r>
-              <a:rPr lang="zh-CN" altLang="en-US" sz="1200" dirty="0"/>
-              <a:t>的职责较</a:t>
-            </a:r>
-            <a:r>
-              <a:rPr lang="en-US" altLang="zh-CN" sz="1200" dirty="0"/>
-              <a:t>SSD FTL</a:t>
-            </a:r>
-            <a:r>
-              <a:rPr lang="zh-CN" altLang="en-US" sz="1200" dirty="0"/>
-              <a:t>小，但它必须管理其对</a:t>
-            </a:r>
-            <a:r>
-              <a:rPr lang="en-US" altLang="zh-CN" sz="1200" dirty="0"/>
-              <a:t>CPU</a:t>
-            </a:r>
-            <a:r>
-              <a:rPr lang="zh-CN" altLang="en-US" sz="1200" dirty="0"/>
-              <a:t>和</a:t>
-            </a:r>
-            <a:r>
-              <a:rPr lang="en-US" altLang="zh-CN" sz="1200" dirty="0"/>
-              <a:t>DRAM</a:t>
-            </a:r>
-            <a:r>
-              <a:rPr lang="zh-CN" altLang="en-US" sz="1200" dirty="0"/>
-              <a:t>资源的使用，因为这些资源与主机应用共享。</a:t>
-            </a:r>
-            <a:r>
-              <a:rPr lang="en-US" altLang="zh-CN" sz="1200" dirty="0"/>
-              <a:t>HFTL</a:t>
-            </a:r>
-            <a:r>
-              <a:rPr lang="zh-CN" altLang="en-US" sz="1200" dirty="0"/>
-              <a:t>简化了与主机端信息的整合，增强了数据放置和垃圾回收的控制，并向应用程序提供传统块接口。目前，例如</a:t>
-            </a:r>
-            <a:r>
-              <a:rPr lang="en-US" altLang="zh-CN" sz="1200" dirty="0"/>
-              <a:t>dm-zoned</a:t>
-            </a:r>
-            <a:r>
-              <a:rPr lang="zh-CN" altLang="en-US" sz="1200" dirty="0"/>
-              <a:t>、</a:t>
-            </a:r>
-            <a:r>
-              <a:rPr lang="en-US" altLang="zh-CN" sz="1200" dirty="0"/>
-              <a:t>dm-zap</a:t>
-            </a:r>
-            <a:r>
-              <a:rPr lang="zh-CN" altLang="en-US" sz="1200" dirty="0"/>
-              <a:t>、</a:t>
-            </a:r>
-            <a:r>
-              <a:rPr lang="en-US" altLang="zh-CN" sz="1200" dirty="0" err="1"/>
-              <a:t>pblk</a:t>
-            </a:r>
-            <a:r>
-              <a:rPr lang="zh-CN" altLang="en-US" sz="1200" dirty="0"/>
-              <a:t>和</a:t>
-            </a:r>
-            <a:r>
-              <a:rPr lang="en-US" altLang="zh-CN" sz="1200" dirty="0"/>
-              <a:t>SPDK</a:t>
-            </a:r>
-            <a:r>
-              <a:rPr lang="zh-CN" altLang="en-US" sz="1200" dirty="0"/>
-              <a:t>的</a:t>
-            </a:r>
-            <a:r>
-              <a:rPr lang="en-US" altLang="zh-CN" sz="1200" dirty="0"/>
-              <a:t>FTL</a:t>
-            </a:r>
-            <a:r>
-              <a:rPr lang="zh-CN" altLang="en-US" sz="1200" dirty="0"/>
-              <a:t>等工作显示了</a:t>
-            </a:r>
-            <a:r>
-              <a:rPr lang="en-US" altLang="zh-CN" sz="1200" dirty="0"/>
-              <a:t>HFTL</a:t>
-            </a:r>
-            <a:r>
-              <a:rPr lang="zh-CN" altLang="en-US" sz="1200" dirty="0"/>
-              <a:t>的可行性和应用性，但目前只有</a:t>
-            </a:r>
-            <a:r>
-              <a:rPr lang="en-US" altLang="zh-CN" sz="1200" dirty="0"/>
-              <a:t>dm-zap</a:t>
-            </a:r>
-            <a:r>
-              <a:rPr lang="zh-CN" altLang="en-US" sz="1200" dirty="0"/>
-              <a:t>支持</a:t>
-            </a:r>
-            <a:r>
-              <a:rPr lang="en-US" altLang="zh-CN" sz="1200" dirty="0"/>
-              <a:t>ZNS SSD</a:t>
-            </a:r>
-            <a:r>
-              <a:rPr lang="zh-CN" altLang="en-US" sz="1200" dirty="0"/>
-              <a:t>。</a:t>
-            </a:r>
-            <a:endParaRPr lang="en-US" altLang="zh-CN" sz="1200" dirty="0"/>
-          </a:p>
-          <a:p>
             <a:pPr indent="0" algn="just">
               <a:spcAft>
                 <a:spcPts val="1200"/>
@@ -1970,6 +1842,12 @@
               <a:buFont typeface="Arial" panose="020B0604020202020204" pitchFamily="34" charset="0"/>
               <a:buNone/>
             </a:pPr>
+            <a:r>
+              <a:rPr lang="en-US" altLang="zh-CN" sz="1200" dirty="0">
+                <a:latin typeface="Constantia" panose="02030602050306030303" pitchFamily="18" charset="0"/>
+              </a:rPr>
+              <a:t>https://www.baidu.com/s?wd=%22Navy%22%E6%98%AFCacheLib%E6%9C%80%E6%96%B0%E7%9A%84%E7%BB%84%E4%BB%B6%E6%88%96%E5%8A%9F%E8%83%BD%E4%B9%8B%E4%B8%80&amp;rsv_spt=1&amp;rsv_iqid=0xbee64fc1002f3e4b&amp;issp=1&amp;f=8&amp;rsv_bp=1&amp;rsv_idx=2&amp;ie=utf-8&amp;rqlang=cn&amp;tn=baiduhome_pg&amp;rsv_dl=tb&amp;rsv_enter=1&amp;oq=give%2520password%2520for%2520maintance&amp;rsv_btype=t&amp;inputT=522184&amp;rsv_t=f7d73OedvQKPi8khPGTPFRWOj6S5N2296YTnTzi1jSvTUceL05sHuTXO7snRVeaGmWDa&amp;rsv_sug3=3&amp;rsv_n=2&amp;rsv_pq=931944c8002a9288&amp;rsv_sug1=1&amp;rsv_sug7=100&amp;rsv_sug2=0&amp;rsv_sug4=522184</a:t>
+            </a:r>
             <a:endParaRPr lang="zh-CN" altLang="en-US" sz="1200" dirty="0">
               <a:latin typeface="Constantia" panose="02030602050306030303" pitchFamily="18" charset="0"/>
             </a:endParaRPr>
@@ -2000,11 +1878,6 @@
         </p:txBody>
       </p:sp>
     </p:spTree>
-    <p:extLst>
-      <p:ext uri="{BB962C8B-B14F-4D97-AF65-F5344CB8AC3E}">
-        <p14:creationId xmlns:p14="http://schemas.microsoft.com/office/powerpoint/2010/main" val="3818044110"/>
-      </p:ext>
-    </p:extLst>
   </p:cSld>
   <p:clrMapOvr>
     <a:masterClrMapping/>
@@ -2056,6 +1929,133 @@
           <a:bodyPr/>
           <a:lstStyle/>
           <a:p>
+            <a:pPr marL="0" marR="0" lvl="0" indent="0" algn="just" defTabSz="914400" rtl="0" eaLnBrk="1" fontAlgn="auto" latinLnBrk="0" hangingPunct="1">
+              <a:lnSpc>
+                <a:spcPct val="100000"/>
+              </a:lnSpc>
+              <a:spcBef>
+                <a:spcPts val="0"/>
+              </a:spcBef>
+              <a:spcAft>
+                <a:spcPts val="1200"/>
+              </a:spcAft>
+              <a:buClrTx/>
+              <a:buSzTx/>
+              <a:buFont typeface="Arial" panose="020B0604020202020204" pitchFamily="34" charset="0"/>
+              <a:buNone/>
+              <a:defRPr/>
+            </a:pPr>
+            <a:r>
+              <a:rPr lang="zh-CN" altLang="en-US" sz="1200" dirty="0"/>
+              <a:t>尽管</a:t>
+            </a:r>
+            <a:r>
+              <a:rPr lang="en-US" altLang="zh-CN" sz="1200" dirty="0"/>
+              <a:t>HFTL</a:t>
+            </a:r>
+            <a:r>
+              <a:rPr lang="zh-CN" altLang="en-US" sz="1200" dirty="0"/>
+              <a:t>的职责较</a:t>
+            </a:r>
+            <a:r>
+              <a:rPr lang="en-US" altLang="zh-CN" sz="1200" dirty="0"/>
+              <a:t>SSD FTL</a:t>
+            </a:r>
+            <a:r>
+              <a:rPr lang="zh-CN" altLang="en-US" sz="1200" dirty="0"/>
+              <a:t>小，但它必须管理其对</a:t>
+            </a:r>
+            <a:r>
+              <a:rPr lang="en-US" altLang="zh-CN" sz="1200" dirty="0"/>
+              <a:t>CPU</a:t>
+            </a:r>
+            <a:r>
+              <a:rPr lang="zh-CN" altLang="en-US" sz="1200" dirty="0"/>
+              <a:t>和</a:t>
+            </a:r>
+            <a:r>
+              <a:rPr lang="en-US" altLang="zh-CN" sz="1200" dirty="0"/>
+              <a:t>DRAM</a:t>
+            </a:r>
+            <a:r>
+              <a:rPr lang="zh-CN" altLang="en-US" sz="1200" dirty="0"/>
+              <a:t>资源的使用，因为这些资源与主机应用共享。</a:t>
+            </a:r>
+            <a:r>
+              <a:rPr lang="en-US" altLang="zh-CN" sz="1200" dirty="0"/>
+              <a:t>HFTL</a:t>
+            </a:r>
+            <a:r>
+              <a:rPr lang="zh-CN" altLang="en-US" sz="1200" dirty="0"/>
+              <a:t>简化了与主机端信息的整合，增强了数据放置和垃圾回收的控制，并向应用程序提供传统块接口。目前，例如</a:t>
+            </a:r>
+            <a:r>
+              <a:rPr lang="en-US" altLang="zh-CN" sz="1200" dirty="0"/>
+              <a:t>dm-zoned</a:t>
+            </a:r>
+            <a:r>
+              <a:rPr lang="zh-CN" altLang="en-US" sz="1200" dirty="0"/>
+              <a:t>、</a:t>
+            </a:r>
+            <a:r>
+              <a:rPr lang="en-US" altLang="zh-CN" sz="1200" dirty="0"/>
+              <a:t>dm-zap</a:t>
+            </a:r>
+            <a:r>
+              <a:rPr lang="zh-CN" altLang="en-US" sz="1200" dirty="0"/>
+              <a:t>、</a:t>
+            </a:r>
+            <a:r>
+              <a:rPr lang="en-US" altLang="zh-CN" sz="1200" dirty="0" err="1"/>
+              <a:t>pblk</a:t>
+            </a:r>
+            <a:r>
+              <a:rPr lang="zh-CN" altLang="en-US" sz="1200" dirty="0"/>
+              <a:t>和</a:t>
+            </a:r>
+            <a:r>
+              <a:rPr lang="en-US" altLang="zh-CN" sz="1200" dirty="0"/>
+              <a:t>SPDK</a:t>
+            </a:r>
+            <a:r>
+              <a:rPr lang="zh-CN" altLang="en-US" sz="1200" dirty="0"/>
+              <a:t>的</a:t>
+            </a:r>
+            <a:r>
+              <a:rPr lang="en-US" altLang="zh-CN" sz="1200" dirty="0"/>
+              <a:t>FTL</a:t>
+            </a:r>
+            <a:r>
+              <a:rPr lang="zh-CN" altLang="en-US" sz="1200" dirty="0"/>
+              <a:t>等工作显示了</a:t>
+            </a:r>
+            <a:r>
+              <a:rPr lang="en-US" altLang="zh-CN" sz="1200" dirty="0"/>
+              <a:t>HFTL</a:t>
+            </a:r>
+            <a:r>
+              <a:rPr lang="zh-CN" altLang="en-US" sz="1200" dirty="0"/>
+              <a:t>的可行性和应用性，但目前只有</a:t>
+            </a:r>
+            <a:r>
+              <a:rPr lang="en-US" altLang="zh-CN" sz="1200" dirty="0"/>
+              <a:t>dm-zap</a:t>
+            </a:r>
+            <a:r>
+              <a:rPr lang="zh-CN" altLang="en-US" sz="1200" dirty="0"/>
+              <a:t>支持</a:t>
+            </a:r>
+            <a:r>
+              <a:rPr lang="en-US" altLang="zh-CN" sz="1200" dirty="0"/>
+              <a:t>ZNS SSD</a:t>
+            </a:r>
+            <a:r>
+              <a:rPr lang="zh-CN" altLang="en-US" sz="1200" dirty="0"/>
+              <a:t>。</a:t>
+            </a:r>
+            <a:endParaRPr lang="en-US" altLang="zh-CN" sz="1200" dirty="0"/>
+          </a:p>
+          <a:p>
             <a:pPr indent="0" algn="just">
               <a:spcAft>
                 <a:spcPts val="1200"/>
@@ -2093,6 +2093,11 @@
         </p:txBody>
       </p:sp>
     </p:spTree>
+    <p:extLst>
+      <p:ext uri="{BB962C8B-B14F-4D97-AF65-F5344CB8AC3E}">
+        <p14:creationId xmlns:p14="http://schemas.microsoft.com/office/powerpoint/2010/main" val="3818044110"/>
+      </p:ext>
+    </p:extLst>
   </p:cSld>
   <p:clrMapOvr>
     <a:masterClrMapping/>
@@ -2151,12 +2156,6 @@
               <a:buFont typeface="Arial" panose="020B0604020202020204" pitchFamily="34" charset="0"/>
               <a:buNone/>
             </a:pPr>
-            <a:r>
-              <a:rPr lang="en-US" altLang="zh-CN" sz="1200" dirty="0">
-                <a:latin typeface="Constantia" panose="02030602050306030303" pitchFamily="18" charset="0"/>
-              </a:rPr>
-              <a:t>https://www.baidu.com/s?wd=%22Navy%22%E6%98%AFCacheLib%E6%9C%80%E6%96%B0%E7%9A%84%E7%BB%84%E4%BB%B6%E6%88%96%E5%8A%9F%E8%83%BD%E4%B9%8B%E4%B8%80&amp;rsv_spt=1&amp;rsv_iqid=0xbee64fc1002f3e4b&amp;issp=1&amp;f=8&amp;rsv_bp=1&amp;rsv_idx=2&amp;ie=utf-8&amp;rqlang=cn&amp;tn=baiduhome_pg&amp;rsv_dl=tb&amp;rsv_enter=1&amp;oq=give%2520password%2520for%2520maintance&amp;rsv_btype=t&amp;inputT=522184&amp;rsv_t=f7d73OedvQKPi8khPGTPFRWOj6S5N2296YTnTzi1jSvTUceL05sHuTXO7snRVeaGmWDa&amp;rsv_sug3=3&amp;rsv_n=2&amp;rsv_pq=931944c8002a9288&amp;rsv_sug1=1&amp;rsv_sug7=100&amp;rsv_sug2=0&amp;rsv_sug4=522184</a:t>
-            </a:r>
             <a:endParaRPr lang="zh-CN" altLang="en-US" sz="1200" dirty="0">
               <a:latin typeface="Constantia" panose="02030602050306030303" pitchFamily="18" charset="0"/>
             </a:endParaRPr>
@@ -2187,150 +2186,6 @@
         </p:txBody>
       </p:sp>
     </p:spTree>
-  </p:cSld>
-  <p:clrMapOvr>
-    <a:masterClrMapping/>
-  </p:clrMapOvr>
-</p:notes>
-</file>
-
-<file path=ppt/notesSlides/notesSlide16.xml><?xml version="1.0" encoding="utf-8"?>
-<p:notes xmlns:a="http://schemas.openxmlformats.org/drawingml/2006/main" xmlns:r="http://schemas.openxmlformats.org/officeDocument/2006/relationships" xmlns:p="http://schemas.openxmlformats.org/presentationml/2006/main">
-  <p:cSld>
-    <p:spTree>
-      <p:nvGrpSpPr>
-        <p:cNvPr id="1" name=""/>
-        <p:cNvGrpSpPr/>
-        <p:nvPr/>
-      </p:nvGrpSpPr>
-      <p:grpSpPr>
-        <a:xfrm>
-          <a:off x="0" y="0"/>
-          <a:ext cx="0" cy="0"/>
-          <a:chOff x="0" y="0"/>
-          <a:chExt cx="0" cy="0"/>
-        </a:xfrm>
-      </p:grpSpPr>
-      <p:sp>
-        <p:nvSpPr>
-          <p:cNvPr id="2" name="Slide Image Placeholder 1"/>
-          <p:cNvSpPr>
-            <a:spLocks noGrp="1" noRot="1" noChangeAspect="1"/>
-          </p:cNvSpPr>
-          <p:nvPr>
-            <p:ph type="sldImg"/>
-          </p:nvPr>
-        </p:nvSpPr>
-        <p:spPr/>
-      </p:sp>
-      <p:sp>
-        <p:nvSpPr>
-          <p:cNvPr id="3" name="Notes Placeholder 2"/>
-          <p:cNvSpPr>
-            <a:spLocks noGrp="1"/>
-          </p:cNvSpPr>
-          <p:nvPr>
-            <p:ph type="body" idx="1"/>
-          </p:nvPr>
-        </p:nvSpPr>
-        <p:spPr/>
-        <p:txBody>
-          <a:bodyPr/>
-          <a:lstStyle/>
-          <a:p>
-            <a:endParaRPr lang="en-US" dirty="0"/>
-          </a:p>
-        </p:txBody>
-      </p:sp>
-      <p:sp>
-        <p:nvSpPr>
-          <p:cNvPr id="4" name="Slide Number Placeholder 3"/>
-          <p:cNvSpPr>
-            <a:spLocks noGrp="1"/>
-          </p:cNvSpPr>
-          <p:nvPr>
-            <p:ph type="sldNum" sz="quarter" idx="10"/>
-          </p:nvPr>
-        </p:nvSpPr>
-        <p:spPr/>
-        <p:txBody>
-          <a:bodyPr/>
-          <a:lstStyle/>
-          <a:p>
-            <a:pPr marL="0" marR="0" lvl="0" indent="0" algn="l" defTabSz="914400" rtl="0" eaLnBrk="1" fontAlgn="auto" latinLnBrk="0" hangingPunct="1">
-              <a:lnSpc>
-                <a:spcPct val="100000"/>
-              </a:lnSpc>
-              <a:spcBef>
-                <a:spcPts val="0"/>
-              </a:spcBef>
-              <a:spcAft>
-                <a:spcPts val="0"/>
-              </a:spcAft>
-              <a:buClrTx/>
-              <a:buSzTx/>
-              <a:buFontTx/>
-              <a:buNone/>
-              <a:tabLst/>
-              <a:defRPr/>
-            </a:pPr>
-            <a:fld id="{F7021451-1387-4CA6-816F-3879F97B5CBC}" type="slidenum">
-              <a:rPr kumimoji="0" lang="en-US" sz="1800" b="0" i="0" u="none" strike="noStrike" kern="1200" cap="none" spc="0" normalizeH="0" baseline="0" noProof="0">
-                <a:ln>
-                  <a:noFill/>
-                </a:ln>
-                <a:solidFill>
-                  <a:prstClr val="black"/>
-                </a:solidFill>
-                <a:effectLst/>
-                <a:uLnTx/>
-                <a:uFillTx/>
-                <a:latin typeface="等线" panose="020F0502020204030204"/>
-                <a:ea typeface="+mn-ea"/>
-                <a:cs typeface="+mn-cs"/>
-              </a:rPr>
-              <a:pPr marL="0" marR="0" lvl="0" indent="0" algn="l" defTabSz="914400" rtl="0" eaLnBrk="1" fontAlgn="auto" latinLnBrk="0" hangingPunct="1">
-                <a:lnSpc>
-                  <a:spcPct val="100000"/>
-                </a:lnSpc>
-                <a:spcBef>
-                  <a:spcPts val="0"/>
-                </a:spcBef>
-                <a:spcAft>
-                  <a:spcPts val="0"/>
-                </a:spcAft>
-                <a:buClrTx/>
-                <a:buSzTx/>
-                <a:buFontTx/>
-                <a:buNone/>
-                <a:tabLst/>
-                <a:defRPr/>
-              </a:pPr>
-              <a:t>16</a:t>
-            </a:fld>
-            <a:endParaRPr kumimoji="0" lang="en-US" sz="1800" b="0" i="0" u="none" strike="noStrike" kern="1200" cap="none" spc="0" normalizeH="0" baseline="0" noProof="0">
-              <a:ln>
-                <a:noFill/>
-              </a:ln>
-              <a:solidFill>
-                <a:prstClr val="black"/>
-              </a:solidFill>
-              <a:effectLst/>
-              <a:uLnTx/>
-              <a:uFillTx/>
-              <a:latin typeface="等线" panose="020F0502020204030204"/>
-              <a:ea typeface="+mn-ea"/>
-              <a:cs typeface="+mn-cs"/>
-            </a:endParaRPr>
-          </a:p>
-        </p:txBody>
-      </p:sp>
-    </p:spTree>
-    <p:extLst>
-      <p:ext uri="{BB962C8B-B14F-4D97-AF65-F5344CB8AC3E}">
-        <p14:creationId xmlns:p14="http://schemas.microsoft.com/office/powerpoint/2010/main" val="1024086991"/>
-      </p:ext>
-    </p:extLst>
   </p:cSld>
   <p:clrMapOvr>
     <a:masterClrMapping/>
@@ -3303,6 +3158,191 @@
           <a:lstStyle/>
           <a:p>
             <a:pPr algn="l"/>
+            <a:endParaRPr lang="en-US" altLang="zh-CN" sz="1800" b="0" i="0" dirty="0">
+              <a:solidFill>
+                <a:srgbClr val="222222"/>
+              </a:solidFill>
+              <a:effectLst/>
+              <a:latin typeface="PingFangSC-Regular"/>
+            </a:endParaRPr>
+          </a:p>
+          <a:p>
+            <a:pPr marL="0" marR="0" lvl="0" indent="0" algn="just" defTabSz="914400" rtl="0" eaLnBrk="1" fontAlgn="auto" latinLnBrk="0" hangingPunct="1">
+              <a:lnSpc>
+                <a:spcPct val="100000"/>
+              </a:lnSpc>
+              <a:spcBef>
+                <a:spcPts val="0"/>
+              </a:spcBef>
+              <a:spcAft>
+                <a:spcPts val="1200"/>
+              </a:spcAft>
+              <a:buClrTx/>
+              <a:buSzTx/>
+              <a:buFont typeface="Arial" panose="020B0604020202020204" pitchFamily="34" charset="0"/>
+              <a:buNone/>
+              <a:tabLst/>
+              <a:defRPr/>
+            </a:pPr>
+            <a:r>
+              <a:rPr lang="zh-CN" altLang="en-US" sz="1800" b="0" i="0" dirty="0">
+                <a:solidFill>
+                  <a:srgbClr val="222222"/>
+                </a:solidFill>
+                <a:effectLst/>
+                <a:latin typeface="PingFangSC-Regular"/>
+              </a:rPr>
+              <a:t>单体数据库，</a:t>
+            </a:r>
+            <a:r>
+              <a:rPr lang="en-US" altLang="zh-CN" sz="1800" b="0" i="0" dirty="0" err="1">
+                <a:solidFill>
+                  <a:srgbClr val="222222"/>
+                </a:solidFill>
+                <a:effectLst/>
+                <a:latin typeface="PingFangSC-Regular"/>
+              </a:rPr>
+              <a:t>Terarkdb</a:t>
+            </a:r>
+            <a:r>
+              <a:rPr lang="en-US" altLang="zh-CN" sz="1800" b="0" i="0" dirty="0">
+                <a:solidFill>
+                  <a:srgbClr val="222222"/>
+                </a:solidFill>
+                <a:effectLst/>
+                <a:latin typeface="PingFangSC-Regular"/>
+              </a:rPr>
+              <a:t> </a:t>
+            </a:r>
+            <a:r>
+              <a:rPr lang="zh-CN" altLang="en-US" sz="1800" b="0" i="0" dirty="0">
+                <a:solidFill>
+                  <a:srgbClr val="222222"/>
+                </a:solidFill>
+                <a:effectLst/>
+                <a:latin typeface="PingFangSC-Regular"/>
+              </a:rPr>
+              <a:t>，</a:t>
+            </a:r>
+            <a:r>
+              <a:rPr lang="zh-CN" altLang="en-US" sz="2800" b="0" i="0" dirty="0">
+                <a:solidFill>
+                  <a:srgbClr val="333333"/>
+                </a:solidFill>
+                <a:effectLst/>
+                <a:latin typeface="PingFangSC-Regular"/>
+              </a:rPr>
+              <a:t>向上承接分布式团队业务，</a:t>
+            </a:r>
+            <a:r>
+              <a:rPr lang="zh-CN" altLang="en-US" sz="1800" b="0" i="0" dirty="0">
+                <a:solidFill>
+                  <a:srgbClr val="222222"/>
+                </a:solidFill>
+                <a:effectLst/>
+                <a:latin typeface="PingFangSC-Regular"/>
+              </a:rPr>
+              <a:t>向下使用 </a:t>
+            </a:r>
+            <a:r>
+              <a:rPr lang="en-US" altLang="zh-CN" sz="1800" b="0" i="0" dirty="0">
+                <a:solidFill>
+                  <a:srgbClr val="222222"/>
+                </a:solidFill>
+                <a:effectLst/>
+                <a:latin typeface="PingFangSC-Regular"/>
+              </a:rPr>
+              <a:t>SSD+ZNS+DPU</a:t>
+            </a:r>
+            <a:r>
+              <a:rPr lang="zh-CN" altLang="en-US" sz="1800" b="0" i="0" dirty="0">
+                <a:solidFill>
+                  <a:srgbClr val="222222"/>
+                </a:solidFill>
+                <a:effectLst/>
+                <a:latin typeface="PingFangSC-Regular"/>
+              </a:rPr>
+              <a:t>，</a:t>
+            </a:r>
+            <a:r>
+              <a:rPr lang="en-US" altLang="zh-CN" sz="1800" b="0" i="0" dirty="0">
+                <a:solidFill>
+                  <a:srgbClr val="222222"/>
+                </a:solidFill>
+                <a:effectLst/>
+                <a:latin typeface="PingFangSC-Regular"/>
+              </a:rPr>
+              <a:t>22</a:t>
+            </a:r>
+            <a:r>
+              <a:rPr lang="zh-CN" altLang="en-US" sz="1800" b="0" i="0" dirty="0">
+                <a:solidFill>
+                  <a:srgbClr val="222222"/>
+                </a:solidFill>
+                <a:effectLst/>
+                <a:latin typeface="PingFangSC-Regular"/>
+              </a:rPr>
+              <a:t>年中旬提交的关于</a:t>
+            </a:r>
+            <a:r>
+              <a:rPr lang="en-US" altLang="zh-CN" sz="1800" b="0" i="0" dirty="0">
+                <a:solidFill>
+                  <a:srgbClr val="222222"/>
+                </a:solidFill>
+                <a:effectLst/>
+                <a:latin typeface="PingFangSC-Regular"/>
+              </a:rPr>
+              <a:t>ZNS</a:t>
+            </a:r>
+            <a:r>
+              <a:rPr lang="zh-CN" altLang="en-US" sz="1800" b="0" i="0" dirty="0">
+                <a:solidFill>
+                  <a:srgbClr val="222222"/>
+                </a:solidFill>
+                <a:effectLst/>
+                <a:latin typeface="PingFangSC-Regular"/>
+              </a:rPr>
+              <a:t>的代码</a:t>
+            </a:r>
+            <a:endParaRPr lang="zh-CN" altLang="en-US" sz="1800" b="1" dirty="0">
+              <a:solidFill>
+                <a:srgbClr val="4747BA"/>
+              </a:solidFill>
+              <a:latin typeface="Constantia" panose="02030602050306030303" pitchFamily="18" charset="0"/>
+              <a:ea typeface="腾讯体 W3" panose="020C04030202040F0204" pitchFamily="34" charset="-122"/>
+              <a:cs typeface="Times" panose="02020603050405020304" pitchFamily="18" charset="0"/>
+            </a:endParaRPr>
+          </a:p>
+          <a:p>
+            <a:pPr indent="0" algn="just">
+              <a:spcAft>
+                <a:spcPts val="1200"/>
+              </a:spcAft>
+              <a:buFont typeface="Arial" panose="020B0604020202020204" pitchFamily="34" charset="0"/>
+              <a:buNone/>
+            </a:pPr>
+            <a:r>
+              <a:rPr lang="en-US" altLang="zh-CN" sz="1800" kern="100" dirty="0">
+                <a:effectLst/>
+                <a:latin typeface="Times New Roman" panose="02020603050405020304" pitchFamily="18" charset="0"/>
+                <a:ea typeface="宋体" panose="02010600030101010101" pitchFamily="2" charset="-122"/>
+                <a:cs typeface="Times New Roman" panose="02020603050405020304" pitchFamily="18" charset="0"/>
+              </a:rPr>
+              <a:t>https://www.nowcoder.com/discuss/375095020267872256</a:t>
+            </a:r>
+          </a:p>
+          <a:p>
+            <a:pPr algn="l"/>
+            <a:endParaRPr lang="en-US" altLang="zh-CN" sz="2800" b="1" i="0" dirty="0">
+              <a:solidFill>
+                <a:srgbClr val="333333"/>
+              </a:solidFill>
+              <a:effectLst/>
+              <a:latin typeface="-apple-system"/>
+            </a:endParaRPr>
+          </a:p>
+          <a:p>
+            <a:pPr algn="l"/>
             <a:r>
               <a:rPr lang="en-US" altLang="zh-CN" sz="2800" b="1" i="0" dirty="0">
                 <a:solidFill>
@@ -3388,181 +3428,6 @@
             </a:endParaRPr>
           </a:p>
           <a:p>
-            <a:pPr algn="l"/>
-            <a:endParaRPr lang="en-US" altLang="zh-CN" sz="1800" b="0" i="0" dirty="0">
-              <a:solidFill>
-                <a:srgbClr val="222222"/>
-              </a:solidFill>
-              <a:effectLst/>
-              <a:latin typeface="PingFangSC-Regular"/>
-            </a:endParaRPr>
-          </a:p>
-          <a:p>
-            <a:pPr marL="0" marR="0" lvl="0" indent="0" algn="just" defTabSz="914400" rtl="0" eaLnBrk="1" fontAlgn="auto" latinLnBrk="0" hangingPunct="1">
-              <a:lnSpc>
-                <a:spcPct val="100000"/>
-              </a:lnSpc>
-              <a:spcBef>
-                <a:spcPts val="0"/>
-              </a:spcBef>
-              <a:spcAft>
-                <a:spcPts val="1200"/>
-              </a:spcAft>
-              <a:buClrTx/>
-              <a:buSzTx/>
-              <a:buFont typeface="Arial" panose="020B0604020202020204" pitchFamily="34" charset="0"/>
-              <a:buNone/>
-              <a:tabLst/>
-              <a:defRPr/>
-            </a:pPr>
-            <a:r>
-              <a:rPr lang="zh-CN" altLang="en-US" sz="1800" b="0" i="0" dirty="0">
-                <a:solidFill>
-                  <a:srgbClr val="222222"/>
-                </a:solidFill>
-                <a:effectLst/>
-                <a:latin typeface="PingFangSC-Regular"/>
-              </a:rPr>
-              <a:t>单体数据库，</a:t>
-            </a:r>
-            <a:r>
-              <a:rPr lang="en-US" altLang="zh-CN" sz="1800" b="0" i="0" dirty="0" err="1">
-                <a:solidFill>
-                  <a:srgbClr val="222222"/>
-                </a:solidFill>
-                <a:effectLst/>
-                <a:latin typeface="PingFangSC-Regular"/>
-              </a:rPr>
-              <a:t>Terarkdb</a:t>
-            </a:r>
-            <a:r>
-              <a:rPr lang="en-US" altLang="zh-CN" sz="1800" b="0" i="0" dirty="0">
-                <a:solidFill>
-                  <a:srgbClr val="222222"/>
-                </a:solidFill>
-                <a:effectLst/>
-                <a:latin typeface="PingFangSC-Regular"/>
-              </a:rPr>
-              <a:t> </a:t>
-            </a:r>
-            <a:r>
-              <a:rPr lang="zh-CN" altLang="en-US" sz="1800" b="0" i="0" dirty="0">
-                <a:solidFill>
-                  <a:srgbClr val="222222"/>
-                </a:solidFill>
-                <a:effectLst/>
-                <a:latin typeface="PingFangSC-Regular"/>
-              </a:rPr>
-              <a:t>，</a:t>
-            </a:r>
-            <a:r>
-              <a:rPr lang="zh-CN" altLang="en-US" sz="2800" b="0" i="0" dirty="0">
-                <a:solidFill>
-                  <a:srgbClr val="333333"/>
-                </a:solidFill>
-                <a:effectLst/>
-                <a:latin typeface="PingFangSC-Regular"/>
-              </a:rPr>
-              <a:t>向上承接分布式团队业务，</a:t>
-            </a:r>
-            <a:r>
-              <a:rPr lang="zh-CN" altLang="en-US" sz="1800" b="0" i="0" dirty="0">
-                <a:solidFill>
-                  <a:srgbClr val="222222"/>
-                </a:solidFill>
-                <a:effectLst/>
-                <a:latin typeface="PingFangSC-Regular"/>
-              </a:rPr>
-              <a:t>向下使用 </a:t>
-            </a:r>
-            <a:r>
-              <a:rPr lang="en-US" altLang="zh-CN" sz="1800" b="0" i="0" dirty="0">
-                <a:solidFill>
-                  <a:srgbClr val="222222"/>
-                </a:solidFill>
-                <a:effectLst/>
-                <a:latin typeface="PingFangSC-Regular"/>
-              </a:rPr>
-              <a:t>SSD+ZNS+DPU</a:t>
-            </a:r>
-            <a:r>
-              <a:rPr lang="zh-CN" altLang="en-US" sz="1800" b="0" i="0" dirty="0">
-                <a:solidFill>
-                  <a:srgbClr val="222222"/>
-                </a:solidFill>
-                <a:effectLst/>
-                <a:latin typeface="PingFangSC-Regular"/>
-              </a:rPr>
-              <a:t>，</a:t>
-            </a:r>
-            <a:r>
-              <a:rPr lang="en-US" altLang="zh-CN" sz="1800" b="0" i="0" dirty="0">
-                <a:solidFill>
-                  <a:srgbClr val="222222"/>
-                </a:solidFill>
-                <a:effectLst/>
-                <a:latin typeface="PingFangSC-Regular"/>
-              </a:rPr>
-              <a:t>22</a:t>
-            </a:r>
-            <a:r>
-              <a:rPr lang="zh-CN" altLang="en-US" sz="1800" b="0" i="0" dirty="0">
-                <a:solidFill>
-                  <a:srgbClr val="222222"/>
-                </a:solidFill>
-                <a:effectLst/>
-                <a:latin typeface="PingFangSC-Regular"/>
-              </a:rPr>
-              <a:t>年中旬提交的关于</a:t>
-            </a:r>
-            <a:r>
-              <a:rPr lang="en-US" altLang="zh-CN" sz="1800" b="0" i="0" dirty="0">
-                <a:solidFill>
-                  <a:srgbClr val="222222"/>
-                </a:solidFill>
-                <a:effectLst/>
-                <a:latin typeface="PingFangSC-Regular"/>
-              </a:rPr>
-              <a:t>ZNS</a:t>
-            </a:r>
-            <a:r>
-              <a:rPr lang="zh-CN" altLang="en-US" sz="1800" b="0" i="0" dirty="0">
-                <a:solidFill>
-                  <a:srgbClr val="222222"/>
-                </a:solidFill>
-                <a:effectLst/>
-                <a:latin typeface="PingFangSC-Regular"/>
-              </a:rPr>
-              <a:t>的代码</a:t>
-            </a:r>
-            <a:endParaRPr lang="zh-CN" altLang="en-US" sz="1800" b="1" dirty="0">
-              <a:solidFill>
-                <a:srgbClr val="4747BA"/>
-              </a:solidFill>
-              <a:latin typeface="Constantia" panose="02030602050306030303" pitchFamily="18" charset="0"/>
-              <a:ea typeface="腾讯体 W3" panose="020C04030202040F0204" pitchFamily="34" charset="-122"/>
-              <a:cs typeface="Times" panose="02020603050405020304" pitchFamily="18" charset="0"/>
-            </a:endParaRPr>
-          </a:p>
-          <a:p>
-            <a:pPr indent="0" algn="just">
-              <a:spcAft>
-                <a:spcPts val="1200"/>
-              </a:spcAft>
-              <a:buFont typeface="Arial" panose="020B0604020202020204" pitchFamily="34" charset="0"/>
-              <a:buNone/>
-            </a:pPr>
-            <a:r>
-              <a:rPr lang="en-US" altLang="zh-CN" sz="1800" kern="100" dirty="0">
-                <a:effectLst/>
-                <a:latin typeface="Times New Roman" panose="02020603050405020304" pitchFamily="18" charset="0"/>
-                <a:ea typeface="宋体" panose="02010600030101010101" pitchFamily="2" charset="-122"/>
-                <a:cs typeface="Times New Roman" panose="02020603050405020304" pitchFamily="18" charset="0"/>
-              </a:rPr>
-              <a:t>https://www.nowcoder.com/discuss/375095020267872256</a:t>
-            </a:r>
-          </a:p>
-          <a:p>
             <a:pPr indent="0" algn="just">
               <a:spcAft>
                 <a:spcPts val="1200"/>
@@ -3702,188 +3567,6 @@
               <a:latin typeface="Times New Roman" panose="02020603050405020304" pitchFamily="18" charset="0"/>
               <a:ea typeface="宋体" panose="02010600030101010101" pitchFamily="2" charset="-122"/>
               <a:cs typeface="Times New Roman" panose="02020603050405020304" pitchFamily="18" charset="0"/>
-            </a:endParaRPr>
-          </a:p>
-          <a:p>
-            <a:pPr marL="0" marR="0" lvl="0" indent="0" algn="just" defTabSz="914400" rtl="0" eaLnBrk="1" fontAlgn="auto" latinLnBrk="0" hangingPunct="1">
-              <a:lnSpc>
-                <a:spcPct val="100000"/>
-              </a:lnSpc>
-              <a:spcBef>
-                <a:spcPts val="0"/>
-              </a:spcBef>
-              <a:spcAft>
-                <a:spcPts val="1200"/>
-              </a:spcAft>
-              <a:buClrTx/>
-              <a:buSzTx/>
-              <a:buFont typeface="Arial" panose="020B0604020202020204" pitchFamily="34" charset="0"/>
-              <a:buNone/>
-              <a:tabLst/>
-              <a:defRPr/>
-            </a:pPr>
-            <a:endParaRPr lang="en-US" altLang="zh-CN" sz="2800" b="1" i="0" dirty="0">
-              <a:solidFill>
-                <a:srgbClr val="333333"/>
-              </a:solidFill>
-              <a:effectLst/>
-              <a:latin typeface="HelveticaNeue Regular"/>
-            </a:endParaRPr>
-          </a:p>
-          <a:p>
-            <a:pPr marL="0" marR="0" lvl="0" indent="0" algn="just" defTabSz="914400" rtl="0" eaLnBrk="1" fontAlgn="auto" latinLnBrk="0" hangingPunct="1">
-              <a:lnSpc>
-                <a:spcPct val="100000"/>
-              </a:lnSpc>
-              <a:spcBef>
-                <a:spcPts val="0"/>
-              </a:spcBef>
-              <a:spcAft>
-                <a:spcPts val="1200"/>
-              </a:spcAft>
-              <a:buClrTx/>
-              <a:buSzTx/>
-              <a:buFont typeface="Arial" panose="020B0604020202020204" pitchFamily="34" charset="0"/>
-              <a:buNone/>
-              <a:tabLst/>
-              <a:defRPr/>
-            </a:pPr>
-            <a:r>
-              <a:rPr lang="zh-CN" altLang="en-US" sz="4000" b="0" i="0" dirty="0">
-                <a:solidFill>
-                  <a:srgbClr val="191B1F"/>
-                </a:solidFill>
-                <a:effectLst/>
-                <a:latin typeface="-apple-system"/>
-              </a:rPr>
-              <a:t>各类存储系统，尤其是 </a:t>
-            </a:r>
-            <a:r>
-              <a:rPr lang="en-US" altLang="zh-CN" sz="4000" b="0" i="0" dirty="0">
-                <a:solidFill>
-                  <a:srgbClr val="191B1F"/>
-                </a:solidFill>
-                <a:effectLst/>
-                <a:latin typeface="-apple-system"/>
-              </a:rPr>
-              <a:t>LSM </a:t>
-            </a:r>
-            <a:r>
-              <a:rPr lang="zh-CN" altLang="en-US" sz="4000" b="0" i="0" dirty="0">
-                <a:solidFill>
-                  <a:srgbClr val="191B1F"/>
-                </a:solidFill>
-                <a:effectLst/>
-                <a:latin typeface="-apple-system"/>
-              </a:rPr>
-              <a:t>花费了大量的精力进行写放大的优化，但即便是 </a:t>
-            </a:r>
-            <a:r>
-              <a:rPr lang="en-US" altLang="zh-CN" sz="4000" b="0" i="0" dirty="0">
-                <a:solidFill>
-                  <a:srgbClr val="191B1F"/>
-                </a:solidFill>
-                <a:effectLst/>
-                <a:latin typeface="-apple-system"/>
-              </a:rPr>
-              <a:t>LSM </a:t>
-            </a:r>
-            <a:r>
-              <a:rPr lang="zh-CN" altLang="en-US" sz="4000" b="0" i="0" dirty="0">
-                <a:solidFill>
-                  <a:srgbClr val="191B1F"/>
-                </a:solidFill>
-                <a:effectLst/>
-                <a:latin typeface="-apple-system"/>
-              </a:rPr>
-              <a:t>写放大降低到 </a:t>
-            </a:r>
-            <a:r>
-              <a:rPr lang="en-US" altLang="zh-CN" sz="4000" b="0" i="0" dirty="0">
-                <a:solidFill>
-                  <a:srgbClr val="191B1F"/>
-                </a:solidFill>
-                <a:effectLst/>
-                <a:latin typeface="-apple-system"/>
-              </a:rPr>
-              <a:t>5</a:t>
-            </a:r>
-            <a:r>
-              <a:rPr lang="zh-CN" altLang="en-US" sz="4000" b="0" i="0" dirty="0">
-                <a:solidFill>
-                  <a:srgbClr val="191B1F"/>
-                </a:solidFill>
-                <a:effectLst/>
-                <a:latin typeface="-apple-system"/>
-              </a:rPr>
-              <a:t>，</a:t>
-            </a:r>
-            <a:r>
-              <a:rPr lang="en-US" altLang="zh-CN" sz="4000" b="0" i="0" dirty="0">
-                <a:solidFill>
-                  <a:srgbClr val="191B1F"/>
-                </a:solidFill>
-                <a:effectLst/>
-                <a:latin typeface="-apple-system"/>
-              </a:rPr>
-              <a:t>SSD </a:t>
-            </a:r>
-            <a:r>
-              <a:rPr lang="zh-CN" altLang="en-US" sz="4000" b="0" i="0" dirty="0">
-                <a:solidFill>
-                  <a:srgbClr val="191B1F"/>
-                </a:solidFill>
-                <a:effectLst/>
-                <a:latin typeface="-apple-system"/>
-              </a:rPr>
-              <a:t>自身的写放大通常也有 </a:t>
-            </a:r>
-            <a:r>
-              <a:rPr lang="en-US" altLang="zh-CN" sz="4000" b="0" i="0" dirty="0">
-                <a:solidFill>
-                  <a:srgbClr val="191B1F"/>
-                </a:solidFill>
-                <a:effectLst/>
-                <a:latin typeface="-apple-system"/>
-              </a:rPr>
-              <a:t>3 </a:t>
-            </a:r>
-            <a:r>
-              <a:rPr lang="zh-CN" altLang="en-US" sz="4000" b="0" i="0" dirty="0">
-                <a:solidFill>
-                  <a:srgbClr val="191B1F"/>
-                </a:solidFill>
-                <a:effectLst/>
-                <a:latin typeface="-apple-system"/>
-              </a:rPr>
-              <a:t>倍，综合写放大还是 </a:t>
-            </a:r>
-            <a:r>
-              <a:rPr lang="en-US" altLang="zh-CN" sz="4000" b="0" i="0" dirty="0">
-                <a:solidFill>
-                  <a:srgbClr val="191B1F"/>
-                </a:solidFill>
-                <a:effectLst/>
-                <a:latin typeface="-apple-system"/>
-              </a:rPr>
-              <a:t>15 </a:t>
-            </a:r>
-            <a:r>
-              <a:rPr lang="zh-CN" altLang="en-US" sz="4000" b="0" i="0" dirty="0">
-                <a:solidFill>
-                  <a:srgbClr val="191B1F"/>
-                </a:solidFill>
-                <a:effectLst/>
-                <a:latin typeface="-apple-system"/>
-              </a:rPr>
-              <a:t>倍之多。</a:t>
-            </a:r>
-            <a:endParaRPr lang="en-US" altLang="zh-CN" sz="2800" b="1" i="0" dirty="0">
-              <a:solidFill>
-                <a:srgbClr val="333333"/>
-              </a:solidFill>
-              <a:effectLst/>
-              <a:latin typeface="HelveticaNeue Regular"/>
             </a:endParaRPr>
           </a:p>
           <a:p>
@@ -11166,7 +10849,7 @@
         <p:spPr>
           <a:xfrm>
             <a:off x="396239" y="1357786"/>
-            <a:ext cx="10618505" cy="4989186"/>
+            <a:ext cx="10618505" cy="4328621"/>
           </a:xfrm>
           <a:prstGeom prst="rect">
             <a:avLst/>
@@ -11246,6 +10929,128 @@
               </a:rPr>
               <a:t>LSM GC = SSD GC</a:t>
             </a:r>
+          </a:p>
+          <a:p>
+            <a:pPr eaLnBrk="0" fontAlgn="base" hangingPunct="0">
+              <a:lnSpc>
+                <a:spcPct val="150000"/>
+              </a:lnSpc>
+              <a:spcBef>
+                <a:spcPct val="0"/>
+              </a:spcBef>
+              <a:spcAft>
+                <a:spcPct val="0"/>
+              </a:spcAft>
+            </a:pPr>
+            <a:endParaRPr lang="en-US" altLang="zh-CN" b="0" i="0" dirty="0">
+              <a:solidFill>
+                <a:srgbClr val="191B1F"/>
+              </a:solidFill>
+              <a:effectLst/>
+              <a:latin typeface="-apple-system"/>
+            </a:endParaRPr>
+          </a:p>
+          <a:p>
+            <a:pPr indent="-285750" fontAlgn="base">
+              <a:lnSpc>
+                <a:spcPct val="150000"/>
+              </a:lnSpc>
+              <a:spcBef>
+                <a:spcPct val="0"/>
+              </a:spcBef>
+              <a:spcAft>
+                <a:spcPct val="0"/>
+              </a:spcAft>
+              <a:buFont typeface="Arial" panose="020B0604020202020204" pitchFamily="34" charset="0"/>
+              <a:buChar char="•"/>
+            </a:pPr>
+            <a:r>
+              <a:rPr lang="zh-CN" altLang="en-US" sz="2000" dirty="0">
+                <a:solidFill>
+                  <a:srgbClr val="374151"/>
+                </a:solidFill>
+                <a:latin typeface="_5b8b_4f53"/>
+              </a:rPr>
+              <a:t>在硬件级，</a:t>
+            </a:r>
+            <a:r>
+              <a:rPr lang="en-US" altLang="zh-CN" sz="2000" dirty="0">
+                <a:solidFill>
+                  <a:srgbClr val="374151"/>
+                </a:solidFill>
+                <a:latin typeface="_5b8b_4f53"/>
+              </a:rPr>
+              <a:t>Zone</a:t>
+            </a:r>
+            <a:r>
+              <a:rPr lang="zh-CN" altLang="en-US" sz="2000" dirty="0">
+                <a:solidFill>
+                  <a:srgbClr val="374151"/>
+                </a:solidFill>
+                <a:latin typeface="_5b8b_4f53"/>
+              </a:rPr>
+              <a:t> </a:t>
+            </a:r>
+            <a:r>
+              <a:rPr lang="en-US" altLang="zh-CN" sz="2000" dirty="0">
+                <a:solidFill>
+                  <a:srgbClr val="374151"/>
+                </a:solidFill>
+                <a:latin typeface="_5b8b_4f53"/>
+              </a:rPr>
+              <a:t>size</a:t>
+            </a:r>
+            <a:r>
+              <a:rPr lang="zh-CN" altLang="en-US" sz="2000" dirty="0">
+                <a:solidFill>
+                  <a:srgbClr val="374151"/>
+                </a:solidFill>
+                <a:latin typeface="_5b8b_4f53"/>
+              </a:rPr>
+              <a:t>的进一步讨论：</a:t>
+            </a:r>
+            <a:r>
+              <a:rPr lang="en-US" altLang="zh-CN" sz="2000" dirty="0">
+                <a:solidFill>
+                  <a:srgbClr val="374151"/>
+                </a:solidFill>
+                <a:latin typeface="_5b8b_4f53"/>
+              </a:rPr>
+              <a:t>Small zone</a:t>
+            </a:r>
+            <a:r>
+              <a:rPr lang="zh-CN" altLang="en-US" sz="2000" dirty="0">
+                <a:solidFill>
+                  <a:srgbClr val="374151"/>
+                </a:solidFill>
+                <a:latin typeface="_5b8b_4f53"/>
+              </a:rPr>
+              <a:t>，例如</a:t>
+            </a:r>
+            <a:r>
+              <a:rPr lang="en-US" altLang="zh-CN" sz="2000" dirty="0">
+                <a:solidFill>
+                  <a:srgbClr val="374151"/>
+                </a:solidFill>
+                <a:latin typeface="_5b8b_4f53"/>
+              </a:rPr>
+              <a:t>96MB</a:t>
+            </a:r>
+            <a:r>
+              <a:rPr lang="zh-CN" altLang="en-US" sz="2000" dirty="0">
+                <a:solidFill>
+                  <a:srgbClr val="374151"/>
+                </a:solidFill>
+                <a:latin typeface="_5b8b_4f53"/>
+              </a:rPr>
+              <a:t>，与擦除单元保持一致。</a:t>
+            </a:r>
+            <a:endParaRPr lang="en-US" altLang="zh-CN" sz="2000" dirty="0">
+              <a:solidFill>
+                <a:srgbClr val="374151"/>
+              </a:solidFill>
+              <a:latin typeface="_5b8b_4f53"/>
+            </a:endParaRPr>
           </a:p>
           <a:p>
             <a:pPr marL="285750" indent="-285750" eaLnBrk="0" fontAlgn="base" hangingPunct="0">
@@ -11283,7 +11088,7 @@
               <a:buChar char="•"/>
             </a:pPr>
             <a:r>
-              <a:rPr lang="zh-CN" altLang="en-US" sz="2000" dirty="0">
+              <a:rPr lang="zh-CN" altLang="en-US" sz="1800" dirty="0">
                 <a:solidFill>
                   <a:srgbClr val="374151"/>
                 </a:solidFill>
@@ -11292,7 +11097,7 @@
               <a:t>在系统级，我们需要一个通用的裸盘</a:t>
             </a:r>
             <a:r>
-              <a:rPr lang="en-US" altLang="zh-CN" sz="2000" dirty="0">
+              <a:rPr lang="en-US" altLang="zh-CN" sz="1800" dirty="0">
                 <a:solidFill>
                   <a:srgbClr val="374151"/>
                 </a:solidFill>
@@ -11301,7 +11106,7 @@
               <a:t>IO</a:t>
             </a:r>
             <a:r>
-              <a:rPr lang="zh-CN" altLang="en-US" sz="2000" dirty="0">
+              <a:rPr lang="zh-CN" altLang="en-US" sz="1800" dirty="0">
                 <a:solidFill>
                   <a:srgbClr val="374151"/>
                 </a:solidFill>
@@ -11310,7 +11115,7 @@
               <a:t>层</a:t>
             </a:r>
             <a:r>
-              <a:rPr lang="en-US" altLang="zh-CN" sz="2000" dirty="0">
+              <a:rPr lang="en-US" altLang="zh-CN" sz="1800" dirty="0">
                 <a:solidFill>
                   <a:srgbClr val="374151"/>
                 </a:solidFill>
@@ -11319,7 +11124,7 @@
               <a:t>( for all non-block I/O )</a:t>
             </a:r>
             <a:r>
-              <a:rPr lang="zh-CN" altLang="en-US" sz="2000" dirty="0">
+              <a:rPr lang="zh-CN" altLang="en-US" sz="1800" dirty="0">
                 <a:solidFill>
                   <a:srgbClr val="374151"/>
                 </a:solidFill>
@@ -11328,7 +11133,7 @@
               <a:t>：</a:t>
             </a:r>
             <a:r>
-              <a:rPr lang="en-US" altLang="zh-CN" sz="2000" dirty="0">
+              <a:rPr lang="en-US" altLang="zh-CN" sz="1800" dirty="0">
                 <a:solidFill>
                   <a:srgbClr val="374151"/>
                 </a:solidFill>
@@ -11337,7 +11142,7 @@
               <a:t> </a:t>
             </a:r>
             <a:r>
-              <a:rPr lang="zh-CN" altLang="en-US" sz="2000" dirty="0">
+              <a:rPr lang="zh-CN" altLang="en-US" sz="1800" dirty="0">
                 <a:solidFill>
                   <a:srgbClr val="374151"/>
                 </a:solidFill>
@@ -11346,7 +11151,7 @@
               <a:t>为存储设备封装出一套统一的抽象接口，并且兼容现有的所有应用。这个接口对下可以支持：</a:t>
             </a:r>
             <a:r>
-              <a:rPr lang="en-US" altLang="zh-CN" sz="2000" dirty="0">
+              <a:rPr lang="en-US" altLang="zh-CN" sz="1800" dirty="0">
                 <a:solidFill>
                   <a:srgbClr val="374151"/>
                 </a:solidFill>
@@ -11355,7 +11160,7 @@
               <a:t>ZNS</a:t>
             </a:r>
             <a:r>
-              <a:rPr lang="zh-CN" altLang="en-US" sz="2000" dirty="0">
+              <a:rPr lang="zh-CN" altLang="en-US" sz="1800" dirty="0">
                 <a:solidFill>
                   <a:srgbClr val="374151"/>
                 </a:solidFill>
@@ -11364,7 +11169,7 @@
               <a:t>，</a:t>
             </a:r>
             <a:r>
-              <a:rPr lang="en-US" altLang="zh-CN" sz="2000" dirty="0">
+              <a:rPr lang="en-US" altLang="zh-CN" sz="1800" dirty="0">
                 <a:solidFill>
                   <a:srgbClr val="374151"/>
                 </a:solidFill>
@@ -11373,7 +11178,7 @@
               <a:t> Optane SSD </a:t>
             </a:r>
             <a:r>
-              <a:rPr lang="zh-CN" altLang="en-US" sz="2000" dirty="0">
+              <a:rPr lang="zh-CN" altLang="en-US" sz="1800" dirty="0">
                 <a:solidFill>
                   <a:srgbClr val="374151"/>
                 </a:solidFill>
@@ -11382,7 +11187,7 @@
               <a:t>，</a:t>
             </a:r>
             <a:r>
-              <a:rPr lang="en-US" altLang="zh-CN" sz="2000" dirty="0">
+              <a:rPr lang="en-US" altLang="zh-CN" sz="1800" dirty="0">
                 <a:solidFill>
                   <a:srgbClr val="374151"/>
                 </a:solidFill>
@@ -11404,7 +11209,7 @@
               </a:spcAft>
             </a:pPr>
             <a:r>
-              <a:rPr lang="en-US" altLang="zh-CN" sz="2000" dirty="0">
+              <a:rPr lang="en-US" altLang="zh-CN" sz="1800" dirty="0">
                 <a:solidFill>
                   <a:srgbClr val="374151"/>
                 </a:solidFill>
@@ -11413,7 +11218,7 @@
               <a:t>     </a:t>
             </a:r>
             <a:r>
-              <a:rPr lang="zh-CN" altLang="en-US" sz="2000" dirty="0">
+              <a:rPr lang="zh-CN" altLang="en-US" sz="1800" dirty="0">
                 <a:solidFill>
                   <a:srgbClr val="374151"/>
                 </a:solidFill>
@@ -11422,7 +11227,7 @@
               <a:t>到目前为止，无论是</a:t>
             </a:r>
             <a:r>
-              <a:rPr lang="en-US" altLang="zh-CN" sz="2000" dirty="0">
+              <a:rPr lang="en-US" altLang="zh-CN" sz="1800" dirty="0">
                 <a:solidFill>
                   <a:srgbClr val="374151"/>
                 </a:solidFill>
@@ -11431,7 +11236,7 @@
               <a:t>OC-SSD</a:t>
             </a:r>
             <a:r>
-              <a:rPr lang="zh-CN" altLang="en-US" sz="2000" dirty="0">
+              <a:rPr lang="zh-CN" altLang="en-US" sz="1800" dirty="0">
                 <a:solidFill>
                   <a:srgbClr val="374151"/>
                 </a:solidFill>
@@ -11440,7 +11245,7 @@
               <a:t>、</a:t>
             </a:r>
             <a:r>
-              <a:rPr lang="en-US" altLang="zh-CN" sz="2000" dirty="0">
+              <a:rPr lang="en-US" altLang="zh-CN" sz="1800" dirty="0">
                 <a:solidFill>
                   <a:srgbClr val="374151"/>
                 </a:solidFill>
@@ -11449,7 +11254,7 @@
               <a:t>Stream-SSD</a:t>
             </a:r>
             <a:r>
-              <a:rPr lang="zh-CN" altLang="en-US" sz="2000" dirty="0">
+              <a:rPr lang="zh-CN" altLang="en-US" sz="1800" dirty="0">
                 <a:solidFill>
                   <a:srgbClr val="374151"/>
                 </a:solidFill>
@@ -11458,7 +11263,7 @@
               <a:t>、</a:t>
             </a:r>
             <a:r>
-              <a:rPr lang="en-US" altLang="zh-CN" sz="2000" dirty="0">
+              <a:rPr lang="en-US" altLang="zh-CN" sz="1800" dirty="0">
                 <a:solidFill>
                   <a:srgbClr val="374151"/>
                 </a:solidFill>
@@ -11467,7 +11272,7 @@
               <a:t>ZNS</a:t>
             </a:r>
             <a:r>
-              <a:rPr lang="zh-CN" altLang="en-US" sz="2000" dirty="0">
+              <a:rPr lang="zh-CN" altLang="en-US" sz="1800" dirty="0">
                 <a:solidFill>
                   <a:srgbClr val="374151"/>
                 </a:solidFill>
@@ -11475,131 +11280,7 @@
               </a:rPr>
               <a:t>甚至包括近存计算等技术，工程师想要的是尽可能少更改现有应用（甚至不更改）， 就能达到更好的性能。</a:t>
             </a:r>
-            <a:endParaRPr lang="en-US" altLang="zh-CN" sz="2000" dirty="0">
-              <a:solidFill>
-                <a:srgbClr val="374151"/>
-              </a:solidFill>
-              <a:latin typeface="_5b8b_4f53"/>
-            </a:endParaRPr>
-          </a:p>
-          <a:p>
-            <a:pPr marL="285750" indent="-285750" eaLnBrk="0" fontAlgn="base" hangingPunct="0">
-              <a:lnSpc>
-                <a:spcPct val="150000"/>
-              </a:lnSpc>
-              <a:spcBef>
-                <a:spcPct val="0"/>
-              </a:spcBef>
-              <a:spcAft>
-                <a:spcPct val="0"/>
-              </a:spcAft>
-              <a:buFont typeface="Arial" panose="020B0604020202020204" pitchFamily="34" charset="0"/>
-              <a:buChar char="•"/>
-            </a:pPr>
-            <a:endParaRPr lang="en-US" altLang="zh-CN" b="0" i="0" dirty="0">
-              <a:solidFill>
-                <a:srgbClr val="191B1F"/>
-              </a:solidFill>
-              <a:effectLst/>
-              <a:latin typeface="-apple-system"/>
-            </a:endParaRPr>
-          </a:p>
-          <a:p>
-            <a:pPr indent="-285750" fontAlgn="base">
-              <a:lnSpc>
-                <a:spcPct val="150000"/>
-              </a:lnSpc>
-              <a:spcBef>
-                <a:spcPct val="0"/>
-              </a:spcBef>
-              <a:spcAft>
-                <a:spcPct val="0"/>
-              </a:spcAft>
-              <a:buFont typeface="Arial" panose="020B0604020202020204" pitchFamily="34" charset="0"/>
-              <a:buChar char="•"/>
-            </a:pPr>
-            <a:r>
-              <a:rPr lang="zh-CN" altLang="en-US" sz="2000" dirty="0">
-                <a:solidFill>
-                  <a:srgbClr val="374151"/>
-                </a:solidFill>
-                <a:latin typeface="_5b8b_4f53"/>
-              </a:rPr>
-              <a:t>在硬件级，</a:t>
-            </a:r>
-            <a:r>
-              <a:rPr lang="en-US" altLang="zh-CN" sz="2000" dirty="0">
-                <a:solidFill>
-                  <a:srgbClr val="374151"/>
-                </a:solidFill>
-                <a:latin typeface="_5b8b_4f53"/>
-              </a:rPr>
-              <a:t>Zone</a:t>
-            </a:r>
-            <a:r>
-              <a:rPr lang="zh-CN" altLang="en-US" sz="2000" dirty="0">
-                <a:solidFill>
-                  <a:srgbClr val="374151"/>
-                </a:solidFill>
-                <a:latin typeface="_5b8b_4f53"/>
-              </a:rPr>
-              <a:t> </a:t>
-            </a:r>
-            <a:r>
-              <a:rPr lang="en-US" altLang="zh-CN" sz="2000" dirty="0">
-                <a:solidFill>
-                  <a:srgbClr val="374151"/>
-                </a:solidFill>
-                <a:latin typeface="_5b8b_4f53"/>
-              </a:rPr>
-              <a:t>size</a:t>
-            </a:r>
-            <a:r>
-              <a:rPr lang="zh-CN" altLang="en-US" sz="2000" dirty="0">
-                <a:solidFill>
-                  <a:srgbClr val="374151"/>
-                </a:solidFill>
-                <a:latin typeface="_5b8b_4f53"/>
-              </a:rPr>
-              <a:t>的进一步讨论：</a:t>
-            </a:r>
-            <a:r>
-              <a:rPr lang="en-US" altLang="zh-CN" sz="2000" dirty="0">
-                <a:solidFill>
-                  <a:srgbClr val="374151"/>
-                </a:solidFill>
-                <a:latin typeface="_5b8b_4f53"/>
-              </a:rPr>
-              <a:t>Small zone</a:t>
-            </a:r>
-            <a:r>
-              <a:rPr lang="zh-CN" altLang="en-US" sz="2000" dirty="0">
-                <a:solidFill>
-                  <a:srgbClr val="374151"/>
-                </a:solidFill>
-                <a:latin typeface="_5b8b_4f53"/>
-              </a:rPr>
-              <a:t>，例如</a:t>
-            </a:r>
-            <a:r>
-              <a:rPr lang="en-US" altLang="zh-CN" sz="2000" dirty="0">
-                <a:solidFill>
-                  <a:srgbClr val="374151"/>
-                </a:solidFill>
-                <a:latin typeface="_5b8b_4f53"/>
-              </a:rPr>
-              <a:t>96MB</a:t>
-            </a:r>
-            <a:r>
-              <a:rPr lang="zh-CN" altLang="en-US" sz="2000" dirty="0">
-                <a:solidFill>
-                  <a:srgbClr val="374151"/>
-                </a:solidFill>
-                <a:latin typeface="_5b8b_4f53"/>
-              </a:rPr>
-              <a:t>，与擦除单元保持一致。</a:t>
-            </a:r>
-            <a:endParaRPr lang="en-US" altLang="zh-CN" sz="2000" dirty="0">
+            <a:endParaRPr lang="en-US" altLang="zh-CN" sz="1800" dirty="0">
               <a:solidFill>
                 <a:srgbClr val="374151"/>
               </a:solidFill>
@@ -11767,6 +11448,1019 @@
         </p:nvSpPr>
         <p:spPr>
           <a:xfrm>
+            <a:off x="8534400" y="6522720"/>
+            <a:ext cx="3657600" cy="335280"/>
+          </a:xfrm>
+          <a:prstGeom prst="rect">
+            <a:avLst/>
+          </a:prstGeom>
+          <a:solidFill>
+            <a:srgbClr val="ADADE0"/>
+          </a:solidFill>
+          <a:ln>
+            <a:noFill/>
+          </a:ln>
+        </p:spPr>
+        <p:style>
+          <a:lnRef idx="2">
+            <a:schemeClr val="accent1">
+              <a:shade val="50000"/>
+            </a:schemeClr>
+          </a:lnRef>
+          <a:fillRef idx="1">
+            <a:schemeClr val="accent1"/>
+          </a:fillRef>
+          <a:effectRef idx="0">
+            <a:schemeClr val="accent1"/>
+          </a:effectRef>
+          <a:fontRef idx="minor">
+            <a:schemeClr val="lt1"/>
+          </a:fontRef>
+        </p:style>
+        <p:txBody>
+          <a:bodyPr rot="0" spcFirstLastPara="0" vert="horz" wrap="square" lIns="91440" tIns="45720" rIns="91440" bIns="45720" numCol="1" spcCol="0" rtlCol="0" fromWordArt="0" anchor="ctr" anchorCtr="0" forceAA="0" compatLnSpc="1">
+            <a:noAutofit/>
+          </a:bodyPr>
+          <a:lstStyle>
+            <a:defPPr>
+              <a:defRPr lang="zh-CN"/>
+            </a:defPPr>
+            <a:lvl1pPr marL="0" algn="l" defTabSz="914400" rtl="0" eaLnBrk="1" latinLnBrk="0" hangingPunct="1">
+              <a:defRPr sz="1800" kern="1200">
+                <a:solidFill>
+                  <a:schemeClr val="lt1"/>
+                </a:solidFill>
+                <a:latin typeface="+mn-lt"/>
+                <a:ea typeface="+mn-ea"/>
+                <a:cs typeface="+mn-cs"/>
+              </a:defRPr>
+            </a:lvl1pPr>
+            <a:lvl2pPr marL="457200" algn="l" defTabSz="914400" rtl="0" eaLnBrk="1" latinLnBrk="0" hangingPunct="1">
+              <a:defRPr sz="1800" kern="1200">
+                <a:solidFill>
+                  <a:schemeClr val="lt1"/>
+                </a:solidFill>
+                <a:latin typeface="+mn-lt"/>
+                <a:ea typeface="+mn-ea"/>
+                <a:cs typeface="+mn-cs"/>
+              </a:defRPr>
+            </a:lvl2pPr>
+            <a:lvl3pPr marL="914400" algn="l" defTabSz="914400" rtl="0" eaLnBrk="1" latinLnBrk="0" hangingPunct="1">
+              <a:defRPr sz="1800" kern="1200">
+                <a:solidFill>
+                  <a:schemeClr val="lt1"/>
+                </a:solidFill>
+                <a:latin typeface="+mn-lt"/>
+                <a:ea typeface="+mn-ea"/>
+                <a:cs typeface="+mn-cs"/>
+              </a:defRPr>
+            </a:lvl3pPr>
+            <a:lvl4pPr marL="1371600" algn="l" defTabSz="914400" rtl="0" eaLnBrk="1" latinLnBrk="0" hangingPunct="1">
+              <a:defRPr sz="1800" kern="1200">
+                <a:solidFill>
+                  <a:schemeClr val="lt1"/>
+                </a:solidFill>
+                <a:latin typeface="+mn-lt"/>
+                <a:ea typeface="+mn-ea"/>
+                <a:cs typeface="+mn-cs"/>
+              </a:defRPr>
+            </a:lvl4pPr>
+            <a:lvl5pPr marL="1828800" algn="l" defTabSz="914400" rtl="0" eaLnBrk="1" latinLnBrk="0" hangingPunct="1">
+              <a:defRPr sz="1800" kern="1200">
+                <a:solidFill>
+                  <a:schemeClr val="lt1"/>
+                </a:solidFill>
+                <a:latin typeface="+mn-lt"/>
+                <a:ea typeface="+mn-ea"/>
+                <a:cs typeface="+mn-cs"/>
+              </a:defRPr>
+            </a:lvl5pPr>
+            <a:lvl6pPr marL="2286000" algn="l" defTabSz="914400" rtl="0" eaLnBrk="1" latinLnBrk="0" hangingPunct="1">
+              <a:defRPr sz="1800" kern="1200">
+                <a:solidFill>
+                  <a:schemeClr val="lt1"/>
+                </a:solidFill>
+                <a:latin typeface="+mn-lt"/>
+                <a:ea typeface="+mn-ea"/>
+                <a:cs typeface="+mn-cs"/>
+              </a:defRPr>
+            </a:lvl6pPr>
+            <a:lvl7pPr marL="2743200" algn="l" defTabSz="914400" rtl="0" eaLnBrk="1" latinLnBrk="0" hangingPunct="1">
+              <a:defRPr sz="1800" kern="1200">
+                <a:solidFill>
+                  <a:schemeClr val="lt1"/>
+                </a:solidFill>
+                <a:latin typeface="+mn-lt"/>
+                <a:ea typeface="+mn-ea"/>
+                <a:cs typeface="+mn-cs"/>
+              </a:defRPr>
+            </a:lvl7pPr>
+            <a:lvl8pPr marL="3200400" algn="l" defTabSz="914400" rtl="0" eaLnBrk="1" latinLnBrk="0" hangingPunct="1">
+              <a:defRPr sz="1800" kern="1200">
+                <a:solidFill>
+                  <a:schemeClr val="lt1"/>
+                </a:solidFill>
+                <a:latin typeface="+mn-lt"/>
+                <a:ea typeface="+mn-ea"/>
+                <a:cs typeface="+mn-cs"/>
+              </a:defRPr>
+            </a:lvl8pPr>
+            <a:lvl9pPr marL="3657600" algn="l" defTabSz="914400" rtl="0" eaLnBrk="1" latinLnBrk="0" hangingPunct="1">
+              <a:defRPr sz="1800" kern="1200">
+                <a:solidFill>
+                  <a:schemeClr val="lt1"/>
+                </a:solidFill>
+                <a:latin typeface="+mn-lt"/>
+                <a:ea typeface="+mn-ea"/>
+                <a:cs typeface="+mn-cs"/>
+              </a:defRPr>
+            </a:lvl9pPr>
+          </a:lstStyle>
+          <a:p>
+            <a:pPr algn="ctr"/>
+            <a:endParaRPr lang="zh-CN" altLang="en-US" sz="1600" dirty="0">
+              <a:solidFill>
+                <a:schemeClr val="bg1"/>
+              </a:solidFill>
+              <a:latin typeface="Constantia" panose="02030602050306030303" pitchFamily="18" charset="0"/>
+            </a:endParaRPr>
+          </a:p>
+        </p:txBody>
+      </p:sp>
+      <p:sp>
+        <p:nvSpPr>
+          <p:cNvPr id="24" name="日期占位符 7"/>
+          <p:cNvSpPr>
+            <a:spLocks noGrp="1"/>
+          </p:cNvSpPr>
+          <p:nvPr>
+            <p:ph type="dt" sz="half" idx="10"/>
+          </p:nvPr>
+        </p:nvSpPr>
+        <p:spPr>
+          <a:xfrm>
+            <a:off x="1209907" y="6494974"/>
+            <a:ext cx="1847385" cy="365125"/>
+          </a:xfrm>
+        </p:spPr>
+        <p:txBody>
+          <a:bodyPr/>
+          <a:lstStyle/>
+          <a:p>
+            <a:fld id="{31CCC338-FFC3-4940-99DD-6195BEF39901}" type="datetime4">
+              <a:rPr lang="en-US" altLang="zh-CN" sz="1400" b="1">
+                <a:solidFill>
+                  <a:schemeClr val="bg1"/>
+                </a:solidFill>
+                <a:latin typeface="Constantia" panose="02030602050306030303" pitchFamily="18" charset="0"/>
+                <a:cs typeface="Times" panose="02020603050405020304" pitchFamily="18" charset="0"/>
+              </a:rPr>
+              <a:t>April 10, 2024</a:t>
+            </a:fld>
+            <a:endParaRPr lang="zh-CN" altLang="en-US" sz="1400" b="1" dirty="0">
+              <a:solidFill>
+                <a:schemeClr val="bg1"/>
+              </a:solidFill>
+              <a:latin typeface="Constantia" panose="02030602050306030303" pitchFamily="18" charset="0"/>
+              <a:cs typeface="Times" panose="02020603050405020304" pitchFamily="18" charset="0"/>
+            </a:endParaRPr>
+          </a:p>
+        </p:txBody>
+      </p:sp>
+      <p:cxnSp>
+        <p:nvCxnSpPr>
+          <p:cNvPr id="26" name="直接连接符 25"/>
+          <p:cNvCxnSpPr/>
+          <p:nvPr/>
+        </p:nvCxnSpPr>
+        <p:spPr>
+          <a:xfrm>
+            <a:off x="385590" y="859531"/>
+            <a:ext cx="11479576" cy="0"/>
+          </a:xfrm>
+          <a:prstGeom prst="line">
+            <a:avLst/>
+          </a:prstGeom>
+          <a:ln w="38100">
+            <a:solidFill>
+              <a:srgbClr val="4747BA"/>
+            </a:solidFill>
+          </a:ln>
+        </p:spPr>
+        <p:style>
+          <a:lnRef idx="1">
+            <a:schemeClr val="accent1"/>
+          </a:lnRef>
+          <a:fillRef idx="0">
+            <a:schemeClr val="accent1"/>
+          </a:fillRef>
+          <a:effectRef idx="0">
+            <a:schemeClr val="accent1"/>
+          </a:effectRef>
+          <a:fontRef idx="minor">
+            <a:schemeClr val="tx1"/>
+          </a:fontRef>
+        </p:style>
+      </p:cxnSp>
+      <p:sp>
+        <p:nvSpPr>
+          <p:cNvPr id="19" name="文本框 18"/>
+          <p:cNvSpPr txBox="1"/>
+          <p:nvPr/>
+        </p:nvSpPr>
+        <p:spPr>
+          <a:xfrm>
+            <a:off x="415183" y="166469"/>
+            <a:ext cx="6798981" cy="645160"/>
+          </a:xfrm>
+          <a:prstGeom prst="rect">
+            <a:avLst/>
+          </a:prstGeom>
+          <a:noFill/>
+        </p:spPr>
+        <p:txBody>
+          <a:bodyPr wrap="square" rtlCol="0">
+            <a:spAutoFit/>
+          </a:bodyPr>
+          <a:lstStyle/>
+          <a:p>
+            <a:pPr>
+              <a:lnSpc>
+                <a:spcPct val="90000"/>
+              </a:lnSpc>
+              <a:spcBef>
+                <a:spcPts val="1000"/>
+              </a:spcBef>
+              <a:defRPr/>
+            </a:pPr>
+            <a:r>
+              <a:rPr lang="en-US" altLang="zh-CN" sz="4000" b="1" dirty="0" err="1">
+                <a:solidFill>
+                  <a:srgbClr val="4747BA"/>
+                </a:solidFill>
+                <a:latin typeface="Constantia" panose="02030602050306030303" pitchFamily="18" charset="0"/>
+                <a:ea typeface="腾讯体 W3" panose="020C04030202040F0204" pitchFamily="34" charset="-122"/>
+                <a:cs typeface="Times" panose="02020603050405020304" pitchFamily="18" charset="0"/>
+              </a:rPr>
+              <a:t>CacheLib</a:t>
+            </a:r>
+            <a:r>
+              <a:rPr lang="en-US" altLang="zh-CN" sz="4000" b="1" dirty="0">
+                <a:solidFill>
+                  <a:srgbClr val="4747BA"/>
+                </a:solidFill>
+                <a:latin typeface="Constantia" panose="02030602050306030303" pitchFamily="18" charset="0"/>
+                <a:ea typeface="腾讯体 W3" panose="020C04030202040F0204" pitchFamily="34" charset="-122"/>
+                <a:cs typeface="Times" panose="02020603050405020304" pitchFamily="18" charset="0"/>
+              </a:rPr>
+              <a:t> Navy</a:t>
+            </a:r>
+            <a:endParaRPr lang="zh-CN" altLang="en-US" sz="4000" b="1" dirty="0">
+              <a:solidFill>
+                <a:srgbClr val="4747BA"/>
+              </a:solidFill>
+              <a:latin typeface="Constantia" panose="02030602050306030303" pitchFamily="18" charset="0"/>
+              <a:ea typeface="腾讯体 W3" panose="020C04030202040F0204" pitchFamily="34" charset="-122"/>
+              <a:cs typeface="Times" panose="02020603050405020304" pitchFamily="18" charset="0"/>
+            </a:endParaRPr>
+          </a:p>
+        </p:txBody>
+      </p:sp>
+      <p:pic>
+        <p:nvPicPr>
+          <p:cNvPr id="23" name="图片 22"/>
+          <p:cNvPicPr>
+            <a:picLocks noChangeAspect="1"/>
+          </p:cNvPicPr>
+          <p:nvPr/>
+        </p:nvPicPr>
+        <p:blipFill>
+          <a:blip r:embed="rId3" cstate="print">
+            <a:extLst>
+              <a:ext uri="{28A0092B-C50C-407E-A947-70E740481C1C}">
+                <a14:useLocalDpi xmlns:a14="http://schemas.microsoft.com/office/drawing/2010/main" val="0"/>
+              </a:ext>
+            </a:extLst>
+          </a:blip>
+          <a:stretch>
+            <a:fillRect/>
+          </a:stretch>
+        </p:blipFill>
+        <p:spPr>
+          <a:xfrm>
+            <a:off x="7804063" y="218980"/>
+            <a:ext cx="730337" cy="556270"/>
+          </a:xfrm>
+          <a:prstGeom prst="rect">
+            <a:avLst/>
+          </a:prstGeom>
+        </p:spPr>
+      </p:pic>
+      <p:sp>
+        <p:nvSpPr>
+          <p:cNvPr id="14" name="灯片编号占位符 8"/>
+          <p:cNvSpPr>
+            <a:spLocks noGrp="1"/>
+          </p:cNvSpPr>
+          <p:nvPr>
+            <p:ph type="sldNum" sz="quarter" idx="12"/>
+          </p:nvPr>
+        </p:nvSpPr>
+        <p:spPr>
+          <a:xfrm>
+            <a:off x="9847869" y="6405035"/>
+            <a:ext cx="809393" cy="545001"/>
+          </a:xfrm>
+        </p:spPr>
+        <p:txBody>
+          <a:bodyPr/>
+          <a:lstStyle/>
+          <a:p>
+            <a:pPr algn="ctr"/>
+            <a:fld id="{152851E7-9224-42D2-A4FF-119762E40804}" type="slidenum">
+              <a:rPr lang="zh-CN" altLang="en-US" sz="1400" b="1" smtClean="0">
+                <a:solidFill>
+                  <a:schemeClr val="bg1"/>
+                </a:solidFill>
+                <a:latin typeface="Constantia" panose="02030602050306030303" pitchFamily="18" charset="0"/>
+                <a:cs typeface="Times" panose="02020603050405020304" pitchFamily="18" charset="0"/>
+              </a:rPr>
+              <a:t>13</a:t>
+            </a:fld>
+            <a:endParaRPr lang="zh-CN" altLang="en-US" sz="1400" b="1" dirty="0">
+              <a:solidFill>
+                <a:schemeClr val="bg1"/>
+              </a:solidFill>
+              <a:latin typeface="Constantia" panose="02030602050306030303" pitchFamily="18" charset="0"/>
+              <a:cs typeface="Times" panose="02020603050405020304" pitchFamily="18" charset="0"/>
+            </a:endParaRPr>
+          </a:p>
+        </p:txBody>
+      </p:sp>
+      <p:pic>
+        <p:nvPicPr>
+          <p:cNvPr id="44" name="图片 43"/>
+          <p:cNvPicPr>
+            <a:picLocks noChangeAspect="1"/>
+          </p:cNvPicPr>
+          <p:nvPr/>
+        </p:nvPicPr>
+        <p:blipFill>
+          <a:blip r:embed="rId4" cstate="print">
+            <a:extLst>
+              <a:ext uri="{28A0092B-C50C-407E-A947-70E740481C1C}">
+                <a14:useLocalDpi xmlns:a14="http://schemas.microsoft.com/office/drawing/2010/main" val="0"/>
+              </a:ext>
+            </a:extLst>
+          </a:blip>
+          <a:stretch>
+            <a:fillRect/>
+          </a:stretch>
+        </p:blipFill>
+        <p:spPr>
+          <a:xfrm>
+            <a:off x="8590829" y="204228"/>
+            <a:ext cx="3323471" cy="570629"/>
+          </a:xfrm>
+          <a:prstGeom prst="rect">
+            <a:avLst/>
+          </a:prstGeom>
+        </p:spPr>
+      </p:pic>
+      <p:sp>
+        <p:nvSpPr>
+          <p:cNvPr id="13" name="Fußzeilenplatzhalter 4"/>
+          <p:cNvSpPr>
+            <a:spLocks noGrp="1"/>
+          </p:cNvSpPr>
+          <p:nvPr>
+            <p:ph type="ftr" sz="quarter" idx="11"/>
+          </p:nvPr>
+        </p:nvSpPr>
+        <p:spPr>
+          <a:xfrm>
+            <a:off x="4095916" y="6553437"/>
+            <a:ext cx="4520431" cy="273844"/>
+          </a:xfrm>
+        </p:spPr>
+        <p:txBody>
+          <a:bodyPr/>
+          <a:lstStyle/>
+          <a:p>
+            <a:pPr algn="ctr"/>
+            <a:r>
+              <a:rPr lang="en-US" altLang="zh-CN" sz="1400" b="1" dirty="0" err="1">
+                <a:solidFill>
+                  <a:schemeClr val="bg1"/>
+                </a:solidFill>
+                <a:latin typeface="Constantia" panose="02030602050306030303" pitchFamily="18" charset="0"/>
+              </a:rPr>
+              <a:t>Ziqi</a:t>
+            </a:r>
+            <a:r>
+              <a:rPr lang="en-US" altLang="zh-CN" sz="1400" b="1" dirty="0">
+                <a:solidFill>
+                  <a:schemeClr val="bg1"/>
+                </a:solidFill>
+                <a:latin typeface="Constantia" panose="02030602050306030303" pitchFamily="18" charset="0"/>
+              </a:rPr>
+              <a:t> Liu | HUST</a:t>
+            </a:r>
+            <a:endParaRPr lang="zh-CN" altLang="en-US" sz="1400" b="1" dirty="0">
+              <a:solidFill>
+                <a:schemeClr val="bg1"/>
+              </a:solidFill>
+              <a:latin typeface="Constantia" panose="02030602050306030303" pitchFamily="18" charset="0"/>
+            </a:endParaRPr>
+          </a:p>
+        </p:txBody>
+      </p:sp>
+      <p:sp>
+        <p:nvSpPr>
+          <p:cNvPr id="2" name="文本框 1">
+            <a:extLst>
+              <a:ext uri="{FF2B5EF4-FFF2-40B4-BE49-F238E27FC236}">
+                <a16:creationId xmlns:a16="http://schemas.microsoft.com/office/drawing/2014/main" id="{31B23CE1-1ECC-2A85-FC04-A5828C1329D6}"/>
+              </a:ext>
+            </a:extLst>
+          </p:cNvPr>
+          <p:cNvSpPr txBox="1"/>
+          <p:nvPr/>
+        </p:nvSpPr>
+        <p:spPr>
+          <a:xfrm>
+            <a:off x="385590" y="1353000"/>
+            <a:ext cx="5687354" cy="4200252"/>
+          </a:xfrm>
+          <a:prstGeom prst="rect">
+            <a:avLst/>
+          </a:prstGeom>
+          <a:noFill/>
+        </p:spPr>
+        <p:txBody>
+          <a:bodyPr wrap="square" rtlCol="0">
+            <a:spAutoFit/>
+          </a:bodyPr>
+          <a:lstStyle/>
+          <a:p>
+            <a:pPr>
+              <a:lnSpc>
+                <a:spcPct val="150000"/>
+              </a:lnSpc>
+            </a:pPr>
+            <a:r>
+              <a:rPr lang="en-US" altLang="zh-CN" sz="2000" dirty="0">
+                <a:solidFill>
+                  <a:srgbClr val="374151"/>
+                </a:solidFill>
+                <a:latin typeface="_5b8b_4f53"/>
+              </a:rPr>
+              <a:t>Navy </a:t>
+            </a:r>
+            <a:r>
+              <a:rPr lang="zh-CN" altLang="en-US" sz="2000" dirty="0">
+                <a:solidFill>
+                  <a:srgbClr val="374151"/>
+                </a:solidFill>
+                <a:latin typeface="_5b8b_4f53"/>
+              </a:rPr>
+              <a:t>是 </a:t>
+            </a:r>
+            <a:r>
+              <a:rPr lang="en-US" altLang="zh-CN" sz="2000" dirty="0" err="1">
+                <a:solidFill>
+                  <a:srgbClr val="374151"/>
+                </a:solidFill>
+                <a:latin typeface="_5b8b_4f53"/>
+              </a:rPr>
+              <a:t>CacheLib</a:t>
+            </a:r>
+            <a:r>
+              <a:rPr lang="en-US" altLang="zh-CN" sz="2000" dirty="0">
+                <a:solidFill>
+                  <a:srgbClr val="374151"/>
+                </a:solidFill>
+                <a:latin typeface="_5b8b_4f53"/>
+              </a:rPr>
+              <a:t> </a:t>
+            </a:r>
+            <a:r>
+              <a:rPr lang="zh-CN" altLang="en-US" sz="2000" dirty="0">
+                <a:solidFill>
+                  <a:srgbClr val="374151"/>
+                </a:solidFill>
+                <a:latin typeface="_5b8b_4f53"/>
+              </a:rPr>
+              <a:t>中的一个组件，它是一个为 </a:t>
+            </a:r>
+            <a:r>
+              <a:rPr lang="en-US" altLang="zh-CN" sz="2000" dirty="0">
+                <a:solidFill>
+                  <a:srgbClr val="374151"/>
+                </a:solidFill>
+                <a:latin typeface="_5b8b_4f53"/>
+              </a:rPr>
+              <a:t>SSD </a:t>
+            </a:r>
+            <a:r>
+              <a:rPr lang="zh-CN" altLang="en-US" sz="2000" dirty="0">
+                <a:solidFill>
+                  <a:srgbClr val="374151"/>
+                </a:solidFill>
+                <a:latin typeface="_5b8b_4f53"/>
+              </a:rPr>
+              <a:t>优化的缓存引擎，专门为 </a:t>
+            </a:r>
+            <a:r>
+              <a:rPr lang="en-US" altLang="zh-CN" sz="2000" dirty="0">
+                <a:solidFill>
+                  <a:srgbClr val="374151"/>
+                </a:solidFill>
+                <a:latin typeface="_5b8b_4f53"/>
+              </a:rPr>
+              <a:t>Hybrid Cache </a:t>
+            </a:r>
+            <a:r>
+              <a:rPr lang="zh-CN" altLang="en-US" sz="2000" dirty="0">
+                <a:solidFill>
+                  <a:srgbClr val="374151"/>
+                </a:solidFill>
+                <a:latin typeface="_5b8b_4f53"/>
+              </a:rPr>
+              <a:t>设计。</a:t>
+            </a:r>
+            <a:r>
+              <a:rPr lang="en-US" altLang="zh-CN" sz="2000" dirty="0">
+                <a:solidFill>
+                  <a:srgbClr val="374151"/>
+                </a:solidFill>
+                <a:latin typeface="_5b8b_4f53"/>
+              </a:rPr>
+              <a:t>Navy </a:t>
+            </a:r>
+            <a:r>
+              <a:rPr lang="zh-CN" altLang="en-US" sz="2000" dirty="0">
+                <a:solidFill>
+                  <a:srgbClr val="374151"/>
+                </a:solidFill>
+                <a:latin typeface="_5b8b_4f53"/>
+              </a:rPr>
+              <a:t>通过 </a:t>
+            </a:r>
+            <a:r>
+              <a:rPr lang="en-US" altLang="zh-CN" sz="2000" dirty="0" err="1">
+                <a:solidFill>
+                  <a:srgbClr val="374151"/>
+                </a:solidFill>
+                <a:latin typeface="_5b8b_4f53"/>
+              </a:rPr>
+              <a:t>nvmcache</a:t>
+            </a:r>
+            <a:r>
+              <a:rPr lang="en-US" altLang="zh-CN" sz="2000" dirty="0">
+                <a:solidFill>
+                  <a:srgbClr val="374151"/>
+                </a:solidFill>
+                <a:latin typeface="_5b8b_4f53"/>
+              </a:rPr>
+              <a:t> </a:t>
+            </a:r>
+            <a:r>
+              <a:rPr lang="zh-CN" altLang="en-US" sz="2000" dirty="0">
+                <a:solidFill>
+                  <a:srgbClr val="374151"/>
+                </a:solidFill>
+                <a:latin typeface="_5b8b_4f53"/>
+              </a:rPr>
+              <a:t>接口与 </a:t>
+            </a:r>
+            <a:r>
+              <a:rPr lang="en-US" altLang="zh-CN" sz="2000" dirty="0" err="1">
+                <a:solidFill>
+                  <a:srgbClr val="374151"/>
+                </a:solidFill>
+                <a:latin typeface="_5b8b_4f53"/>
+              </a:rPr>
+              <a:t>cachelib</a:t>
+            </a:r>
+            <a:r>
+              <a:rPr lang="en-US" altLang="zh-CN" sz="2000" dirty="0">
+                <a:solidFill>
+                  <a:srgbClr val="374151"/>
+                </a:solidFill>
+                <a:latin typeface="_5b8b_4f53"/>
+              </a:rPr>
+              <a:t> </a:t>
+            </a:r>
+            <a:r>
+              <a:rPr lang="zh-CN" altLang="en-US" sz="2000" dirty="0">
+                <a:solidFill>
+                  <a:srgbClr val="374151"/>
+                </a:solidFill>
+                <a:latin typeface="_5b8b_4f53"/>
+              </a:rPr>
+              <a:t>集成。它能够高效地管理 </a:t>
+            </a:r>
+            <a:r>
+              <a:rPr lang="en-US" altLang="zh-CN" sz="2000" dirty="0">
+                <a:solidFill>
+                  <a:srgbClr val="374151"/>
+                </a:solidFill>
+                <a:latin typeface="_5b8b_4f53"/>
+              </a:rPr>
+              <a:t>TB </a:t>
+            </a:r>
+            <a:r>
+              <a:rPr lang="zh-CN" altLang="en-US" sz="2000" dirty="0">
+                <a:solidFill>
+                  <a:srgbClr val="374151"/>
+                </a:solidFill>
+                <a:latin typeface="_5b8b_4f53"/>
+              </a:rPr>
+              <a:t>级别的数据，并且同时支持小型（约 </a:t>
+            </a:r>
+            <a:r>
+              <a:rPr lang="en-US" altLang="zh-CN" sz="2000" dirty="0">
+                <a:solidFill>
+                  <a:srgbClr val="374151"/>
+                </a:solidFill>
+                <a:latin typeface="_5b8b_4f53"/>
+              </a:rPr>
+              <a:t>100 </a:t>
+            </a:r>
+            <a:r>
+              <a:rPr lang="zh-CN" altLang="en-US" sz="2000" dirty="0">
+                <a:solidFill>
+                  <a:srgbClr val="374151"/>
+                </a:solidFill>
+                <a:latin typeface="_5b8b_4f53"/>
+              </a:rPr>
+              <a:t>字节）和大型（</a:t>
+            </a:r>
+            <a:r>
+              <a:rPr lang="en-US" altLang="zh-CN" sz="2000" dirty="0">
+                <a:solidFill>
+                  <a:srgbClr val="374151"/>
+                </a:solidFill>
+                <a:latin typeface="_5b8b_4f53"/>
+              </a:rPr>
+              <a:t>10KB </a:t>
+            </a:r>
+            <a:r>
+              <a:rPr lang="zh-CN" altLang="en-US" sz="2000" dirty="0">
+                <a:solidFill>
+                  <a:srgbClr val="374151"/>
+                </a:solidFill>
+                <a:latin typeface="_5b8b_4f53"/>
+              </a:rPr>
+              <a:t>到 </a:t>
+            </a:r>
+            <a:r>
+              <a:rPr lang="en-US" altLang="zh-CN" sz="2000" dirty="0">
+                <a:solidFill>
+                  <a:srgbClr val="374151"/>
+                </a:solidFill>
+                <a:latin typeface="_5b8b_4f53"/>
+              </a:rPr>
+              <a:t>1MB</a:t>
+            </a:r>
+            <a:r>
+              <a:rPr lang="zh-CN" altLang="en-US" sz="2000" dirty="0">
+                <a:solidFill>
+                  <a:srgbClr val="374151"/>
+                </a:solidFill>
+                <a:latin typeface="_5b8b_4f53"/>
+              </a:rPr>
+              <a:t>）对象的缓存</a:t>
+            </a:r>
+            <a:r>
+              <a:rPr lang="en-US" altLang="zh-CN" sz="2000" dirty="0">
+                <a:solidFill>
+                  <a:srgbClr val="374151"/>
+                </a:solidFill>
+                <a:latin typeface="_5b8b_4f53"/>
+              </a:rPr>
+              <a:t>1</a:t>
+            </a:r>
+            <a:r>
+              <a:rPr lang="zh-CN" altLang="en-US" sz="2000" dirty="0">
+                <a:solidFill>
+                  <a:srgbClr val="374151"/>
+                </a:solidFill>
+                <a:latin typeface="_5b8b_4f53"/>
+              </a:rPr>
+              <a:t>。</a:t>
+            </a:r>
+            <a:r>
+              <a:rPr lang="en-US" altLang="zh-CN" sz="2000" dirty="0">
+                <a:solidFill>
+                  <a:srgbClr val="374151"/>
+                </a:solidFill>
+                <a:latin typeface="_5b8b_4f53"/>
+              </a:rPr>
+              <a:t>Navy </a:t>
+            </a:r>
+            <a:r>
+              <a:rPr lang="zh-CN" altLang="en-US" sz="2000" dirty="0">
+                <a:solidFill>
+                  <a:srgbClr val="374151"/>
+                </a:solidFill>
+                <a:latin typeface="_5b8b_4f53"/>
+              </a:rPr>
+              <a:t>提供了同步和异步 </a:t>
+            </a:r>
+            <a:r>
+              <a:rPr lang="en-US" altLang="zh-CN" sz="2000" dirty="0">
+                <a:solidFill>
+                  <a:srgbClr val="374151"/>
+                </a:solidFill>
+                <a:latin typeface="_5b8b_4f53"/>
+              </a:rPr>
+              <a:t>API</a:t>
+            </a:r>
+            <a:r>
+              <a:rPr lang="zh-CN" altLang="en-US" sz="2000" dirty="0">
+                <a:solidFill>
+                  <a:srgbClr val="374151"/>
+                </a:solidFill>
+                <a:latin typeface="_5b8b_4f53"/>
+              </a:rPr>
+              <a:t>（支持自定义执行器进行异步操作），并在安全关闭时提供缓存持久性。此外，</a:t>
+            </a:r>
+            <a:r>
+              <a:rPr lang="en-US" altLang="zh-CN" sz="2000" dirty="0">
+                <a:solidFill>
+                  <a:srgbClr val="374151"/>
+                </a:solidFill>
+                <a:latin typeface="_5b8b_4f53"/>
+              </a:rPr>
+              <a:t>Navy </a:t>
+            </a:r>
+            <a:r>
+              <a:rPr lang="zh-CN" altLang="en-US" sz="2000" dirty="0">
+                <a:solidFill>
+                  <a:srgbClr val="374151"/>
+                </a:solidFill>
+                <a:latin typeface="_5b8b_4f53"/>
+              </a:rPr>
+              <a:t>还支持直接 </a:t>
+            </a:r>
+            <a:r>
+              <a:rPr lang="en-US" altLang="zh-CN" sz="2000" dirty="0">
+                <a:solidFill>
+                  <a:srgbClr val="374151"/>
+                </a:solidFill>
+                <a:latin typeface="_5b8b_4f53"/>
+              </a:rPr>
+              <a:t>I/O </a:t>
+            </a:r>
+            <a:r>
+              <a:rPr lang="zh-CN" altLang="en-US" sz="2000" dirty="0">
+                <a:solidFill>
+                  <a:srgbClr val="374151"/>
+                </a:solidFill>
+                <a:latin typeface="_5b8b_4f53"/>
+              </a:rPr>
+              <a:t>和原始设备，以及使用 </a:t>
+            </a:r>
+            <a:r>
+              <a:rPr lang="en-US" altLang="zh-CN" sz="2000" dirty="0" err="1">
+                <a:solidFill>
+                  <a:srgbClr val="374151"/>
+                </a:solidFill>
+                <a:latin typeface="_5b8b_4f53"/>
+              </a:rPr>
+              <a:t>io_uring</a:t>
+            </a:r>
+            <a:r>
+              <a:rPr lang="en-US" altLang="zh-CN" sz="2000" dirty="0">
+                <a:solidFill>
+                  <a:srgbClr val="374151"/>
+                </a:solidFill>
+                <a:latin typeface="_5b8b_4f53"/>
+              </a:rPr>
+              <a:t> </a:t>
+            </a:r>
+            <a:r>
+              <a:rPr lang="zh-CN" altLang="en-US" sz="2000" dirty="0">
+                <a:solidFill>
+                  <a:srgbClr val="374151"/>
+                </a:solidFill>
+                <a:latin typeface="_5b8b_4f53"/>
+              </a:rPr>
+              <a:t>或 </a:t>
+            </a:r>
+            <a:r>
+              <a:rPr lang="en-US" altLang="zh-CN" sz="2000" dirty="0" err="1">
+                <a:solidFill>
+                  <a:srgbClr val="374151"/>
+                </a:solidFill>
+                <a:latin typeface="_5b8b_4f53"/>
+              </a:rPr>
+              <a:t>libaio</a:t>
+            </a:r>
+            <a:r>
+              <a:rPr lang="en-US" altLang="zh-CN" sz="2000" dirty="0">
+                <a:solidFill>
+                  <a:srgbClr val="374151"/>
+                </a:solidFill>
+                <a:latin typeface="_5b8b_4f53"/>
+              </a:rPr>
+              <a:t> </a:t>
+            </a:r>
+            <a:r>
+              <a:rPr lang="zh-CN" altLang="en-US" sz="2000" dirty="0">
+                <a:solidFill>
+                  <a:srgbClr val="374151"/>
+                </a:solidFill>
+                <a:latin typeface="_5b8b_4f53"/>
+              </a:rPr>
+              <a:t>进行异步 </a:t>
+            </a:r>
+            <a:r>
+              <a:rPr lang="en-US" altLang="zh-CN" sz="2000" dirty="0">
+                <a:solidFill>
+                  <a:srgbClr val="374151"/>
+                </a:solidFill>
+                <a:latin typeface="_5b8b_4f53"/>
+              </a:rPr>
+              <a:t>I/O</a:t>
+            </a:r>
+            <a:r>
+              <a:rPr lang="zh-CN" altLang="en-US" sz="2000" dirty="0">
+                <a:solidFill>
+                  <a:srgbClr val="374151"/>
+                </a:solidFill>
+                <a:latin typeface="_5b8b_4f53"/>
+              </a:rPr>
+              <a:t>。</a:t>
+            </a:r>
+          </a:p>
+        </p:txBody>
+      </p:sp>
+      <p:pic>
+        <p:nvPicPr>
+          <p:cNvPr id="4" name="图片 3">
+            <a:extLst>
+              <a:ext uri="{FF2B5EF4-FFF2-40B4-BE49-F238E27FC236}">
+                <a16:creationId xmlns:a16="http://schemas.microsoft.com/office/drawing/2014/main" id="{C1993C3B-731A-4B77-8607-E78909102DC6}"/>
+              </a:ext>
+            </a:extLst>
+          </p:cNvPr>
+          <p:cNvPicPr>
+            <a:picLocks noChangeAspect="1"/>
+          </p:cNvPicPr>
+          <p:nvPr/>
+        </p:nvPicPr>
+        <p:blipFill>
+          <a:blip r:embed="rId5"/>
+          <a:stretch>
+            <a:fillRect/>
+          </a:stretch>
+        </p:blipFill>
+        <p:spPr>
+          <a:xfrm>
+            <a:off x="6812191" y="1640607"/>
+            <a:ext cx="5052975" cy="3488502"/>
+          </a:xfrm>
+          <a:prstGeom prst="rect">
+            <a:avLst/>
+          </a:prstGeom>
+        </p:spPr>
+      </p:pic>
+    </p:spTree>
+  </p:cSld>
+  <p:clrMapOvr>
+    <a:masterClrMapping/>
+  </p:clrMapOvr>
+  <mc:AlternateContent xmlns:mc="http://schemas.openxmlformats.org/markup-compatibility/2006" xmlns:p14="http://schemas.microsoft.com/office/powerpoint/2010/main">
+    <mc:Choice Requires="p14">
+      <p:transition p14:dur="10" advClick="0"/>
+    </mc:Choice>
+    <mc:Fallback xmlns="">
+      <p:transition advClick="0"/>
+    </mc:Fallback>
+  </mc:AlternateContent>
+</p:sld>
+</file>
+
+<file path=ppt/slides/slide14.xml><?xml version="1.0" encoding="utf-8"?>
+<p:sld xmlns:a="http://schemas.openxmlformats.org/drawingml/2006/main" xmlns:r="http://schemas.openxmlformats.org/officeDocument/2006/relationships" xmlns:p="http://schemas.openxmlformats.org/presentationml/2006/main">
+  <p:cSld>
+    <p:spTree>
+      <p:nvGrpSpPr>
+        <p:cNvPr id="1" name=""/>
+        <p:cNvGrpSpPr/>
+        <p:nvPr/>
+      </p:nvGrpSpPr>
+      <p:grpSpPr>
+        <a:xfrm>
+          <a:off x="0" y="0"/>
+          <a:ext cx="0" cy="0"/>
+          <a:chOff x="0" y="0"/>
+          <a:chExt cx="0" cy="0"/>
+        </a:xfrm>
+      </p:grpSpPr>
+      <p:sp>
+        <p:nvSpPr>
+          <p:cNvPr id="17" name="矩形 16"/>
+          <p:cNvSpPr/>
+          <p:nvPr/>
+        </p:nvSpPr>
+        <p:spPr>
+          <a:xfrm>
+            <a:off x="0" y="6522720"/>
+            <a:ext cx="4267200" cy="335280"/>
+          </a:xfrm>
+          <a:prstGeom prst="rect">
+            <a:avLst/>
+          </a:prstGeom>
+          <a:solidFill>
+            <a:srgbClr val="4747BA"/>
+          </a:solidFill>
+          <a:ln>
+            <a:noFill/>
+          </a:ln>
+        </p:spPr>
+        <p:style>
+          <a:lnRef idx="2">
+            <a:schemeClr val="accent1">
+              <a:shade val="50000"/>
+            </a:schemeClr>
+          </a:lnRef>
+          <a:fillRef idx="1">
+            <a:schemeClr val="accent1"/>
+          </a:fillRef>
+          <a:effectRef idx="0">
+            <a:schemeClr val="accent1"/>
+          </a:effectRef>
+          <a:fontRef idx="minor">
+            <a:schemeClr val="lt1"/>
+          </a:fontRef>
+        </p:style>
+        <p:txBody>
+          <a:bodyPr rtlCol="0" anchor="ctr"/>
+          <a:lstStyle/>
+          <a:p>
+            <a:pPr algn="ctr"/>
+            <a:endParaRPr lang="zh-CN" altLang="en-US"/>
+          </a:p>
+        </p:txBody>
+      </p:sp>
+      <p:sp>
+        <p:nvSpPr>
+          <p:cNvPr id="18" name="矩形 17"/>
+          <p:cNvSpPr/>
+          <p:nvPr/>
+        </p:nvSpPr>
+        <p:spPr>
+          <a:xfrm>
+            <a:off x="4267200" y="6522720"/>
+            <a:ext cx="4267200" cy="335280"/>
+          </a:xfrm>
+          <a:prstGeom prst="rect">
+            <a:avLst/>
+          </a:prstGeom>
+          <a:solidFill>
+            <a:srgbClr val="8484D1"/>
+          </a:solidFill>
+          <a:ln>
+            <a:noFill/>
+          </a:ln>
+        </p:spPr>
+        <p:style>
+          <a:lnRef idx="2">
+            <a:schemeClr val="accent1">
+              <a:shade val="50000"/>
+            </a:schemeClr>
+          </a:lnRef>
+          <a:fillRef idx="1">
+            <a:schemeClr val="accent1"/>
+          </a:fillRef>
+          <a:effectRef idx="0">
+            <a:schemeClr val="accent1"/>
+          </a:effectRef>
+          <a:fontRef idx="minor">
+            <a:schemeClr val="lt1"/>
+          </a:fontRef>
+        </p:style>
+        <p:txBody>
+          <a:bodyPr rtlCol="0" anchor="ctr"/>
+          <a:lstStyle/>
+          <a:p>
+            <a:pPr algn="ctr"/>
+            <a:endParaRPr lang="zh-CN" altLang="en-US"/>
+          </a:p>
+        </p:txBody>
+      </p:sp>
+      <p:sp>
+        <p:nvSpPr>
+          <p:cNvPr id="20" name="矩形 19"/>
+          <p:cNvSpPr/>
+          <p:nvPr/>
+        </p:nvSpPr>
+        <p:spPr>
+          <a:xfrm>
             <a:off x="8534400" y="6538313"/>
             <a:ext cx="3657600" cy="335280"/>
           </a:xfrm>
@@ -11975,7 +12669,7 @@
                 <a:latin typeface="Constantia" panose="02030602050306030303" pitchFamily="18" charset="0"/>
                 <a:cs typeface="Times" panose="02020603050405020304" pitchFamily="18" charset="0"/>
               </a:rPr>
-              <a:t>13</a:t>
+              <a:t>14</a:t>
             </a:fld>
             <a:endParaRPr lang="zh-CN" altLang="en-US" sz="1400" b="1" dirty="0">
               <a:solidFill>
@@ -12687,7 +13381,7 @@
 </p:sld>
 </file>
 
-<file path=ppt/slides/slide14.xml><?xml version="1.0" encoding="utf-8"?>
+<file path=ppt/slides/slide15.xml><?xml version="1.0" encoding="utf-8"?>
 <p:sld xmlns:a="http://schemas.openxmlformats.org/drawingml/2006/main" xmlns:r="http://schemas.openxmlformats.org/officeDocument/2006/relationships" xmlns:p="http://schemas.openxmlformats.org/presentationml/2006/main">
   <p:cSld>
     <p:spTree>
@@ -13122,7 +13816,7 @@
                 <a:latin typeface="Constantia" panose="02030602050306030303" pitchFamily="18" charset="0"/>
                 <a:cs typeface="Times" panose="02020603050405020304" pitchFamily="18" charset="0"/>
               </a:rPr>
-              <a:t>14</a:t>
+              <a:t>15</a:t>
             </a:fld>
             <a:endParaRPr lang="zh-CN" altLang="en-US" sz="1400" b="1" dirty="0">
               <a:solidFill>
@@ -13225,7 +13919,7 @@
         <p:spPr>
           <a:xfrm>
             <a:off x="440055" y="1666450"/>
-            <a:ext cx="9407814" cy="4662110"/>
+            <a:ext cx="9407814" cy="4200445"/>
           </a:xfrm>
           <a:prstGeom prst="rect">
             <a:avLst/>
@@ -13329,16 +14023,6 @@
               <a:rPr lang="en-US" altLang="zh-CN" sz="2000" dirty="0"/>
               <a:t>Leveraging Zone Append to Tighten the Tail Latency of LSM Tree on ZNS SSD</a:t>
             </a:r>
-          </a:p>
-          <a:p>
-            <a:pPr indent="-285750">
-              <a:lnSpc>
-                <a:spcPct val="150000"/>
-              </a:lnSpc>
-              <a:buFont typeface="Wingdings" panose="05000000000000000000" charset="0"/>
-              <a:buChar char="q"/>
-            </a:pPr>
-            <a:endParaRPr lang="en-US" altLang="zh-CN" sz="2000" dirty="0"/>
           </a:p>
           <a:p>
             <a:pPr indent="-285750">
@@ -13425,1057 +14109,6 @@
       <p:transition advClick="0"/>
     </mc:Fallback>
   </mc:AlternateContent>
-</p:sld>
-</file>
-
-<file path=ppt/slides/slide15.xml><?xml version="1.0" encoding="utf-8"?>
-<p:sld xmlns:a="http://schemas.openxmlformats.org/drawingml/2006/main" xmlns:r="http://schemas.openxmlformats.org/officeDocument/2006/relationships" xmlns:p="http://schemas.openxmlformats.org/presentationml/2006/main">
-  <p:cSld>
-    <p:spTree>
-      <p:nvGrpSpPr>
-        <p:cNvPr id="1" name=""/>
-        <p:cNvGrpSpPr/>
-        <p:nvPr/>
-      </p:nvGrpSpPr>
-      <p:grpSpPr>
-        <a:xfrm>
-          <a:off x="0" y="0"/>
-          <a:ext cx="0" cy="0"/>
-          <a:chOff x="0" y="0"/>
-          <a:chExt cx="0" cy="0"/>
-        </a:xfrm>
-      </p:grpSpPr>
-      <p:sp>
-        <p:nvSpPr>
-          <p:cNvPr id="17" name="矩形 16"/>
-          <p:cNvSpPr/>
-          <p:nvPr/>
-        </p:nvSpPr>
-        <p:spPr>
-          <a:xfrm>
-            <a:off x="0" y="6522720"/>
-            <a:ext cx="4267200" cy="335280"/>
-          </a:xfrm>
-          <a:prstGeom prst="rect">
-            <a:avLst/>
-          </a:prstGeom>
-          <a:solidFill>
-            <a:srgbClr val="4747BA"/>
-          </a:solidFill>
-          <a:ln>
-            <a:noFill/>
-          </a:ln>
-        </p:spPr>
-        <p:style>
-          <a:lnRef idx="2">
-            <a:schemeClr val="accent1">
-              <a:shade val="50000"/>
-            </a:schemeClr>
-          </a:lnRef>
-          <a:fillRef idx="1">
-            <a:schemeClr val="accent1"/>
-          </a:fillRef>
-          <a:effectRef idx="0">
-            <a:schemeClr val="accent1"/>
-          </a:effectRef>
-          <a:fontRef idx="minor">
-            <a:schemeClr val="lt1"/>
-          </a:fontRef>
-        </p:style>
-        <p:txBody>
-          <a:bodyPr rtlCol="0" anchor="ctr"/>
-          <a:lstStyle/>
-          <a:p>
-            <a:pPr algn="ctr"/>
-            <a:endParaRPr lang="zh-CN" altLang="en-US"/>
-          </a:p>
-        </p:txBody>
-      </p:sp>
-      <p:sp>
-        <p:nvSpPr>
-          <p:cNvPr id="18" name="矩形 17"/>
-          <p:cNvSpPr/>
-          <p:nvPr/>
-        </p:nvSpPr>
-        <p:spPr>
-          <a:xfrm>
-            <a:off x="4267200" y="6522720"/>
-            <a:ext cx="4267200" cy="335280"/>
-          </a:xfrm>
-          <a:prstGeom prst="rect">
-            <a:avLst/>
-          </a:prstGeom>
-          <a:solidFill>
-            <a:srgbClr val="8484D1"/>
-          </a:solidFill>
-          <a:ln>
-            <a:noFill/>
-          </a:ln>
-        </p:spPr>
-        <p:style>
-          <a:lnRef idx="2">
-            <a:schemeClr val="accent1">
-              <a:shade val="50000"/>
-            </a:schemeClr>
-          </a:lnRef>
-          <a:fillRef idx="1">
-            <a:schemeClr val="accent1"/>
-          </a:fillRef>
-          <a:effectRef idx="0">
-            <a:schemeClr val="accent1"/>
-          </a:effectRef>
-          <a:fontRef idx="minor">
-            <a:schemeClr val="lt1"/>
-          </a:fontRef>
-        </p:style>
-        <p:txBody>
-          <a:bodyPr rtlCol="0" anchor="ctr"/>
-          <a:lstStyle/>
-          <a:p>
-            <a:pPr algn="ctr"/>
-            <a:endParaRPr lang="zh-CN" altLang="en-US"/>
-          </a:p>
-        </p:txBody>
-      </p:sp>
-      <p:sp>
-        <p:nvSpPr>
-          <p:cNvPr id="20" name="矩形 19"/>
-          <p:cNvSpPr/>
-          <p:nvPr/>
-        </p:nvSpPr>
-        <p:spPr>
-          <a:xfrm>
-            <a:off x="8534400" y="6522720"/>
-            <a:ext cx="3657600" cy="335280"/>
-          </a:xfrm>
-          <a:prstGeom prst="rect">
-            <a:avLst/>
-          </a:prstGeom>
-          <a:solidFill>
-            <a:srgbClr val="ADADE0"/>
-          </a:solidFill>
-          <a:ln>
-            <a:noFill/>
-          </a:ln>
-        </p:spPr>
-        <p:style>
-          <a:lnRef idx="2">
-            <a:schemeClr val="accent1">
-              <a:shade val="50000"/>
-            </a:schemeClr>
-          </a:lnRef>
-          <a:fillRef idx="1">
-            <a:schemeClr val="accent1"/>
-          </a:fillRef>
-          <a:effectRef idx="0">
-            <a:schemeClr val="accent1"/>
-          </a:effectRef>
-          <a:fontRef idx="minor">
-            <a:schemeClr val="lt1"/>
-          </a:fontRef>
-        </p:style>
-        <p:txBody>
-          <a:bodyPr rot="0" spcFirstLastPara="0" vert="horz" wrap="square" lIns="91440" tIns="45720" rIns="91440" bIns="45720" numCol="1" spcCol="0" rtlCol="0" fromWordArt="0" anchor="ctr" anchorCtr="0" forceAA="0" compatLnSpc="1">
-            <a:noAutofit/>
-          </a:bodyPr>
-          <a:lstStyle>
-            <a:defPPr>
-              <a:defRPr lang="zh-CN"/>
-            </a:defPPr>
-            <a:lvl1pPr marL="0" algn="l" defTabSz="914400" rtl="0" eaLnBrk="1" latinLnBrk="0" hangingPunct="1">
-              <a:defRPr sz="1800" kern="1200">
-                <a:solidFill>
-                  <a:schemeClr val="lt1"/>
-                </a:solidFill>
-                <a:latin typeface="+mn-lt"/>
-                <a:ea typeface="+mn-ea"/>
-                <a:cs typeface="+mn-cs"/>
-              </a:defRPr>
-            </a:lvl1pPr>
-            <a:lvl2pPr marL="457200" algn="l" defTabSz="914400" rtl="0" eaLnBrk="1" latinLnBrk="0" hangingPunct="1">
-              <a:defRPr sz="1800" kern="1200">
-                <a:solidFill>
-                  <a:schemeClr val="lt1"/>
-                </a:solidFill>
-                <a:latin typeface="+mn-lt"/>
-                <a:ea typeface="+mn-ea"/>
-                <a:cs typeface="+mn-cs"/>
-              </a:defRPr>
-            </a:lvl2pPr>
-            <a:lvl3pPr marL="914400" algn="l" defTabSz="914400" rtl="0" eaLnBrk="1" latinLnBrk="0" hangingPunct="1">
-              <a:defRPr sz="1800" kern="1200">
-                <a:solidFill>
-                  <a:schemeClr val="lt1"/>
-                </a:solidFill>
-                <a:latin typeface="+mn-lt"/>
-                <a:ea typeface="+mn-ea"/>
-                <a:cs typeface="+mn-cs"/>
-              </a:defRPr>
-            </a:lvl3pPr>
-            <a:lvl4pPr marL="1371600" algn="l" defTabSz="914400" rtl="0" eaLnBrk="1" latinLnBrk="0" hangingPunct="1">
-              <a:defRPr sz="1800" kern="1200">
-                <a:solidFill>
-                  <a:schemeClr val="lt1"/>
-                </a:solidFill>
-                <a:latin typeface="+mn-lt"/>
-                <a:ea typeface="+mn-ea"/>
-                <a:cs typeface="+mn-cs"/>
-              </a:defRPr>
-            </a:lvl4pPr>
-            <a:lvl5pPr marL="1828800" algn="l" defTabSz="914400" rtl="0" eaLnBrk="1" latinLnBrk="0" hangingPunct="1">
-              <a:defRPr sz="1800" kern="1200">
-                <a:solidFill>
-                  <a:schemeClr val="lt1"/>
-                </a:solidFill>
-                <a:latin typeface="+mn-lt"/>
-                <a:ea typeface="+mn-ea"/>
-                <a:cs typeface="+mn-cs"/>
-              </a:defRPr>
-            </a:lvl5pPr>
-            <a:lvl6pPr marL="2286000" algn="l" defTabSz="914400" rtl="0" eaLnBrk="1" latinLnBrk="0" hangingPunct="1">
-              <a:defRPr sz="1800" kern="1200">
-                <a:solidFill>
-                  <a:schemeClr val="lt1"/>
-                </a:solidFill>
-                <a:latin typeface="+mn-lt"/>
-                <a:ea typeface="+mn-ea"/>
-                <a:cs typeface="+mn-cs"/>
-              </a:defRPr>
-            </a:lvl6pPr>
-            <a:lvl7pPr marL="2743200" algn="l" defTabSz="914400" rtl="0" eaLnBrk="1" latinLnBrk="0" hangingPunct="1">
-              <a:defRPr sz="1800" kern="1200">
-                <a:solidFill>
-                  <a:schemeClr val="lt1"/>
-                </a:solidFill>
-                <a:latin typeface="+mn-lt"/>
-                <a:ea typeface="+mn-ea"/>
-                <a:cs typeface="+mn-cs"/>
-              </a:defRPr>
-            </a:lvl7pPr>
-            <a:lvl8pPr marL="3200400" algn="l" defTabSz="914400" rtl="0" eaLnBrk="1" latinLnBrk="0" hangingPunct="1">
-              <a:defRPr sz="1800" kern="1200">
-                <a:solidFill>
-                  <a:schemeClr val="lt1"/>
-                </a:solidFill>
-                <a:latin typeface="+mn-lt"/>
-                <a:ea typeface="+mn-ea"/>
-                <a:cs typeface="+mn-cs"/>
-              </a:defRPr>
-            </a:lvl8pPr>
-            <a:lvl9pPr marL="3657600" algn="l" defTabSz="914400" rtl="0" eaLnBrk="1" latinLnBrk="0" hangingPunct="1">
-              <a:defRPr sz="1800" kern="1200">
-                <a:solidFill>
-                  <a:schemeClr val="lt1"/>
-                </a:solidFill>
-                <a:latin typeface="+mn-lt"/>
-                <a:ea typeface="+mn-ea"/>
-                <a:cs typeface="+mn-cs"/>
-              </a:defRPr>
-            </a:lvl9pPr>
-          </a:lstStyle>
-          <a:p>
-            <a:pPr algn="ctr"/>
-            <a:endParaRPr lang="zh-CN" altLang="en-US" sz="1600" dirty="0">
-              <a:solidFill>
-                <a:schemeClr val="bg1"/>
-              </a:solidFill>
-              <a:latin typeface="Constantia" panose="02030602050306030303" pitchFamily="18" charset="0"/>
-            </a:endParaRPr>
-          </a:p>
-        </p:txBody>
-      </p:sp>
-      <p:sp>
-        <p:nvSpPr>
-          <p:cNvPr id="24" name="日期占位符 7"/>
-          <p:cNvSpPr>
-            <a:spLocks noGrp="1"/>
-          </p:cNvSpPr>
-          <p:nvPr>
-            <p:ph type="dt" sz="half" idx="10"/>
-          </p:nvPr>
-        </p:nvSpPr>
-        <p:spPr>
-          <a:xfrm>
-            <a:off x="1209907" y="6494974"/>
-            <a:ext cx="1847385" cy="365125"/>
-          </a:xfrm>
-        </p:spPr>
-        <p:txBody>
-          <a:bodyPr/>
-          <a:lstStyle/>
-          <a:p>
-            <a:fld id="{31CCC338-FFC3-4940-99DD-6195BEF39901}" type="datetime4">
-              <a:rPr lang="en-US" altLang="zh-CN" sz="1400" b="1">
-                <a:solidFill>
-                  <a:schemeClr val="bg1"/>
-                </a:solidFill>
-                <a:latin typeface="Constantia" panose="02030602050306030303" pitchFamily="18" charset="0"/>
-                <a:cs typeface="Times" panose="02020603050405020304" pitchFamily="18" charset="0"/>
-              </a:rPr>
-              <a:t>April 10, 2024</a:t>
-            </a:fld>
-            <a:endParaRPr lang="zh-CN" altLang="en-US" sz="1400" b="1" dirty="0">
-              <a:solidFill>
-                <a:schemeClr val="bg1"/>
-              </a:solidFill>
-              <a:latin typeface="Constantia" panose="02030602050306030303" pitchFamily="18" charset="0"/>
-              <a:cs typeface="Times" panose="02020603050405020304" pitchFamily="18" charset="0"/>
-            </a:endParaRPr>
-          </a:p>
-        </p:txBody>
-      </p:sp>
-      <p:cxnSp>
-        <p:nvCxnSpPr>
-          <p:cNvPr id="26" name="直接连接符 25"/>
-          <p:cNvCxnSpPr/>
-          <p:nvPr/>
-        </p:nvCxnSpPr>
-        <p:spPr>
-          <a:xfrm>
-            <a:off x="385590" y="859531"/>
-            <a:ext cx="11479576" cy="0"/>
-          </a:xfrm>
-          <a:prstGeom prst="line">
-            <a:avLst/>
-          </a:prstGeom>
-          <a:ln w="38100">
-            <a:solidFill>
-              <a:srgbClr val="4747BA"/>
-            </a:solidFill>
-          </a:ln>
-        </p:spPr>
-        <p:style>
-          <a:lnRef idx="1">
-            <a:schemeClr val="accent1"/>
-          </a:lnRef>
-          <a:fillRef idx="0">
-            <a:schemeClr val="accent1"/>
-          </a:fillRef>
-          <a:effectRef idx="0">
-            <a:schemeClr val="accent1"/>
-          </a:effectRef>
-          <a:fontRef idx="minor">
-            <a:schemeClr val="tx1"/>
-          </a:fontRef>
-        </p:style>
-      </p:cxnSp>
-      <p:sp>
-        <p:nvSpPr>
-          <p:cNvPr id="19" name="文本框 18"/>
-          <p:cNvSpPr txBox="1"/>
-          <p:nvPr/>
-        </p:nvSpPr>
-        <p:spPr>
-          <a:xfrm>
-            <a:off x="415183" y="166469"/>
-            <a:ext cx="6798981" cy="645160"/>
-          </a:xfrm>
-          <a:prstGeom prst="rect">
-            <a:avLst/>
-          </a:prstGeom>
-          <a:noFill/>
-        </p:spPr>
-        <p:txBody>
-          <a:bodyPr wrap="square" rtlCol="0">
-            <a:spAutoFit/>
-          </a:bodyPr>
-          <a:lstStyle/>
-          <a:p>
-            <a:pPr>
-              <a:lnSpc>
-                <a:spcPct val="90000"/>
-              </a:lnSpc>
-              <a:spcBef>
-                <a:spcPts val="1000"/>
-              </a:spcBef>
-              <a:defRPr/>
-            </a:pPr>
-            <a:r>
-              <a:rPr lang="en-US" altLang="zh-CN" sz="4000" b="1" dirty="0" err="1">
-                <a:solidFill>
-                  <a:srgbClr val="4747BA"/>
-                </a:solidFill>
-                <a:latin typeface="Constantia" panose="02030602050306030303" pitchFamily="18" charset="0"/>
-                <a:ea typeface="腾讯体 W3" panose="020C04030202040F0204" pitchFamily="34" charset="-122"/>
-                <a:cs typeface="Times" panose="02020603050405020304" pitchFamily="18" charset="0"/>
-              </a:rPr>
-              <a:t>CacheLib</a:t>
-            </a:r>
-            <a:r>
-              <a:rPr lang="en-US" altLang="zh-CN" sz="4000" b="1" dirty="0">
-                <a:solidFill>
-                  <a:srgbClr val="4747BA"/>
-                </a:solidFill>
-                <a:latin typeface="Constantia" panose="02030602050306030303" pitchFamily="18" charset="0"/>
-                <a:ea typeface="腾讯体 W3" panose="020C04030202040F0204" pitchFamily="34" charset="-122"/>
-                <a:cs typeface="Times" panose="02020603050405020304" pitchFamily="18" charset="0"/>
-              </a:rPr>
-              <a:t> Navy</a:t>
-            </a:r>
-            <a:endParaRPr lang="zh-CN" altLang="en-US" sz="4000" b="1" dirty="0">
-              <a:solidFill>
-                <a:srgbClr val="4747BA"/>
-              </a:solidFill>
-              <a:latin typeface="Constantia" panose="02030602050306030303" pitchFamily="18" charset="0"/>
-              <a:ea typeface="腾讯体 W3" panose="020C04030202040F0204" pitchFamily="34" charset="-122"/>
-              <a:cs typeface="Times" panose="02020603050405020304" pitchFamily="18" charset="0"/>
-            </a:endParaRPr>
-          </a:p>
-        </p:txBody>
-      </p:sp>
-      <p:pic>
-        <p:nvPicPr>
-          <p:cNvPr id="23" name="图片 22"/>
-          <p:cNvPicPr>
-            <a:picLocks noChangeAspect="1"/>
-          </p:cNvPicPr>
-          <p:nvPr/>
-        </p:nvPicPr>
-        <p:blipFill>
-          <a:blip r:embed="rId3" cstate="print">
-            <a:extLst>
-              <a:ext uri="{28A0092B-C50C-407E-A947-70E740481C1C}">
-                <a14:useLocalDpi xmlns:a14="http://schemas.microsoft.com/office/drawing/2010/main" val="0"/>
-              </a:ext>
-            </a:extLst>
-          </a:blip>
-          <a:stretch>
-            <a:fillRect/>
-          </a:stretch>
-        </p:blipFill>
-        <p:spPr>
-          <a:xfrm>
-            <a:off x="7804063" y="218980"/>
-            <a:ext cx="730337" cy="556270"/>
-          </a:xfrm>
-          <a:prstGeom prst="rect">
-            <a:avLst/>
-          </a:prstGeom>
-        </p:spPr>
-      </p:pic>
-      <p:sp>
-        <p:nvSpPr>
-          <p:cNvPr id="14" name="灯片编号占位符 8"/>
-          <p:cNvSpPr>
-            <a:spLocks noGrp="1"/>
-          </p:cNvSpPr>
-          <p:nvPr>
-            <p:ph type="sldNum" sz="quarter" idx="12"/>
-          </p:nvPr>
-        </p:nvSpPr>
-        <p:spPr>
-          <a:xfrm>
-            <a:off x="9847869" y="6405035"/>
-            <a:ext cx="809393" cy="545001"/>
-          </a:xfrm>
-        </p:spPr>
-        <p:txBody>
-          <a:bodyPr/>
-          <a:lstStyle/>
-          <a:p>
-            <a:pPr algn="ctr"/>
-            <a:fld id="{152851E7-9224-42D2-A4FF-119762E40804}" type="slidenum">
-              <a:rPr lang="zh-CN" altLang="en-US" sz="1400" b="1" smtClean="0">
-                <a:solidFill>
-                  <a:schemeClr val="bg1"/>
-                </a:solidFill>
-                <a:latin typeface="Constantia" panose="02030602050306030303" pitchFamily="18" charset="0"/>
-                <a:cs typeface="Times" panose="02020603050405020304" pitchFamily="18" charset="0"/>
-              </a:rPr>
-              <a:t>15</a:t>
-            </a:fld>
-            <a:endParaRPr lang="zh-CN" altLang="en-US" sz="1400" b="1" dirty="0">
-              <a:solidFill>
-                <a:schemeClr val="bg1"/>
-              </a:solidFill>
-              <a:latin typeface="Constantia" panose="02030602050306030303" pitchFamily="18" charset="0"/>
-              <a:cs typeface="Times" panose="02020603050405020304" pitchFamily="18" charset="0"/>
-            </a:endParaRPr>
-          </a:p>
-        </p:txBody>
-      </p:sp>
-      <p:pic>
-        <p:nvPicPr>
-          <p:cNvPr id="44" name="图片 43"/>
-          <p:cNvPicPr>
-            <a:picLocks noChangeAspect="1"/>
-          </p:cNvPicPr>
-          <p:nvPr/>
-        </p:nvPicPr>
-        <p:blipFill>
-          <a:blip r:embed="rId4" cstate="print">
-            <a:extLst>
-              <a:ext uri="{28A0092B-C50C-407E-A947-70E740481C1C}">
-                <a14:useLocalDpi xmlns:a14="http://schemas.microsoft.com/office/drawing/2010/main" val="0"/>
-              </a:ext>
-            </a:extLst>
-          </a:blip>
-          <a:stretch>
-            <a:fillRect/>
-          </a:stretch>
-        </p:blipFill>
-        <p:spPr>
-          <a:xfrm>
-            <a:off x="8590829" y="204228"/>
-            <a:ext cx="3323471" cy="570629"/>
-          </a:xfrm>
-          <a:prstGeom prst="rect">
-            <a:avLst/>
-          </a:prstGeom>
-        </p:spPr>
-      </p:pic>
-      <p:sp>
-        <p:nvSpPr>
-          <p:cNvPr id="13" name="Fußzeilenplatzhalter 4"/>
-          <p:cNvSpPr>
-            <a:spLocks noGrp="1"/>
-          </p:cNvSpPr>
-          <p:nvPr>
-            <p:ph type="ftr" sz="quarter" idx="11"/>
-          </p:nvPr>
-        </p:nvSpPr>
-        <p:spPr>
-          <a:xfrm>
-            <a:off x="4095916" y="6553437"/>
-            <a:ext cx="4520431" cy="273844"/>
-          </a:xfrm>
-        </p:spPr>
-        <p:txBody>
-          <a:bodyPr/>
-          <a:lstStyle/>
-          <a:p>
-            <a:r>
-              <a:rPr lang="en-US" altLang="zh-CN" sz="1400" b="1" dirty="0" err="1">
-                <a:solidFill>
-                  <a:schemeClr val="bg1"/>
-                </a:solidFill>
-                <a:latin typeface="Constantia" panose="02030602050306030303" pitchFamily="18" charset="0"/>
-              </a:rPr>
-              <a:t>Ziqi</a:t>
-            </a:r>
-            <a:r>
-              <a:rPr lang="en-US" altLang="zh-CN" sz="1400" b="1" dirty="0">
-                <a:solidFill>
-                  <a:schemeClr val="bg1"/>
-                </a:solidFill>
-                <a:latin typeface="Constantia" panose="02030602050306030303" pitchFamily="18" charset="0"/>
-              </a:rPr>
-              <a:t> Liu | HUST</a:t>
-            </a:r>
-            <a:endParaRPr lang="zh-CN" altLang="en-US" sz="1400" b="1" dirty="0">
-              <a:solidFill>
-                <a:schemeClr val="bg1"/>
-              </a:solidFill>
-              <a:latin typeface="Constantia" panose="02030602050306030303" pitchFamily="18" charset="0"/>
-            </a:endParaRPr>
-          </a:p>
-        </p:txBody>
-      </p:sp>
-      <p:sp>
-        <p:nvSpPr>
-          <p:cNvPr id="2" name="文本框 1">
-            <a:extLst>
-              <a:ext uri="{FF2B5EF4-FFF2-40B4-BE49-F238E27FC236}">
-                <a16:creationId xmlns:a16="http://schemas.microsoft.com/office/drawing/2014/main" id="{31B23CE1-1ECC-2A85-FC04-A5828C1329D6}"/>
-              </a:ext>
-            </a:extLst>
-          </p:cNvPr>
-          <p:cNvSpPr txBox="1"/>
-          <p:nvPr/>
-        </p:nvSpPr>
-        <p:spPr>
-          <a:xfrm>
-            <a:off x="385590" y="1353000"/>
-            <a:ext cx="5687354" cy="4200252"/>
-          </a:xfrm>
-          <a:prstGeom prst="rect">
-            <a:avLst/>
-          </a:prstGeom>
-          <a:noFill/>
-        </p:spPr>
-        <p:txBody>
-          <a:bodyPr wrap="square" rtlCol="0">
-            <a:spAutoFit/>
-          </a:bodyPr>
-          <a:lstStyle/>
-          <a:p>
-            <a:pPr>
-              <a:lnSpc>
-                <a:spcPct val="150000"/>
-              </a:lnSpc>
-            </a:pPr>
-            <a:r>
-              <a:rPr lang="en-US" altLang="zh-CN" sz="2000" dirty="0">
-                <a:solidFill>
-                  <a:srgbClr val="374151"/>
-                </a:solidFill>
-                <a:latin typeface="_5b8b_4f53"/>
-              </a:rPr>
-              <a:t>Navy </a:t>
-            </a:r>
-            <a:r>
-              <a:rPr lang="zh-CN" altLang="en-US" sz="2000" dirty="0">
-                <a:solidFill>
-                  <a:srgbClr val="374151"/>
-                </a:solidFill>
-                <a:latin typeface="_5b8b_4f53"/>
-              </a:rPr>
-              <a:t>是 </a:t>
-            </a:r>
-            <a:r>
-              <a:rPr lang="en-US" altLang="zh-CN" sz="2000" dirty="0" err="1">
-                <a:solidFill>
-                  <a:srgbClr val="374151"/>
-                </a:solidFill>
-                <a:latin typeface="_5b8b_4f53"/>
-              </a:rPr>
-              <a:t>CacheLib</a:t>
-            </a:r>
-            <a:r>
-              <a:rPr lang="en-US" altLang="zh-CN" sz="2000" dirty="0">
-                <a:solidFill>
-                  <a:srgbClr val="374151"/>
-                </a:solidFill>
-                <a:latin typeface="_5b8b_4f53"/>
-              </a:rPr>
-              <a:t> </a:t>
-            </a:r>
-            <a:r>
-              <a:rPr lang="zh-CN" altLang="en-US" sz="2000" dirty="0">
-                <a:solidFill>
-                  <a:srgbClr val="374151"/>
-                </a:solidFill>
-                <a:latin typeface="_5b8b_4f53"/>
-              </a:rPr>
-              <a:t>中的一个组件，它是一个为 </a:t>
-            </a:r>
-            <a:r>
-              <a:rPr lang="en-US" altLang="zh-CN" sz="2000" dirty="0">
-                <a:solidFill>
-                  <a:srgbClr val="374151"/>
-                </a:solidFill>
-                <a:latin typeface="_5b8b_4f53"/>
-              </a:rPr>
-              <a:t>SSD </a:t>
-            </a:r>
-            <a:r>
-              <a:rPr lang="zh-CN" altLang="en-US" sz="2000" dirty="0">
-                <a:solidFill>
-                  <a:srgbClr val="374151"/>
-                </a:solidFill>
-                <a:latin typeface="_5b8b_4f53"/>
-              </a:rPr>
-              <a:t>优化的缓存引擎，专门为 </a:t>
-            </a:r>
-            <a:r>
-              <a:rPr lang="en-US" altLang="zh-CN" sz="2000" dirty="0">
-                <a:solidFill>
-                  <a:srgbClr val="374151"/>
-                </a:solidFill>
-                <a:latin typeface="_5b8b_4f53"/>
-              </a:rPr>
-              <a:t>Hybrid Cache </a:t>
-            </a:r>
-            <a:r>
-              <a:rPr lang="zh-CN" altLang="en-US" sz="2000" dirty="0">
-                <a:solidFill>
-                  <a:srgbClr val="374151"/>
-                </a:solidFill>
-                <a:latin typeface="_5b8b_4f53"/>
-              </a:rPr>
-              <a:t>设计。</a:t>
-            </a:r>
-            <a:r>
-              <a:rPr lang="en-US" altLang="zh-CN" sz="2000" dirty="0">
-                <a:solidFill>
-                  <a:srgbClr val="374151"/>
-                </a:solidFill>
-                <a:latin typeface="_5b8b_4f53"/>
-              </a:rPr>
-              <a:t>Navy </a:t>
-            </a:r>
-            <a:r>
-              <a:rPr lang="zh-CN" altLang="en-US" sz="2000" dirty="0">
-                <a:solidFill>
-                  <a:srgbClr val="374151"/>
-                </a:solidFill>
-                <a:latin typeface="_5b8b_4f53"/>
-              </a:rPr>
-              <a:t>通过 </a:t>
-            </a:r>
-            <a:r>
-              <a:rPr lang="en-US" altLang="zh-CN" sz="2000" dirty="0" err="1">
-                <a:solidFill>
-                  <a:srgbClr val="374151"/>
-                </a:solidFill>
-                <a:latin typeface="_5b8b_4f53"/>
-              </a:rPr>
-              <a:t>nvmcache</a:t>
-            </a:r>
-            <a:r>
-              <a:rPr lang="en-US" altLang="zh-CN" sz="2000" dirty="0">
-                <a:solidFill>
-                  <a:srgbClr val="374151"/>
-                </a:solidFill>
-                <a:latin typeface="_5b8b_4f53"/>
-              </a:rPr>
-              <a:t> </a:t>
-            </a:r>
-            <a:r>
-              <a:rPr lang="zh-CN" altLang="en-US" sz="2000" dirty="0">
-                <a:solidFill>
-                  <a:srgbClr val="374151"/>
-                </a:solidFill>
-                <a:latin typeface="_5b8b_4f53"/>
-              </a:rPr>
-              <a:t>接口与 </a:t>
-            </a:r>
-            <a:r>
-              <a:rPr lang="en-US" altLang="zh-CN" sz="2000" dirty="0" err="1">
-                <a:solidFill>
-                  <a:srgbClr val="374151"/>
-                </a:solidFill>
-                <a:latin typeface="_5b8b_4f53"/>
-              </a:rPr>
-              <a:t>cachelib</a:t>
-            </a:r>
-            <a:r>
-              <a:rPr lang="en-US" altLang="zh-CN" sz="2000" dirty="0">
-                <a:solidFill>
-                  <a:srgbClr val="374151"/>
-                </a:solidFill>
-                <a:latin typeface="_5b8b_4f53"/>
-              </a:rPr>
-              <a:t> </a:t>
-            </a:r>
-            <a:r>
-              <a:rPr lang="zh-CN" altLang="en-US" sz="2000" dirty="0">
-                <a:solidFill>
-                  <a:srgbClr val="374151"/>
-                </a:solidFill>
-                <a:latin typeface="_5b8b_4f53"/>
-              </a:rPr>
-              <a:t>集成。它能够高效地管理 </a:t>
-            </a:r>
-            <a:r>
-              <a:rPr lang="en-US" altLang="zh-CN" sz="2000" dirty="0">
-                <a:solidFill>
-                  <a:srgbClr val="374151"/>
-                </a:solidFill>
-                <a:latin typeface="_5b8b_4f53"/>
-              </a:rPr>
-              <a:t>TB </a:t>
-            </a:r>
-            <a:r>
-              <a:rPr lang="zh-CN" altLang="en-US" sz="2000" dirty="0">
-                <a:solidFill>
-                  <a:srgbClr val="374151"/>
-                </a:solidFill>
-                <a:latin typeface="_5b8b_4f53"/>
-              </a:rPr>
-              <a:t>级别的数据，并且同时支持小型（约 </a:t>
-            </a:r>
-            <a:r>
-              <a:rPr lang="en-US" altLang="zh-CN" sz="2000" dirty="0">
-                <a:solidFill>
-                  <a:srgbClr val="374151"/>
-                </a:solidFill>
-                <a:latin typeface="_5b8b_4f53"/>
-              </a:rPr>
-              <a:t>100 </a:t>
-            </a:r>
-            <a:r>
-              <a:rPr lang="zh-CN" altLang="en-US" sz="2000" dirty="0">
-                <a:solidFill>
-                  <a:srgbClr val="374151"/>
-                </a:solidFill>
-                <a:latin typeface="_5b8b_4f53"/>
-              </a:rPr>
-              <a:t>字节）和大型（</a:t>
-            </a:r>
-            <a:r>
-              <a:rPr lang="en-US" altLang="zh-CN" sz="2000" dirty="0">
-                <a:solidFill>
-                  <a:srgbClr val="374151"/>
-                </a:solidFill>
-                <a:latin typeface="_5b8b_4f53"/>
-              </a:rPr>
-              <a:t>10KB </a:t>
-            </a:r>
-            <a:r>
-              <a:rPr lang="zh-CN" altLang="en-US" sz="2000" dirty="0">
-                <a:solidFill>
-                  <a:srgbClr val="374151"/>
-                </a:solidFill>
-                <a:latin typeface="_5b8b_4f53"/>
-              </a:rPr>
-              <a:t>到 </a:t>
-            </a:r>
-            <a:r>
-              <a:rPr lang="en-US" altLang="zh-CN" sz="2000" dirty="0">
-                <a:solidFill>
-                  <a:srgbClr val="374151"/>
-                </a:solidFill>
-                <a:latin typeface="_5b8b_4f53"/>
-              </a:rPr>
-              <a:t>1MB</a:t>
-            </a:r>
-            <a:r>
-              <a:rPr lang="zh-CN" altLang="en-US" sz="2000" dirty="0">
-                <a:solidFill>
-                  <a:srgbClr val="374151"/>
-                </a:solidFill>
-                <a:latin typeface="_5b8b_4f53"/>
-              </a:rPr>
-              <a:t>）对象的缓存</a:t>
-            </a:r>
-            <a:r>
-              <a:rPr lang="en-US" altLang="zh-CN" sz="2000" dirty="0">
-                <a:solidFill>
-                  <a:srgbClr val="374151"/>
-                </a:solidFill>
-                <a:latin typeface="_5b8b_4f53"/>
-              </a:rPr>
-              <a:t>1</a:t>
-            </a:r>
-            <a:r>
-              <a:rPr lang="zh-CN" altLang="en-US" sz="2000" dirty="0">
-                <a:solidFill>
-                  <a:srgbClr val="374151"/>
-                </a:solidFill>
-                <a:latin typeface="_5b8b_4f53"/>
-              </a:rPr>
-              <a:t>。</a:t>
-            </a:r>
-            <a:r>
-              <a:rPr lang="en-US" altLang="zh-CN" sz="2000" dirty="0">
-                <a:solidFill>
-                  <a:srgbClr val="374151"/>
-                </a:solidFill>
-                <a:latin typeface="_5b8b_4f53"/>
-              </a:rPr>
-              <a:t>Navy </a:t>
-            </a:r>
-            <a:r>
-              <a:rPr lang="zh-CN" altLang="en-US" sz="2000" dirty="0">
-                <a:solidFill>
-                  <a:srgbClr val="374151"/>
-                </a:solidFill>
-                <a:latin typeface="_5b8b_4f53"/>
-              </a:rPr>
-              <a:t>提供了同步和异步 </a:t>
-            </a:r>
-            <a:r>
-              <a:rPr lang="en-US" altLang="zh-CN" sz="2000" dirty="0">
-                <a:solidFill>
-                  <a:srgbClr val="374151"/>
-                </a:solidFill>
-                <a:latin typeface="_5b8b_4f53"/>
-              </a:rPr>
-              <a:t>API</a:t>
-            </a:r>
-            <a:r>
-              <a:rPr lang="zh-CN" altLang="en-US" sz="2000" dirty="0">
-                <a:solidFill>
-                  <a:srgbClr val="374151"/>
-                </a:solidFill>
-                <a:latin typeface="_5b8b_4f53"/>
-              </a:rPr>
-              <a:t>（支持自定义执行器进行异步操作），并在安全关闭时提供缓存持久性。此外，</a:t>
-            </a:r>
-            <a:r>
-              <a:rPr lang="en-US" altLang="zh-CN" sz="2000" dirty="0">
-                <a:solidFill>
-                  <a:srgbClr val="374151"/>
-                </a:solidFill>
-                <a:latin typeface="_5b8b_4f53"/>
-              </a:rPr>
-              <a:t>Navy </a:t>
-            </a:r>
-            <a:r>
-              <a:rPr lang="zh-CN" altLang="en-US" sz="2000" dirty="0">
-                <a:solidFill>
-                  <a:srgbClr val="374151"/>
-                </a:solidFill>
-                <a:latin typeface="_5b8b_4f53"/>
-              </a:rPr>
-              <a:t>还支持直接 </a:t>
-            </a:r>
-            <a:r>
-              <a:rPr lang="en-US" altLang="zh-CN" sz="2000" dirty="0">
-                <a:solidFill>
-                  <a:srgbClr val="374151"/>
-                </a:solidFill>
-                <a:latin typeface="_5b8b_4f53"/>
-              </a:rPr>
-              <a:t>I/O </a:t>
-            </a:r>
-            <a:r>
-              <a:rPr lang="zh-CN" altLang="en-US" sz="2000" dirty="0">
-                <a:solidFill>
-                  <a:srgbClr val="374151"/>
-                </a:solidFill>
-                <a:latin typeface="_5b8b_4f53"/>
-              </a:rPr>
-              <a:t>和原始设备，以及使用 </a:t>
-            </a:r>
-            <a:r>
-              <a:rPr lang="en-US" altLang="zh-CN" sz="2000" dirty="0" err="1">
-                <a:solidFill>
-                  <a:srgbClr val="374151"/>
-                </a:solidFill>
-                <a:latin typeface="_5b8b_4f53"/>
-              </a:rPr>
-              <a:t>io_uring</a:t>
-            </a:r>
-            <a:r>
-              <a:rPr lang="en-US" altLang="zh-CN" sz="2000" dirty="0">
-                <a:solidFill>
-                  <a:srgbClr val="374151"/>
-                </a:solidFill>
-                <a:latin typeface="_5b8b_4f53"/>
-              </a:rPr>
-              <a:t> </a:t>
-            </a:r>
-            <a:r>
-              <a:rPr lang="zh-CN" altLang="en-US" sz="2000" dirty="0">
-                <a:solidFill>
-                  <a:srgbClr val="374151"/>
-                </a:solidFill>
-                <a:latin typeface="_5b8b_4f53"/>
-              </a:rPr>
-              <a:t>或 </a:t>
-            </a:r>
-            <a:r>
-              <a:rPr lang="en-US" altLang="zh-CN" sz="2000" dirty="0" err="1">
-                <a:solidFill>
-                  <a:srgbClr val="374151"/>
-                </a:solidFill>
-                <a:latin typeface="_5b8b_4f53"/>
-              </a:rPr>
-              <a:t>libaio</a:t>
-            </a:r>
-            <a:r>
-              <a:rPr lang="en-US" altLang="zh-CN" sz="2000" dirty="0">
-                <a:solidFill>
-                  <a:srgbClr val="374151"/>
-                </a:solidFill>
-                <a:latin typeface="_5b8b_4f53"/>
-              </a:rPr>
-              <a:t> </a:t>
-            </a:r>
-            <a:r>
-              <a:rPr lang="zh-CN" altLang="en-US" sz="2000" dirty="0">
-                <a:solidFill>
-                  <a:srgbClr val="374151"/>
-                </a:solidFill>
-                <a:latin typeface="_5b8b_4f53"/>
-              </a:rPr>
-              <a:t>进行异步 </a:t>
-            </a:r>
-            <a:r>
-              <a:rPr lang="en-US" altLang="zh-CN" sz="2000" dirty="0">
-                <a:solidFill>
-                  <a:srgbClr val="374151"/>
-                </a:solidFill>
-                <a:latin typeface="_5b8b_4f53"/>
-              </a:rPr>
-              <a:t>I/O</a:t>
-            </a:r>
-            <a:r>
-              <a:rPr lang="zh-CN" altLang="en-US" sz="2000" dirty="0">
-                <a:solidFill>
-                  <a:srgbClr val="374151"/>
-                </a:solidFill>
-                <a:latin typeface="_5b8b_4f53"/>
-              </a:rPr>
-              <a:t>。</a:t>
-            </a:r>
-          </a:p>
-        </p:txBody>
-      </p:sp>
-      <p:pic>
-        <p:nvPicPr>
-          <p:cNvPr id="4" name="图片 3">
-            <a:extLst>
-              <a:ext uri="{FF2B5EF4-FFF2-40B4-BE49-F238E27FC236}">
-                <a16:creationId xmlns:a16="http://schemas.microsoft.com/office/drawing/2014/main" id="{C1993C3B-731A-4B77-8607-E78909102DC6}"/>
-              </a:ext>
-            </a:extLst>
-          </p:cNvPr>
-          <p:cNvPicPr>
-            <a:picLocks noChangeAspect="1"/>
-          </p:cNvPicPr>
-          <p:nvPr/>
-        </p:nvPicPr>
-        <p:blipFill>
-          <a:blip r:embed="rId5"/>
-          <a:stretch>
-            <a:fillRect/>
-          </a:stretch>
-        </p:blipFill>
-        <p:spPr>
-          <a:xfrm>
-            <a:off x="6812191" y="1640607"/>
-            <a:ext cx="5052975" cy="3488502"/>
-          </a:xfrm>
-          <a:prstGeom prst="rect">
-            <a:avLst/>
-          </a:prstGeom>
-        </p:spPr>
-      </p:pic>
-    </p:spTree>
-  </p:cSld>
-  <p:clrMapOvr>
-    <a:masterClrMapping/>
-  </p:clrMapOvr>
-  <mc:AlternateContent xmlns:mc="http://schemas.openxmlformats.org/markup-compatibility/2006" xmlns:p14="http://schemas.microsoft.com/office/powerpoint/2010/main">
-    <mc:Choice Requires="p14">
-      <p:transition p14:dur="10" advClick="0"/>
-    </mc:Choice>
-    <mc:Fallback xmlns="">
-      <p:transition advClick="0"/>
-    </mc:Fallback>
-  </mc:AlternateContent>
-</p:sld>
-</file>
-
-<file path=ppt/slides/slide16.xml><?xml version="1.0" encoding="utf-8"?>
-<p:sld xmlns:a="http://schemas.openxmlformats.org/drawingml/2006/main" xmlns:r="http://schemas.openxmlformats.org/officeDocument/2006/relationships" xmlns:p="http://schemas.openxmlformats.org/presentationml/2006/main">
-  <p:cSld>
-    <p:bg>
-      <p:bgPr>
-        <a:blipFill dpi="0" rotWithShape="1">
-          <a:blip r:embed="rId3">
-            <a:lum/>
-          </a:blip>
-          <a:srcRect/>
-          <a:stretch>
-            <a:fillRect/>
-          </a:stretch>
-        </a:blipFill>
-        <a:effectLst/>
-      </p:bgPr>
-    </p:bg>
-    <p:spTree>
-      <p:nvGrpSpPr>
-        <p:cNvPr id="1" name=""/>
-        <p:cNvGrpSpPr/>
-        <p:nvPr/>
-      </p:nvGrpSpPr>
-      <p:grpSpPr>
-        <a:xfrm>
-          <a:off x="0" y="0"/>
-          <a:ext cx="0" cy="0"/>
-          <a:chOff x="0" y="0"/>
-          <a:chExt cx="0" cy="0"/>
-        </a:xfrm>
-      </p:grpSpPr>
-    </p:spTree>
-  </p:cSld>
-  <p:clrMapOvr>
-    <a:masterClrMapping/>
-  </p:clrMapOvr>
 </p:sld>
 </file>
 
@@ -19684,6 +19317,51 @@
                 <a:spcPct val="0"/>
               </a:spcAft>
             </a:pPr>
+            <a:r>
+              <a:rPr lang="en-US" altLang="zh-CN" dirty="0">
+                <a:solidFill>
+                  <a:srgbClr val="34495E"/>
+                </a:solidFill>
+                <a:latin typeface="Ubuntu" panose="020B0504030602030204" pitchFamily="34" charset="0"/>
+              </a:rPr>
+              <a:t>“</a:t>
+            </a:r>
+            <a:r>
+              <a:rPr lang="zh-CN" altLang="en-US" dirty="0">
+                <a:solidFill>
+                  <a:srgbClr val="34495E"/>
+                </a:solidFill>
+                <a:latin typeface="Ubuntu" panose="020B0504030602030204" pitchFamily="34" charset="0"/>
+              </a:rPr>
+              <a:t>带来了</a:t>
+            </a:r>
+            <a:r>
+              <a:rPr lang="en-US" altLang="zh-CN" dirty="0">
+                <a:solidFill>
+                  <a:srgbClr val="34495E"/>
+                </a:solidFill>
+                <a:latin typeface="Ubuntu" panose="020B0504030602030204" pitchFamily="34" charset="0"/>
+              </a:rPr>
+              <a:t>30%</a:t>
+            </a:r>
+            <a:r>
+              <a:rPr lang="zh-CN" altLang="en-US" dirty="0">
+                <a:solidFill>
+                  <a:srgbClr val="34495E"/>
+                </a:solidFill>
+                <a:latin typeface="Ubuntu" panose="020B0504030602030204" pitchFamily="34" charset="0"/>
+              </a:rPr>
+              <a:t>的综合提升</a:t>
+            </a:r>
+            <a:r>
+              <a:rPr lang="en-US" altLang="zh-CN" dirty="0">
+                <a:solidFill>
+                  <a:srgbClr val="34495E"/>
+                </a:solidFill>
+                <a:latin typeface="Ubuntu" panose="020B0504030602030204" pitchFamily="34" charset="0"/>
+              </a:rPr>
+              <a:t>”</a:t>
+            </a:r>
             <a:r>
               <a:rPr lang="zh-CN" altLang="en-US" dirty="0">
                 <a:solidFill>
